--- a/Презентация_Шавалеева_Python_QA .pptx
+++ b/Презентация_Шавалеева_Python_QA .pptx
@@ -13287,8 +13287,8 @@
         </p:nvSpPr>
         <p:spPr>
           <a:xfrm>
-            <a:off x="327847" y="1243565"/>
-            <a:ext cx="7793881" cy="1015663"/>
+            <a:off x="341514" y="1304191"/>
+            <a:ext cx="7836490" cy="830997"/>
           </a:xfrm>
           <a:prstGeom prst="rect">
             <a:avLst/>
@@ -13301,26 +13301,53 @@
           </a:bodyPr>
           <a:lstStyle/>
           <a:p>
-            <a:pPr algn="l"/>
+            <a:r>
+              <a:rPr lang="ru-RU" sz="2400" dirty="0">
+                <a:solidFill>
+                  <a:srgbClr val="444455"/>
+                </a:solidFill>
+              </a:rPr>
+              <a:t>Принимает номера телефона «00110011001»</a:t>
+            </a:r>
+          </a:p>
+          <a:p>
+            <a:r>
+              <a:rPr lang="ru-RU" sz="2400" dirty="0">
+                <a:solidFill>
+                  <a:srgbClr val="444455"/>
+                </a:solidFill>
+              </a:rPr>
+              <a:t> дату «11111-11-11» имя </a:t>
+            </a:r>
             <a:r>
               <a:rPr lang="ru-RU" sz="2000" dirty="0">
                 <a:solidFill>
                   <a:srgbClr val="444455"/>
                 </a:solidFill>
               </a:rPr>
-              <a:t>Принимает номера телефона «00110011001» и дату «11111-11-11»</a:t>
-            </a:r>
-          </a:p>
-          <a:p>
-            <a:pPr algn="l"/>
+              <a:t>«,</a:t>
+            </a:r>
+            <a:r>
+              <a:rPr lang="en-US" sz="2000" dirty="0">
+                <a:solidFill>
+                  <a:srgbClr val="444455"/>
+                </a:solidFill>
+              </a:rPr>
+              <a:t>Mbuygt76</a:t>
+            </a:r>
             <a:r>
               <a:rPr lang="ru-RU" sz="2000" dirty="0">
                 <a:solidFill>
                   <a:srgbClr val="444455"/>
                 </a:solidFill>
               </a:rPr>
-              <a:t>Заявка уходит без проверки, не получаем сообщения об ошибке «Некорректные данные»</a:t>
-            </a:r>
+              <a:t>» </a:t>
+            </a:r>
+            <a:endParaRPr lang="ru-RU" sz="2400" dirty="0">
+              <a:solidFill>
+                <a:srgbClr val="444455"/>
+              </a:solidFill>
+            </a:endParaRPr>
           </a:p>
         </p:txBody>
       </p:sp>
@@ -13433,8 +13460,8 @@
         </p:nvSpPr>
         <p:spPr>
           <a:xfrm>
-            <a:off x="341514" y="2696954"/>
-            <a:ext cx="7619382" cy="707886"/>
+            <a:off x="319232" y="2734470"/>
+            <a:ext cx="7619382" cy="461665"/>
           </a:xfrm>
           <a:prstGeom prst="rect">
             <a:avLst/>
@@ -13449,14 +13476,14 @@
           <a:p>
             <a:pPr algn="l"/>
             <a:r>
-              <a:rPr lang="ru-RU" sz="2000" dirty="0">
+              <a:rPr lang="ru-RU" sz="2400" dirty="0">
                 <a:solidFill>
                   <a:srgbClr val="444455"/>
                 </a:solidFill>
               </a:rPr>
-              <a:t>Заявка отправляется без предупреждения, менеджер не перезвонит, бесполезная запись, потеря клиента и репутации. </a:t>
-            </a:r>
-            <a:endParaRPr sz="2000" dirty="0">
+              <a:t>Заявка отправляется с пустым номером</a:t>
+            </a:r>
+            <a:endParaRPr sz="2400" dirty="0">
               <a:solidFill>
                 <a:srgbClr val="444455"/>
               </a:solidFill>
@@ -13528,7 +13555,7 @@
         </p:nvSpPr>
         <p:spPr>
           <a:xfrm>
-            <a:off x="375516" y="3480933"/>
+            <a:off x="375516" y="3546232"/>
             <a:ext cx="3392651" cy="371320"/>
           </a:xfrm>
           <a:prstGeom prst="rect">
@@ -13589,8 +13616,8 @@
         </p:nvSpPr>
         <p:spPr>
           <a:xfrm>
-            <a:off x="353599" y="3785538"/>
-            <a:ext cx="7595213" cy="1015663"/>
+            <a:off x="353599" y="3879459"/>
+            <a:ext cx="7595213" cy="830997"/>
           </a:xfrm>
           <a:prstGeom prst="rect">
             <a:avLst/>
@@ -13605,7 +13632,7 @@
           <a:p>
             <a:pPr algn="l"/>
             <a:r>
-              <a:rPr lang="ru-RU" sz="2000" dirty="0">
+              <a:rPr lang="ru-RU" sz="2400" dirty="0">
                 <a:solidFill>
                   <a:srgbClr val="444455"/>
                 </a:solidFill>
@@ -13613,7 +13640,7 @@
               <a:t>Не переходит по ссылке, ведет на ту же страницу «Неврологи в Уфе» на сайте </a:t>
             </a:r>
             <a:r>
-              <a:rPr lang="en-US" sz="2000" dirty="0" err="1">
+              <a:rPr lang="en-US" sz="2400" dirty="0" err="1">
                 <a:solidFill>
                   <a:srgbClr val="444455"/>
                 </a:solidFill>
@@ -13621,14 +13648,14 @@
               <a:t>Alimma</a:t>
             </a:r>
             <a:r>
-              <a:rPr lang="ru-RU" sz="2000" dirty="0">
+              <a:rPr lang="ru-RU" sz="2400" dirty="0">
                 <a:solidFill>
                   <a:srgbClr val="444455"/>
                 </a:solidFill>
               </a:rPr>
-              <a:t>. Пациент не видит отзывы и рейтинг врача. Снижается доверие к клинике.</a:t>
-            </a:r>
-            <a:endParaRPr sz="2000" dirty="0">
+              <a:t>. </a:t>
+            </a:r>
+            <a:endParaRPr sz="2400" dirty="0">
               <a:solidFill>
                 <a:srgbClr val="444455"/>
               </a:solidFill>
@@ -13700,7 +13727,7 @@
         </p:nvSpPr>
         <p:spPr>
           <a:xfrm>
-            <a:off x="353599" y="4905048"/>
+            <a:off x="375516" y="4946294"/>
             <a:ext cx="3292293" cy="371320"/>
           </a:xfrm>
           <a:prstGeom prst="rect">
@@ -13753,8 +13780,8 @@
         </p:nvSpPr>
         <p:spPr>
           <a:xfrm>
-            <a:off x="345336" y="5190818"/>
-            <a:ext cx="7696006" cy="707886"/>
+            <a:off x="329357" y="5265347"/>
+            <a:ext cx="7696006" cy="461665"/>
           </a:xfrm>
           <a:prstGeom prst="rect">
             <a:avLst/>
@@ -13769,14 +13796,14 @@
           <a:p>
             <a:pPr algn="l"/>
             <a:r>
-              <a:rPr lang="ru-RU" sz="2000" dirty="0">
+              <a:rPr lang="ru-RU" sz="2400" dirty="0">
                 <a:solidFill>
                   <a:srgbClr val="444455"/>
                 </a:solidFill>
               </a:rPr>
-              <a:t>Кнопки сливаются с фоном и не имеют текста или знака, пользователь не сможет листать  </a:t>
-            </a:r>
-            <a:endParaRPr sz="2000" dirty="0">
+              <a:t>Кнопки сливаются с фоном и не имеют текста или знака</a:t>
+            </a:r>
+            <a:endParaRPr sz="2400" dirty="0">
               <a:solidFill>
                 <a:srgbClr val="444455"/>
               </a:solidFill>
@@ -14691,368 +14718,111 @@
           </a:p>
         </p:txBody>
       </p:sp>
-      <p:sp>
-        <p:nvSpPr>
-          <p:cNvPr id="18" name="TextBox 17">
+      <p:pic>
+        <p:nvPicPr>
+          <p:cNvPr id="7" name="Рисунок 6">
             <a:extLst>
               <a:ext uri="{FF2B5EF4-FFF2-40B4-BE49-F238E27FC236}">
-                <a16:creationId xmlns:a16="http://schemas.microsoft.com/office/drawing/2014/main" id="{AAB0BC0E-656F-2EAA-DDD4-9E2F491F18CB}"/>
+                <a16:creationId xmlns:a16="http://schemas.microsoft.com/office/drawing/2014/main" id="{6BFE9C25-3F87-0533-6766-C83EC5A65B8C}"/>
               </a:ext>
             </a:extLst>
           </p:cNvPr>
-          <p:cNvSpPr txBox="1"/>
-          <p:nvPr/>
-        </p:nvSpPr>
-        <p:spPr>
-          <a:xfrm>
-            <a:off x="2214691" y="1193007"/>
-            <a:ext cx="5795307" cy="4401205"/>
-          </a:xfrm>
-          <a:prstGeom prst="rect">
-            <a:avLst/>
-          </a:prstGeom>
-          <a:noFill/>
-        </p:spPr>
-        <p:txBody>
-          <a:bodyPr wrap="square">
-            <a:spAutoFit/>
-          </a:bodyPr>
-          <a:lstStyle/>
-          <a:p>
-            <a:r>
-              <a:rPr sz="2800" dirty="0">
-                <a:solidFill>
-                  <a:srgbClr val="002060"/>
-                </a:solidFill>
-              </a:rPr>
-              <a:t>▸</a:t>
-            </a:r>
-            <a:r>
-              <a:rPr lang="ru-RU" sz="2800" dirty="0" err="1">
-                <a:solidFill>
-                  <a:srgbClr val="002060"/>
-                </a:solidFill>
-              </a:rPr>
-              <a:t>автотесты</a:t>
-            </a:r>
-            <a:r>
-              <a:rPr lang="ru-RU" sz="2800" dirty="0">
-                <a:solidFill>
-                  <a:srgbClr val="002060"/>
-                </a:solidFill>
-              </a:rPr>
-              <a:t> проверяют </a:t>
-            </a:r>
-            <a:r>
-              <a:rPr sz="2800" dirty="0" err="1">
-                <a:solidFill>
-                  <a:srgbClr val="002060"/>
-                </a:solidFill>
-              </a:rPr>
-              <a:t>ключевы</a:t>
-            </a:r>
-            <a:r>
-              <a:rPr lang="ru-RU" sz="2800" dirty="0">
-                <a:solidFill>
-                  <a:srgbClr val="002060"/>
-                </a:solidFill>
-              </a:rPr>
-              <a:t>е</a:t>
-            </a:r>
-            <a:r>
-              <a:rPr sz="2800" dirty="0">
-                <a:solidFill>
-                  <a:srgbClr val="002060"/>
-                </a:solidFill>
-              </a:rPr>
-              <a:t> </a:t>
-            </a:r>
-            <a:r>
-              <a:rPr sz="2800" dirty="0" err="1">
-                <a:solidFill>
-                  <a:srgbClr val="002060"/>
-                </a:solidFill>
-              </a:rPr>
-              <a:t>сценари</a:t>
-            </a:r>
-            <a:r>
-              <a:rPr lang="ru-RU" sz="2800" dirty="0">
-                <a:solidFill>
-                  <a:srgbClr val="002060"/>
-                </a:solidFill>
-              </a:rPr>
-              <a:t>и </a:t>
-            </a:r>
-            <a:r>
-              <a:rPr sz="2800" dirty="0" err="1">
-                <a:solidFill>
-                  <a:srgbClr val="002060"/>
-                </a:solidFill>
-              </a:rPr>
-              <a:t>сайта</a:t>
-            </a:r>
-            <a:r>
-              <a:rPr sz="2800" dirty="0">
-                <a:solidFill>
-                  <a:srgbClr val="002060"/>
-                </a:solidFill>
-              </a:rPr>
-              <a:t>
-</a:t>
-            </a:r>
-            <a:r>
-              <a:rPr lang="ru-RU" sz="2800" dirty="0">
-                <a:solidFill>
-                  <a:srgbClr val="002060"/>
-                </a:solidFill>
-              </a:rPr>
-              <a:t>▸архитектура </a:t>
-            </a:r>
-            <a:r>
-              <a:rPr lang="ru-RU" sz="2800" dirty="0" err="1">
-                <a:solidFill>
-                  <a:srgbClr val="002060"/>
-                </a:solidFill>
-              </a:rPr>
-              <a:t>автотестов</a:t>
-            </a:r>
-            <a:r>
-              <a:rPr lang="ru-RU" sz="2800" dirty="0">
-                <a:solidFill>
-                  <a:srgbClr val="002060"/>
-                </a:solidFill>
-              </a:rPr>
-              <a:t> для лёгкой поддержки: </a:t>
-            </a:r>
-            <a:r>
-              <a:rPr lang="ru-RU" sz="2800" dirty="0" err="1">
-                <a:solidFill>
-                  <a:srgbClr val="002060"/>
-                </a:solidFill>
-              </a:rPr>
-              <a:t>Controls</a:t>
-            </a:r>
-            <a:r>
-              <a:rPr lang="ru-RU" sz="2800" dirty="0">
-                <a:solidFill>
-                  <a:srgbClr val="002060"/>
-                </a:solidFill>
-              </a:rPr>
-              <a:t> → </a:t>
-            </a:r>
-            <a:r>
-              <a:rPr lang="ru-RU" sz="2800" dirty="0" err="1">
-                <a:solidFill>
-                  <a:srgbClr val="002060"/>
-                </a:solidFill>
-              </a:rPr>
-              <a:t>Components</a:t>
-            </a:r>
-            <a:r>
-              <a:rPr lang="ru-RU" sz="2800" dirty="0">
-                <a:solidFill>
-                  <a:srgbClr val="002060"/>
-                </a:solidFill>
-              </a:rPr>
-              <a:t> → </a:t>
-            </a:r>
-            <a:r>
-              <a:rPr lang="ru-RU" sz="2800" dirty="0" err="1">
-                <a:solidFill>
-                  <a:srgbClr val="002060"/>
-                </a:solidFill>
-              </a:rPr>
-              <a:t>Pages</a:t>
-            </a:r>
-            <a:r>
-              <a:rPr lang="ru-RU" sz="2800" dirty="0">
-                <a:solidFill>
-                  <a:srgbClr val="002060"/>
-                </a:solidFill>
-              </a:rPr>
-              <a:t> → </a:t>
-            </a:r>
-            <a:r>
-              <a:rPr lang="ru-RU" sz="2800" dirty="0" err="1">
-                <a:solidFill>
-                  <a:srgbClr val="002060"/>
-                </a:solidFill>
-              </a:rPr>
-              <a:t>Tests</a:t>
-            </a:r>
-            <a:r>
-              <a:rPr lang="ru-RU" sz="2800" dirty="0">
-                <a:solidFill>
-                  <a:srgbClr val="002060"/>
-                </a:solidFill>
-              </a:rPr>
-              <a:t> </a:t>
-            </a:r>
-            <a:r>
-              <a:rPr sz="2800" dirty="0">
-                <a:solidFill>
-                  <a:srgbClr val="002060"/>
-                </a:solidFill>
-              </a:rPr>
-              <a:t>
-▸</a:t>
-            </a:r>
-            <a:r>
-              <a:rPr sz="2800" dirty="0" err="1">
-                <a:solidFill>
-                  <a:srgbClr val="002060"/>
-                </a:solidFill>
-              </a:rPr>
-              <a:t>современн</a:t>
-            </a:r>
-            <a:r>
-              <a:rPr lang="ru-RU" sz="2800" dirty="0" err="1">
-                <a:solidFill>
-                  <a:srgbClr val="002060"/>
-                </a:solidFill>
-              </a:rPr>
-              <a:t>ый</a:t>
-            </a:r>
-            <a:r>
-              <a:rPr lang="ru-RU" sz="2800" dirty="0">
-                <a:solidFill>
-                  <a:srgbClr val="002060"/>
-                </a:solidFill>
-              </a:rPr>
-              <a:t> стек: </a:t>
-            </a:r>
-            <a:r>
-              <a:rPr sz="2800" dirty="0">
-                <a:solidFill>
-                  <a:srgbClr val="002060"/>
-                </a:solidFill>
-              </a:rPr>
-              <a:t>Python + </a:t>
-            </a:r>
-            <a:r>
-              <a:rPr sz="2800" dirty="0" err="1">
-                <a:solidFill>
-                  <a:srgbClr val="002060"/>
-                </a:solidFill>
-              </a:rPr>
-              <a:t>PyTest</a:t>
-            </a:r>
-            <a:r>
-              <a:rPr sz="2800" dirty="0">
-                <a:solidFill>
-                  <a:srgbClr val="002060"/>
-                </a:solidFill>
-              </a:rPr>
-              <a:t> + Playwright + Allure</a:t>
-            </a:r>
-            <a:endParaRPr lang="ru-RU" sz="2800" dirty="0">
-              <a:solidFill>
-                <a:srgbClr val="002060"/>
-              </a:solidFill>
-            </a:endParaRPr>
-          </a:p>
-          <a:p>
-            <a:r>
-              <a:rPr sz="2800" dirty="0">
-                <a:solidFill>
-                  <a:srgbClr val="002060"/>
-                </a:solidFill>
-              </a:rPr>
-              <a:t>▸</a:t>
-            </a:r>
-            <a:r>
-              <a:rPr sz="2800" dirty="0" err="1">
-                <a:solidFill>
-                  <a:srgbClr val="002060"/>
-                </a:solidFill>
-              </a:rPr>
-              <a:t>наглядные</a:t>
-            </a:r>
-            <a:r>
-              <a:rPr sz="2800" dirty="0">
-                <a:solidFill>
-                  <a:srgbClr val="002060"/>
-                </a:solidFill>
-              </a:rPr>
-              <a:t> </a:t>
-            </a:r>
-            <a:r>
-              <a:rPr sz="2800" dirty="0" err="1">
-                <a:solidFill>
-                  <a:srgbClr val="002060"/>
-                </a:solidFill>
-              </a:rPr>
-              <a:t>отчёты</a:t>
-            </a:r>
-            <a:r>
-              <a:rPr sz="2800" dirty="0">
-                <a:solidFill>
-                  <a:srgbClr val="002060"/>
-                </a:solidFill>
-              </a:rPr>
-              <a:t> о </a:t>
-            </a:r>
-            <a:r>
-              <a:rPr sz="2800" dirty="0" err="1">
-                <a:solidFill>
-                  <a:srgbClr val="002060"/>
-                </a:solidFill>
-              </a:rPr>
-              <a:t>результатах</a:t>
-            </a:r>
-            <a:r>
-              <a:rPr sz="2800" dirty="0">
-                <a:solidFill>
-                  <a:srgbClr val="002060"/>
-                </a:solidFill>
-              </a:rPr>
-              <a:t> </a:t>
-            </a:r>
-            <a:r>
-              <a:rPr sz="2800" dirty="0" err="1">
-                <a:solidFill>
-                  <a:srgbClr val="002060"/>
-                </a:solidFill>
-              </a:rPr>
-              <a:t>каждого</a:t>
-            </a:r>
-            <a:r>
-              <a:rPr lang="ru-RU" sz="2800" dirty="0">
-                <a:solidFill>
-                  <a:srgbClr val="002060"/>
-                </a:solidFill>
-              </a:rPr>
-              <a:t> теста в </a:t>
-            </a:r>
-            <a:r>
-              <a:rPr lang="ru-RU" sz="2800" dirty="0" err="1">
-                <a:solidFill>
-                  <a:srgbClr val="002060"/>
-                </a:solidFill>
-              </a:rPr>
-              <a:t>Аllure</a:t>
-            </a:r>
-            <a:r>
-              <a:rPr lang="ru-RU" sz="2800" dirty="0">
-                <a:solidFill>
-                  <a:srgbClr val="002060"/>
-                </a:solidFill>
-              </a:rPr>
-              <a:t> </a:t>
-            </a:r>
-          </a:p>
-          <a:p>
-            <a:r>
-              <a:rPr lang="ru-RU" sz="2800" dirty="0">
-                <a:solidFill>
-                  <a:srgbClr val="002060"/>
-                </a:solidFill>
-              </a:rPr>
-              <a:t>▸ выявлено 4 бага </a:t>
-            </a:r>
-          </a:p>
-        </p:txBody>
-      </p:sp>
+          <p:cNvPicPr>
+            <a:picLocks noChangeAspect="1"/>
+          </p:cNvPicPr>
+          <p:nvPr/>
+        </p:nvPicPr>
+        <p:blipFill>
+          <a:blip r:embed="rId3"/>
+          <a:stretch>
+            <a:fillRect/>
+          </a:stretch>
+        </p:blipFill>
+        <p:spPr>
+          <a:xfrm>
+            <a:off x="2346760" y="4333442"/>
+            <a:ext cx="5750927" cy="1374408"/>
+          </a:xfrm>
+          <a:prstGeom prst="rect">
+            <a:avLst/>
+          </a:prstGeom>
+          <a:ln>
+            <a:solidFill>
+              <a:schemeClr val="tx1"/>
+            </a:solidFill>
+          </a:ln>
+        </p:spPr>
+      </p:pic>
+      <p:pic>
+        <p:nvPicPr>
+          <p:cNvPr id="10" name="Рисунок 9">
+            <a:extLst>
+              <a:ext uri="{FF2B5EF4-FFF2-40B4-BE49-F238E27FC236}">
+                <a16:creationId xmlns:a16="http://schemas.microsoft.com/office/drawing/2014/main" id="{86AC71C6-8FE0-4EEB-8420-D6FB68D2DBA2}"/>
+              </a:ext>
+            </a:extLst>
+          </p:cNvPr>
+          <p:cNvPicPr>
+            <a:picLocks noChangeAspect="1"/>
+          </p:cNvPicPr>
+          <p:nvPr/>
+        </p:nvPicPr>
+        <p:blipFill>
+          <a:blip r:embed="rId4"/>
+          <a:stretch>
+            <a:fillRect/>
+          </a:stretch>
+        </p:blipFill>
+        <p:spPr>
+          <a:xfrm>
+            <a:off x="2346761" y="1117425"/>
+            <a:ext cx="2894371" cy="2991142"/>
+          </a:xfrm>
+          <a:prstGeom prst="rect">
+            <a:avLst/>
+          </a:prstGeom>
+          <a:ln>
+            <a:solidFill>
+              <a:schemeClr val="tx1"/>
+            </a:solidFill>
+          </a:ln>
+        </p:spPr>
+      </p:pic>
+      <p:pic>
+        <p:nvPicPr>
+          <p:cNvPr id="17" name="Рисунок 16">
+            <a:extLst>
+              <a:ext uri="{FF2B5EF4-FFF2-40B4-BE49-F238E27FC236}">
+                <a16:creationId xmlns:a16="http://schemas.microsoft.com/office/drawing/2014/main" id="{31AE9630-9045-DD6B-F307-9AC455DC973D}"/>
+              </a:ext>
+            </a:extLst>
+          </p:cNvPr>
+          <p:cNvPicPr>
+            <a:picLocks noChangeAspect="1"/>
+          </p:cNvPicPr>
+          <p:nvPr/>
+        </p:nvPicPr>
+        <p:blipFill>
+          <a:blip r:embed="rId5"/>
+          <a:stretch>
+            <a:fillRect/>
+          </a:stretch>
+        </p:blipFill>
+        <p:spPr>
+          <a:xfrm>
+            <a:off x="5295621" y="1104774"/>
+            <a:ext cx="2802066" cy="2983078"/>
+          </a:xfrm>
+          <a:prstGeom prst="rect">
+            <a:avLst/>
+          </a:prstGeom>
+          <a:ln>
+            <a:solidFill>
+              <a:schemeClr val="tx1"/>
+            </a:solidFill>
+          </a:ln>
+        </p:spPr>
+      </p:pic>
     </p:spTree>
   </p:cSld>
   <p:clrMapOvr>
@@ -18952,7 +18722,7 @@
         </p:nvSpPr>
         <p:spPr>
           <a:xfrm>
-            <a:off x="85014" y="1052955"/>
+            <a:off x="85014" y="1174963"/>
             <a:ext cx="8025747" cy="1342484"/>
           </a:xfrm>
           <a:prstGeom prst="rect">
@@ -18996,7 +18766,7 @@
         </p:nvSpPr>
         <p:spPr>
           <a:xfrm>
-            <a:off x="321150" y="1057807"/>
+            <a:off x="321150" y="1179815"/>
             <a:ext cx="3022414" cy="523220"/>
           </a:xfrm>
           <a:prstGeom prst="rect">
@@ -19035,7 +18805,7 @@
         </p:nvSpPr>
         <p:spPr>
           <a:xfrm>
-            <a:off x="111435" y="1548159"/>
+            <a:off x="111435" y="1670167"/>
             <a:ext cx="7930230" cy="830997"/>
           </a:xfrm>
           <a:prstGeom prst="rect">
@@ -19250,7 +19020,7 @@
         </p:nvSpPr>
         <p:spPr>
           <a:xfrm>
-            <a:off x="83121" y="2524978"/>
+            <a:off x="83121" y="2743507"/>
             <a:ext cx="8027640" cy="1338413"/>
           </a:xfrm>
           <a:prstGeom prst="rect">
@@ -19294,7 +19064,7 @@
         </p:nvSpPr>
         <p:spPr>
           <a:xfrm>
-            <a:off x="321150" y="2570720"/>
+            <a:off x="321150" y="2789249"/>
             <a:ext cx="3022413" cy="523220"/>
           </a:xfrm>
           <a:prstGeom prst="rect">
@@ -19333,7 +19103,7 @@
         </p:nvSpPr>
         <p:spPr>
           <a:xfrm>
-            <a:off x="64024" y="2965399"/>
+            <a:off x="64024" y="3183928"/>
             <a:ext cx="8285045" cy="830997"/>
           </a:xfrm>
           <a:prstGeom prst="rect">
@@ -19532,7 +19302,7 @@
         </p:nvSpPr>
         <p:spPr>
           <a:xfrm>
-            <a:off x="83121" y="3976626"/>
+            <a:off x="83121" y="4355892"/>
             <a:ext cx="8027640" cy="1338414"/>
           </a:xfrm>
           <a:prstGeom prst="rect">
@@ -19576,7 +19346,7 @@
         </p:nvSpPr>
         <p:spPr>
           <a:xfrm>
-            <a:off x="321151" y="4048207"/>
+            <a:off x="321151" y="4427473"/>
             <a:ext cx="3022412" cy="523220"/>
           </a:xfrm>
           <a:prstGeom prst="rect">
@@ -19623,7 +19393,7 @@
         </p:nvSpPr>
         <p:spPr>
           <a:xfrm>
-            <a:off x="64024" y="4428746"/>
+            <a:off x="64024" y="4808012"/>
             <a:ext cx="8029798" cy="830997"/>
           </a:xfrm>
           <a:prstGeom prst="rect">
@@ -19795,208 +19565,6 @@
                 <a:srgbClr val="CCE0FF"/>
               </a:solidFill>
             </a:endParaRPr>
-          </a:p>
-        </p:txBody>
-      </p:sp>
-      <p:sp>
-        <p:nvSpPr>
-          <p:cNvPr id="25" name="TextBox 24"/>
-          <p:cNvSpPr txBox="1"/>
-          <p:nvPr/>
-        </p:nvSpPr>
-        <p:spPr>
-          <a:xfrm>
-            <a:off x="41230" y="5381812"/>
-            <a:ext cx="7687717" cy="584775"/>
-          </a:xfrm>
-          <a:prstGeom prst="rect">
-            <a:avLst/>
-          </a:prstGeom>
-          <a:noFill/>
-        </p:spPr>
-        <p:txBody>
-          <a:bodyPr wrap="square">
-            <a:spAutoFit/>
-          </a:bodyPr>
-          <a:lstStyle/>
-          <a:p>
-            <a:pPr algn="ctr"/>
-            <a:r>
-              <a:rPr sz="1600" i="1" dirty="0" err="1">
-                <a:solidFill>
-                  <a:srgbClr val="444455"/>
-                </a:solidFill>
-              </a:rPr>
-              <a:t>Метод</a:t>
-            </a:r>
-            <a:r>
-              <a:rPr sz="1600" i="1" dirty="0">
-                <a:solidFill>
-                  <a:srgbClr val="444455"/>
-                </a:solidFill>
-              </a:rPr>
-              <a:t> «</a:t>
-            </a:r>
-            <a:r>
-              <a:rPr sz="1600" i="1" dirty="0" err="1">
-                <a:solidFill>
-                  <a:srgbClr val="444455"/>
-                </a:solidFill>
-              </a:rPr>
-              <a:t>чёрного</a:t>
-            </a:r>
-            <a:r>
-              <a:rPr sz="1600" i="1" dirty="0">
-                <a:solidFill>
-                  <a:srgbClr val="444455"/>
-                </a:solidFill>
-              </a:rPr>
-              <a:t> </a:t>
-            </a:r>
-            <a:r>
-              <a:rPr sz="1600" i="1" dirty="0" err="1">
-                <a:solidFill>
-                  <a:srgbClr val="444455"/>
-                </a:solidFill>
-              </a:rPr>
-              <a:t>ящика</a:t>
-            </a:r>
-            <a:r>
-              <a:rPr sz="1600" i="1" dirty="0">
-                <a:solidFill>
-                  <a:srgbClr val="444455"/>
-                </a:solidFill>
-              </a:rPr>
-              <a:t>» — </a:t>
-            </a:r>
-            <a:r>
-              <a:rPr sz="1600" i="1" dirty="0" err="1">
-                <a:solidFill>
-                  <a:srgbClr val="444455"/>
-                </a:solidFill>
-              </a:rPr>
-              <a:t>тестировщик</a:t>
-            </a:r>
-            <a:r>
-              <a:rPr sz="1600" i="1" dirty="0">
-                <a:solidFill>
-                  <a:srgbClr val="444455"/>
-                </a:solidFill>
-              </a:rPr>
-              <a:t> </a:t>
-            </a:r>
-            <a:r>
-              <a:rPr sz="1600" i="1" dirty="0" err="1">
-                <a:solidFill>
-                  <a:srgbClr val="444455"/>
-                </a:solidFill>
-              </a:rPr>
-              <a:t>взаимодействует</a:t>
-            </a:r>
-            <a:r>
-              <a:rPr sz="1600" i="1" dirty="0">
-                <a:solidFill>
-                  <a:srgbClr val="444455"/>
-                </a:solidFill>
-              </a:rPr>
-              <a:t> с </a:t>
-            </a:r>
-            <a:r>
-              <a:rPr sz="1600" i="1" dirty="0" err="1">
-                <a:solidFill>
-                  <a:srgbClr val="444455"/>
-                </a:solidFill>
-              </a:rPr>
-              <a:t>интерфейсом</a:t>
-            </a:r>
-            <a:r>
-              <a:rPr sz="1600" i="1" dirty="0">
-                <a:solidFill>
-                  <a:srgbClr val="444455"/>
-                </a:solidFill>
-              </a:rPr>
-              <a:t>, </a:t>
-            </a:r>
-            <a:r>
-              <a:rPr sz="1600" i="1" dirty="0" err="1">
-                <a:solidFill>
-                  <a:srgbClr val="444455"/>
-                </a:solidFill>
-              </a:rPr>
-              <a:t>не</a:t>
-            </a:r>
-            <a:r>
-              <a:rPr sz="1600" i="1" dirty="0">
-                <a:solidFill>
-                  <a:srgbClr val="444455"/>
-                </a:solidFill>
-              </a:rPr>
-              <a:t> </a:t>
-            </a:r>
-            <a:r>
-              <a:rPr sz="1600" i="1" dirty="0" err="1">
-                <a:solidFill>
-                  <a:srgbClr val="444455"/>
-                </a:solidFill>
-              </a:rPr>
-              <a:t>имея</a:t>
-            </a:r>
-            <a:r>
-              <a:rPr sz="1600" i="1" dirty="0">
-                <a:solidFill>
-                  <a:srgbClr val="444455"/>
-                </a:solidFill>
-              </a:rPr>
-              <a:t> </a:t>
-            </a:r>
-            <a:r>
-              <a:rPr sz="1600" i="1" dirty="0" err="1">
-                <a:solidFill>
-                  <a:srgbClr val="444455"/>
-                </a:solidFill>
-              </a:rPr>
-              <a:t>доступа</a:t>
-            </a:r>
-            <a:r>
-              <a:rPr sz="1600" i="1" dirty="0">
-                <a:solidFill>
-                  <a:srgbClr val="444455"/>
-                </a:solidFill>
-              </a:rPr>
-              <a:t> к </a:t>
-            </a:r>
-            <a:r>
-              <a:rPr sz="1600" i="1" dirty="0" err="1">
-                <a:solidFill>
-                  <a:srgbClr val="444455"/>
-                </a:solidFill>
-              </a:rPr>
-              <a:t>исходному</a:t>
-            </a:r>
-            <a:r>
-              <a:rPr sz="1600" i="1" dirty="0">
-                <a:solidFill>
-                  <a:srgbClr val="444455"/>
-                </a:solidFill>
-              </a:rPr>
-              <a:t> </a:t>
-            </a:r>
-            <a:r>
-              <a:rPr sz="1600" i="1" dirty="0" err="1">
-                <a:solidFill>
-                  <a:srgbClr val="444455"/>
-                </a:solidFill>
-              </a:rPr>
-              <a:t>коду</a:t>
-            </a:r>
-            <a:r>
-              <a:rPr sz="1600" i="1" dirty="0">
-                <a:solidFill>
-                  <a:srgbClr val="444455"/>
-                </a:solidFill>
-              </a:rPr>
-              <a:t>.</a:t>
-            </a:r>
           </a:p>
         </p:txBody>
       </p:sp>
@@ -21791,7 +21359,7 @@
         <p:spPr>
           <a:xfrm>
             <a:off x="138620" y="1557157"/>
-            <a:ext cx="1946870" cy="2862322"/>
+            <a:ext cx="1946870" cy="2031325"/>
           </a:xfrm>
           <a:prstGeom prst="rect">
             <a:avLst/>
@@ -21871,12 +21439,20 @@
               <a:t>Простота</a:t>
             </a:r>
             <a:r>
+              <a:rPr lang="ru-RU" dirty="0">
+                <a:solidFill>
+                  <a:schemeClr val="bg1"/>
+                </a:solidFill>
+              </a:rPr>
+              <a:t> и </a:t>
+            </a:r>
+            <a:r>
               <a:rPr dirty="0">
                 <a:solidFill>
                   <a:schemeClr val="bg1"/>
                 </a:solidFill>
               </a:rPr>
-              <a:t> и </a:t>
+              <a:t> </a:t>
             </a:r>
             <a:r>
               <a:rPr dirty="0" err="1">
@@ -21940,55 +21516,7 @@
                   <a:schemeClr val="bg1"/>
                 </a:solidFill>
               </a:rPr>
-              <a:t> , </a:t>
-            </a:r>
-            <a:r>
-              <a:rPr dirty="0" err="1">
-                <a:solidFill>
-                  <a:schemeClr val="bg1"/>
-                </a:solidFill>
-              </a:rPr>
-              <a:t>нативная</a:t>
-            </a:r>
-            <a:r>
-              <a:rPr dirty="0">
-                <a:solidFill>
-                  <a:schemeClr val="bg1"/>
-                </a:solidFill>
-              </a:rPr>
               <a:t> </a:t>
-            </a:r>
-            <a:r>
-              <a:rPr dirty="0" err="1">
-                <a:solidFill>
-                  <a:schemeClr val="bg1"/>
-                </a:solidFill>
-              </a:rPr>
-              <a:t>поддержка</a:t>
-            </a:r>
-            <a:r>
-              <a:rPr dirty="0">
-                <a:solidFill>
-                  <a:schemeClr val="bg1"/>
-                </a:solidFill>
-              </a:rPr>
-              <a:t> </a:t>
-            </a:r>
-            <a:r>
-              <a:rPr dirty="0" err="1">
-                <a:solidFill>
-                  <a:schemeClr val="bg1"/>
-                </a:solidFill>
-              </a:rPr>
-              <a:t>PyTest</a:t>
-            </a:r>
-            <a:r>
-              <a:rPr dirty="0">
-                <a:solidFill>
-                  <a:schemeClr val="bg1"/>
-                </a:solidFill>
-              </a:rPr>
-              <a:t> и Playwright</a:t>
             </a:r>
           </a:p>
         </p:txBody>
@@ -22001,7 +21529,7 @@
         </p:nvSpPr>
         <p:spPr>
           <a:xfrm>
-            <a:off x="2118218" y="1022874"/>
+            <a:off x="2127698" y="998076"/>
             <a:ext cx="1878850" cy="4826360"/>
           </a:xfrm>
           <a:prstGeom prst="rect">
@@ -22085,7 +21613,7 @@
         <p:spPr>
           <a:xfrm>
             <a:off x="2223937" y="1557157"/>
-            <a:ext cx="1679631" cy="2862322"/>
+            <a:ext cx="1679631" cy="1754326"/>
           </a:xfrm>
           <a:prstGeom prst="rect">
             <a:avLst/>
@@ -22180,94 +21708,11 @@
               </a:rPr>
               <a:t>параметризация</a:t>
             </a:r>
-            <a:r>
-              <a:rPr dirty="0">
-                <a:solidFill>
-                  <a:schemeClr val="bg1"/>
-                </a:solidFill>
-              </a:rPr>
-              <a:t>, </a:t>
-            </a:r>
-            <a:r>
-              <a:rPr dirty="0" err="1">
-                <a:solidFill>
-                  <a:schemeClr val="bg1"/>
-                </a:solidFill>
-              </a:rPr>
-              <a:t>плагины</a:t>
-            </a:r>
-            <a:r>
-              <a:rPr dirty="0">
-                <a:solidFill>
-                  <a:schemeClr val="bg1"/>
-                </a:solidFill>
-              </a:rPr>
-              <a:t>, </a:t>
-            </a:r>
-            <a:r>
-              <a:rPr dirty="0" err="1">
-                <a:solidFill>
-                  <a:schemeClr val="bg1"/>
-                </a:solidFill>
-              </a:rPr>
-              <a:t>параллельный</a:t>
-            </a:r>
-            <a:r>
-              <a:rPr dirty="0">
-                <a:solidFill>
-                  <a:schemeClr val="bg1"/>
-                </a:solidFill>
-              </a:rPr>
-              <a:t> </a:t>
-            </a:r>
-            <a:r>
-              <a:rPr dirty="0" err="1">
-                <a:solidFill>
-                  <a:schemeClr val="bg1"/>
-                </a:solidFill>
-              </a:rPr>
-              <a:t>запуск</a:t>
-            </a:r>
-            <a:r>
-              <a:rPr dirty="0">
-                <a:solidFill>
-                  <a:schemeClr val="bg1"/>
-                </a:solidFill>
-              </a:rPr>
-              <a:t> </a:t>
-            </a:r>
-            <a:r>
-              <a:rPr dirty="0" err="1">
-                <a:solidFill>
-                  <a:schemeClr val="bg1"/>
-                </a:solidFill>
-              </a:rPr>
-              <a:t>тестов</a:t>
-            </a:r>
-            <a:r>
-              <a:rPr dirty="0">
-                <a:solidFill>
-                  <a:schemeClr val="bg1"/>
-                </a:solidFill>
-              </a:rPr>
-              <a:t>, </a:t>
-            </a:r>
-            <a:r>
-              <a:rPr dirty="0" err="1">
-                <a:solidFill>
-                  <a:schemeClr val="bg1"/>
-                </a:solidFill>
-              </a:rPr>
-              <a:t>интеграция</a:t>
-            </a:r>
-            <a:r>
-              <a:rPr dirty="0">
-                <a:solidFill>
-                  <a:schemeClr val="bg1"/>
-                </a:solidFill>
-              </a:rPr>
-              <a:t> с Allure</a:t>
-            </a:r>
+            <a:endParaRPr dirty="0">
+              <a:solidFill>
+                <a:schemeClr val="bg1"/>
+              </a:solidFill>
+            </a:endParaRPr>
           </a:p>
         </p:txBody>
       </p:sp>
@@ -22358,7 +21803,7 @@
         <p:spPr>
           <a:xfrm>
             <a:off x="4218318" y="1526451"/>
-            <a:ext cx="1763319" cy="2585323"/>
+            <a:ext cx="1763319" cy="1754326"/>
           </a:xfrm>
           <a:prstGeom prst="rect">
             <a:avLst/>
@@ -22428,38 +21873,6 @@
               </a:rPr>
               <a:t>
 Auto-waiting, </a:t>
-            </a:r>
-            <a:r>
-              <a:rPr dirty="0" err="1">
-                <a:solidFill>
-                  <a:schemeClr val="bg1"/>
-                </a:solidFill>
-              </a:rPr>
-              <a:t>единый</a:t>
-            </a:r>
-            <a:r>
-              <a:rPr dirty="0">
-                <a:solidFill>
-                  <a:schemeClr val="bg1"/>
-                </a:solidFill>
-              </a:rPr>
-              <a:t> API </a:t>
-            </a:r>
-            <a:r>
-              <a:rPr dirty="0" err="1">
-                <a:solidFill>
-                  <a:schemeClr val="bg1"/>
-                </a:solidFill>
-              </a:rPr>
-              <a:t>для</a:t>
-            </a:r>
-            <a:r>
-              <a:rPr dirty="0">
-                <a:solidFill>
-                  <a:schemeClr val="bg1"/>
-                </a:solidFill>
-              </a:rPr>
-              <a:t> Chrome/Firefox/WebKit, </a:t>
             </a:r>
             <a:r>
               <a:rPr dirty="0" err="1">
@@ -22639,8 +22052,8 @@
         </p:nvSpPr>
         <p:spPr>
           <a:xfrm>
-            <a:off x="6208842" y="1555027"/>
-            <a:ext cx="1749043" cy="2308324"/>
+            <a:off x="6272204" y="1569919"/>
+            <a:ext cx="1749043" cy="1754326"/>
           </a:xfrm>
           <a:prstGeom prst="rect">
             <a:avLst/>
@@ -22671,109 +22084,46 @@
               <a:t>
 </a:t>
             </a:r>
+            <a:endParaRPr lang="ru-RU" dirty="0">
+              <a:solidFill>
+                <a:schemeClr val="bg1"/>
+              </a:solidFill>
+            </a:endParaRPr>
+          </a:p>
+          <a:p>
+            <a:pPr algn="l"/>
+            <a:r>
+              <a:rPr dirty="0">
+                <a:solidFill>
+                  <a:schemeClr val="bg1"/>
+                </a:solidFill>
+              </a:rPr>
+              <a:t>
+</a:t>
+            </a:r>
             <a:r>
               <a:rPr dirty="0" err="1">
                 <a:solidFill>
                   <a:schemeClr val="bg1"/>
                 </a:solidFill>
               </a:rPr>
-              <a:t>Визуальные</a:t>
-            </a:r>
-            <a:r>
-              <a:rPr dirty="0">
+              <a:t>Визуа</a:t>
+            </a:r>
+            <a:r>
+              <a:rPr lang="ru-RU" dirty="0" err="1">
                 <a:solidFill>
                   <a:schemeClr val="bg1"/>
                 </a:solidFill>
               </a:rPr>
-              <a:t> </a:t>
-            </a:r>
-            <a:r>
-              <a:rPr dirty="0" err="1">
+              <a:t>лизация</a:t>
+            </a:r>
+            <a:r>
+              <a:rPr lang="ru-RU" dirty="0">
                 <a:solidFill>
                   <a:schemeClr val="bg1"/>
                 </a:solidFill>
               </a:rPr>
-              <a:t>отчёты</a:t>
-            </a:r>
-            <a:r>
-              <a:rPr dirty="0">
-                <a:solidFill>
-                  <a:schemeClr val="bg1"/>
-                </a:solidFill>
-              </a:rPr>
-              <a:t> с </a:t>
-            </a:r>
-            <a:r>
-              <a:rPr dirty="0" err="1">
-                <a:solidFill>
-                  <a:schemeClr val="bg1"/>
-                </a:solidFill>
-              </a:rPr>
-              <a:t>шагами</a:t>
-            </a:r>
-            <a:r>
-              <a:rPr dirty="0">
-                <a:solidFill>
-                  <a:schemeClr val="bg1"/>
-                </a:solidFill>
-              </a:rPr>
-              <a:t>, </a:t>
-            </a:r>
-            <a:r>
-              <a:rPr dirty="0" err="1">
-                <a:solidFill>
-                  <a:schemeClr val="bg1"/>
-                </a:solidFill>
-              </a:rPr>
-              <a:t>описаниями</a:t>
-            </a:r>
-            <a:r>
-              <a:rPr dirty="0">
-                <a:solidFill>
-                  <a:schemeClr val="bg1"/>
-                </a:solidFill>
-              </a:rPr>
-              <a:t> и </a:t>
-            </a:r>
-            <a:r>
-              <a:rPr dirty="0" err="1">
-                <a:solidFill>
-                  <a:schemeClr val="bg1"/>
-                </a:solidFill>
-              </a:rPr>
-              <a:t>статусами</a:t>
-            </a:r>
-            <a:r>
-              <a:rPr dirty="0">
-                <a:solidFill>
-                  <a:schemeClr val="bg1"/>
-                </a:solidFill>
-              </a:rPr>
-              <a:t> </a:t>
-            </a:r>
-            <a:r>
-              <a:rPr dirty="0" err="1">
-                <a:solidFill>
-                  <a:schemeClr val="bg1"/>
-                </a:solidFill>
-              </a:rPr>
-              <a:t>каждого</a:t>
-            </a:r>
-            <a:r>
-              <a:rPr dirty="0">
-                <a:solidFill>
-                  <a:schemeClr val="bg1"/>
-                </a:solidFill>
-              </a:rPr>
-              <a:t> </a:t>
-            </a:r>
-            <a:r>
-              <a:rPr dirty="0" err="1">
-                <a:solidFill>
-                  <a:schemeClr val="bg1"/>
-                </a:solidFill>
-              </a:rPr>
-              <a:t>теста</a:t>
+              <a:t> отчетов, вложения</a:t>
             </a:r>
             <a:endParaRPr dirty="0">
               <a:solidFill>
@@ -22805,8 +22155,8 @@
         </p:blipFill>
         <p:spPr>
           <a:xfrm>
-            <a:off x="2354935" y="4439495"/>
-            <a:ext cx="1374165" cy="1314888"/>
+            <a:off x="2223937" y="4101187"/>
+            <a:ext cx="1716660" cy="1642609"/>
           </a:xfrm>
           <a:prstGeom prst="rect">
             <a:avLst/>
@@ -22840,8 +22190,8 @@
         </p:blipFill>
         <p:spPr>
           <a:xfrm>
-            <a:off x="4412894" y="4439495"/>
-            <a:ext cx="1374165" cy="1310056"/>
+            <a:off x="4218318" y="4084935"/>
+            <a:ext cx="1740040" cy="1658861"/>
           </a:xfrm>
           <a:prstGeom prst="rect">
             <a:avLst/>
@@ -22875,8 +22225,8 @@
         </p:blipFill>
         <p:spPr>
           <a:xfrm>
-            <a:off x="6453877" y="4433741"/>
-            <a:ext cx="1376550" cy="1310055"/>
+            <a:off x="6242026" y="4101187"/>
+            <a:ext cx="1730950" cy="1647335"/>
           </a:xfrm>
           <a:prstGeom prst="rect">
             <a:avLst/>
@@ -22917,8 +22267,8 @@
         </p:blipFill>
         <p:spPr bwMode="auto">
           <a:xfrm>
-            <a:off x="360586" y="4447217"/>
-            <a:ext cx="1374164" cy="1310056"/>
+            <a:off x="185934" y="4134670"/>
+            <a:ext cx="1723137" cy="1609125"/>
           </a:xfrm>
           <a:prstGeom prst="rect">
             <a:avLst/>

--- a/Презентация_Шавалеева_Python_QA .pptx
+++ b/Презентация_Шавалеева_Python_QA .pptx
@@ -17920,8 +17920,8 @@
         </p:nvSpPr>
         <p:spPr>
           <a:xfrm>
-            <a:off x="137738" y="1707496"/>
-            <a:ext cx="3946070" cy="3978012"/>
+            <a:off x="89922" y="2124951"/>
+            <a:ext cx="3946070" cy="3175228"/>
           </a:xfrm>
           <a:prstGeom prst="rect">
             <a:avLst/>
@@ -17940,7 +17940,7 @@
               </a:spcBef>
             </a:pPr>
             <a:r>
-              <a:rPr lang="ru-RU" sz="3000" b="1" dirty="0">
+              <a:rPr lang="ru-RU" sz="3200" b="1" dirty="0">
                 <a:ln w="0"/>
                 <a:effectLst>
                   <a:outerShdw blurRad="38100" dist="19050" dir="2700000" algn="tl" rotWithShape="0">
@@ -17953,7 +17953,7 @@
               <a:t>→</a:t>
             </a:r>
             <a:r>
-              <a:rPr sz="3000" b="1" dirty="0">
+              <a:rPr sz="3200" b="1" dirty="0">
                 <a:ln w="0"/>
                 <a:effectLst>
                   <a:outerShdw blurRad="38100" dist="19050" dir="2700000" algn="tl" rotWithShape="0">
@@ -17966,12 +17966,12 @@
               <a:t> </a:t>
             </a:r>
             <a:r>
-              <a:rPr lang="ru-RU" sz="3000" b="1" dirty="0">
+              <a:rPr lang="ru-RU" sz="3200" b="1" dirty="0">
                 <a:solidFill>
                   <a:srgbClr val="444455"/>
                 </a:solidFill>
               </a:rPr>
-              <a:t>Динамические элементы (карусели, всплывающие окна)</a:t>
+              <a:t>Динамические элементы </a:t>
             </a:r>
           </a:p>
           <a:p>
@@ -17981,7 +17981,7 @@
               </a:spcBef>
             </a:pPr>
             <a:r>
-              <a:rPr lang="ru-RU" sz="3000" b="1" dirty="0">
+              <a:rPr lang="ru-RU" sz="3200" b="1" dirty="0">
                 <a:ln w="0"/>
                 <a:effectLst>
                   <a:outerShdw blurRad="38100" dist="19050" dir="2700000" algn="tl" rotWithShape="0">
@@ -17994,7 +17994,7 @@
               <a:t>→ </a:t>
             </a:r>
             <a:r>
-              <a:rPr lang="ru-RU" sz="3000" b="1" dirty="0">
+              <a:rPr lang="ru-RU" sz="3200" b="1" dirty="0">
                 <a:solidFill>
                   <a:srgbClr val="444455"/>
                 </a:solidFill>
@@ -18009,38 +18009,7 @@
               </a:spcBef>
             </a:pPr>
             <a:r>
-              <a:rPr lang="ru-RU" sz="3000" b="1" dirty="0">
-                <a:solidFill>
-                  <a:srgbClr val="444455"/>
-                </a:solidFill>
-              </a:rPr>
-              <a:t>(</a:t>
-            </a:r>
-            <a:r>
-              <a:rPr lang="en-US" sz="3000" b="1" dirty="0" err="1">
-                <a:solidFill>
-                  <a:srgbClr val="444455"/>
-                </a:solidFill>
-              </a:rPr>
-              <a:t>Prodoctorov</a:t>
-            </a:r>
-            <a:r>
-              <a:rPr lang="ru-RU" sz="3000" b="1" dirty="0">
-                <a:solidFill>
-                  <a:srgbClr val="444455"/>
-                </a:solidFill>
-              </a:rPr>
-              <a:t>)</a:t>
-            </a:r>
-          </a:p>
-          <a:p>
-            <a:pPr>
-              <a:spcBef>
-                <a:spcPts val="529"/>
-              </a:spcBef>
-            </a:pPr>
-            <a:r>
-              <a:rPr lang="ru-RU" sz="3000" b="1" dirty="0">
+              <a:rPr lang="ru-RU" sz="3200" b="1" dirty="0">
                 <a:ln w="0"/>
                 <a:effectLst>
                   <a:outerShdw blurRad="38100" dist="19050" dir="2700000" algn="tl" rotWithShape="0">
@@ -18053,7 +18022,7 @@
               <a:t>→</a:t>
             </a:r>
             <a:r>
-              <a:rPr lang="ru-RU" sz="3000" b="1" dirty="0">
+              <a:rPr lang="ru-RU" sz="3200" b="1" dirty="0">
                 <a:solidFill>
                   <a:srgbClr val="CCE8FF"/>
                 </a:solidFill>
@@ -18061,14 +18030,14 @@
               <a:t>  </a:t>
             </a:r>
             <a:r>
-              <a:rPr lang="ru-RU" sz="3000" b="1" dirty="0">
+              <a:rPr lang="ru-RU" sz="3200" b="1" dirty="0">
                 <a:solidFill>
                   <a:srgbClr val="444455"/>
                 </a:solidFill>
               </a:rPr>
-              <a:t>Форма записи на прием (валидация)</a:t>
-            </a:r>
-            <a:endParaRPr sz="3000" b="1" dirty="0">
+              <a:t>Форма записи на прием</a:t>
+            </a:r>
+            <a:endParaRPr sz="3200" b="1" dirty="0">
               <a:solidFill>
                 <a:srgbClr val="444455"/>
               </a:solidFill>
@@ -18090,8 +18059,8 @@
         </p:nvSpPr>
         <p:spPr>
           <a:xfrm>
-            <a:off x="256860" y="1128247"/>
-            <a:ext cx="2847288" cy="553998"/>
+            <a:off x="454084" y="1230219"/>
+            <a:ext cx="2847288" cy="584775"/>
           </a:xfrm>
           <a:prstGeom prst="rect">
             <a:avLst/>
@@ -18106,14 +18075,14 @@
           <a:p>
             <a:pPr algn="l"/>
             <a:r>
-              <a:rPr lang="ru-RU" sz="3000" b="1" dirty="0">
+              <a:rPr lang="ru-RU" sz="3200" b="1" dirty="0">
                 <a:solidFill>
                   <a:srgbClr val="0D2B55"/>
                 </a:solidFill>
               </a:rPr>
               <a:t>Сложности :</a:t>
             </a:r>
-            <a:endParaRPr sz="3000" b="1" dirty="0">
+            <a:endParaRPr sz="3200" b="1" dirty="0">
               <a:solidFill>
                 <a:srgbClr val="0D2B55"/>
               </a:solidFill>
@@ -20084,7 +20053,7 @@
         <p:spPr>
           <a:xfrm>
             <a:off x="85327" y="1637160"/>
-            <a:ext cx="3858023" cy="3647152"/>
+            <a:ext cx="3783841" cy="3770263"/>
           </a:xfrm>
           <a:prstGeom prst="rect">
             <a:avLst/>
@@ -20103,7 +20072,7 @@
               </a:spcBef>
             </a:pPr>
             <a:r>
-              <a:rPr sz="2400" dirty="0">
+              <a:rPr sz="2800" dirty="0">
                 <a:solidFill>
                   <a:srgbClr val="552222"/>
                 </a:solidFill>
@@ -20111,7 +20080,7 @@
               <a:t>✗  </a:t>
             </a:r>
             <a:r>
-              <a:rPr sz="2400" dirty="0" err="1">
+              <a:rPr sz="2800" dirty="0" err="1">
                 <a:solidFill>
                   <a:srgbClr val="552222"/>
                 </a:solidFill>
@@ -20119,7 +20088,7 @@
               <a:t>Человеческий</a:t>
             </a:r>
             <a:r>
-              <a:rPr sz="2400" dirty="0">
+              <a:rPr sz="2800" dirty="0">
                 <a:solidFill>
                   <a:srgbClr val="552222"/>
                 </a:solidFill>
@@ -20127,7 +20096,7 @@
               <a:t> </a:t>
             </a:r>
             <a:r>
-              <a:rPr sz="2400" dirty="0" err="1">
+              <a:rPr sz="2800" dirty="0" err="1">
                 <a:solidFill>
                   <a:srgbClr val="552222"/>
                 </a:solidFill>
@@ -20135,38 +20104,14 @@
               <a:t>фактор</a:t>
             </a:r>
             <a:r>
-              <a:rPr sz="2400" dirty="0">
+              <a:rPr sz="2800" dirty="0">
                 <a:solidFill>
                   <a:srgbClr val="552222"/>
                 </a:solidFill>
               </a:rPr>
-              <a:t> — </a:t>
-            </a:r>
-            <a:r>
-              <a:rPr sz="2400" dirty="0" err="1">
-                <a:solidFill>
-                  <a:srgbClr val="552222"/>
-                </a:solidFill>
-              </a:rPr>
-              <a:t>пропуск</a:t>
-            </a:r>
-            <a:r>
-              <a:rPr sz="2400" dirty="0">
-                <a:solidFill>
-                  <a:srgbClr val="552222"/>
-                </a:solidFill>
-              </a:rPr>
               <a:t> </a:t>
             </a:r>
-            <a:r>
-              <a:rPr sz="2400" dirty="0" err="1">
-                <a:solidFill>
-                  <a:srgbClr val="552222"/>
-                </a:solidFill>
-              </a:rPr>
-              <a:t>ошибок</a:t>
-            </a:r>
-            <a:endParaRPr sz="2400" dirty="0">
+            <a:endParaRPr lang="ru-RU" sz="2800" dirty="0">
               <a:solidFill>
                 <a:srgbClr val="552222"/>
               </a:solidFill>
@@ -20179,7 +20124,7 @@
               </a:spcBef>
             </a:pPr>
             <a:r>
-              <a:rPr sz="2400" dirty="0">
+              <a:rPr sz="2800" dirty="0">
                 <a:solidFill>
                   <a:srgbClr val="552222"/>
                 </a:solidFill>
@@ -20187,78 +20132,54 @@
               <a:t>✗  </a:t>
             </a:r>
             <a:r>
-              <a:rPr sz="2400" dirty="0" err="1">
+              <a:rPr lang="ru-RU" sz="2800" dirty="0">
                 <a:solidFill>
                   <a:srgbClr val="552222"/>
                 </a:solidFill>
               </a:rPr>
-              <a:t>Сложно</a:t>
-            </a:r>
-            <a:r>
-              <a:rPr sz="2400" dirty="0">
+              <a:t>Проверка </a:t>
+            </a:r>
+            <a:r>
+              <a:rPr sz="2800" dirty="0" err="1">
                 <a:solidFill>
                   <a:srgbClr val="552222"/>
                 </a:solidFill>
               </a:rPr>
+              <a:t>все</a:t>
+            </a:r>
+            <a:r>
+              <a:rPr lang="ru-RU" sz="2800" dirty="0">
+                <a:solidFill>
+                  <a:srgbClr val="552222"/>
+                </a:solidFill>
+              </a:rPr>
+              <a:t>х наборов</a:t>
+            </a:r>
+            <a:r>
+              <a:rPr sz="2800" dirty="0">
+                <a:solidFill>
+                  <a:srgbClr val="552222"/>
+                </a:solidFill>
+              </a:rPr>
               <a:t> </a:t>
             </a:r>
             <a:r>
-              <a:rPr sz="2400" dirty="0" err="1">
+              <a:rPr lang="ru-RU" sz="2800" dirty="0">
                 <a:solidFill>
                   <a:srgbClr val="552222"/>
                 </a:solidFill>
               </a:rPr>
-              <a:t>охватить</a:t>
-            </a:r>
-            <a:r>
-              <a:rPr sz="2400" dirty="0">
+              <a:t>данных </a:t>
+            </a:r>
+            <a:r>
+              <a:rPr sz="2800" dirty="0" err="1">
                 <a:solidFill>
                   <a:srgbClr val="552222"/>
                 </a:solidFill>
               </a:rPr>
-              <a:t> </a:t>
-            </a:r>
-            <a:r>
-              <a:rPr sz="2400" dirty="0" err="1">
-                <a:solidFill>
-                  <a:srgbClr val="552222"/>
-                </a:solidFill>
-              </a:rPr>
-              <a:t>все</a:t>
-            </a:r>
-            <a:r>
-              <a:rPr sz="2400" dirty="0">
-                <a:solidFill>
-                  <a:srgbClr val="552222"/>
-                </a:solidFill>
-              </a:rPr>
-              <a:t> </a:t>
-            </a:r>
-            <a:r>
-              <a:rPr sz="2400" dirty="0" err="1">
-                <a:solidFill>
-                  <a:srgbClr val="552222"/>
-                </a:solidFill>
-              </a:rPr>
-              <a:t>варианты</a:t>
-            </a:r>
-            <a:r>
-              <a:rPr sz="2400" dirty="0">
-                <a:solidFill>
-                  <a:srgbClr val="552222"/>
-                </a:solidFill>
-              </a:rPr>
-              <a:t> </a:t>
-            </a:r>
-            <a:r>
-              <a:rPr sz="2400" dirty="0" err="1">
-                <a:solidFill>
-                  <a:srgbClr val="552222"/>
-                </a:solidFill>
-              </a:rPr>
               <a:t>форм</a:t>
             </a:r>
-            <a:endParaRPr sz="2400" dirty="0">
+            <a:endParaRPr sz="2800" dirty="0">
               <a:solidFill>
                 <a:srgbClr val="552222"/>
               </a:solidFill>
@@ -20271,7 +20192,7 @@
               </a:spcBef>
             </a:pPr>
             <a:r>
-              <a:rPr sz="2400" dirty="0">
+              <a:rPr sz="2800" dirty="0">
                 <a:solidFill>
                   <a:srgbClr val="552222"/>
                 </a:solidFill>
@@ -20279,26 +20200,13 @@
               <a:t>✗  </a:t>
             </a:r>
             <a:r>
-              <a:rPr lang="ru-RU" sz="2400" dirty="0">
+              <a:rPr lang="ru-RU" sz="2800" dirty="0">
                 <a:solidFill>
                   <a:srgbClr val="552222"/>
                 </a:solidFill>
               </a:rPr>
-              <a:t>Масштабирование- тяжело при ручном </a:t>
-            </a:r>
-            <a:r>
-              <a:rPr lang="ru-RU" sz="2400" dirty="0" err="1">
-                <a:solidFill>
-                  <a:srgbClr val="552222"/>
-                </a:solidFill>
-              </a:rPr>
-              <a:t>тестировнии</a:t>
-            </a:r>
-            <a:endParaRPr lang="ru-RU" sz="2400" dirty="0">
-              <a:solidFill>
-                <a:srgbClr val="552222"/>
-              </a:solidFill>
-            </a:endParaRPr>
+              <a:t>Сложность масштабирования</a:t>
+            </a:r>
           </a:p>
           <a:p>
             <a:pPr>
@@ -20307,7 +20215,7 @@
               </a:spcBef>
             </a:pPr>
             <a:r>
-              <a:rPr sz="2400" dirty="0">
+              <a:rPr sz="2800" dirty="0">
                 <a:solidFill>
                   <a:srgbClr val="552222"/>
                 </a:solidFill>
@@ -20315,78 +20223,30 @@
               <a:t>✗  </a:t>
             </a:r>
             <a:r>
-              <a:rPr sz="2400" dirty="0" err="1">
+              <a:rPr lang="ru-RU" sz="2800" dirty="0">
                 <a:solidFill>
                   <a:srgbClr val="552222"/>
                 </a:solidFill>
               </a:rPr>
-              <a:t>Регрессия</a:t>
-            </a:r>
-            <a:r>
-              <a:rPr lang="ru-RU" sz="2400" dirty="0">
+              <a:t>Долгие р</a:t>
+            </a:r>
+            <a:r>
+              <a:rPr sz="2800" dirty="0" err="1">
                 <a:solidFill>
                   <a:srgbClr val="552222"/>
                 </a:solidFill>
               </a:rPr>
-              <a:t> и релизы</a:t>
-            </a:r>
-            <a:r>
-              <a:rPr sz="2400" dirty="0">
+              <a:t>егресси</a:t>
+            </a:r>
+            <a:r>
+              <a:rPr lang="ru-RU" sz="2800" dirty="0">
                 <a:solidFill>
                   <a:srgbClr val="552222"/>
                 </a:solidFill>
               </a:rPr>
-              <a:t> </a:t>
-            </a:r>
-            <a:r>
-              <a:rPr sz="2400" dirty="0" err="1">
-                <a:solidFill>
-                  <a:srgbClr val="552222"/>
-                </a:solidFill>
-              </a:rPr>
-              <a:t>занима</a:t>
-            </a:r>
-            <a:r>
-              <a:rPr lang="ru-RU" sz="2400" dirty="0">
-                <a:solidFill>
-                  <a:srgbClr val="552222"/>
-                </a:solidFill>
-              </a:rPr>
-              <a:t>ю</a:t>
-            </a:r>
-            <a:r>
-              <a:rPr sz="2400" dirty="0">
-                <a:solidFill>
-                  <a:srgbClr val="552222"/>
-                </a:solidFill>
-              </a:rPr>
-              <a:t>т </a:t>
-            </a:r>
-            <a:r>
-              <a:rPr sz="2400" dirty="0" err="1">
-                <a:solidFill>
-                  <a:srgbClr val="552222"/>
-                </a:solidFill>
-              </a:rPr>
-              <a:t>часы</a:t>
-            </a:r>
-            <a:r>
-              <a:rPr sz="2400" dirty="0">
-                <a:solidFill>
-                  <a:srgbClr val="552222"/>
-                </a:solidFill>
-              </a:rPr>
-              <a:t> </a:t>
-            </a:r>
-            <a:r>
-              <a:rPr sz="2400" dirty="0" err="1">
-                <a:solidFill>
-                  <a:srgbClr val="552222"/>
-                </a:solidFill>
-              </a:rPr>
-              <a:t>работы</a:t>
-            </a:r>
-            <a:endParaRPr sz="2400" dirty="0">
+              <a:t>и и релизы</a:t>
+            </a:r>
+            <a:endParaRPr sz="2800" dirty="0">
               <a:solidFill>
                 <a:srgbClr val="552222"/>
               </a:solidFill>
@@ -20402,8 +20262,8 @@
         </p:nvSpPr>
         <p:spPr>
           <a:xfrm>
-            <a:off x="4321138" y="1551419"/>
-            <a:ext cx="3707792" cy="4205553"/>
+            <a:off x="4245089" y="1551419"/>
+            <a:ext cx="3783841" cy="4205553"/>
           </a:xfrm>
           <a:prstGeom prst="rect">
             <a:avLst/>
@@ -20532,8 +20392,8 @@
         </p:nvSpPr>
         <p:spPr>
           <a:xfrm>
-            <a:off x="4342315" y="1540270"/>
-            <a:ext cx="3617797" cy="4093428"/>
+            <a:off x="4290584" y="1524292"/>
+            <a:ext cx="3869165" cy="3847207"/>
           </a:xfrm>
           <a:prstGeom prst="rect">
             <a:avLst/>
@@ -20552,7 +20412,7 @@
               </a:spcBef>
             </a:pPr>
             <a:r>
-              <a:rPr sz="2400" dirty="0">
+              <a:rPr sz="2800" dirty="0">
                 <a:solidFill>
                   <a:srgbClr val="144A28"/>
                 </a:solidFill>
@@ -20560,7 +20420,7 @@
               <a:t>✓  </a:t>
             </a:r>
             <a:r>
-              <a:rPr sz="2400" dirty="0" err="1">
+              <a:rPr sz="2800" dirty="0" err="1">
                 <a:solidFill>
                   <a:srgbClr val="144A28"/>
                 </a:solidFill>
@@ -20568,7 +20428,7 @@
               <a:t>Повторный</a:t>
             </a:r>
             <a:r>
-              <a:rPr sz="2400" dirty="0">
+              <a:rPr sz="2800" dirty="0">
                 <a:solidFill>
                   <a:srgbClr val="144A28"/>
                 </a:solidFill>
@@ -20576,7 +20436,7 @@
               <a:t> </a:t>
             </a:r>
             <a:r>
-              <a:rPr sz="2400" dirty="0" err="1">
+              <a:rPr sz="2800" dirty="0" err="1">
                 <a:solidFill>
                   <a:srgbClr val="144A28"/>
                 </a:solidFill>
@@ -20584,7 +20444,7 @@
               <a:t>запуск</a:t>
             </a:r>
             <a:r>
-              <a:rPr sz="2400" dirty="0">
+              <a:rPr sz="2800" dirty="0">
                 <a:solidFill>
                   <a:srgbClr val="144A28"/>
                 </a:solidFill>
@@ -20592,7 +20452,7 @@
               <a:t> </a:t>
             </a:r>
             <a:r>
-              <a:rPr sz="2400" dirty="0" err="1">
+              <a:rPr sz="2800" dirty="0" err="1">
                 <a:solidFill>
                   <a:srgbClr val="144A28"/>
                 </a:solidFill>
@@ -20600,7 +20460,7 @@
               <a:t>за</a:t>
             </a:r>
             <a:r>
-              <a:rPr sz="2400" dirty="0">
+              <a:rPr sz="2800" dirty="0">
                 <a:solidFill>
                   <a:srgbClr val="144A28"/>
                 </a:solidFill>
@@ -20608,14 +20468,14 @@
               <a:t> </a:t>
             </a:r>
             <a:r>
-              <a:rPr sz="2400" dirty="0" err="1">
+              <a:rPr sz="2800" dirty="0" err="1">
                 <a:solidFill>
                   <a:srgbClr val="144A28"/>
                 </a:solidFill>
               </a:rPr>
               <a:t>секунды</a:t>
             </a:r>
-            <a:endParaRPr sz="2400" dirty="0">
+            <a:endParaRPr sz="2800" dirty="0">
               <a:solidFill>
                 <a:srgbClr val="144A28"/>
               </a:solidFill>
@@ -20628,7 +20488,7 @@
               </a:spcBef>
             </a:pPr>
             <a:r>
-              <a:rPr sz="2400" dirty="0">
+              <a:rPr sz="2800" dirty="0">
                 <a:solidFill>
                   <a:srgbClr val="144A28"/>
                 </a:solidFill>
@@ -20636,7 +20496,7 @@
               <a:t>✓  </a:t>
             </a:r>
             <a:r>
-              <a:rPr sz="2400" dirty="0" err="1">
+              <a:rPr sz="2800" dirty="0" err="1">
                 <a:solidFill>
                   <a:srgbClr val="144A28"/>
                 </a:solidFill>
@@ -20644,7 +20504,7 @@
               <a:t>Проверка</a:t>
             </a:r>
             <a:r>
-              <a:rPr sz="2400" dirty="0">
+              <a:rPr sz="2800" dirty="0">
                 <a:solidFill>
                   <a:srgbClr val="144A28"/>
                 </a:solidFill>
@@ -20652,7 +20512,7 @@
               <a:t> </a:t>
             </a:r>
             <a:r>
-              <a:rPr sz="2400" dirty="0" err="1">
+              <a:rPr sz="2800" dirty="0" err="1">
                 <a:solidFill>
                   <a:srgbClr val="144A28"/>
                 </a:solidFill>
@@ -20660,7 +20520,7 @@
               <a:t>всех</a:t>
             </a:r>
             <a:r>
-              <a:rPr sz="2400" dirty="0">
+              <a:rPr sz="2800" dirty="0">
                 <a:solidFill>
                   <a:srgbClr val="144A28"/>
                 </a:solidFill>
@@ -20668,7 +20528,7 @@
               <a:t> </a:t>
             </a:r>
             <a:r>
-              <a:rPr sz="2400" dirty="0" err="1">
+              <a:rPr sz="2800" dirty="0" err="1">
                 <a:solidFill>
                   <a:srgbClr val="144A28"/>
                 </a:solidFill>
@@ -20676,7 +20536,7 @@
               <a:t>наборов</a:t>
             </a:r>
             <a:r>
-              <a:rPr sz="2400" dirty="0">
+              <a:rPr sz="2800" dirty="0">
                 <a:solidFill>
                   <a:srgbClr val="144A28"/>
                 </a:solidFill>
@@ -20684,7 +20544,7 @@
               <a:t> </a:t>
             </a:r>
             <a:r>
-              <a:rPr sz="2400" dirty="0" err="1">
+              <a:rPr sz="2800" dirty="0" err="1">
                 <a:solidFill>
                   <a:srgbClr val="144A28"/>
                 </a:solidFill>
@@ -20692,7 +20552,7 @@
               <a:t>данных</a:t>
             </a:r>
             <a:r>
-              <a:rPr sz="2400" dirty="0">
+              <a:rPr sz="2800" dirty="0">
                 <a:solidFill>
                   <a:srgbClr val="144A28"/>
                 </a:solidFill>
@@ -20700,14 +20560,14 @@
               <a:t> </a:t>
             </a:r>
             <a:r>
-              <a:rPr sz="2400" dirty="0" err="1">
+              <a:rPr sz="2800" dirty="0" err="1">
                 <a:solidFill>
                   <a:srgbClr val="144A28"/>
                 </a:solidFill>
               </a:rPr>
               <a:t>формы</a:t>
             </a:r>
-            <a:endParaRPr sz="2400" dirty="0">
+            <a:endParaRPr sz="2800" dirty="0">
               <a:solidFill>
                 <a:srgbClr val="144A28"/>
               </a:solidFill>
@@ -20720,7 +20580,7 @@
               </a:spcBef>
             </a:pPr>
             <a:r>
-              <a:rPr sz="2400" dirty="0">
+              <a:rPr sz="2800" dirty="0">
                 <a:solidFill>
                   <a:srgbClr val="144A28"/>
                 </a:solidFill>
@@ -20728,7 +20588,7 @@
               <a:t>✓  </a:t>
             </a:r>
             <a:r>
-              <a:rPr sz="2400" dirty="0" err="1">
+              <a:rPr sz="2800" dirty="0" err="1">
                 <a:solidFill>
                   <a:srgbClr val="144A28"/>
                 </a:solidFill>
@@ -20736,7 +20596,7 @@
               <a:t>Лёгкое</a:t>
             </a:r>
             <a:r>
-              <a:rPr sz="2400" dirty="0">
+              <a:rPr sz="2800" dirty="0">
                 <a:solidFill>
                   <a:srgbClr val="144A28"/>
                 </a:solidFill>
@@ -20744,7 +20604,7 @@
               <a:t> </a:t>
             </a:r>
             <a:r>
-              <a:rPr sz="2400" dirty="0" err="1">
+              <a:rPr sz="2800" dirty="0" err="1">
                 <a:solidFill>
                   <a:srgbClr val="144A28"/>
                 </a:solidFill>
@@ -20752,26 +20612,13 @@
               <a:t>масштабирование</a:t>
             </a:r>
             <a:r>
-              <a:rPr sz="2400" dirty="0">
+              <a:rPr sz="2800" dirty="0">
                 <a:solidFill>
                   <a:srgbClr val="144A28"/>
                 </a:solidFill>
               </a:rPr>
               <a:t> </a:t>
             </a:r>
-            <a:r>
-              <a:rPr sz="2400" dirty="0" err="1">
-                <a:solidFill>
-                  <a:srgbClr val="144A28"/>
-                </a:solidFill>
-              </a:rPr>
-              <a:t>тестов</a:t>
-            </a:r>
-            <a:endParaRPr sz="2400" dirty="0">
-              <a:solidFill>
-                <a:srgbClr val="144A28"/>
-              </a:solidFill>
-            </a:endParaRPr>
           </a:p>
           <a:p>
             <a:pPr>
@@ -20780,7 +20627,7 @@
               </a:spcBef>
             </a:pPr>
             <a:r>
-              <a:rPr sz="2400" dirty="0">
+              <a:rPr sz="2800" dirty="0">
                 <a:solidFill>
                   <a:srgbClr val="144A28"/>
                 </a:solidFill>
@@ -20788,7 +20635,7 @@
               <a:t>✓  </a:t>
             </a:r>
             <a:r>
-              <a:rPr sz="2400" dirty="0" err="1">
+              <a:rPr sz="2800" dirty="0" err="1">
                 <a:solidFill>
                   <a:srgbClr val="144A28"/>
                 </a:solidFill>
@@ -20796,7 +20643,7 @@
               <a:t>Быстрая</a:t>
             </a:r>
             <a:r>
-              <a:rPr sz="2400" dirty="0">
+              <a:rPr sz="2800" dirty="0">
                 <a:solidFill>
                   <a:srgbClr val="144A28"/>
                 </a:solidFill>
@@ -20804,7 +20651,7 @@
               <a:t> </a:t>
             </a:r>
             <a:r>
-              <a:rPr sz="2400" dirty="0" err="1">
+              <a:rPr sz="2800" dirty="0" err="1">
                 <a:solidFill>
                   <a:srgbClr val="144A28"/>
                 </a:solidFill>
@@ -20812,38 +20659,14 @@
               <a:t>регрессия</a:t>
             </a:r>
             <a:r>
-              <a:rPr sz="2400" dirty="0">
+              <a:rPr sz="2800" dirty="0">
                 <a:solidFill>
                   <a:srgbClr val="144A28"/>
                 </a:solidFill>
               </a:rPr>
               <a:t> </a:t>
             </a:r>
-            <a:r>
-              <a:rPr sz="2400" dirty="0" err="1">
-                <a:solidFill>
-                  <a:srgbClr val="144A28"/>
-                </a:solidFill>
-              </a:rPr>
-              <a:t>после</a:t>
-            </a:r>
-            <a:r>
-              <a:rPr sz="2400" dirty="0">
-                <a:solidFill>
-                  <a:srgbClr val="144A28"/>
-                </a:solidFill>
-              </a:rPr>
-              <a:t> </a:t>
-            </a:r>
-            <a:r>
-              <a:rPr sz="2400" dirty="0" err="1">
-                <a:solidFill>
-                  <a:srgbClr val="144A28"/>
-                </a:solidFill>
-              </a:rPr>
-              <a:t>обновлений</a:t>
-            </a:r>
-            <a:endParaRPr sz="2400" dirty="0">
+            <a:endParaRPr lang="ru-RU" sz="2800" dirty="0">
               <a:solidFill>
                 <a:srgbClr val="144A28"/>
               </a:solidFill>
@@ -20856,7 +20679,7 @@
               </a:spcBef>
             </a:pPr>
             <a:r>
-              <a:rPr sz="2400" dirty="0">
+              <a:rPr sz="2800" dirty="0">
                 <a:solidFill>
                   <a:srgbClr val="144A28"/>
                 </a:solidFill>
@@ -20864,7 +20687,7 @@
               <a:t>✓  </a:t>
             </a:r>
             <a:r>
-              <a:rPr sz="2400" dirty="0" err="1">
+              <a:rPr sz="2800" dirty="0" err="1">
                 <a:solidFill>
                   <a:srgbClr val="144A28"/>
                 </a:solidFill>
@@ -20872,58 +20695,13 @@
               <a:t>Отчёты</a:t>
             </a:r>
             <a:r>
-              <a:rPr sz="2400" dirty="0">
+              <a:rPr sz="2800" dirty="0">
                 <a:solidFill>
                   <a:srgbClr val="144A28"/>
                 </a:solidFill>
               </a:rPr>
-              <a:t> Allure с </a:t>
-            </a:r>
-            <a:r>
-              <a:rPr sz="2400" dirty="0" err="1">
-                <a:solidFill>
-                  <a:srgbClr val="144A28"/>
-                </a:solidFill>
-              </a:rPr>
-              <a:t>деталями</a:t>
-            </a:r>
-            <a:r>
-              <a:rPr sz="2400" dirty="0">
-                <a:solidFill>
-                  <a:srgbClr val="144A28"/>
-                </a:solidFill>
-              </a:rPr>
-              <a:t> </a:t>
-            </a:r>
-            <a:r>
-              <a:rPr sz="2400" dirty="0" err="1">
-                <a:solidFill>
-                  <a:srgbClr val="144A28"/>
-                </a:solidFill>
-              </a:rPr>
-              <a:t>каждого</a:t>
-            </a:r>
-            <a:r>
-              <a:rPr sz="2400" dirty="0">
-                <a:solidFill>
-                  <a:srgbClr val="144A28"/>
-                </a:solidFill>
-              </a:rPr>
-              <a:t> </a:t>
-            </a:r>
-            <a:r>
-              <a:rPr sz="2400" dirty="0" err="1">
-                <a:solidFill>
-                  <a:srgbClr val="144A28"/>
-                </a:solidFill>
-              </a:rPr>
-              <a:t>шага</a:t>
-            </a:r>
-            <a:endParaRPr sz="2400" dirty="0">
-              <a:solidFill>
-                <a:srgbClr val="144A28"/>
-              </a:solidFill>
-            </a:endParaRPr>
+              <a:t> Allure с</a:t>
+            </a:r>
           </a:p>
         </p:txBody>
       </p:sp>
@@ -20935,7 +20713,7 @@
         </p:nvSpPr>
         <p:spPr>
           <a:xfrm rot="18857091">
-            <a:off x="3884902" y="2982128"/>
+            <a:off x="3813811" y="3203223"/>
             <a:ext cx="504494" cy="504494"/>
           </a:xfrm>
           <a:prstGeom prst="rect">
@@ -20979,7 +20757,7 @@
         </p:nvSpPr>
         <p:spPr>
           <a:xfrm>
-            <a:off x="3884902" y="3062337"/>
+            <a:off x="3813811" y="3283432"/>
             <a:ext cx="504494" cy="369332"/>
           </a:xfrm>
           <a:prstGeom prst="rect">

--- a/Презентация_Шавалеева_Python_QA .pptx
+++ b/Презентация_Шавалеева_Python_QA .pptx
@@ -20306,8 +20306,8 @@
         </p:nvSpPr>
         <p:spPr>
           <a:xfrm>
-            <a:off x="4332523" y="1066120"/>
-            <a:ext cx="3707792" cy="449535"/>
+            <a:off x="4239331" y="1066120"/>
+            <a:ext cx="3800984" cy="449535"/>
           </a:xfrm>
           <a:prstGeom prst="rect">
             <a:avLst/>

--- a/Презентация_Шавалеева_Python_QA .pptx
+++ b/Презентация_Шавалеева_Python_QA .pptx
@@ -5,7 +5,7 @@
     <p:sldMasterId id="2147483648" r:id="rId1"/>
   </p:sldMasterIdLst>
   <p:notesMasterIdLst>
-    <p:notesMasterId r:id="rId20"/>
+    <p:notesMasterId r:id="rId19"/>
   </p:notesMasterIdLst>
   <p:sldIdLst>
     <p:sldId id="256" r:id="rId2"/>
@@ -16,16 +16,15 @@
     <p:sldId id="259" r:id="rId7"/>
     <p:sldId id="260" r:id="rId8"/>
     <p:sldId id="261" r:id="rId9"/>
-    <p:sldId id="262" r:id="rId10"/>
-    <p:sldId id="263" r:id="rId11"/>
-    <p:sldId id="272" r:id="rId12"/>
-    <p:sldId id="273" r:id="rId13"/>
-    <p:sldId id="274" r:id="rId14"/>
-    <p:sldId id="265" r:id="rId15"/>
-    <p:sldId id="267" r:id="rId16"/>
-    <p:sldId id="264" r:id="rId17"/>
-    <p:sldId id="268" r:id="rId18"/>
-    <p:sldId id="269" r:id="rId19"/>
+    <p:sldId id="263" r:id="rId10"/>
+    <p:sldId id="272" r:id="rId11"/>
+    <p:sldId id="273" r:id="rId12"/>
+    <p:sldId id="274" r:id="rId13"/>
+    <p:sldId id="265" r:id="rId14"/>
+    <p:sldId id="267" r:id="rId15"/>
+    <p:sldId id="264" r:id="rId16"/>
+    <p:sldId id="268" r:id="rId17"/>
+    <p:sldId id="269" r:id="rId18"/>
   </p:sldIdLst>
   <p:sldSz cx="8159750" cy="6119813"/>
   <p:notesSz cx="6858000" cy="9144000"/>
@@ -402,35 +401,330 @@
           <a:lstStyle/>
           <a:p>
             <a:r>
-              <a:rPr sz="1400"/>
-              <a:t>Все тесты интегрированы с системой отчётности Allure.</a:t>
-            </a:r>
-          </a:p>
-          <a:p>
-            <a:endParaRPr sz="1400"/>
-          </a:p>
-          <a:p>
-            <a:r>
-              <a:rPr sz="1400"/>
-              <a:t>Allure предоставляет дашборд с общей статистикой, детали каждого теста с шагами, историю прогонов и группировку по Suite и Feature.</a:t>
-            </a:r>
-          </a:p>
-          <a:p>
-            <a:endParaRPr sz="1400"/>
-          </a:p>
-          <a:p>
-            <a:r>
-              <a:rPr sz="1400"/>
-              <a:t>Запуск прост: команда pytest с флагом --alluredir сохраняет результаты, а allure serve генерирует интерактивный HTML-отчёт.</a:t>
-            </a:r>
-          </a:p>
-          <a:p>
-            <a:endParaRPr sz="1400"/>
-          </a:p>
-          <a:p>
-            <a:r>
-              <a:rPr sz="1400"/>
-              <a:t>В тестах используются три декоратора: @allure.title для заголовка, @allure.description для описания и with allure.step для документирования каждого шага.</a:t>
+              <a:rPr sz="1400" dirty="0" err="1"/>
+              <a:t>На</a:t>
+            </a:r>
+            <a:r>
+              <a:rPr sz="1400" dirty="0"/>
+              <a:t> </a:t>
+            </a:r>
+            <a:r>
+              <a:rPr sz="1400" dirty="0" err="1"/>
+              <a:t>слайде</a:t>
+            </a:r>
+            <a:r>
+              <a:rPr sz="1400" dirty="0"/>
+              <a:t> </a:t>
+            </a:r>
+            <a:r>
+              <a:rPr sz="1400" dirty="0" err="1"/>
+              <a:t>показана</a:t>
+            </a:r>
+            <a:r>
+              <a:rPr sz="1400" dirty="0"/>
+              <a:t> </a:t>
+            </a:r>
+            <a:r>
+              <a:rPr sz="1400" dirty="0" err="1"/>
+              <a:t>реальная</a:t>
+            </a:r>
+            <a:r>
+              <a:rPr sz="1400" dirty="0"/>
+              <a:t> </a:t>
+            </a:r>
+            <a:r>
+              <a:rPr sz="1400" dirty="0" err="1"/>
+              <a:t>структура</a:t>
+            </a:r>
+            <a:r>
+              <a:rPr sz="1400" dirty="0"/>
+              <a:t> </a:t>
+            </a:r>
+            <a:r>
+              <a:rPr sz="1400" dirty="0" err="1"/>
+              <a:t>файлов</a:t>
+            </a:r>
+            <a:r>
+              <a:rPr sz="1400" dirty="0"/>
+              <a:t> </a:t>
+            </a:r>
+            <a:r>
+              <a:rPr sz="1400" dirty="0" err="1"/>
+              <a:t>проекта</a:t>
+            </a:r>
+            <a:r>
+              <a:rPr sz="1400" dirty="0"/>
+              <a:t>.</a:t>
+            </a:r>
+          </a:p>
+          <a:p>
+            <a:endParaRPr sz="1400" dirty="0"/>
+          </a:p>
+          <a:p>
+            <a:r>
+              <a:rPr sz="1400" dirty="0"/>
+              <a:t>В </a:t>
+            </a:r>
+            <a:r>
+              <a:rPr sz="1400" dirty="0" err="1"/>
+              <a:t>папке</a:t>
+            </a:r>
+            <a:r>
+              <a:rPr sz="1400" dirty="0"/>
+              <a:t> controls — </a:t>
+            </a:r>
+            <a:r>
+              <a:rPr sz="1400" dirty="0" err="1"/>
+              <a:t>атомарные</a:t>
+            </a:r>
+            <a:r>
+              <a:rPr sz="1400" dirty="0"/>
+              <a:t> </a:t>
+            </a:r>
+            <a:r>
+              <a:rPr sz="1400" dirty="0" err="1"/>
+              <a:t>элементы</a:t>
+            </a:r>
+            <a:r>
+              <a:rPr sz="1400" dirty="0"/>
+              <a:t>: </a:t>
+            </a:r>
+            <a:r>
+              <a:rPr sz="1400" dirty="0" err="1"/>
+              <a:t>InputForm</a:t>
+            </a:r>
+            <a:r>
+              <a:rPr sz="1400" dirty="0"/>
+              <a:t>, </a:t>
+            </a:r>
+            <a:r>
+              <a:rPr sz="1400" dirty="0" err="1"/>
+              <a:t>ButtonForm</a:t>
+            </a:r>
+            <a:r>
+              <a:rPr sz="1400" dirty="0"/>
+              <a:t>, Pagination. В components — </a:t>
+            </a:r>
+            <a:r>
+              <a:rPr sz="1400" dirty="0" err="1"/>
+              <a:t>составные</a:t>
+            </a:r>
+            <a:r>
+              <a:rPr sz="1400" dirty="0"/>
+              <a:t> </a:t>
+            </a:r>
+            <a:r>
+              <a:rPr sz="1400" dirty="0" err="1"/>
+              <a:t>блоки</a:t>
+            </a:r>
+            <a:r>
+              <a:rPr sz="1400" dirty="0"/>
+              <a:t>: Header, </a:t>
+            </a:r>
+            <a:r>
+              <a:rPr sz="1400" dirty="0" err="1"/>
+              <a:t>FormRecording</a:t>
+            </a:r>
+            <a:r>
+              <a:rPr sz="1400" dirty="0"/>
+              <a:t>, </a:t>
+            </a:r>
+            <a:r>
+              <a:rPr sz="1400" dirty="0" err="1"/>
+              <a:t>CartProfileDoctor</a:t>
+            </a:r>
+            <a:r>
+              <a:rPr sz="1400" dirty="0"/>
+              <a:t>. В pages — </a:t>
+            </a:r>
+            <a:r>
+              <a:rPr sz="1400" dirty="0" err="1"/>
+              <a:t>классы</a:t>
+            </a:r>
+            <a:r>
+              <a:rPr sz="1400" dirty="0"/>
+              <a:t> </a:t>
+            </a:r>
+            <a:r>
+              <a:rPr sz="1400" dirty="0" err="1"/>
+              <a:t>страниц</a:t>
+            </a:r>
+            <a:r>
+              <a:rPr sz="1400" dirty="0"/>
+              <a:t>, </a:t>
+            </a:r>
+            <a:r>
+              <a:rPr sz="1400" dirty="0" err="1"/>
+              <a:t>наследующие</a:t>
+            </a:r>
+            <a:r>
+              <a:rPr sz="1400" dirty="0"/>
+              <a:t> </a:t>
+            </a:r>
+            <a:r>
+              <a:rPr sz="1400" dirty="0" err="1"/>
+              <a:t>BasePage</a:t>
+            </a:r>
+            <a:r>
+              <a:rPr sz="1400" dirty="0"/>
+              <a:t>. В tests — 16 </a:t>
+            </a:r>
+            <a:r>
+              <a:rPr sz="1400" dirty="0" err="1"/>
+              <a:t>тест-файлов</a:t>
+            </a:r>
+            <a:r>
+              <a:rPr sz="1400" dirty="0"/>
+              <a:t>.</a:t>
+            </a:r>
+          </a:p>
+          <a:p>
+            <a:endParaRPr sz="1400" dirty="0"/>
+          </a:p>
+          <a:p>
+            <a:r>
+              <a:rPr sz="1400" dirty="0" err="1"/>
+              <a:t>Заголовок</a:t>
+            </a:r>
+            <a:r>
+              <a:rPr sz="1400" dirty="0"/>
+              <a:t> «</a:t>
+            </a:r>
+            <a:r>
+              <a:rPr sz="1400" dirty="0" err="1"/>
+              <a:t>Назначение</a:t>
+            </a:r>
+            <a:r>
+              <a:rPr sz="1400" dirty="0"/>
+              <a:t> </a:t>
+            </a:r>
+            <a:r>
+              <a:rPr sz="1400" dirty="0" err="1"/>
+              <a:t>модулей</a:t>
+            </a:r>
+            <a:r>
+              <a:rPr sz="1400" dirty="0"/>
+              <a:t>» </a:t>
+            </a:r>
+            <a:r>
+              <a:rPr sz="1400" dirty="0" err="1"/>
+              <a:t>справа</a:t>
+            </a:r>
+            <a:r>
+              <a:rPr sz="1400" dirty="0"/>
+              <a:t> </a:t>
+            </a:r>
+            <a:r>
+              <a:rPr sz="1400" dirty="0" err="1"/>
+              <a:t>описывает</a:t>
+            </a:r>
+            <a:r>
+              <a:rPr sz="1400" dirty="0"/>
+              <a:t> </a:t>
+            </a:r>
+            <a:r>
+              <a:rPr sz="1400" dirty="0" err="1"/>
+              <a:t>роль</a:t>
+            </a:r>
+            <a:r>
+              <a:rPr sz="1400" dirty="0"/>
+              <a:t> </a:t>
+            </a:r>
+            <a:r>
+              <a:rPr sz="1400" dirty="0" err="1"/>
+              <a:t>каждого</a:t>
+            </a:r>
+            <a:r>
+              <a:rPr sz="1400" dirty="0"/>
+              <a:t> </a:t>
+            </a:r>
+            <a:r>
+              <a:rPr sz="1400" dirty="0" err="1"/>
+              <a:t>уровня</a:t>
+            </a:r>
+            <a:r>
+              <a:rPr sz="1400" dirty="0"/>
+              <a:t>. </a:t>
+            </a:r>
+            <a:r>
+              <a:rPr sz="1400" dirty="0" err="1"/>
+              <a:t>Особо</a:t>
+            </a:r>
+            <a:r>
+              <a:rPr sz="1400" dirty="0"/>
+              <a:t> </a:t>
+            </a:r>
+            <a:r>
+              <a:rPr sz="1400" dirty="0" err="1"/>
+              <a:t>хочу</a:t>
+            </a:r>
+            <a:r>
+              <a:rPr sz="1400" dirty="0"/>
+              <a:t> </a:t>
+            </a:r>
+            <a:r>
+              <a:rPr sz="1400" dirty="0" err="1"/>
+              <a:t>отметить</a:t>
+            </a:r>
+            <a:r>
+              <a:rPr sz="1400" dirty="0"/>
+              <a:t> conftest.py — </a:t>
+            </a:r>
+            <a:r>
+              <a:rPr sz="1400" dirty="0" err="1"/>
+              <a:t>он</a:t>
+            </a:r>
+            <a:r>
+              <a:rPr sz="1400" dirty="0"/>
+              <a:t> </a:t>
+            </a:r>
+            <a:r>
+              <a:rPr sz="1400" dirty="0" err="1"/>
+              <a:t>автоматически</a:t>
+            </a:r>
+            <a:r>
+              <a:rPr sz="1400" dirty="0"/>
+              <a:t> </a:t>
+            </a:r>
+            <a:r>
+              <a:rPr sz="1400" dirty="0" err="1"/>
+              <a:t>закрывает</a:t>
+            </a:r>
+            <a:r>
+              <a:rPr sz="1400" dirty="0"/>
+              <a:t> cookie-</a:t>
+            </a:r>
+            <a:r>
+              <a:rPr sz="1400" dirty="0" err="1"/>
+              <a:t>баннер</a:t>
+            </a:r>
+            <a:r>
+              <a:rPr sz="1400" dirty="0"/>
+              <a:t> </a:t>
+            </a:r>
+            <a:r>
+              <a:rPr sz="1400" dirty="0" err="1"/>
+              <a:t>при</a:t>
+            </a:r>
+            <a:r>
+              <a:rPr sz="1400" dirty="0"/>
+              <a:t> </a:t>
+            </a:r>
+            <a:r>
+              <a:rPr sz="1400" dirty="0" err="1"/>
+              <a:t>каждой</a:t>
+            </a:r>
+            <a:r>
+              <a:rPr sz="1400" dirty="0"/>
+              <a:t> </a:t>
+            </a:r>
+            <a:r>
+              <a:rPr sz="1400" dirty="0" err="1"/>
+              <a:t>навигации</a:t>
+            </a:r>
+            <a:r>
+              <a:rPr sz="1400" dirty="0"/>
+              <a:t>.</a:t>
             </a:r>
           </a:p>
         </p:txBody>
@@ -500,330 +794,26 @@
           <a:lstStyle/>
           <a:p>
             <a:r>
-              <a:rPr sz="1400" dirty="0" err="1"/>
-              <a:t>На</a:t>
-            </a:r>
-            <a:r>
-              <a:rPr sz="1400" dirty="0"/>
-              <a:t> </a:t>
-            </a:r>
-            <a:r>
-              <a:rPr sz="1400" dirty="0" err="1"/>
-              <a:t>слайде</a:t>
-            </a:r>
-            <a:r>
-              <a:rPr sz="1400" dirty="0"/>
-              <a:t> </a:t>
-            </a:r>
-            <a:r>
-              <a:rPr sz="1400" dirty="0" err="1"/>
-              <a:t>показана</a:t>
-            </a:r>
-            <a:r>
-              <a:rPr sz="1400" dirty="0"/>
-              <a:t> </a:t>
-            </a:r>
-            <a:r>
-              <a:rPr sz="1400" dirty="0" err="1"/>
-              <a:t>реальная</a:t>
-            </a:r>
-            <a:r>
-              <a:rPr sz="1400" dirty="0"/>
-              <a:t> </a:t>
-            </a:r>
-            <a:r>
-              <a:rPr sz="1400" dirty="0" err="1"/>
-              <a:t>структура</a:t>
-            </a:r>
-            <a:r>
-              <a:rPr sz="1400" dirty="0"/>
-              <a:t> </a:t>
-            </a:r>
-            <a:r>
-              <a:rPr sz="1400" dirty="0" err="1"/>
-              <a:t>файлов</a:t>
-            </a:r>
-            <a:r>
-              <a:rPr sz="1400" dirty="0"/>
-              <a:t> </a:t>
-            </a:r>
-            <a:r>
-              <a:rPr sz="1400" dirty="0" err="1"/>
-              <a:t>проекта</a:t>
-            </a:r>
-            <a:r>
-              <a:rPr sz="1400" dirty="0"/>
-              <a:t>.</a:t>
-            </a:r>
-          </a:p>
-          <a:p>
-            <a:endParaRPr sz="1400" dirty="0"/>
-          </a:p>
-          <a:p>
-            <a:r>
-              <a:rPr sz="1400" dirty="0"/>
-              <a:t>В </a:t>
-            </a:r>
-            <a:r>
-              <a:rPr sz="1400" dirty="0" err="1"/>
-              <a:t>папке</a:t>
-            </a:r>
-            <a:r>
-              <a:rPr sz="1400" dirty="0"/>
-              <a:t> controls — </a:t>
-            </a:r>
-            <a:r>
-              <a:rPr sz="1400" dirty="0" err="1"/>
-              <a:t>атомарные</a:t>
-            </a:r>
-            <a:r>
-              <a:rPr sz="1400" dirty="0"/>
-              <a:t> </a:t>
-            </a:r>
-            <a:r>
-              <a:rPr sz="1400" dirty="0" err="1"/>
-              <a:t>элементы</a:t>
-            </a:r>
-            <a:r>
-              <a:rPr sz="1400" dirty="0"/>
-              <a:t>: </a:t>
-            </a:r>
-            <a:r>
-              <a:rPr sz="1400" dirty="0" err="1"/>
-              <a:t>InputForm</a:t>
-            </a:r>
-            <a:r>
-              <a:rPr sz="1400" dirty="0"/>
-              <a:t>, </a:t>
-            </a:r>
-            <a:r>
-              <a:rPr sz="1400" dirty="0" err="1"/>
-              <a:t>ButtonForm</a:t>
-            </a:r>
-            <a:r>
-              <a:rPr sz="1400" dirty="0"/>
-              <a:t>, Pagination. В components — </a:t>
-            </a:r>
-            <a:r>
-              <a:rPr sz="1400" dirty="0" err="1"/>
-              <a:t>составные</a:t>
-            </a:r>
-            <a:r>
-              <a:rPr sz="1400" dirty="0"/>
-              <a:t> </a:t>
-            </a:r>
-            <a:r>
-              <a:rPr sz="1400" dirty="0" err="1"/>
-              <a:t>блоки</a:t>
-            </a:r>
-            <a:r>
-              <a:rPr sz="1400" dirty="0"/>
-              <a:t>: Header, </a:t>
-            </a:r>
-            <a:r>
-              <a:rPr sz="1400" dirty="0" err="1"/>
-              <a:t>FormRecording</a:t>
-            </a:r>
-            <a:r>
-              <a:rPr sz="1400" dirty="0"/>
-              <a:t>, </a:t>
-            </a:r>
-            <a:r>
-              <a:rPr sz="1400" dirty="0" err="1"/>
-              <a:t>CartProfileDoctor</a:t>
-            </a:r>
-            <a:r>
-              <a:rPr sz="1400" dirty="0"/>
-              <a:t>. В pages — </a:t>
-            </a:r>
-            <a:r>
-              <a:rPr sz="1400" dirty="0" err="1"/>
-              <a:t>классы</a:t>
-            </a:r>
-            <a:r>
-              <a:rPr sz="1400" dirty="0"/>
-              <a:t> </a:t>
-            </a:r>
-            <a:r>
-              <a:rPr sz="1400" dirty="0" err="1"/>
-              <a:t>страниц</a:t>
-            </a:r>
-            <a:r>
-              <a:rPr sz="1400" dirty="0"/>
-              <a:t>, </a:t>
-            </a:r>
-            <a:r>
-              <a:rPr sz="1400" dirty="0" err="1"/>
-              <a:t>наследующие</a:t>
-            </a:r>
-            <a:r>
-              <a:rPr sz="1400" dirty="0"/>
-              <a:t> </a:t>
-            </a:r>
-            <a:r>
-              <a:rPr sz="1400" dirty="0" err="1"/>
-              <a:t>BasePage</a:t>
-            </a:r>
-            <a:r>
-              <a:rPr sz="1400" dirty="0"/>
-              <a:t>. В tests — 16 </a:t>
-            </a:r>
-            <a:r>
-              <a:rPr sz="1400" dirty="0" err="1"/>
-              <a:t>тест-файлов</a:t>
-            </a:r>
-            <a:r>
-              <a:rPr sz="1400" dirty="0"/>
-              <a:t>.</a:t>
-            </a:r>
-          </a:p>
-          <a:p>
-            <a:endParaRPr sz="1400" dirty="0"/>
-          </a:p>
-          <a:p>
-            <a:r>
-              <a:rPr sz="1400" dirty="0" err="1"/>
-              <a:t>Заголовок</a:t>
-            </a:r>
-            <a:r>
-              <a:rPr sz="1400" dirty="0"/>
-              <a:t> «</a:t>
-            </a:r>
-            <a:r>
-              <a:rPr sz="1400" dirty="0" err="1"/>
-              <a:t>Назначение</a:t>
-            </a:r>
-            <a:r>
-              <a:rPr sz="1400" dirty="0"/>
-              <a:t> </a:t>
-            </a:r>
-            <a:r>
-              <a:rPr sz="1400" dirty="0" err="1"/>
-              <a:t>модулей</a:t>
-            </a:r>
-            <a:r>
-              <a:rPr sz="1400" dirty="0"/>
-              <a:t>» </a:t>
-            </a:r>
-            <a:r>
-              <a:rPr sz="1400" dirty="0" err="1"/>
-              <a:t>справа</a:t>
-            </a:r>
-            <a:r>
-              <a:rPr sz="1400" dirty="0"/>
-              <a:t> </a:t>
-            </a:r>
-            <a:r>
-              <a:rPr sz="1400" dirty="0" err="1"/>
-              <a:t>описывает</a:t>
-            </a:r>
-            <a:r>
-              <a:rPr sz="1400" dirty="0"/>
-              <a:t> </a:t>
-            </a:r>
-            <a:r>
-              <a:rPr sz="1400" dirty="0" err="1"/>
-              <a:t>роль</a:t>
-            </a:r>
-            <a:r>
-              <a:rPr sz="1400" dirty="0"/>
-              <a:t> </a:t>
-            </a:r>
-            <a:r>
-              <a:rPr sz="1400" dirty="0" err="1"/>
-              <a:t>каждого</a:t>
-            </a:r>
-            <a:r>
-              <a:rPr sz="1400" dirty="0"/>
-              <a:t> </a:t>
-            </a:r>
-            <a:r>
-              <a:rPr sz="1400" dirty="0" err="1"/>
-              <a:t>уровня</a:t>
-            </a:r>
-            <a:r>
-              <a:rPr sz="1400" dirty="0"/>
-              <a:t>. </a:t>
-            </a:r>
-            <a:r>
-              <a:rPr sz="1400" dirty="0" err="1"/>
-              <a:t>Особо</a:t>
-            </a:r>
-            <a:r>
-              <a:rPr sz="1400" dirty="0"/>
-              <a:t> </a:t>
-            </a:r>
-            <a:r>
-              <a:rPr sz="1400" dirty="0" err="1"/>
-              <a:t>хочу</a:t>
-            </a:r>
-            <a:r>
-              <a:rPr sz="1400" dirty="0"/>
-              <a:t> </a:t>
-            </a:r>
-            <a:r>
-              <a:rPr sz="1400" dirty="0" err="1"/>
-              <a:t>отметить</a:t>
-            </a:r>
-            <a:r>
-              <a:rPr sz="1400" dirty="0"/>
-              <a:t> conftest.py — </a:t>
-            </a:r>
-            <a:r>
-              <a:rPr sz="1400" dirty="0" err="1"/>
-              <a:t>он</a:t>
-            </a:r>
-            <a:r>
-              <a:rPr sz="1400" dirty="0"/>
-              <a:t> </a:t>
-            </a:r>
-            <a:r>
-              <a:rPr sz="1400" dirty="0" err="1"/>
-              <a:t>автоматически</a:t>
-            </a:r>
-            <a:r>
-              <a:rPr sz="1400" dirty="0"/>
-              <a:t> </a:t>
-            </a:r>
-            <a:r>
-              <a:rPr sz="1400" dirty="0" err="1"/>
-              <a:t>закрывает</a:t>
-            </a:r>
-            <a:r>
-              <a:rPr sz="1400" dirty="0"/>
-              <a:t> cookie-</a:t>
-            </a:r>
-            <a:r>
-              <a:rPr sz="1400" dirty="0" err="1"/>
-              <a:t>баннер</a:t>
-            </a:r>
-            <a:r>
-              <a:rPr sz="1400" dirty="0"/>
-              <a:t> </a:t>
-            </a:r>
-            <a:r>
-              <a:rPr sz="1400" dirty="0" err="1"/>
-              <a:t>при</a:t>
-            </a:r>
-            <a:r>
-              <a:rPr sz="1400" dirty="0"/>
-              <a:t> </a:t>
-            </a:r>
-            <a:r>
-              <a:rPr sz="1400" dirty="0" err="1"/>
-              <a:t>каждой</a:t>
-            </a:r>
-            <a:r>
-              <a:rPr sz="1400" dirty="0"/>
-              <a:t> </a:t>
-            </a:r>
-            <a:r>
-              <a:rPr sz="1400" dirty="0" err="1"/>
-              <a:t>навигации</a:t>
-            </a:r>
-            <a:r>
-              <a:rPr sz="1400" dirty="0"/>
-              <a:t>.</a:t>
+              <a:rPr sz="1400"/>
+              <a:t>На слайде — 4 ключевых итога работы.</a:t>
+            </a:r>
+          </a:p>
+          <a:p>
+            <a:endParaRPr sz="1400"/>
+          </a:p>
+          <a:p>
+            <a:r>
+              <a:rPr sz="1400"/>
+              <a:t>16 тест-кейсов разработано, 16 автотестов реализовано, 4 уровня POM архитектуры, и главное — выявлено 4 бага в продакшн-сайте.</a:t>
+            </a:r>
+          </a:p>
+          <a:p>
+            <a:endParaRPr sz="1400"/>
+          </a:p>
+          <a:p>
+            <a:r>
+              <a:rPr sz="1400"/>
+              <a:t>Буллеты детализируют: архитектура четырёх уровней, покрытие всех сценариев, форма записи проверена в 4 вариантах данных, найденные баги конкретны и воспроизводимы.</a:t>
             </a:r>
           </a:p>
         </p:txBody>
@@ -894,95 +884,6 @@
           <a:p>
             <a:r>
               <a:rPr sz="1400"/>
-              <a:t>На слайде — 4 ключевых итога работы.</a:t>
-            </a:r>
-          </a:p>
-          <a:p>
-            <a:endParaRPr sz="1400"/>
-          </a:p>
-          <a:p>
-            <a:r>
-              <a:rPr sz="1400"/>
-              <a:t>16 тест-кейсов разработано, 16 автотестов реализовано, 4 уровня POM архитектуры, и главное — выявлено 4 бага в продакшн-сайте.</a:t>
-            </a:r>
-          </a:p>
-          <a:p>
-            <a:endParaRPr sz="1400"/>
-          </a:p>
-          <a:p>
-            <a:r>
-              <a:rPr sz="1400"/>
-              <a:t>Буллеты детализируют: архитектура четырёх уровней, покрытие всех сценариев, форма записи проверена в 4 вариантах данных, найденные баги конкретны и воспроизводимы.</a:t>
-            </a:r>
-          </a:p>
-        </p:txBody>
-      </p:sp>
-      <p:sp>
-        <p:nvSpPr>
-          <p:cNvPr id="4" name="Slide Number Placeholder 3"/>
-          <p:cNvSpPr>
-            <a:spLocks noGrp="1"/>
-          </p:cNvSpPr>
-          <p:nvPr>
-            <p:ph type="sldNum" sz="quarter" idx="5"/>
-          </p:nvPr>
-        </p:nvSpPr>
-        <p:spPr/>
-      </p:sp>
-    </p:spTree>
-  </p:cSld>
-  <p:clrMapOvr>
-    <a:masterClrMapping/>
-  </p:clrMapOvr>
-</p:notes>
-</file>
-
-<file path=ppt/notesSlides/notesSlide13.xml><?xml version="1.0" encoding="utf-8"?>
-<p:notes xmlns:a="http://schemas.openxmlformats.org/drawingml/2006/main" xmlns:r="http://schemas.openxmlformats.org/officeDocument/2006/relationships" xmlns:p="http://schemas.openxmlformats.org/presentationml/2006/main">
-  <p:cSld>
-    <p:spTree>
-      <p:nvGrpSpPr>
-        <p:cNvPr id="1" name=""/>
-        <p:cNvGrpSpPr/>
-        <p:nvPr/>
-      </p:nvGrpSpPr>
-      <p:grpSpPr>
-        <a:xfrm>
-          <a:off x="0" y="0"/>
-          <a:ext cx="0" cy="0"/>
-          <a:chOff x="0" y="0"/>
-          <a:chExt cx="0" cy="0"/>
-        </a:xfrm>
-      </p:grpSpPr>
-      <p:sp>
-        <p:nvSpPr>
-          <p:cNvPr id="2" name="Slide Image Placeholder 1"/>
-          <p:cNvSpPr>
-            <a:spLocks noGrp="1" noRot="1" noChangeAspect="1"/>
-          </p:cNvSpPr>
-          <p:nvPr>
-            <p:ph type="sldImg" idx="2"/>
-          </p:nvPr>
-        </p:nvSpPr>
-        <p:spPr/>
-      </p:sp>
-      <p:sp>
-        <p:nvSpPr>
-          <p:cNvPr id="3" name="Notes Placeholder 2"/>
-          <p:cNvSpPr>
-            <a:spLocks noGrp="1"/>
-          </p:cNvSpPr>
-          <p:nvPr>
-            <p:ph type="body" sz="quarter" idx="3"/>
-          </p:nvPr>
-        </p:nvSpPr>
-        <p:spPr/>
-        <p:txBody>
-          <a:bodyPr/>
-          <a:lstStyle/>
-          <a:p>
-            <a:r>
-              <a:rPr sz="1400"/>
               <a:t>В заключение.</a:t>
             </a:r>
           </a:p>
@@ -1906,7 +1807,7 @@
           <a:p>
             <a:r>
               <a:rPr sz="1400"/>
-              <a:t>Почему Playwright, а не Selenium?</a:t>
+              <a:t>Для организации кода выбран паттерн Page Object Model — POM.</a:t>
             </a:r>
           </a:p>
           <a:p>
@@ -1915,7 +1816,7 @@
           <a:p>
             <a:r>
               <a:rPr sz="1400"/>
-              <a:t>Я выбрала Playwright по трём ключевым причинам. Первая — auto-wait: библиотека сама ждёт элементы на странице, без явных sleep() и WebDriverWait. Вторая — встроенные браузеры: не нужно отдельно устанавливать ChromeDriver, всё идёт в одном пакете. Третья — современный API от Microsoft: чистый синтаксис, хорошая документация.</a:t>
+              <a:t>Архитектура состоит из четырёх уровней. Снизу вверх: Controls — атомарные элементы интерфейса: поля, кнопки, чекбоксы. Components — составные блоки: шапка, форма, карточка врача. Pages — страницы сайта с методами навигации. Tests — только тест-сценарии, без прямых локаторов.</a:t>
             </a:r>
           </a:p>
           <a:p>
@@ -1924,7 +1825,7 @@
           <a:p>
             <a:r>
               <a:rPr sz="1400"/>
-              <a:t>Результат: все 16 автотестов работают стабильно без лишних настроек.</a:t>
+              <a:t>Такая структура обеспечивает независимость тестов от вёрстки: при изменении локатора достаточно поправить один файл в Controls.</a:t>
             </a:r>
           </a:p>
         </p:txBody>
@@ -1995,7 +1896,7 @@
           <a:p>
             <a:r>
               <a:rPr sz="1400"/>
-              <a:t>Для организации кода выбран паттерн Page Object Model — POM.</a:t>
+              <a:t>В рамках работы разработано 16 тест-кейсов по 8 модулям сайта.</a:t>
             </a:r>
           </a:p>
           <a:p>
@@ -2004,7 +1905,7 @@
           <a:p>
             <a:r>
               <a:rPr sz="1400"/>
-              <a:t>Архитектура состоит из четырёх уровней. Снизу вверх: Controls — атомарные элементы интерфейса: поля, кнопки, чекбоксы. Components — составные блоки: шапка, форма, карточка врача. Pages — страницы сайта с методами навигации. Tests — только тест-сценарии, без прямых локаторов.</a:t>
+              <a:t>Ключевая особенность таблицы — колонка «Итог»: зелёным отмечены пройденные тесты, красным — те, которые выявили баги. Таких оказалось 4: TC-05 (пагинация), TC-12 (Prodoctorov), TC-14, TC-15 и TC-16 (форма записи).</a:t>
             </a:r>
           </a:p>
           <a:p>
@@ -2013,7 +1914,7 @@
           <a:p>
             <a:r>
               <a:rPr sz="1400"/>
-              <a:t>Такая структура обеспечивает независимость тестов от вёрстки: при изменении локатора достаточно поправить один файл в Controls.</a:t>
+              <a:t>Это реальные находки, которые подтверждают ценность автоматизированного тестирования.</a:t>
             </a:r>
           </a:p>
         </p:txBody>
@@ -2084,7 +1985,7 @@
           <a:p>
             <a:r>
               <a:rPr sz="1400"/>
-              <a:t>В рамках работы разработано 16 тест-кейсов по 8 модулям сайта.</a:t>
+              <a:t>Все тесты интегрированы с системой отчётности Allure.</a:t>
             </a:r>
           </a:p>
           <a:p>
@@ -2093,7 +1994,7 @@
           <a:p>
             <a:r>
               <a:rPr sz="1400"/>
-              <a:t>Ключевая особенность таблицы — колонка «Итог»: зелёным отмечены пройденные тесты, красным — те, которые выявили баги. Таких оказалось 4: TC-05 (пагинация), TC-12 (Prodoctorov), TC-14, TC-15 и TC-16 (форма записи).</a:t>
+              <a:t>Allure предоставляет дашборд с общей статистикой, детали каждого теста с шагами, историю прогонов и группировку по Suite и Feature.</a:t>
             </a:r>
           </a:p>
           <a:p>
@@ -2102,7 +2003,16 @@
           <a:p>
             <a:r>
               <a:rPr sz="1400"/>
-              <a:t>Это реальные находки, которые подтверждают ценность автоматизированного тестирования.</a:t>
+              <a:t>Запуск прост: команда pytest с флагом --alluredir сохраняет результаты, а allure serve генерирует интерактивный HTML-отчёт.</a:t>
+            </a:r>
+          </a:p>
+          <a:p>
+            <a:endParaRPr sz="1400"/>
+          </a:p>
+          <a:p>
+            <a:r>
+              <a:rPr sz="1400"/>
+              <a:t>В тестах используются три декоратора: @allure.title для заголовка, @allure.description для описания и with allure.step для документирования каждого шага.</a:t>
             </a:r>
           </a:p>
         </p:txBody>
@@ -5808,7 +5718,13 @@
       </p:grpSpPr>
       <p:sp>
         <p:nvSpPr>
-          <p:cNvPr id="2" name="Rectangle 1"/>
+          <p:cNvPr id="2" name="Rectangle 1">
+            <a:extLst>
+              <a:ext uri="{FF2B5EF4-FFF2-40B4-BE49-F238E27FC236}">
+                <a16:creationId xmlns:a16="http://schemas.microsoft.com/office/drawing/2014/main" id="{E8D28C5F-0777-277D-8971-906E1586A893}"/>
+              </a:ext>
+            </a:extLst>
+          </p:cNvPr>
           <p:cNvSpPr/>
           <p:nvPr/>
         </p:nvSpPr>
@@ -5851,14 +5767,20 @@
       </p:sp>
       <p:sp>
         <p:nvSpPr>
-          <p:cNvPr id="3" name="Rectangle 2"/>
+          <p:cNvPr id="3" name="Rectangle 2">
+            <a:extLst>
+              <a:ext uri="{FF2B5EF4-FFF2-40B4-BE49-F238E27FC236}">
+                <a16:creationId xmlns:a16="http://schemas.microsoft.com/office/drawing/2014/main" id="{28AE7A5A-4428-00E2-C2A6-5553DB4A7069}"/>
+              </a:ext>
+            </a:extLst>
+          </p:cNvPr>
           <p:cNvSpPr/>
           <p:nvPr/>
         </p:nvSpPr>
         <p:spPr>
           <a:xfrm>
-            <a:off x="-647" y="-9523"/>
-            <a:ext cx="8166785" cy="932968"/>
+            <a:off x="-9006" y="-9523"/>
+            <a:ext cx="8175144" cy="932968"/>
           </a:xfrm>
           <a:prstGeom prst="rect">
             <a:avLst/>
@@ -5895,7 +5817,13 @@
       </p:sp>
       <p:sp>
         <p:nvSpPr>
-          <p:cNvPr id="4" name="TextBox 3"/>
+          <p:cNvPr id="4" name="TextBox 3">
+            <a:extLst>
+              <a:ext uri="{FF2B5EF4-FFF2-40B4-BE49-F238E27FC236}">
+                <a16:creationId xmlns:a16="http://schemas.microsoft.com/office/drawing/2014/main" id="{B75B45CD-9325-07A8-E385-4CFF5A088D7A}"/>
+              </a:ext>
+            </a:extLst>
+          </p:cNvPr>
           <p:cNvSpPr txBox="1"/>
           <p:nvPr/>
         </p:nvSpPr>
@@ -5969,14 +5897,20 @@
       </p:sp>
       <p:sp>
         <p:nvSpPr>
-          <p:cNvPr id="5" name="Rectangle 4"/>
+          <p:cNvPr id="5" name="Rectangle 4">
+            <a:extLst>
+              <a:ext uri="{FF2B5EF4-FFF2-40B4-BE49-F238E27FC236}">
+                <a16:creationId xmlns:a16="http://schemas.microsoft.com/office/drawing/2014/main" id="{2DFDA096-24DB-19F3-8875-B202B69F869B}"/>
+              </a:ext>
+            </a:extLst>
+          </p:cNvPr>
           <p:cNvSpPr/>
           <p:nvPr/>
         </p:nvSpPr>
         <p:spPr>
           <a:xfrm>
-            <a:off x="-649" y="911109"/>
-            <a:ext cx="8166785" cy="45719"/>
+            <a:off x="-9007" y="911109"/>
+            <a:ext cx="8175143" cy="45719"/>
           </a:xfrm>
           <a:prstGeom prst="rect">
             <a:avLst/>
@@ -6013,14 +5947,20 @@
       </p:sp>
       <p:sp>
         <p:nvSpPr>
-          <p:cNvPr id="6" name="Rectangle 5"/>
+          <p:cNvPr id="6" name="Rectangle 5">
+            <a:extLst>
+              <a:ext uri="{FF2B5EF4-FFF2-40B4-BE49-F238E27FC236}">
+                <a16:creationId xmlns:a16="http://schemas.microsoft.com/office/drawing/2014/main" id="{A8AFF3D7-7B49-C2A8-B6C9-6EA9773CF34D}"/>
+              </a:ext>
+            </a:extLst>
+          </p:cNvPr>
           <p:cNvSpPr/>
           <p:nvPr/>
         </p:nvSpPr>
         <p:spPr>
           <a:xfrm>
-            <a:off x="-3518" y="5877936"/>
-            <a:ext cx="8166785" cy="241877"/>
+            <a:off x="-1866" y="5877936"/>
+            <a:ext cx="8175143" cy="241877"/>
           </a:xfrm>
           <a:prstGeom prst="rect">
             <a:avLst/>
@@ -6057,59 +5997,26 @@
       </p:sp>
       <p:sp>
         <p:nvSpPr>
-          <p:cNvPr id="8" name="TextBox 7"/>
-          <p:cNvSpPr txBox="1"/>
-          <p:nvPr/>
-        </p:nvSpPr>
-        <p:spPr>
-          <a:xfrm>
-            <a:off x="7646038" y="5820074"/>
-            <a:ext cx="513712" cy="338554"/>
-          </a:xfrm>
-          <a:prstGeom prst="rect">
-            <a:avLst/>
-          </a:prstGeom>
-          <a:noFill/>
-        </p:spPr>
-        <p:txBody>
-          <a:bodyPr wrap="square">
-            <a:spAutoFit/>
-          </a:bodyPr>
-          <a:lstStyle/>
-          <a:p>
-            <a:pPr algn="r"/>
-            <a:r>
-              <a:rPr lang="ru-RU" sz="1600" dirty="0">
-                <a:solidFill>
-                  <a:srgbClr val="009BD8"/>
-                </a:solidFill>
-              </a:rPr>
-              <a:t>10</a:t>
-            </a:r>
-            <a:endParaRPr sz="1600" dirty="0">
-              <a:solidFill>
-                <a:srgbClr val="009BD8"/>
-              </a:solidFill>
-            </a:endParaRPr>
-          </a:p>
-        </p:txBody>
-      </p:sp>
-      <p:sp>
-        <p:nvSpPr>
-          <p:cNvPr id="10" name="Rectangle 9"/>
+          <p:cNvPr id="12" name="Rectangle 15">
+            <a:extLst>
+              <a:ext uri="{FF2B5EF4-FFF2-40B4-BE49-F238E27FC236}">
+                <a16:creationId xmlns:a16="http://schemas.microsoft.com/office/drawing/2014/main" id="{B9AF0D3E-06F3-8E8B-EB17-A902D0024294}"/>
+              </a:ext>
+            </a:extLst>
+          </p:cNvPr>
           <p:cNvSpPr/>
           <p:nvPr/>
         </p:nvSpPr>
         <p:spPr>
           <a:xfrm>
-            <a:off x="0" y="982606"/>
-            <a:ext cx="8166138" cy="794752"/>
+            <a:off x="-9007" y="973235"/>
+            <a:ext cx="8190536" cy="792278"/>
           </a:xfrm>
           <a:prstGeom prst="rect">
             <a:avLst/>
           </a:prstGeom>
           <a:solidFill>
-            <a:srgbClr val="4A2377"/>
+            <a:srgbClr val="0D2B55"/>
           </a:solidFill>
           <a:ln>
             <a:noFill/>
@@ -6140,13 +6047,19 @@
       </p:sp>
       <p:sp>
         <p:nvSpPr>
-          <p:cNvPr id="11" name="TextBox 10"/>
+          <p:cNvPr id="13" name="TextBox 12">
+            <a:extLst>
+              <a:ext uri="{FF2B5EF4-FFF2-40B4-BE49-F238E27FC236}">
+                <a16:creationId xmlns:a16="http://schemas.microsoft.com/office/drawing/2014/main" id="{5C182233-0926-150E-4F5E-D12B132BC2CF}"/>
+              </a:ext>
+            </a:extLst>
+          </p:cNvPr>
           <p:cNvSpPr txBox="1"/>
           <p:nvPr/>
         </p:nvSpPr>
         <p:spPr>
           <a:xfrm>
-            <a:off x="45282" y="1078245"/>
+            <a:off x="130629" y="1030480"/>
             <a:ext cx="1382175" cy="584775"/>
           </a:xfrm>
           <a:prstGeom prst="rect">
@@ -6167,21 +6080,27 @@
                   <a:srgbClr val="FFFFFF"/>
                 </a:solidFill>
               </a:rPr>
-              <a:t>TESTS</a:t>
-            </a:r>
-          </a:p>
-        </p:txBody>
-      </p:sp>
-      <p:sp>
-        <p:nvSpPr>
-          <p:cNvPr id="12" name="TextBox 11"/>
+              <a:t>PAGES</a:t>
+            </a:r>
+          </a:p>
+        </p:txBody>
+      </p:sp>
+      <p:sp>
+        <p:nvSpPr>
+          <p:cNvPr id="14" name="TextBox 13">
+            <a:extLst>
+              <a:ext uri="{FF2B5EF4-FFF2-40B4-BE49-F238E27FC236}">
+                <a16:creationId xmlns:a16="http://schemas.microsoft.com/office/drawing/2014/main" id="{0BC5B5DB-2779-E460-16A9-110EB768FB03}"/>
+              </a:ext>
+            </a:extLst>
+          </p:cNvPr>
           <p:cNvSpPr txBox="1"/>
           <p:nvPr/>
         </p:nvSpPr>
         <p:spPr>
           <a:xfrm>
-            <a:off x="1427457" y="1078668"/>
-            <a:ext cx="3800984" cy="523220"/>
+            <a:off x="1521057" y="1043238"/>
+            <a:ext cx="2956717" cy="523220"/>
           </a:xfrm>
           <a:prstGeom prst="rect">
             <a:avLst/>
@@ -6201,10 +6120,10 @@
                   <a:srgbClr val="AACCFF"/>
                 </a:solidFill>
               </a:rPr>
-              <a:t>Тест-файлы</a:t>
-            </a:r>
-            <a:r>
-              <a:rPr lang="ru-RU" sz="2800" dirty="0">
+              <a:t>Страницы</a:t>
+            </a:r>
+            <a:r>
+              <a:rPr sz="2800" dirty="0">
                 <a:solidFill>
                   <a:srgbClr val="AACCFF"/>
                 </a:solidFill>
@@ -6212,60 +6131,37 @@
               <a:t> </a:t>
             </a:r>
             <a:r>
-              <a:rPr sz="2800" dirty="0">
+              <a:rPr sz="2800" dirty="0" err="1">
                 <a:solidFill>
                   <a:srgbClr val="AACCFF"/>
                 </a:solidFill>
               </a:rPr>
-              <a:t>test_*.py</a:t>
-            </a:r>
-          </a:p>
-        </p:txBody>
-      </p:sp>
-      <p:sp>
-        <p:nvSpPr>
-          <p:cNvPr id="13" name="TextBox 12"/>
-          <p:cNvSpPr txBox="1"/>
-          <p:nvPr/>
-        </p:nvSpPr>
-        <p:spPr>
-          <a:xfrm>
-            <a:off x="7782574" y="1229911"/>
-            <a:ext cx="276435" cy="279062"/>
-          </a:xfrm>
-          <a:prstGeom prst="rect">
-            <a:avLst/>
-          </a:prstGeom>
-          <a:noFill/>
-        </p:spPr>
-        <p:txBody>
-          <a:bodyPr wrap="square">
-            <a:spAutoFit/>
-          </a:bodyPr>
-          <a:lstStyle/>
-          <a:p>
-            <a:pPr algn="ctr"/>
-            <a:r>
-              <a:rPr sz="1209" dirty="0">
-                <a:solidFill>
-                  <a:srgbClr val="009BD8"/>
-                </a:solidFill>
-              </a:rPr>
-              <a:t>▼</a:t>
-            </a:r>
-          </a:p>
-        </p:txBody>
-      </p:sp>
-      <p:sp>
-        <p:nvSpPr>
-          <p:cNvPr id="14" name="Rectangle 13"/>
+              <a:t>сайта</a:t>
+            </a:r>
+            <a:endParaRPr sz="2800" dirty="0">
+              <a:solidFill>
+                <a:srgbClr val="AACCFF"/>
+              </a:solidFill>
+            </a:endParaRPr>
+          </a:p>
+        </p:txBody>
+      </p:sp>
+      <p:sp>
+        <p:nvSpPr>
+          <p:cNvPr id="15" name="Rectangle 19">
+            <a:extLst>
+              <a:ext uri="{FF2B5EF4-FFF2-40B4-BE49-F238E27FC236}">
+                <a16:creationId xmlns:a16="http://schemas.microsoft.com/office/drawing/2014/main" id="{46A59DD4-2940-F3FE-88AB-0D0D8D4FB182}"/>
+              </a:ext>
+            </a:extLst>
+          </p:cNvPr>
           <p:cNvSpPr/>
           <p:nvPr/>
         </p:nvSpPr>
         <p:spPr>
           <a:xfrm>
-            <a:off x="-649" y="1836051"/>
-            <a:ext cx="8166785" cy="794751"/>
+            <a:off x="-11827" y="1792686"/>
+            <a:ext cx="8168002" cy="580417"/>
           </a:xfrm>
           <a:prstGeom prst="rect">
             <a:avLst/>
@@ -6302,14 +6198,20 @@
       </p:sp>
       <p:sp>
         <p:nvSpPr>
-          <p:cNvPr id="15" name="TextBox 14"/>
+          <p:cNvPr id="16" name="TextBox 15">
+            <a:extLst>
+              <a:ext uri="{FF2B5EF4-FFF2-40B4-BE49-F238E27FC236}">
+                <a16:creationId xmlns:a16="http://schemas.microsoft.com/office/drawing/2014/main" id="{4EA49D90-0E32-35C3-3EE8-2E798158D859}"/>
+              </a:ext>
+            </a:extLst>
+          </p:cNvPr>
           <p:cNvSpPr txBox="1"/>
           <p:nvPr/>
         </p:nvSpPr>
         <p:spPr>
           <a:xfrm>
-            <a:off x="6388" y="1926427"/>
-            <a:ext cx="8146976" cy="523220"/>
+            <a:off x="6387" y="1806821"/>
+            <a:ext cx="7985267" cy="461665"/>
           </a:xfrm>
           <a:prstGeom prst="rect">
             <a:avLst/>
@@ -6324,86 +6226,38 @@
           <a:p>
             <a:pPr algn="l"/>
             <a:r>
-              <a:rPr sz="2800" dirty="0" err="1">
+              <a:rPr lang="ru-RU" sz="2400" dirty="0">
                 <a:solidFill>
                   <a:srgbClr val="444455"/>
                 </a:solidFill>
               </a:rPr>
-              <a:t>Только</a:t>
-            </a:r>
-            <a:r>
-              <a:rPr sz="2800" dirty="0">
+              <a:t>Каждая страница отдельный класс: </a:t>
+            </a:r>
+            <a:r>
+              <a:rPr lang="en-US" sz="2400" dirty="0" err="1">
                 <a:solidFill>
                   <a:srgbClr val="444455"/>
                 </a:solidFill>
               </a:rPr>
-              <a:t> </a:t>
-            </a:r>
-            <a:r>
-              <a:rPr lang="ru-RU" sz="2800" dirty="0">
+              <a:t>MainPage</a:t>
+            </a:r>
+            <a:r>
+              <a:rPr lang="en-US" sz="2400" dirty="0">
                 <a:solidFill>
                   <a:srgbClr val="444455"/>
                 </a:solidFill>
               </a:rPr>
-              <a:t>действия</a:t>
-            </a:r>
-            <a:r>
-              <a:rPr sz="2800" dirty="0">
+              <a:t>, </a:t>
+            </a:r>
+            <a:r>
+              <a:rPr lang="en-US" sz="2400" dirty="0" err="1">
                 <a:solidFill>
                   <a:srgbClr val="444455"/>
                 </a:solidFill>
               </a:rPr>
-              <a:t>: </a:t>
-            </a:r>
-            <a:r>
-              <a:rPr sz="2800" dirty="0" err="1">
-                <a:solidFill>
-                  <a:srgbClr val="444455"/>
-                </a:solidFill>
-              </a:rPr>
-              <a:t>открыть</a:t>
-            </a:r>
-            <a:r>
-              <a:rPr sz="2800" dirty="0">
-                <a:solidFill>
-                  <a:srgbClr val="444455"/>
-                </a:solidFill>
-              </a:rPr>
-              <a:t> → </a:t>
-            </a:r>
-            <a:r>
-              <a:rPr sz="2800" dirty="0" err="1">
-                <a:solidFill>
-                  <a:srgbClr val="444455"/>
-                </a:solidFill>
-              </a:rPr>
-              <a:t>кликнуть</a:t>
-            </a:r>
-            <a:r>
-              <a:rPr sz="2800" dirty="0">
-                <a:solidFill>
-                  <a:srgbClr val="444455"/>
-                </a:solidFill>
-              </a:rPr>
-              <a:t> → </a:t>
-            </a:r>
-            <a:r>
-              <a:rPr sz="2800" dirty="0" err="1">
-                <a:solidFill>
-                  <a:srgbClr val="444455"/>
-                </a:solidFill>
-              </a:rPr>
-              <a:t>проверить</a:t>
-            </a:r>
-            <a:r>
-              <a:rPr lang="ru-RU" sz="2800" dirty="0">
-                <a:solidFill>
-                  <a:srgbClr val="444455"/>
-                </a:solidFill>
-              </a:rPr>
-              <a:t>. </a:t>
-            </a:r>
-            <a:endParaRPr sz="2800" dirty="0">
+              <a:t>PageNevrolog</a:t>
+            </a:r>
+            <a:endParaRPr sz="2400" dirty="0">
               <a:solidFill>
                 <a:srgbClr val="444455"/>
               </a:solidFill>
@@ -6413,10 +6267,60 @@
       </p:sp>
       <p:sp>
         <p:nvSpPr>
-          <p:cNvPr id="34" name="TextBox 33">
+          <p:cNvPr id="17" name="Rectangle 19">
             <a:extLst>
               <a:ext uri="{FF2B5EF4-FFF2-40B4-BE49-F238E27FC236}">
-                <a16:creationId xmlns:a16="http://schemas.microsoft.com/office/drawing/2014/main" id="{25A24F72-9E6D-0745-1909-03E5440FCA5B}"/>
+                <a16:creationId xmlns:a16="http://schemas.microsoft.com/office/drawing/2014/main" id="{625B18AD-2C90-CBDA-2AFA-9BC9118C8F29}"/>
+              </a:ext>
+            </a:extLst>
+          </p:cNvPr>
+          <p:cNvSpPr/>
+          <p:nvPr/>
+        </p:nvSpPr>
+        <p:spPr>
+          <a:xfrm>
+            <a:off x="-11827" y="2406941"/>
+            <a:ext cx="8193356" cy="794751"/>
+          </a:xfrm>
+          <a:prstGeom prst="rect">
+            <a:avLst/>
+          </a:prstGeom>
+          <a:solidFill>
+            <a:srgbClr val="FFFFFF"/>
+          </a:solidFill>
+          <a:ln>
+            <a:noFill/>
+          </a:ln>
+        </p:spPr>
+        <p:style>
+          <a:lnRef idx="1">
+            <a:schemeClr val="accent1"/>
+          </a:lnRef>
+          <a:fillRef idx="3">
+            <a:schemeClr val="accent1"/>
+          </a:fillRef>
+          <a:effectRef idx="2">
+            <a:schemeClr val="accent1"/>
+          </a:effectRef>
+          <a:fontRef idx="minor">
+            <a:schemeClr val="lt1"/>
+          </a:fontRef>
+        </p:style>
+        <p:txBody>
+          <a:bodyPr rtlCol="0" anchor="ctr"/>
+          <a:lstStyle/>
+          <a:p>
+            <a:pPr algn="ctr"/>
+            <a:endParaRPr sz="1360"/>
+          </a:p>
+        </p:txBody>
+      </p:sp>
+      <p:sp>
+        <p:nvSpPr>
+          <p:cNvPr id="18" name="TextBox 17">
+            <a:extLst>
+              <a:ext uri="{FF2B5EF4-FFF2-40B4-BE49-F238E27FC236}">
+                <a16:creationId xmlns:a16="http://schemas.microsoft.com/office/drawing/2014/main" id="{D6633FE6-7836-222A-D1C9-F331E6B7FE60}"/>
               </a:ext>
             </a:extLst>
           </p:cNvPr>
@@ -6425,8 +6329,8 @@
         </p:nvSpPr>
         <p:spPr>
           <a:xfrm>
-            <a:off x="5335568" y="2883783"/>
-            <a:ext cx="2817795" cy="2554545"/>
+            <a:off x="0" y="2360112"/>
+            <a:ext cx="7863864" cy="830997"/>
           </a:xfrm>
           <a:prstGeom prst="rect">
             <a:avLst/>
@@ -6441,14 +6345,86 @@
           <a:p>
             <a:pPr algn="l"/>
             <a:r>
-              <a:rPr lang="ru-RU" sz="3200" dirty="0">
+              <a:rPr sz="2400" dirty="0" err="1">
                 <a:solidFill>
                   <a:srgbClr val="444455"/>
                 </a:solidFill>
               </a:rPr>
-              <a:t>Нет деталей реализации. Тест вызывает только готовые методы .</a:t>
-            </a:r>
-            <a:endParaRPr sz="3200" dirty="0">
+              <a:t>Методы</a:t>
+            </a:r>
+            <a:r>
+              <a:rPr sz="2400" dirty="0">
+                <a:solidFill>
+                  <a:srgbClr val="444455"/>
+                </a:solidFill>
+              </a:rPr>
+              <a:t> </a:t>
+            </a:r>
+            <a:r>
+              <a:rPr sz="2400" dirty="0" err="1">
+                <a:solidFill>
+                  <a:srgbClr val="444455"/>
+                </a:solidFill>
+              </a:rPr>
+              <a:t>уровня</a:t>
+            </a:r>
+            <a:r>
+              <a:rPr sz="2400" dirty="0">
+                <a:solidFill>
+                  <a:srgbClr val="444455"/>
+                </a:solidFill>
+              </a:rPr>
+              <a:t> </a:t>
+            </a:r>
+            <a:r>
+              <a:rPr sz="2400" dirty="0" err="1">
+                <a:solidFill>
+                  <a:srgbClr val="444455"/>
+                </a:solidFill>
+              </a:rPr>
+              <a:t>страницы</a:t>
+            </a:r>
+            <a:r>
+              <a:rPr sz="2400" dirty="0">
+                <a:solidFill>
+                  <a:srgbClr val="444455"/>
+                </a:solidFill>
+              </a:rPr>
+              <a:t>: open(), </a:t>
+            </a:r>
+            <a:r>
+              <a:rPr sz="2400" dirty="0" err="1">
+                <a:solidFill>
+                  <a:srgbClr val="444455"/>
+                </a:solidFill>
+              </a:rPr>
+              <a:t>scroll_to_section</a:t>
+            </a:r>
+            <a:r>
+              <a:rPr sz="2400" dirty="0">
+                <a:solidFill>
+                  <a:srgbClr val="444455"/>
+                </a:solidFill>
+              </a:rPr>
+              <a:t>()</a:t>
+            </a:r>
+            <a:r>
+              <a:rPr lang="ru-RU" sz="2400" dirty="0">
+                <a:solidFill>
+                  <a:srgbClr val="444455"/>
+                </a:solidFill>
+              </a:rPr>
+              <a:t>, </a:t>
+            </a:r>
+            <a:r>
+              <a:rPr lang="en-US" sz="2400" dirty="0">
+                <a:solidFill>
+                  <a:srgbClr val="444455"/>
+                </a:solidFill>
+              </a:rPr>
+              <a:t>check_title_h1()</a:t>
+            </a:r>
+            <a:endParaRPr sz="2400" dirty="0">
               <a:solidFill>
                 <a:srgbClr val="444455"/>
               </a:solidFill>
@@ -6456,12 +6432,127 @@
           </a:p>
         </p:txBody>
       </p:sp>
+      <p:sp>
+        <p:nvSpPr>
+          <p:cNvPr id="25" name="TextBox 24">
+            <a:extLst>
+              <a:ext uri="{FF2B5EF4-FFF2-40B4-BE49-F238E27FC236}">
+                <a16:creationId xmlns:a16="http://schemas.microsoft.com/office/drawing/2014/main" id="{74255ADD-43D4-6C53-9BAB-99DC25FF66DB}"/>
+              </a:ext>
+            </a:extLst>
+          </p:cNvPr>
+          <p:cNvSpPr txBox="1"/>
+          <p:nvPr/>
+        </p:nvSpPr>
+        <p:spPr>
+          <a:xfrm>
+            <a:off x="7523480" y="5844795"/>
+            <a:ext cx="629883" cy="307777"/>
+          </a:xfrm>
+          <a:prstGeom prst="rect">
+            <a:avLst/>
+          </a:prstGeom>
+          <a:noFill/>
+        </p:spPr>
+        <p:txBody>
+          <a:bodyPr wrap="square">
+            <a:spAutoFit/>
+          </a:bodyPr>
+          <a:lstStyle/>
+          <a:p>
+            <a:pPr algn="r"/>
+            <a:r>
+              <a:rPr lang="ru-RU" sz="1400" dirty="0">
+                <a:solidFill>
+                  <a:srgbClr val="009BD8"/>
+                </a:solidFill>
+              </a:rPr>
+              <a:t>10</a:t>
+            </a:r>
+            <a:endParaRPr sz="1400" dirty="0">
+              <a:solidFill>
+                <a:srgbClr val="009BD8"/>
+              </a:solidFill>
+            </a:endParaRPr>
+          </a:p>
+        </p:txBody>
+      </p:sp>
+      <p:sp>
+        <p:nvSpPr>
+          <p:cNvPr id="26" name="TextBox 25">
+            <a:extLst>
+              <a:ext uri="{FF2B5EF4-FFF2-40B4-BE49-F238E27FC236}">
+                <a16:creationId xmlns:a16="http://schemas.microsoft.com/office/drawing/2014/main" id="{FDCC10F4-F9EE-8DC1-64CE-1005FEC39657}"/>
+              </a:ext>
+            </a:extLst>
+          </p:cNvPr>
+          <p:cNvSpPr txBox="1"/>
+          <p:nvPr/>
+        </p:nvSpPr>
+        <p:spPr>
+          <a:xfrm>
+            <a:off x="7751485" y="1252241"/>
+            <a:ext cx="276435" cy="279062"/>
+          </a:xfrm>
+          <a:prstGeom prst="rect">
+            <a:avLst/>
+          </a:prstGeom>
+          <a:noFill/>
+        </p:spPr>
+        <p:txBody>
+          <a:bodyPr wrap="square">
+            <a:spAutoFit/>
+          </a:bodyPr>
+          <a:lstStyle/>
+          <a:p>
+            <a:pPr algn="ctr"/>
+            <a:r>
+              <a:rPr sz="1209" dirty="0">
+                <a:solidFill>
+                  <a:srgbClr val="009BD8"/>
+                </a:solidFill>
+              </a:rPr>
+              <a:t>▼</a:t>
+            </a:r>
+          </a:p>
+        </p:txBody>
+      </p:sp>
       <p:pic>
         <p:nvPicPr>
-          <p:cNvPr id="9" name="Рисунок 8">
+          <p:cNvPr id="30" name="Рисунок 29">
             <a:extLst>
               <a:ext uri="{FF2B5EF4-FFF2-40B4-BE49-F238E27FC236}">
-                <a16:creationId xmlns:a16="http://schemas.microsoft.com/office/drawing/2014/main" id="{DC5B886B-BB04-47E5-C4E4-4F348275D26A}"/>
+                <a16:creationId xmlns:a16="http://schemas.microsoft.com/office/drawing/2014/main" id="{8A3EBBB4-1D97-AA73-44F2-429583687659}"/>
+              </a:ext>
+            </a:extLst>
+          </p:cNvPr>
+          <p:cNvPicPr>
+            <a:picLocks noChangeAspect="1"/>
+          </p:cNvPicPr>
+          <p:nvPr/>
+        </p:nvPicPr>
+        <p:blipFill>
+          <a:blip r:embed="rId2"/>
+          <a:stretch>
+            <a:fillRect/>
+          </a:stretch>
+        </p:blipFill>
+        <p:spPr>
+          <a:xfrm>
+            <a:off x="50259" y="3224250"/>
+            <a:ext cx="4437075" cy="2618124"/>
+          </a:xfrm>
+          <a:prstGeom prst="rect">
+            <a:avLst/>
+          </a:prstGeom>
+        </p:spPr>
+      </p:pic>
+      <p:pic>
+        <p:nvPicPr>
+          <p:cNvPr id="32" name="Рисунок 31">
+            <a:extLst>
+              <a:ext uri="{FF2B5EF4-FFF2-40B4-BE49-F238E27FC236}">
+                <a16:creationId xmlns:a16="http://schemas.microsoft.com/office/drawing/2014/main" id="{81AC4895-162C-B3DB-A80F-B5B728DE32A3}"/>
               </a:ext>
             </a:extLst>
           </p:cNvPr>
@@ -6478,15 +6569,25 @@
         </p:blipFill>
         <p:spPr>
           <a:xfrm>
-            <a:off x="6389" y="2656581"/>
-            <a:ext cx="5316406" cy="3192423"/>
-          </a:xfrm>
-          <a:prstGeom prst="rect">
-            <a:avLst/>
-          </a:prstGeom>
+            <a:off x="4531206" y="3234832"/>
+            <a:ext cx="3578285" cy="2607541"/>
+          </a:xfrm>
+          <a:prstGeom prst="rect">
+            <a:avLst/>
+          </a:prstGeom>
+          <a:ln>
+            <a:solidFill>
+              <a:schemeClr val="tx2"/>
+            </a:solidFill>
+          </a:ln>
         </p:spPr>
       </p:pic>
     </p:spTree>
+    <p:extLst>
+      <p:ext uri="{BB962C8B-B14F-4D97-AF65-F5344CB8AC3E}">
+        <p14:creationId xmlns:p14="http://schemas.microsoft.com/office/powerpoint/2010/main" val="4195586575"/>
+      </p:ext>
+    </p:extLst>
   </p:cSld>
   <p:clrMapOvr>
     <a:masterClrMapping/>
@@ -6516,7 +6617,7 @@
           <p:cNvPr id="2" name="Rectangle 1">
             <a:extLst>
               <a:ext uri="{FF2B5EF4-FFF2-40B4-BE49-F238E27FC236}">
-                <a16:creationId xmlns:a16="http://schemas.microsoft.com/office/drawing/2014/main" id="{E8D28C5F-0777-277D-8971-906E1586A893}"/>
+                <a16:creationId xmlns:a16="http://schemas.microsoft.com/office/drawing/2014/main" id="{22A7FC20-2C60-88E0-064D-D8061FB0EA29}"/>
               </a:ext>
             </a:extLst>
           </p:cNvPr>
@@ -6565,7 +6666,7 @@
           <p:cNvPr id="3" name="Rectangle 2">
             <a:extLst>
               <a:ext uri="{FF2B5EF4-FFF2-40B4-BE49-F238E27FC236}">
-                <a16:creationId xmlns:a16="http://schemas.microsoft.com/office/drawing/2014/main" id="{28AE7A5A-4428-00E2-C2A6-5553DB4A7069}"/>
+                <a16:creationId xmlns:a16="http://schemas.microsoft.com/office/drawing/2014/main" id="{C925FC50-6273-C9FF-B1F6-9E9B3A3D1D12}"/>
               </a:ext>
             </a:extLst>
           </p:cNvPr>
@@ -6574,8 +6675,8 @@
         </p:nvSpPr>
         <p:spPr>
           <a:xfrm>
-            <a:off x="-9006" y="-9523"/>
-            <a:ext cx="8175144" cy="932968"/>
+            <a:off x="-2" y="-9523"/>
+            <a:ext cx="8166139" cy="932968"/>
           </a:xfrm>
           <a:prstGeom prst="rect">
             <a:avLst/>
@@ -6615,7 +6716,7 @@
           <p:cNvPr id="4" name="TextBox 3">
             <a:extLst>
               <a:ext uri="{FF2B5EF4-FFF2-40B4-BE49-F238E27FC236}">
-                <a16:creationId xmlns:a16="http://schemas.microsoft.com/office/drawing/2014/main" id="{B75B45CD-9325-07A8-E385-4CFF5A088D7A}"/>
+                <a16:creationId xmlns:a16="http://schemas.microsoft.com/office/drawing/2014/main" id="{F4B8A258-D429-AB4B-B7BA-BE554464EE46}"/>
               </a:ext>
             </a:extLst>
           </p:cNvPr>
@@ -6695,7 +6796,7 @@
           <p:cNvPr id="5" name="Rectangle 4">
             <a:extLst>
               <a:ext uri="{FF2B5EF4-FFF2-40B4-BE49-F238E27FC236}">
-                <a16:creationId xmlns:a16="http://schemas.microsoft.com/office/drawing/2014/main" id="{2DFDA096-24DB-19F3-8875-B202B69F869B}"/>
+                <a16:creationId xmlns:a16="http://schemas.microsoft.com/office/drawing/2014/main" id="{C00AEC89-7899-0A16-F259-04843C5CAC10}"/>
               </a:ext>
             </a:extLst>
           </p:cNvPr>
@@ -6704,8 +6805,8 @@
         </p:nvSpPr>
         <p:spPr>
           <a:xfrm>
-            <a:off x="-9007" y="911109"/>
-            <a:ext cx="8175143" cy="45719"/>
+            <a:off x="-1" y="911109"/>
+            <a:ext cx="8166137" cy="45719"/>
           </a:xfrm>
           <a:prstGeom prst="rect">
             <a:avLst/>
@@ -6745,7 +6846,7 @@
           <p:cNvPr id="6" name="Rectangle 5">
             <a:extLst>
               <a:ext uri="{FF2B5EF4-FFF2-40B4-BE49-F238E27FC236}">
-                <a16:creationId xmlns:a16="http://schemas.microsoft.com/office/drawing/2014/main" id="{A8AFF3D7-7B49-C2A8-B6C9-6EA9773CF34D}"/>
+                <a16:creationId xmlns:a16="http://schemas.microsoft.com/office/drawing/2014/main" id="{DD9F4DF1-2FD0-9625-8712-8CD07D87461B}"/>
               </a:ext>
             </a:extLst>
           </p:cNvPr>
@@ -6754,8 +6855,8 @@
         </p:nvSpPr>
         <p:spPr>
           <a:xfrm>
-            <a:off x="-1866" y="5877936"/>
-            <a:ext cx="8175143" cy="241877"/>
+            <a:off x="0" y="5877936"/>
+            <a:ext cx="8166139" cy="241877"/>
           </a:xfrm>
           <a:prstGeom prst="rect">
             <a:avLst/>
@@ -6792,10 +6893,10 @@
       </p:sp>
       <p:sp>
         <p:nvSpPr>
-          <p:cNvPr id="12" name="Rectangle 15">
+          <p:cNvPr id="12" name="Rectangle 21">
             <a:extLst>
               <a:ext uri="{FF2B5EF4-FFF2-40B4-BE49-F238E27FC236}">
-                <a16:creationId xmlns:a16="http://schemas.microsoft.com/office/drawing/2014/main" id="{B9AF0D3E-06F3-8E8B-EB17-A902D0024294}"/>
+                <a16:creationId xmlns:a16="http://schemas.microsoft.com/office/drawing/2014/main" id="{B2B47716-CF89-92E3-D13E-9611A9926BD2}"/>
               </a:ext>
             </a:extLst>
           </p:cNvPr>
@@ -6804,14 +6905,14 @@
         </p:nvSpPr>
         <p:spPr>
           <a:xfrm>
-            <a:off x="-9007" y="973235"/>
-            <a:ext cx="8190536" cy="792278"/>
+            <a:off x="-1" y="983540"/>
+            <a:ext cx="8166139" cy="716667"/>
           </a:xfrm>
           <a:prstGeom prst="rect">
             <a:avLst/>
           </a:prstGeom>
           <a:solidFill>
-            <a:srgbClr val="0D2B55"/>
+            <a:srgbClr val="0D6E6E"/>
           </a:solidFill>
           <a:ln>
             <a:noFill/>
@@ -6845,7 +6946,7 @@
           <p:cNvPr id="13" name="TextBox 12">
             <a:extLst>
               <a:ext uri="{FF2B5EF4-FFF2-40B4-BE49-F238E27FC236}">
-                <a16:creationId xmlns:a16="http://schemas.microsoft.com/office/drawing/2014/main" id="{5C182233-0926-150E-4F5E-D12B132BC2CF}"/>
+                <a16:creationId xmlns:a16="http://schemas.microsoft.com/office/drawing/2014/main" id="{558D1DCB-6818-AA90-1133-F80C03D22EF1}"/>
               </a:ext>
             </a:extLst>
           </p:cNvPr>
@@ -6854,8 +6955,8 @@
         </p:nvSpPr>
         <p:spPr>
           <a:xfrm>
-            <a:off x="130629" y="1030480"/>
-            <a:ext cx="1382175" cy="584775"/>
+            <a:off x="112506" y="1080324"/>
+            <a:ext cx="2744520" cy="523220"/>
           </a:xfrm>
           <a:prstGeom prst="rect">
             <a:avLst/>
@@ -6870,12 +6971,12 @@
           <a:p>
             <a:pPr algn="l"/>
             <a:r>
-              <a:rPr sz="3200" b="1" dirty="0">
+              <a:rPr sz="2800" b="1" dirty="0">
                 <a:solidFill>
                   <a:srgbClr val="FFFFFF"/>
                 </a:solidFill>
               </a:rPr>
-              <a:t>PAGES</a:t>
+              <a:t>COMPONENTS</a:t>
             </a:r>
           </a:p>
         </p:txBody>
@@ -6885,7 +6986,7 @@
           <p:cNvPr id="14" name="TextBox 13">
             <a:extLst>
               <a:ext uri="{FF2B5EF4-FFF2-40B4-BE49-F238E27FC236}">
-                <a16:creationId xmlns:a16="http://schemas.microsoft.com/office/drawing/2014/main" id="{0BC5B5DB-2779-E460-16A9-110EB768FB03}"/>
+                <a16:creationId xmlns:a16="http://schemas.microsoft.com/office/drawing/2014/main" id="{777E824E-67A9-D1D4-D69A-3AC628213256}"/>
               </a:ext>
             </a:extLst>
           </p:cNvPr>
@@ -6894,8 +6995,8 @@
         </p:nvSpPr>
         <p:spPr>
           <a:xfrm>
-            <a:off x="1521057" y="1043238"/>
-            <a:ext cx="2956717" cy="523220"/>
+            <a:off x="2562661" y="1078773"/>
+            <a:ext cx="1543684" cy="523220"/>
           </a:xfrm>
           <a:prstGeom prst="rect">
             <a:avLst/>
@@ -6915,23 +7016,7 @@
                   <a:srgbClr val="AACCFF"/>
                 </a:solidFill>
               </a:rPr>
-              <a:t>Страницы</a:t>
-            </a:r>
-            <a:r>
-              <a:rPr sz="2800" dirty="0">
-                <a:solidFill>
-                  <a:srgbClr val="AACCFF"/>
-                </a:solidFill>
-              </a:rPr>
-              <a:t> </a:t>
-            </a:r>
-            <a:r>
-              <a:rPr sz="2800" dirty="0" err="1">
-                <a:solidFill>
-                  <a:srgbClr val="AACCFF"/>
-                </a:solidFill>
-              </a:rPr>
-              <a:t>сайта</a:t>
+              <a:t>Блоки</a:t>
             </a:r>
             <a:endParaRPr sz="2800" dirty="0">
               <a:solidFill>
@@ -6943,10 +7028,10 @@
       </p:sp>
       <p:sp>
         <p:nvSpPr>
-          <p:cNvPr id="15" name="Rectangle 19">
+          <p:cNvPr id="15" name="Rectangle 25">
             <a:extLst>
               <a:ext uri="{FF2B5EF4-FFF2-40B4-BE49-F238E27FC236}">
-                <a16:creationId xmlns:a16="http://schemas.microsoft.com/office/drawing/2014/main" id="{46A59DD4-2940-F3FE-88AB-0D0D8D4FB182}"/>
+                <a16:creationId xmlns:a16="http://schemas.microsoft.com/office/drawing/2014/main" id="{FDA84D0C-0A19-142B-B7DF-704BD7477F43}"/>
               </a:ext>
             </a:extLst>
           </p:cNvPr>
@@ -6955,8 +7040,8 @@
         </p:nvSpPr>
         <p:spPr>
           <a:xfrm>
-            <a:off x="-11827" y="1792686"/>
-            <a:ext cx="8168002" cy="580417"/>
+            <a:off x="-2" y="1748913"/>
+            <a:ext cx="8173057" cy="794751"/>
           </a:xfrm>
           <a:prstGeom prst="rect">
             <a:avLst/>
@@ -6996,7 +7081,7 @@
           <p:cNvPr id="16" name="TextBox 15">
             <a:extLst>
               <a:ext uri="{FF2B5EF4-FFF2-40B4-BE49-F238E27FC236}">
-                <a16:creationId xmlns:a16="http://schemas.microsoft.com/office/drawing/2014/main" id="{4EA49D90-0E32-35C3-3EE8-2E798158D859}"/>
+                <a16:creationId xmlns:a16="http://schemas.microsoft.com/office/drawing/2014/main" id="{4F556F2C-DBCC-1028-BC73-0A5283861D7F}"/>
               </a:ext>
             </a:extLst>
           </p:cNvPr>
@@ -7005,8 +7090,8 @@
         </p:nvSpPr>
         <p:spPr>
           <a:xfrm>
-            <a:off x="6387" y="1806821"/>
-            <a:ext cx="7985267" cy="461665"/>
+            <a:off x="97699" y="1733590"/>
+            <a:ext cx="7934738" cy="830997"/>
           </a:xfrm>
           <a:prstGeom prst="rect">
             <a:avLst/>
@@ -7021,12 +7106,44 @@
           <a:p>
             <a:pPr algn="l"/>
             <a:r>
+              <a:rPr sz="2400" dirty="0" err="1">
+                <a:solidFill>
+                  <a:srgbClr val="444455"/>
+                </a:solidFill>
+              </a:rPr>
+              <a:t>Составные</a:t>
+            </a:r>
+            <a:r>
+              <a:rPr sz="2400" dirty="0">
+                <a:solidFill>
+                  <a:srgbClr val="444455"/>
+                </a:solidFill>
+              </a:rPr>
+              <a:t> </a:t>
+            </a:r>
+            <a:r>
               <a:rPr lang="ru-RU" sz="2400" dirty="0">
                 <a:solidFill>
                   <a:srgbClr val="444455"/>
                 </a:solidFill>
               </a:rPr>
-              <a:t>Каждая страница отдельный класс: </a:t>
+              <a:t>части интерфейса</a:t>
+            </a:r>
+            <a:r>
+              <a:rPr sz="2400" dirty="0">
+                <a:solidFill>
+                  <a:srgbClr val="444455"/>
+                </a:solidFill>
+              </a:rPr>
+              <a:t>: </a:t>
+            </a:r>
+            <a:r>
+              <a:rPr lang="en-US" sz="2400" dirty="0">
+                <a:solidFill>
+                  <a:srgbClr val="444455"/>
+                </a:solidFill>
+              </a:rPr>
+              <a:t>Header, </a:t>
             </a:r>
             <a:r>
               <a:rPr lang="en-US" sz="2400" dirty="0" err="1">
@@ -7034,7 +7151,7 @@
                   <a:srgbClr val="444455"/>
                 </a:solidFill>
               </a:rPr>
-              <a:t>MainPage</a:t>
+              <a:t>FormRecording</a:t>
             </a:r>
             <a:r>
               <a:rPr lang="en-US" sz="2400" dirty="0">
@@ -7050,7 +7167,7 @@
                   <a:srgbClr val="444455"/>
                 </a:solidFill>
               </a:rPr>
-              <a:t>PageNevrolog</a:t>
+              <a:t>CardDoctor</a:t>
             </a:r>
             <a:endParaRPr sz="2400" dirty="0">
               <a:solidFill>
@@ -7062,10 +7179,10 @@
       </p:sp>
       <p:sp>
         <p:nvSpPr>
-          <p:cNvPr id="17" name="Rectangle 19">
+          <p:cNvPr id="17" name="Rectangle 25">
             <a:extLst>
               <a:ext uri="{FF2B5EF4-FFF2-40B4-BE49-F238E27FC236}">
-                <a16:creationId xmlns:a16="http://schemas.microsoft.com/office/drawing/2014/main" id="{625B18AD-2C90-CBDA-2AFA-9BC9118C8F29}"/>
+                <a16:creationId xmlns:a16="http://schemas.microsoft.com/office/drawing/2014/main" id="{200A1383-1B23-FA83-ACF9-10A9A742220A}"/>
               </a:ext>
             </a:extLst>
           </p:cNvPr>
@@ -7074,8 +7191,8 @@
         </p:nvSpPr>
         <p:spPr>
           <a:xfrm>
-            <a:off x="-11827" y="2406941"/>
-            <a:ext cx="8193356" cy="794751"/>
+            <a:off x="-2" y="2575217"/>
+            <a:ext cx="8163681" cy="632463"/>
           </a:xfrm>
           <a:prstGeom prst="rect">
             <a:avLst/>
@@ -7112,10 +7229,10 @@
       </p:sp>
       <p:sp>
         <p:nvSpPr>
-          <p:cNvPr id="18" name="TextBox 17">
+          <p:cNvPr id="21" name="TextBox 20">
             <a:extLst>
               <a:ext uri="{FF2B5EF4-FFF2-40B4-BE49-F238E27FC236}">
-                <a16:creationId xmlns:a16="http://schemas.microsoft.com/office/drawing/2014/main" id="{D6633FE6-7836-222A-D1C9-F331E6B7FE60}"/>
+                <a16:creationId xmlns:a16="http://schemas.microsoft.com/office/drawing/2014/main" id="{8D7D612B-5B64-A0FD-C598-5DF77013E943}"/>
               </a:ext>
             </a:extLst>
           </p:cNvPr>
@@ -7124,8 +7241,8 @@
         </p:nvSpPr>
         <p:spPr>
           <a:xfrm>
-            <a:off x="0" y="2360112"/>
-            <a:ext cx="7863864" cy="830997"/>
+            <a:off x="97699" y="2672835"/>
+            <a:ext cx="7959110" cy="461665"/>
           </a:xfrm>
           <a:prstGeom prst="rect">
             <a:avLst/>
@@ -7140,84 +7257,20 @@
           <a:p>
             <a:pPr algn="l"/>
             <a:r>
-              <a:rPr sz="2400" dirty="0" err="1">
+              <a:rPr lang="ru-RU" sz="2400" dirty="0">
                 <a:solidFill>
                   <a:srgbClr val="444455"/>
                 </a:solidFill>
               </a:rPr>
-              <a:t>Методы</a:t>
-            </a:r>
-            <a:r>
-              <a:rPr sz="2400" dirty="0">
+              <a:t>Могут содержать другие компоненты и </a:t>
+            </a:r>
+            <a:r>
+              <a:rPr lang="ru-RU" sz="2400" dirty="0" err="1">
                 <a:solidFill>
                   <a:srgbClr val="444455"/>
                 </a:solidFill>
               </a:rPr>
-              <a:t> </a:t>
-            </a:r>
-            <a:r>
-              <a:rPr sz="2400" dirty="0" err="1">
-                <a:solidFill>
-                  <a:srgbClr val="444455"/>
-                </a:solidFill>
-              </a:rPr>
-              <a:t>уровня</a:t>
-            </a:r>
-            <a:r>
-              <a:rPr sz="2400" dirty="0">
-                <a:solidFill>
-                  <a:srgbClr val="444455"/>
-                </a:solidFill>
-              </a:rPr>
-              <a:t> </a:t>
-            </a:r>
-            <a:r>
-              <a:rPr sz="2400" dirty="0" err="1">
-                <a:solidFill>
-                  <a:srgbClr val="444455"/>
-                </a:solidFill>
-              </a:rPr>
-              <a:t>страницы</a:t>
-            </a:r>
-            <a:r>
-              <a:rPr sz="2400" dirty="0">
-                <a:solidFill>
-                  <a:srgbClr val="444455"/>
-                </a:solidFill>
-              </a:rPr>
-              <a:t>: open(), </a:t>
-            </a:r>
-            <a:r>
-              <a:rPr sz="2400" dirty="0" err="1">
-                <a:solidFill>
-                  <a:srgbClr val="444455"/>
-                </a:solidFill>
-              </a:rPr>
-              <a:t>scroll_to_section</a:t>
-            </a:r>
-            <a:r>
-              <a:rPr sz="2400" dirty="0">
-                <a:solidFill>
-                  <a:srgbClr val="444455"/>
-                </a:solidFill>
-              </a:rPr>
-              <a:t>()</a:t>
-            </a:r>
-            <a:r>
-              <a:rPr lang="ru-RU" sz="2400" dirty="0">
-                <a:solidFill>
-                  <a:srgbClr val="444455"/>
-                </a:solidFill>
-              </a:rPr>
-              <a:t>, </a:t>
-            </a:r>
-            <a:r>
-              <a:rPr lang="en-US" sz="2400" dirty="0">
-                <a:solidFill>
-                  <a:srgbClr val="444455"/>
-                </a:solidFill>
-              </a:rPr>
-              <a:t>check_title_h1()</a:t>
+              <a:t>контроллы</a:t>
             </a:r>
             <a:endParaRPr sz="2400" dirty="0">
               <a:solidFill>
@@ -7229,10 +7282,10 @@
       </p:sp>
       <p:sp>
         <p:nvSpPr>
-          <p:cNvPr id="25" name="TextBox 24">
+          <p:cNvPr id="23" name="TextBox 22">
             <a:extLst>
               <a:ext uri="{FF2B5EF4-FFF2-40B4-BE49-F238E27FC236}">
-                <a16:creationId xmlns:a16="http://schemas.microsoft.com/office/drawing/2014/main" id="{74255ADD-43D4-6C53-9BAB-99DC25FF66DB}"/>
+                <a16:creationId xmlns:a16="http://schemas.microsoft.com/office/drawing/2014/main" id="{87073169-38BC-020C-A1EC-465A8B6C4749}"/>
               </a:ext>
             </a:extLst>
           </p:cNvPr>
@@ -7241,8 +7294,8 @@
         </p:nvSpPr>
         <p:spPr>
           <a:xfrm>
-            <a:off x="7523480" y="5844795"/>
-            <a:ext cx="629883" cy="307777"/>
+            <a:off x="7719144" y="5835462"/>
+            <a:ext cx="431763" cy="307777"/>
           </a:xfrm>
           <a:prstGeom prst="rect">
             <a:avLst/>
@@ -7274,10 +7327,10 @@
       </p:sp>
       <p:sp>
         <p:nvSpPr>
-          <p:cNvPr id="26" name="TextBox 25">
+          <p:cNvPr id="24" name="TextBox 23">
             <a:extLst>
               <a:ext uri="{FF2B5EF4-FFF2-40B4-BE49-F238E27FC236}">
-                <a16:creationId xmlns:a16="http://schemas.microsoft.com/office/drawing/2014/main" id="{FDCC10F4-F9EE-8DC1-64CE-1005FEC39657}"/>
+                <a16:creationId xmlns:a16="http://schemas.microsoft.com/office/drawing/2014/main" id="{4E120B69-87D6-1F05-2339-8D325FBB5A7D}"/>
               </a:ext>
             </a:extLst>
           </p:cNvPr>
@@ -7286,7 +7339,7 @@
         </p:nvSpPr>
         <p:spPr>
           <a:xfrm>
-            <a:off x="7751485" y="1252241"/>
+            <a:off x="7719144" y="1236219"/>
             <a:ext cx="276435" cy="279062"/>
           </a:xfrm>
           <a:prstGeom prst="rect">
@@ -7314,10 +7367,10 @@
       </p:sp>
       <p:pic>
         <p:nvPicPr>
-          <p:cNvPr id="30" name="Рисунок 29">
+          <p:cNvPr id="26" name="Рисунок 25">
             <a:extLst>
               <a:ext uri="{FF2B5EF4-FFF2-40B4-BE49-F238E27FC236}">
-                <a16:creationId xmlns:a16="http://schemas.microsoft.com/office/drawing/2014/main" id="{8A3EBBB4-1D97-AA73-44F2-429583687659}"/>
+                <a16:creationId xmlns:a16="http://schemas.microsoft.com/office/drawing/2014/main" id="{7E708093-D86E-27AF-D3AC-74F2A735EE8E}"/>
               </a:ext>
             </a:extLst>
           </p:cNvPr>
@@ -7334,8 +7387,8 @@
         </p:blipFill>
         <p:spPr>
           <a:xfrm>
-            <a:off x="50259" y="3224250"/>
-            <a:ext cx="4437075" cy="2618124"/>
+            <a:off x="49849" y="3275075"/>
+            <a:ext cx="4198987" cy="2579435"/>
           </a:xfrm>
           <a:prstGeom prst="rect">
             <a:avLst/>
@@ -7344,10 +7397,10 @@
       </p:pic>
       <p:pic>
         <p:nvPicPr>
-          <p:cNvPr id="32" name="Рисунок 31">
+          <p:cNvPr id="28" name="Рисунок 27">
             <a:extLst>
               <a:ext uri="{FF2B5EF4-FFF2-40B4-BE49-F238E27FC236}">
-                <a16:creationId xmlns:a16="http://schemas.microsoft.com/office/drawing/2014/main" id="{81AC4895-162C-B3DB-A80F-B5B728DE32A3}"/>
+                <a16:creationId xmlns:a16="http://schemas.microsoft.com/office/drawing/2014/main" id="{5AD9612D-FA3A-B7AE-4412-7673A386A979}"/>
               </a:ext>
             </a:extLst>
           </p:cNvPr>
@@ -7364,15 +7417,15 @@
         </p:blipFill>
         <p:spPr>
           <a:xfrm>
-            <a:off x="4531206" y="3234832"/>
-            <a:ext cx="3578285" cy="2607541"/>
+            <a:off x="4302209" y="3275075"/>
+            <a:ext cx="3807692" cy="2579435"/>
           </a:xfrm>
           <a:prstGeom prst="rect">
             <a:avLst/>
           </a:prstGeom>
           <a:ln>
             <a:solidFill>
-              <a:schemeClr val="tx2"/>
+              <a:schemeClr val="accent1"/>
             </a:solidFill>
           </a:ln>
         </p:spPr>
@@ -7380,7 +7433,7 @@
     </p:spTree>
     <p:extLst>
       <p:ext uri="{BB962C8B-B14F-4D97-AF65-F5344CB8AC3E}">
-        <p14:creationId xmlns:p14="http://schemas.microsoft.com/office/powerpoint/2010/main" val="4195586575"/>
+        <p14:creationId xmlns:p14="http://schemas.microsoft.com/office/powerpoint/2010/main" val="545131185"/>
       </p:ext>
     </p:extLst>
   </p:cSld>
@@ -7412,7 +7465,7 @@
           <p:cNvPr id="2" name="Rectangle 1">
             <a:extLst>
               <a:ext uri="{FF2B5EF4-FFF2-40B4-BE49-F238E27FC236}">
-                <a16:creationId xmlns:a16="http://schemas.microsoft.com/office/drawing/2014/main" id="{22A7FC20-2C60-88E0-064D-D8061FB0EA29}"/>
+                <a16:creationId xmlns:a16="http://schemas.microsoft.com/office/drawing/2014/main" id="{F43DBE52-9231-BE18-E624-E8F490BF73BD}"/>
               </a:ext>
             </a:extLst>
           </p:cNvPr>
@@ -7461,7 +7514,7 @@
           <p:cNvPr id="3" name="Rectangle 2">
             <a:extLst>
               <a:ext uri="{FF2B5EF4-FFF2-40B4-BE49-F238E27FC236}">
-                <a16:creationId xmlns:a16="http://schemas.microsoft.com/office/drawing/2014/main" id="{C925FC50-6273-C9FF-B1F6-9E9B3A3D1D12}"/>
+                <a16:creationId xmlns:a16="http://schemas.microsoft.com/office/drawing/2014/main" id="{8A2FC3A1-ADD4-B56B-8C25-4129D30191CD}"/>
               </a:ext>
             </a:extLst>
           </p:cNvPr>
@@ -7470,8 +7523,8 @@
         </p:nvSpPr>
         <p:spPr>
           <a:xfrm>
-            <a:off x="-2" y="-9523"/>
-            <a:ext cx="8166139" cy="932968"/>
+            <a:off x="-6387" y="0"/>
+            <a:ext cx="8172522" cy="932968"/>
           </a:xfrm>
           <a:prstGeom prst="rect">
             <a:avLst/>
@@ -7511,7 +7564,7 @@
           <p:cNvPr id="4" name="TextBox 3">
             <a:extLst>
               <a:ext uri="{FF2B5EF4-FFF2-40B4-BE49-F238E27FC236}">
-                <a16:creationId xmlns:a16="http://schemas.microsoft.com/office/drawing/2014/main" id="{F4B8A258-D429-AB4B-B7BA-BE554464EE46}"/>
+                <a16:creationId xmlns:a16="http://schemas.microsoft.com/office/drawing/2014/main" id="{B56F779C-45B7-CE8B-AED9-D343B2FC6437}"/>
               </a:ext>
             </a:extLst>
           </p:cNvPr>
@@ -7591,7 +7644,7 @@
           <p:cNvPr id="5" name="Rectangle 4">
             <a:extLst>
               <a:ext uri="{FF2B5EF4-FFF2-40B4-BE49-F238E27FC236}">
-                <a16:creationId xmlns:a16="http://schemas.microsoft.com/office/drawing/2014/main" id="{C00AEC89-7899-0A16-F259-04843C5CAC10}"/>
+                <a16:creationId xmlns:a16="http://schemas.microsoft.com/office/drawing/2014/main" id="{424A583F-8958-A77E-AC68-8C1AAED4AD2A}"/>
               </a:ext>
             </a:extLst>
           </p:cNvPr>
@@ -7600,8 +7653,8 @@
         </p:nvSpPr>
         <p:spPr>
           <a:xfrm>
-            <a:off x="-1" y="911109"/>
-            <a:ext cx="8166137" cy="45719"/>
+            <a:off x="-6387" y="911109"/>
+            <a:ext cx="8172523" cy="45719"/>
           </a:xfrm>
           <a:prstGeom prst="rect">
             <a:avLst/>
@@ -7641,7 +7694,7 @@
           <p:cNvPr id="6" name="Rectangle 5">
             <a:extLst>
               <a:ext uri="{FF2B5EF4-FFF2-40B4-BE49-F238E27FC236}">
-                <a16:creationId xmlns:a16="http://schemas.microsoft.com/office/drawing/2014/main" id="{DD9F4DF1-2FD0-9625-8712-8CD07D87461B}"/>
+                <a16:creationId xmlns:a16="http://schemas.microsoft.com/office/drawing/2014/main" id="{F78FEEE5-D041-42B6-4AF3-6DC50E4FBFA0}"/>
               </a:ext>
             </a:extLst>
           </p:cNvPr>
@@ -7650,8 +7703,8 @@
         </p:nvSpPr>
         <p:spPr>
           <a:xfrm>
-            <a:off x="0" y="5877936"/>
-            <a:ext cx="8166139" cy="241877"/>
+            <a:off x="0" y="5882123"/>
+            <a:ext cx="8172522" cy="241877"/>
           </a:xfrm>
           <a:prstGeom prst="rect">
             <a:avLst/>
@@ -7688,10 +7741,10 @@
       </p:sp>
       <p:sp>
         <p:nvSpPr>
-          <p:cNvPr id="12" name="Rectangle 21">
+          <p:cNvPr id="7" name="Rectangle 27">
             <a:extLst>
               <a:ext uri="{FF2B5EF4-FFF2-40B4-BE49-F238E27FC236}">
-                <a16:creationId xmlns:a16="http://schemas.microsoft.com/office/drawing/2014/main" id="{B2B47716-CF89-92E3-D13E-9611A9926BD2}"/>
+                <a16:creationId xmlns:a16="http://schemas.microsoft.com/office/drawing/2014/main" id="{923B6111-71A5-AAD4-6B02-C25ECAC4F72E}"/>
               </a:ext>
             </a:extLst>
           </p:cNvPr>
@@ -7700,14 +7753,14 @@
         </p:nvSpPr>
         <p:spPr>
           <a:xfrm>
-            <a:off x="-1" y="983540"/>
-            <a:ext cx="8166139" cy="716667"/>
+            <a:off x="0" y="989215"/>
+            <a:ext cx="8166135" cy="747230"/>
           </a:xfrm>
           <a:prstGeom prst="rect">
             <a:avLst/>
           </a:prstGeom>
           <a:solidFill>
-            <a:srgbClr val="0D6E6E"/>
+            <a:srgbClr val="1A5C8A"/>
           </a:solidFill>
           <a:ln>
             <a:noFill/>
@@ -7738,10 +7791,10 @@
       </p:sp>
       <p:sp>
         <p:nvSpPr>
-          <p:cNvPr id="13" name="TextBox 12">
+          <p:cNvPr id="8" name="TextBox 7">
             <a:extLst>
               <a:ext uri="{FF2B5EF4-FFF2-40B4-BE49-F238E27FC236}">
-                <a16:creationId xmlns:a16="http://schemas.microsoft.com/office/drawing/2014/main" id="{558D1DCB-6818-AA90-1133-F80C03D22EF1}"/>
+                <a16:creationId xmlns:a16="http://schemas.microsoft.com/office/drawing/2014/main" id="{E6807D28-988B-877B-0AF2-89CE0169C004}"/>
               </a:ext>
             </a:extLst>
           </p:cNvPr>
@@ -7750,8 +7803,8 @@
         </p:nvSpPr>
         <p:spPr>
           <a:xfrm>
-            <a:off x="112506" y="1080324"/>
-            <a:ext cx="2744520" cy="523220"/>
+            <a:off x="8842" y="1025635"/>
+            <a:ext cx="2248583" cy="584775"/>
           </a:xfrm>
           <a:prstGeom prst="rect">
             <a:avLst/>
@@ -7766,22 +7819,22 @@
           <a:p>
             <a:pPr algn="l"/>
             <a:r>
-              <a:rPr sz="2800" b="1" dirty="0">
+              <a:rPr sz="3200" b="1" dirty="0">
                 <a:solidFill>
                   <a:srgbClr val="FFFFFF"/>
                 </a:solidFill>
               </a:rPr>
-              <a:t>COMPONENTS</a:t>
-            </a:r>
-          </a:p>
-        </p:txBody>
-      </p:sp>
-      <p:sp>
-        <p:nvSpPr>
-          <p:cNvPr id="14" name="TextBox 13">
+              <a:t>CONTROLS</a:t>
+            </a:r>
+          </a:p>
+        </p:txBody>
+      </p:sp>
+      <p:sp>
+        <p:nvSpPr>
+          <p:cNvPr id="9" name="TextBox 8">
             <a:extLst>
               <a:ext uri="{FF2B5EF4-FFF2-40B4-BE49-F238E27FC236}">
-                <a16:creationId xmlns:a16="http://schemas.microsoft.com/office/drawing/2014/main" id="{777E824E-67A9-D1D4-D69A-3AC628213256}"/>
+                <a16:creationId xmlns:a16="http://schemas.microsoft.com/office/drawing/2014/main" id="{3DBDFBAE-5A6C-7403-41ED-CECA3144DF97}"/>
               </a:ext>
             </a:extLst>
           </p:cNvPr>
@@ -7790,8 +7843,8 @@
         </p:nvSpPr>
         <p:spPr>
           <a:xfrm>
-            <a:off x="2562661" y="1078773"/>
-            <a:ext cx="1543684" cy="523220"/>
+            <a:off x="2179382" y="1078789"/>
+            <a:ext cx="3800984" cy="523220"/>
           </a:xfrm>
           <a:prstGeom prst="rect">
             <a:avLst/>
@@ -7806,12 +7859,12 @@
           <a:p>
             <a:pPr algn="l"/>
             <a:r>
-              <a:rPr sz="2800" dirty="0" err="1">
+              <a:rPr lang="ru-RU" sz="2800" dirty="0">
                 <a:solidFill>
                   <a:srgbClr val="AACCFF"/>
                 </a:solidFill>
               </a:rPr>
-              <a:t>Блоки</a:t>
+              <a:t>Элементы управления</a:t>
             </a:r>
             <a:endParaRPr sz="2800" dirty="0">
               <a:solidFill>
@@ -7823,10 +7876,10 @@
       </p:sp>
       <p:sp>
         <p:nvSpPr>
-          <p:cNvPr id="15" name="Rectangle 25">
+          <p:cNvPr id="10" name="Rectangle 30">
             <a:extLst>
               <a:ext uri="{FF2B5EF4-FFF2-40B4-BE49-F238E27FC236}">
-                <a16:creationId xmlns:a16="http://schemas.microsoft.com/office/drawing/2014/main" id="{FDA84D0C-0A19-142B-B7DF-704BD7477F43}"/>
+                <a16:creationId xmlns:a16="http://schemas.microsoft.com/office/drawing/2014/main" id="{16AF98BD-26F4-148E-127F-B4EFB3E14884}"/>
               </a:ext>
             </a:extLst>
           </p:cNvPr>
@@ -7835,8 +7888,8 @@
         </p:nvSpPr>
         <p:spPr>
           <a:xfrm>
-            <a:off x="-2" y="1748913"/>
-            <a:ext cx="8173057" cy="794751"/>
+            <a:off x="-2454" y="1798094"/>
+            <a:ext cx="8172523" cy="655465"/>
           </a:xfrm>
           <a:prstGeom prst="rect">
             <a:avLst/>
@@ -7873,10 +7926,10 @@
       </p:sp>
       <p:sp>
         <p:nvSpPr>
-          <p:cNvPr id="16" name="TextBox 15">
+          <p:cNvPr id="11" name="TextBox 10">
             <a:extLst>
               <a:ext uri="{FF2B5EF4-FFF2-40B4-BE49-F238E27FC236}">
-                <a16:creationId xmlns:a16="http://schemas.microsoft.com/office/drawing/2014/main" id="{4F556F2C-DBCC-1028-BC73-0A5283861D7F}"/>
+                <a16:creationId xmlns:a16="http://schemas.microsoft.com/office/drawing/2014/main" id="{CF050870-3398-9939-AA79-8C993AD0D60A}"/>
               </a:ext>
             </a:extLst>
           </p:cNvPr>
@@ -7885,8 +7938,8 @@
         </p:nvSpPr>
         <p:spPr>
           <a:xfrm>
-            <a:off x="97699" y="1733590"/>
-            <a:ext cx="7934738" cy="830997"/>
+            <a:off x="8842" y="1894561"/>
+            <a:ext cx="8242244" cy="461665"/>
           </a:xfrm>
           <a:prstGeom prst="rect">
             <a:avLst/>
@@ -7906,7 +7959,7 @@
                   <a:srgbClr val="444455"/>
                 </a:solidFill>
               </a:rPr>
-              <a:t>Составные</a:t>
+              <a:t>Минимальные</a:t>
             </a:r>
             <a:r>
               <a:rPr sz="2400" dirty="0">
@@ -7917,20 +7970,36 @@
               <a:t> </a:t>
             </a:r>
             <a:r>
+              <a:rPr sz="2400" dirty="0" err="1">
+                <a:solidFill>
+                  <a:srgbClr val="444455"/>
+                </a:solidFill>
+              </a:rPr>
+              <a:t>элементы</a:t>
+            </a:r>
+            <a:r>
+              <a:rPr sz="2400" dirty="0">
+                <a:solidFill>
+                  <a:srgbClr val="444455"/>
+                </a:solidFill>
+              </a:rPr>
+              <a:t>:</a:t>
+            </a:r>
+            <a:r>
               <a:rPr lang="ru-RU" sz="2400" dirty="0">
                 <a:solidFill>
                   <a:srgbClr val="444455"/>
                 </a:solidFill>
               </a:rPr>
-              <a:t>части интерфейса</a:t>
-            </a:r>
-            <a:r>
-              <a:rPr sz="2400" dirty="0">
+              <a:t> </a:t>
+            </a:r>
+            <a:r>
+              <a:rPr lang="en-US" sz="2400" dirty="0" err="1">
                 <a:solidFill>
                   <a:srgbClr val="444455"/>
                 </a:solidFill>
               </a:rPr>
-              <a:t>: </a:t>
+              <a:t>InputForm</a:t>
             </a:r>
             <a:r>
               <a:rPr lang="en-US" sz="2400" dirty="0">
@@ -7938,7 +8007,7 @@
                   <a:srgbClr val="444455"/>
                 </a:solidFill>
               </a:rPr>
-              <a:t>Header, </a:t>
+              <a:t>, </a:t>
             </a:r>
             <a:r>
               <a:rPr lang="en-US" sz="2400" dirty="0" err="1">
@@ -7946,7 +8015,7 @@
                   <a:srgbClr val="444455"/>
                 </a:solidFill>
               </a:rPr>
-              <a:t>FormRecording</a:t>
+              <a:t>ButtonForm</a:t>
             </a:r>
             <a:r>
               <a:rPr lang="en-US" sz="2400" dirty="0">
@@ -7954,15 +8023,7 @@
                   <a:srgbClr val="444455"/>
                 </a:solidFill>
               </a:rPr>
-              <a:t>, </a:t>
-            </a:r>
-            <a:r>
-              <a:rPr lang="en-US" sz="2400" dirty="0" err="1">
-                <a:solidFill>
-                  <a:srgbClr val="444455"/>
-                </a:solidFill>
-              </a:rPr>
-              <a:t>CardDoctor</a:t>
+              <a:t>, Pagination</a:t>
             </a:r>
             <a:endParaRPr sz="2400" dirty="0">
               <a:solidFill>
@@ -7974,10 +8035,55 @@
       </p:sp>
       <p:sp>
         <p:nvSpPr>
-          <p:cNvPr id="17" name="Rectangle 25">
+          <p:cNvPr id="12" name="TextBox 11">
             <a:extLst>
               <a:ext uri="{FF2B5EF4-FFF2-40B4-BE49-F238E27FC236}">
-                <a16:creationId xmlns:a16="http://schemas.microsoft.com/office/drawing/2014/main" id="{200A1383-1B23-FA83-ACF9-10A9A742220A}"/>
+                <a16:creationId xmlns:a16="http://schemas.microsoft.com/office/drawing/2014/main" id="{C8A29572-9550-A16D-66AD-247C778BDB78}"/>
+              </a:ext>
+            </a:extLst>
+          </p:cNvPr>
+          <p:cNvSpPr txBox="1"/>
+          <p:nvPr/>
+        </p:nvSpPr>
+        <p:spPr>
+          <a:xfrm>
+            <a:off x="7675880" y="5849172"/>
+            <a:ext cx="477483" cy="307777"/>
+          </a:xfrm>
+          <a:prstGeom prst="rect">
+            <a:avLst/>
+          </a:prstGeom>
+          <a:noFill/>
+        </p:spPr>
+        <p:txBody>
+          <a:bodyPr wrap="square">
+            <a:spAutoFit/>
+          </a:bodyPr>
+          <a:lstStyle/>
+          <a:p>
+            <a:pPr algn="r"/>
+            <a:r>
+              <a:rPr lang="ru-RU" sz="1400" dirty="0">
+                <a:solidFill>
+                  <a:srgbClr val="009BD8"/>
+                </a:solidFill>
+              </a:rPr>
+              <a:t>12</a:t>
+            </a:r>
+            <a:endParaRPr sz="1400" dirty="0">
+              <a:solidFill>
+                <a:srgbClr val="009BD8"/>
+              </a:solidFill>
+            </a:endParaRPr>
+          </a:p>
+        </p:txBody>
+      </p:sp>
+      <p:sp>
+        <p:nvSpPr>
+          <p:cNvPr id="14" name="Rectangle 30">
+            <a:extLst>
+              <a:ext uri="{FF2B5EF4-FFF2-40B4-BE49-F238E27FC236}">
+                <a16:creationId xmlns:a16="http://schemas.microsoft.com/office/drawing/2014/main" id="{BE838E82-CA93-7822-D815-6C685548CEB7}"/>
               </a:ext>
             </a:extLst>
           </p:cNvPr>
@@ -7986,8 +8092,8 @@
         </p:nvSpPr>
         <p:spPr>
           <a:xfrm>
-            <a:off x="-2" y="2575217"/>
-            <a:ext cx="8163681" cy="632463"/>
+            <a:off x="-7003" y="2497927"/>
+            <a:ext cx="8170069" cy="619783"/>
           </a:xfrm>
           <a:prstGeom prst="rect">
             <a:avLst/>
@@ -8024,10 +8130,10 @@
       </p:sp>
       <p:sp>
         <p:nvSpPr>
-          <p:cNvPr id="21" name="TextBox 20">
+          <p:cNvPr id="18" name="TextBox 17">
             <a:extLst>
               <a:ext uri="{FF2B5EF4-FFF2-40B4-BE49-F238E27FC236}">
-                <a16:creationId xmlns:a16="http://schemas.microsoft.com/office/drawing/2014/main" id="{8D7D612B-5B64-A0FD-C598-5DF77013E943}"/>
+                <a16:creationId xmlns:a16="http://schemas.microsoft.com/office/drawing/2014/main" id="{10E3F7E2-D600-4EA6-689C-C700060582FA}"/>
               </a:ext>
             </a:extLst>
           </p:cNvPr>
@@ -8036,8 +8142,8 @@
         </p:nvSpPr>
         <p:spPr>
           <a:xfrm>
-            <a:off x="97699" y="2672835"/>
-            <a:ext cx="7959110" cy="461665"/>
+            <a:off x="8842" y="2460513"/>
+            <a:ext cx="7822896" cy="523220"/>
           </a:xfrm>
           <a:prstGeom prst="rect">
             <a:avLst/>
@@ -8052,22 +8158,38 @@
           <a:p>
             <a:pPr algn="l"/>
             <a:r>
-              <a:rPr lang="ru-RU" sz="2400" dirty="0">
+              <a:rPr lang="ru-RU" sz="2800" dirty="0">
                 <a:solidFill>
                   <a:srgbClr val="444455"/>
                 </a:solidFill>
               </a:rPr>
-              <a:t>Могут содержать другие компоненты и </a:t>
-            </a:r>
-            <a:r>
-              <a:rPr lang="ru-RU" sz="2400" dirty="0" err="1">
+              <a:t>Предоставляют методы: </a:t>
+            </a:r>
+            <a:r>
+              <a:rPr lang="en-US" sz="2800" dirty="0">
                 <a:solidFill>
                   <a:srgbClr val="444455"/>
                 </a:solidFill>
               </a:rPr>
-              <a:t>контроллы</a:t>
-            </a:r>
-            <a:endParaRPr sz="2400" dirty="0">
+              <a:t>click(), fill(), </a:t>
+            </a:r>
+            <a:r>
+              <a:rPr lang="en-US" sz="2800" dirty="0" err="1">
+                <a:solidFill>
+                  <a:srgbClr val="444455"/>
+                </a:solidFill>
+              </a:rPr>
+              <a:t>get_error</a:t>
+            </a:r>
+            <a:r>
+              <a:rPr lang="en-US" sz="2800" dirty="0">
+                <a:solidFill>
+                  <a:srgbClr val="444455"/>
+                </a:solidFill>
+              </a:rPr>
+              <a:t>()</a:t>
+            </a:r>
+            <a:endParaRPr sz="2800" dirty="0">
               <a:solidFill>
                 <a:srgbClr val="444455"/>
               </a:solidFill>
@@ -8075,97 +8197,12 @@
           </a:p>
         </p:txBody>
       </p:sp>
-      <p:sp>
-        <p:nvSpPr>
-          <p:cNvPr id="23" name="TextBox 22">
+      <p:pic>
+        <p:nvPicPr>
+          <p:cNvPr id="25" name="Рисунок 24">
             <a:extLst>
               <a:ext uri="{FF2B5EF4-FFF2-40B4-BE49-F238E27FC236}">
-                <a16:creationId xmlns:a16="http://schemas.microsoft.com/office/drawing/2014/main" id="{87073169-38BC-020C-A1EC-465A8B6C4749}"/>
-              </a:ext>
-            </a:extLst>
-          </p:cNvPr>
-          <p:cNvSpPr txBox="1"/>
-          <p:nvPr/>
-        </p:nvSpPr>
-        <p:spPr>
-          <a:xfrm>
-            <a:off x="7719144" y="5835462"/>
-            <a:ext cx="431763" cy="307777"/>
-          </a:xfrm>
-          <a:prstGeom prst="rect">
-            <a:avLst/>
-          </a:prstGeom>
-          <a:noFill/>
-        </p:spPr>
-        <p:txBody>
-          <a:bodyPr wrap="square">
-            <a:spAutoFit/>
-          </a:bodyPr>
-          <a:lstStyle/>
-          <a:p>
-            <a:pPr algn="r"/>
-            <a:r>
-              <a:rPr lang="ru-RU" sz="1400" dirty="0">
-                <a:solidFill>
-                  <a:srgbClr val="009BD8"/>
-                </a:solidFill>
-              </a:rPr>
-              <a:t>12</a:t>
-            </a:r>
-            <a:endParaRPr sz="1400" dirty="0">
-              <a:solidFill>
-                <a:srgbClr val="009BD8"/>
-              </a:solidFill>
-            </a:endParaRPr>
-          </a:p>
-        </p:txBody>
-      </p:sp>
-      <p:sp>
-        <p:nvSpPr>
-          <p:cNvPr id="24" name="TextBox 23">
-            <a:extLst>
-              <a:ext uri="{FF2B5EF4-FFF2-40B4-BE49-F238E27FC236}">
-                <a16:creationId xmlns:a16="http://schemas.microsoft.com/office/drawing/2014/main" id="{4E120B69-87D6-1F05-2339-8D325FBB5A7D}"/>
-              </a:ext>
-            </a:extLst>
-          </p:cNvPr>
-          <p:cNvSpPr txBox="1"/>
-          <p:nvPr/>
-        </p:nvSpPr>
-        <p:spPr>
-          <a:xfrm>
-            <a:off x="7719144" y="1236219"/>
-            <a:ext cx="276435" cy="279062"/>
-          </a:xfrm>
-          <a:prstGeom prst="rect">
-            <a:avLst/>
-          </a:prstGeom>
-          <a:noFill/>
-        </p:spPr>
-        <p:txBody>
-          <a:bodyPr wrap="square">
-            <a:spAutoFit/>
-          </a:bodyPr>
-          <a:lstStyle/>
-          <a:p>
-            <a:pPr algn="ctr"/>
-            <a:r>
-              <a:rPr sz="1209" dirty="0">
-                <a:solidFill>
-                  <a:srgbClr val="009BD8"/>
-                </a:solidFill>
-              </a:rPr>
-              <a:t>▼</a:t>
-            </a:r>
-          </a:p>
-        </p:txBody>
-      </p:sp>
-      <p:pic>
-        <p:nvPicPr>
-          <p:cNvPr id="26" name="Рисунок 25">
-            <a:extLst>
-              <a:ext uri="{FF2B5EF4-FFF2-40B4-BE49-F238E27FC236}">
-                <a16:creationId xmlns:a16="http://schemas.microsoft.com/office/drawing/2014/main" id="{7E708093-D86E-27AF-D3AC-74F2A735EE8E}"/>
+                <a16:creationId xmlns:a16="http://schemas.microsoft.com/office/drawing/2014/main" id="{27906CB1-FF3E-E24E-B9BC-980B0604AB1A}"/>
               </a:ext>
             </a:extLst>
           </p:cNvPr>
@@ -8182,8 +8219,8 @@
         </p:blipFill>
         <p:spPr>
           <a:xfrm>
-            <a:off x="49849" y="3275075"/>
-            <a:ext cx="4198987" cy="2579435"/>
+            <a:off x="69347" y="3175368"/>
+            <a:ext cx="4773335" cy="2673803"/>
           </a:xfrm>
           <a:prstGeom prst="rect">
             <a:avLst/>
@@ -8192,10 +8229,10 @@
       </p:pic>
       <p:pic>
         <p:nvPicPr>
-          <p:cNvPr id="28" name="Рисунок 27">
+          <p:cNvPr id="29" name="Рисунок 28">
             <a:extLst>
               <a:ext uri="{FF2B5EF4-FFF2-40B4-BE49-F238E27FC236}">
-                <a16:creationId xmlns:a16="http://schemas.microsoft.com/office/drawing/2014/main" id="{5AD9612D-FA3A-B7AE-4412-7673A386A979}"/>
+                <a16:creationId xmlns:a16="http://schemas.microsoft.com/office/drawing/2014/main" id="{14D38556-85EF-E93B-5767-15A64A071798}"/>
               </a:ext>
             </a:extLst>
           </p:cNvPr>
@@ -8212,23 +8249,18 @@
         </p:blipFill>
         <p:spPr>
           <a:xfrm>
-            <a:off x="4302209" y="3275075"/>
-            <a:ext cx="3807692" cy="2579435"/>
-          </a:xfrm>
-          <a:prstGeom prst="rect">
-            <a:avLst/>
-          </a:prstGeom>
-          <a:ln>
-            <a:solidFill>
-              <a:schemeClr val="accent1"/>
-            </a:solidFill>
-          </a:ln>
+            <a:off x="4936167" y="3162077"/>
+            <a:ext cx="3136484" cy="2673385"/>
+          </a:xfrm>
+          <a:prstGeom prst="rect">
+            <a:avLst/>
+          </a:prstGeom>
         </p:spPr>
       </p:pic>
     </p:spTree>
     <p:extLst>
       <p:ext uri="{BB962C8B-B14F-4D97-AF65-F5344CB8AC3E}">
-        <p14:creationId xmlns:p14="http://schemas.microsoft.com/office/powerpoint/2010/main" val="545131185"/>
+        <p14:creationId xmlns:p14="http://schemas.microsoft.com/office/powerpoint/2010/main" val="2115762984"/>
       </p:ext>
     </p:extLst>
   </p:cSld>
@@ -8257,20 +8289,14 @@
       </p:grpSpPr>
       <p:sp>
         <p:nvSpPr>
-          <p:cNvPr id="2" name="Rectangle 1">
-            <a:extLst>
-              <a:ext uri="{FF2B5EF4-FFF2-40B4-BE49-F238E27FC236}">
-                <a16:creationId xmlns:a16="http://schemas.microsoft.com/office/drawing/2014/main" id="{F43DBE52-9231-BE18-E624-E8F490BF73BD}"/>
-              </a:ext>
-            </a:extLst>
-          </p:cNvPr>
+          <p:cNvPr id="2" name="Rectangle 1"/>
           <p:cNvSpPr/>
           <p:nvPr/>
         </p:nvSpPr>
         <p:spPr>
           <a:xfrm>
-            <a:off x="6387" y="458804"/>
-            <a:ext cx="8159749" cy="5651486"/>
+            <a:off x="1" y="468327"/>
+            <a:ext cx="8159750" cy="5649640"/>
           </a:xfrm>
           <a:prstGeom prst="rect">
             <a:avLst/>
@@ -8300,26 +8326,21 @@
           <a:bodyPr rtlCol="0" anchor="ctr"/>
           <a:lstStyle/>
           <a:p>
-            <a:endParaRPr lang="ru-RU" sz="1360" dirty="0"/>
-          </a:p>
-        </p:txBody>
-      </p:sp>
-      <p:sp>
-        <p:nvSpPr>
-          <p:cNvPr id="3" name="Rectangle 2">
-            <a:extLst>
-              <a:ext uri="{FF2B5EF4-FFF2-40B4-BE49-F238E27FC236}">
-                <a16:creationId xmlns:a16="http://schemas.microsoft.com/office/drawing/2014/main" id="{8A2FC3A1-ADD4-B56B-8C25-4129D30191CD}"/>
-              </a:ext>
-            </a:extLst>
-          </p:cNvPr>
+            <a:pPr algn="ctr"/>
+            <a:endParaRPr sz="1360"/>
+          </a:p>
+        </p:txBody>
+      </p:sp>
+      <p:sp>
+        <p:nvSpPr>
+          <p:cNvPr id="3" name="Rectangle 2"/>
           <p:cNvSpPr/>
           <p:nvPr/>
         </p:nvSpPr>
         <p:spPr>
           <a:xfrm>
-            <a:off x="-6387" y="0"/>
-            <a:ext cx="8172522" cy="932968"/>
+            <a:off x="2" y="1845"/>
+            <a:ext cx="8159751" cy="932968"/>
           </a:xfrm>
           <a:prstGeom prst="rect">
             <a:avLst/>
@@ -8356,20 +8377,14 @@
       </p:sp>
       <p:sp>
         <p:nvSpPr>
-          <p:cNvPr id="4" name="TextBox 3">
-            <a:extLst>
-              <a:ext uri="{FF2B5EF4-FFF2-40B4-BE49-F238E27FC236}">
-                <a16:creationId xmlns:a16="http://schemas.microsoft.com/office/drawing/2014/main" id="{B56F779C-45B7-CE8B-AED9-D343B2FC6437}"/>
-              </a:ext>
-            </a:extLst>
-          </p:cNvPr>
+          <p:cNvPr id="4" name="TextBox 3"/>
           <p:cNvSpPr txBox="1"/>
           <p:nvPr/>
         </p:nvSpPr>
         <p:spPr>
           <a:xfrm>
-            <a:off x="146022" y="209296"/>
-            <a:ext cx="8638598" cy="523220"/>
+            <a:off x="229983" y="137443"/>
+            <a:ext cx="7615825" cy="584775"/>
           </a:xfrm>
           <a:prstGeom prst="rect">
             <a:avLst/>
@@ -8384,31 +8399,31 @@
           <a:p>
             <a:pPr algn="l"/>
             <a:r>
-              <a:rPr lang="ru-RU" sz="2800" b="1" dirty="0">
+              <a:rPr sz="3200" b="1" dirty="0" err="1">
                 <a:solidFill>
                   <a:srgbClr val="FFFFFF"/>
                 </a:solidFill>
               </a:rPr>
-              <a:t>О</a:t>
-            </a:r>
-            <a:r>
-              <a:rPr sz="2800" b="1" dirty="0" err="1">
+              <a:t>Тест-кейсы</a:t>
+            </a:r>
+            <a:r>
+              <a:rPr sz="3200" b="1" dirty="0">
                 <a:solidFill>
                   <a:srgbClr val="FFFFFF"/>
                 </a:solidFill>
               </a:rPr>
-              <a:t>рганизаци</a:t>
-            </a:r>
-            <a:r>
-              <a:rPr lang="ru-RU" sz="2800" b="1" dirty="0">
+              <a:t> </a:t>
+            </a:r>
+            <a:r>
+              <a:rPr sz="3200" b="1" dirty="0" err="1">
                 <a:solidFill>
                   <a:srgbClr val="FFFFFF"/>
                 </a:solidFill>
               </a:rPr>
-              <a:t>я</a:t>
-            </a:r>
-            <a:r>
-              <a:rPr sz="2800" b="1" dirty="0">
+              <a:t>для</a:t>
+            </a:r>
+            <a:r>
+              <a:rPr sz="3200" b="1" dirty="0">
                 <a:solidFill>
                   <a:srgbClr val="FFFFFF"/>
                 </a:solidFill>
@@ -8416,90 +8431,50 @@
               <a:t> </a:t>
             </a:r>
             <a:r>
-              <a:rPr sz="2800" b="1" dirty="0" err="1">
+              <a:rPr sz="3200" b="1" dirty="0" err="1">
                 <a:solidFill>
                   <a:srgbClr val="FFFFFF"/>
                 </a:solidFill>
               </a:rPr>
-              <a:t>кода</a:t>
-            </a:r>
-            <a:r>
-              <a:rPr sz="2800" b="1" dirty="0">
+              <a:t>сайта</a:t>
+            </a:r>
+            <a:r>
+              <a:rPr sz="3200" b="1" dirty="0">
                 <a:solidFill>
                   <a:srgbClr val="FFFFFF"/>
                 </a:solidFill>
               </a:rPr>
-              <a:t> — Page Object Model (POM)</a:t>
-            </a:r>
-          </a:p>
-        </p:txBody>
-      </p:sp>
-      <p:sp>
-        <p:nvSpPr>
-          <p:cNvPr id="5" name="Rectangle 4">
-            <a:extLst>
-              <a:ext uri="{FF2B5EF4-FFF2-40B4-BE49-F238E27FC236}">
-                <a16:creationId xmlns:a16="http://schemas.microsoft.com/office/drawing/2014/main" id="{424A583F-8958-A77E-AC68-8C1AAED4AD2A}"/>
-              </a:ext>
-            </a:extLst>
-          </p:cNvPr>
+              <a:t> «</a:t>
+            </a:r>
+            <a:r>
+              <a:rPr sz="3200" b="1" dirty="0" err="1">
+                <a:solidFill>
+                  <a:srgbClr val="FFFFFF"/>
+                </a:solidFill>
+              </a:rPr>
+              <a:t>Alimma</a:t>
+            </a:r>
+            <a:r>
+              <a:rPr sz="3200" b="1" dirty="0">
+                <a:solidFill>
+                  <a:srgbClr val="FFFFFF"/>
+                </a:solidFill>
+              </a:rPr>
+              <a:t>»</a:t>
+            </a:r>
+          </a:p>
+        </p:txBody>
+      </p:sp>
+      <p:sp>
+        <p:nvSpPr>
+          <p:cNvPr id="7" name="Rectangle 6"/>
           <p:cNvSpPr/>
           <p:nvPr/>
         </p:nvSpPr>
         <p:spPr>
           <a:xfrm>
-            <a:off x="-6387" y="911109"/>
-            <a:ext cx="8172523" cy="45719"/>
-          </a:xfrm>
-          <a:prstGeom prst="rect">
-            <a:avLst/>
-          </a:prstGeom>
-          <a:solidFill>
-            <a:srgbClr val="009BD8"/>
-          </a:solidFill>
-          <a:ln>
-            <a:noFill/>
-          </a:ln>
-        </p:spPr>
-        <p:style>
-          <a:lnRef idx="1">
-            <a:schemeClr val="accent1"/>
-          </a:lnRef>
-          <a:fillRef idx="3">
-            <a:schemeClr val="accent1"/>
-          </a:fillRef>
-          <a:effectRef idx="2">
-            <a:schemeClr val="accent1"/>
-          </a:effectRef>
-          <a:fontRef idx="minor">
-            <a:schemeClr val="lt1"/>
-          </a:fontRef>
-        </p:style>
-        <p:txBody>
-          <a:bodyPr rtlCol="0" anchor="ctr"/>
-          <a:lstStyle/>
-          <a:p>
-            <a:pPr algn="ctr"/>
-            <a:endParaRPr sz="1360"/>
-          </a:p>
-        </p:txBody>
-      </p:sp>
-      <p:sp>
-        <p:nvSpPr>
-          <p:cNvPr id="6" name="Rectangle 5">
-            <a:extLst>
-              <a:ext uri="{FF2B5EF4-FFF2-40B4-BE49-F238E27FC236}">
-                <a16:creationId xmlns:a16="http://schemas.microsoft.com/office/drawing/2014/main" id="{F78FEEE5-D041-42B6-4AF3-6DC50E4FBFA0}"/>
-              </a:ext>
-            </a:extLst>
-          </p:cNvPr>
-          <p:cNvSpPr/>
-          <p:nvPr/>
-        </p:nvSpPr>
-        <p:spPr>
-          <a:xfrm>
-            <a:off x="0" y="5882123"/>
-            <a:ext cx="8172522" cy="241877"/>
+            <a:off x="1" y="5894849"/>
+            <a:ext cx="8159752" cy="223117"/>
           </a:xfrm>
           <a:prstGeom prst="rect">
             <a:avLst/>
@@ -8536,70 +8511,14 @@
       </p:sp>
       <p:sp>
         <p:nvSpPr>
-          <p:cNvPr id="7" name="Rectangle 27">
-            <a:extLst>
-              <a:ext uri="{FF2B5EF4-FFF2-40B4-BE49-F238E27FC236}">
-                <a16:creationId xmlns:a16="http://schemas.microsoft.com/office/drawing/2014/main" id="{923B6111-71A5-AAD4-6B02-C25ECAC4F72E}"/>
-              </a:ext>
-            </a:extLst>
-          </p:cNvPr>
-          <p:cNvSpPr/>
-          <p:nvPr/>
-        </p:nvSpPr>
-        <p:spPr>
-          <a:xfrm>
-            <a:off x="0" y="989215"/>
-            <a:ext cx="8166135" cy="747230"/>
-          </a:xfrm>
-          <a:prstGeom prst="rect">
-            <a:avLst/>
-          </a:prstGeom>
-          <a:solidFill>
-            <a:srgbClr val="1A5C8A"/>
-          </a:solidFill>
-          <a:ln>
-            <a:noFill/>
-          </a:ln>
-        </p:spPr>
-        <p:style>
-          <a:lnRef idx="1">
-            <a:schemeClr val="accent1"/>
-          </a:lnRef>
-          <a:fillRef idx="3">
-            <a:schemeClr val="accent1"/>
-          </a:fillRef>
-          <a:effectRef idx="2">
-            <a:schemeClr val="accent1"/>
-          </a:effectRef>
-          <a:fontRef idx="minor">
-            <a:schemeClr val="lt1"/>
-          </a:fontRef>
-        </p:style>
-        <p:txBody>
-          <a:bodyPr rtlCol="0" anchor="ctr"/>
-          <a:lstStyle/>
-          <a:p>
-            <a:pPr algn="ctr"/>
-            <a:endParaRPr sz="1360"/>
-          </a:p>
-        </p:txBody>
-      </p:sp>
-      <p:sp>
-        <p:nvSpPr>
-          <p:cNvPr id="8" name="TextBox 7">
-            <a:extLst>
-              <a:ext uri="{FF2B5EF4-FFF2-40B4-BE49-F238E27FC236}">
-                <a16:creationId xmlns:a16="http://schemas.microsoft.com/office/drawing/2014/main" id="{E6807D28-988B-877B-0AF2-89CE0169C004}"/>
-              </a:ext>
-            </a:extLst>
-          </p:cNvPr>
+          <p:cNvPr id="9" name="TextBox 8"/>
           <p:cNvSpPr txBox="1"/>
           <p:nvPr/>
         </p:nvSpPr>
         <p:spPr>
           <a:xfrm>
-            <a:off x="8842" y="1025635"/>
-            <a:ext cx="2248583" cy="584775"/>
+            <a:off x="7545632" y="5848686"/>
+            <a:ext cx="600353" cy="307777"/>
           </a:xfrm>
           <a:prstGeom prst="rect">
             <a:avLst/>
@@ -8612,250 +8531,6 @@
           </a:bodyPr>
           <a:lstStyle/>
           <a:p>
-            <a:pPr algn="l"/>
-            <a:r>
-              <a:rPr sz="3200" b="1" dirty="0">
-                <a:solidFill>
-                  <a:srgbClr val="FFFFFF"/>
-                </a:solidFill>
-              </a:rPr>
-              <a:t>CONTROLS</a:t>
-            </a:r>
-          </a:p>
-        </p:txBody>
-      </p:sp>
-      <p:sp>
-        <p:nvSpPr>
-          <p:cNvPr id="9" name="TextBox 8">
-            <a:extLst>
-              <a:ext uri="{FF2B5EF4-FFF2-40B4-BE49-F238E27FC236}">
-                <a16:creationId xmlns:a16="http://schemas.microsoft.com/office/drawing/2014/main" id="{3DBDFBAE-5A6C-7403-41ED-CECA3144DF97}"/>
-              </a:ext>
-            </a:extLst>
-          </p:cNvPr>
-          <p:cNvSpPr txBox="1"/>
-          <p:nvPr/>
-        </p:nvSpPr>
-        <p:spPr>
-          <a:xfrm>
-            <a:off x="2179382" y="1078789"/>
-            <a:ext cx="3800984" cy="523220"/>
-          </a:xfrm>
-          <a:prstGeom prst="rect">
-            <a:avLst/>
-          </a:prstGeom>
-          <a:noFill/>
-        </p:spPr>
-        <p:txBody>
-          <a:bodyPr wrap="square">
-            <a:spAutoFit/>
-          </a:bodyPr>
-          <a:lstStyle/>
-          <a:p>
-            <a:pPr algn="l"/>
-            <a:r>
-              <a:rPr lang="ru-RU" sz="2800" dirty="0">
-                <a:solidFill>
-                  <a:srgbClr val="AACCFF"/>
-                </a:solidFill>
-              </a:rPr>
-              <a:t>Элементы управления</a:t>
-            </a:r>
-            <a:endParaRPr sz="2800" dirty="0">
-              <a:solidFill>
-                <a:srgbClr val="AACCFF"/>
-              </a:solidFill>
-            </a:endParaRPr>
-          </a:p>
-        </p:txBody>
-      </p:sp>
-      <p:sp>
-        <p:nvSpPr>
-          <p:cNvPr id="10" name="Rectangle 30">
-            <a:extLst>
-              <a:ext uri="{FF2B5EF4-FFF2-40B4-BE49-F238E27FC236}">
-                <a16:creationId xmlns:a16="http://schemas.microsoft.com/office/drawing/2014/main" id="{16AF98BD-26F4-148E-127F-B4EFB3E14884}"/>
-              </a:ext>
-            </a:extLst>
-          </p:cNvPr>
-          <p:cNvSpPr/>
-          <p:nvPr/>
-        </p:nvSpPr>
-        <p:spPr>
-          <a:xfrm>
-            <a:off x="-2454" y="1798094"/>
-            <a:ext cx="8172523" cy="655465"/>
-          </a:xfrm>
-          <a:prstGeom prst="rect">
-            <a:avLst/>
-          </a:prstGeom>
-          <a:solidFill>
-            <a:srgbClr val="FFFFFF"/>
-          </a:solidFill>
-          <a:ln>
-            <a:noFill/>
-          </a:ln>
-        </p:spPr>
-        <p:style>
-          <a:lnRef idx="1">
-            <a:schemeClr val="accent1"/>
-          </a:lnRef>
-          <a:fillRef idx="3">
-            <a:schemeClr val="accent1"/>
-          </a:fillRef>
-          <a:effectRef idx="2">
-            <a:schemeClr val="accent1"/>
-          </a:effectRef>
-          <a:fontRef idx="minor">
-            <a:schemeClr val="lt1"/>
-          </a:fontRef>
-        </p:style>
-        <p:txBody>
-          <a:bodyPr rtlCol="0" anchor="ctr"/>
-          <a:lstStyle/>
-          <a:p>
-            <a:pPr algn="ctr"/>
-            <a:endParaRPr sz="1360"/>
-          </a:p>
-        </p:txBody>
-      </p:sp>
-      <p:sp>
-        <p:nvSpPr>
-          <p:cNvPr id="11" name="TextBox 10">
-            <a:extLst>
-              <a:ext uri="{FF2B5EF4-FFF2-40B4-BE49-F238E27FC236}">
-                <a16:creationId xmlns:a16="http://schemas.microsoft.com/office/drawing/2014/main" id="{CF050870-3398-9939-AA79-8C993AD0D60A}"/>
-              </a:ext>
-            </a:extLst>
-          </p:cNvPr>
-          <p:cNvSpPr txBox="1"/>
-          <p:nvPr/>
-        </p:nvSpPr>
-        <p:spPr>
-          <a:xfrm>
-            <a:off x="8842" y="1894561"/>
-            <a:ext cx="8242244" cy="461665"/>
-          </a:xfrm>
-          <a:prstGeom prst="rect">
-            <a:avLst/>
-          </a:prstGeom>
-          <a:noFill/>
-        </p:spPr>
-        <p:txBody>
-          <a:bodyPr wrap="square">
-            <a:spAutoFit/>
-          </a:bodyPr>
-          <a:lstStyle/>
-          <a:p>
-            <a:pPr algn="l"/>
-            <a:r>
-              <a:rPr sz="2400" dirty="0" err="1">
-                <a:solidFill>
-                  <a:srgbClr val="444455"/>
-                </a:solidFill>
-              </a:rPr>
-              <a:t>Минимальные</a:t>
-            </a:r>
-            <a:r>
-              <a:rPr sz="2400" dirty="0">
-                <a:solidFill>
-                  <a:srgbClr val="444455"/>
-                </a:solidFill>
-              </a:rPr>
-              <a:t> </a:t>
-            </a:r>
-            <a:r>
-              <a:rPr sz="2400" dirty="0" err="1">
-                <a:solidFill>
-                  <a:srgbClr val="444455"/>
-                </a:solidFill>
-              </a:rPr>
-              <a:t>элементы</a:t>
-            </a:r>
-            <a:r>
-              <a:rPr sz="2400" dirty="0">
-                <a:solidFill>
-                  <a:srgbClr val="444455"/>
-                </a:solidFill>
-              </a:rPr>
-              <a:t>:</a:t>
-            </a:r>
-            <a:r>
-              <a:rPr lang="ru-RU" sz="2400" dirty="0">
-                <a:solidFill>
-                  <a:srgbClr val="444455"/>
-                </a:solidFill>
-              </a:rPr>
-              <a:t> </a:t>
-            </a:r>
-            <a:r>
-              <a:rPr lang="en-US" sz="2400" dirty="0" err="1">
-                <a:solidFill>
-                  <a:srgbClr val="444455"/>
-                </a:solidFill>
-              </a:rPr>
-              <a:t>InputForm</a:t>
-            </a:r>
-            <a:r>
-              <a:rPr lang="en-US" sz="2400" dirty="0">
-                <a:solidFill>
-                  <a:srgbClr val="444455"/>
-                </a:solidFill>
-              </a:rPr>
-              <a:t>, </a:t>
-            </a:r>
-            <a:r>
-              <a:rPr lang="en-US" sz="2400" dirty="0" err="1">
-                <a:solidFill>
-                  <a:srgbClr val="444455"/>
-                </a:solidFill>
-              </a:rPr>
-              <a:t>ButtonForm</a:t>
-            </a:r>
-            <a:r>
-              <a:rPr lang="en-US" sz="2400" dirty="0">
-                <a:solidFill>
-                  <a:srgbClr val="444455"/>
-                </a:solidFill>
-              </a:rPr>
-              <a:t>, Pagination</a:t>
-            </a:r>
-            <a:endParaRPr sz="2400" dirty="0">
-              <a:solidFill>
-                <a:srgbClr val="444455"/>
-              </a:solidFill>
-            </a:endParaRPr>
-          </a:p>
-        </p:txBody>
-      </p:sp>
-      <p:sp>
-        <p:nvSpPr>
-          <p:cNvPr id="12" name="TextBox 11">
-            <a:extLst>
-              <a:ext uri="{FF2B5EF4-FFF2-40B4-BE49-F238E27FC236}">
-                <a16:creationId xmlns:a16="http://schemas.microsoft.com/office/drawing/2014/main" id="{C8A29572-9550-A16D-66AD-247C778BDB78}"/>
-              </a:ext>
-            </a:extLst>
-          </p:cNvPr>
-          <p:cNvSpPr txBox="1"/>
-          <p:nvPr/>
-        </p:nvSpPr>
-        <p:spPr>
-          <a:xfrm>
-            <a:off x="7675880" y="5849172"/>
-            <a:ext cx="477483" cy="307777"/>
-          </a:xfrm>
-          <a:prstGeom prst="rect">
-            <a:avLst/>
-          </a:prstGeom>
-          <a:noFill/>
-        </p:spPr>
-        <p:txBody>
-          <a:bodyPr wrap="square">
-            <a:spAutoFit/>
-          </a:bodyPr>
-          <a:lstStyle/>
-          <a:p>
             <a:pPr algn="r"/>
             <a:r>
               <a:rPr lang="ru-RU" sz="1400" dirty="0">
@@ -8864,476 +8539,6 @@
                 </a:solidFill>
               </a:rPr>
               <a:t>13</a:t>
-            </a:r>
-            <a:endParaRPr sz="1400" dirty="0">
-              <a:solidFill>
-                <a:srgbClr val="009BD8"/>
-              </a:solidFill>
-            </a:endParaRPr>
-          </a:p>
-        </p:txBody>
-      </p:sp>
-      <p:sp>
-        <p:nvSpPr>
-          <p:cNvPr id="14" name="Rectangle 30">
-            <a:extLst>
-              <a:ext uri="{FF2B5EF4-FFF2-40B4-BE49-F238E27FC236}">
-                <a16:creationId xmlns:a16="http://schemas.microsoft.com/office/drawing/2014/main" id="{BE838E82-CA93-7822-D815-6C685548CEB7}"/>
-              </a:ext>
-            </a:extLst>
-          </p:cNvPr>
-          <p:cNvSpPr/>
-          <p:nvPr/>
-        </p:nvSpPr>
-        <p:spPr>
-          <a:xfrm>
-            <a:off x="-7003" y="2497927"/>
-            <a:ext cx="8170069" cy="619783"/>
-          </a:xfrm>
-          <a:prstGeom prst="rect">
-            <a:avLst/>
-          </a:prstGeom>
-          <a:solidFill>
-            <a:srgbClr val="FFFFFF"/>
-          </a:solidFill>
-          <a:ln>
-            <a:noFill/>
-          </a:ln>
-        </p:spPr>
-        <p:style>
-          <a:lnRef idx="1">
-            <a:schemeClr val="accent1"/>
-          </a:lnRef>
-          <a:fillRef idx="3">
-            <a:schemeClr val="accent1"/>
-          </a:fillRef>
-          <a:effectRef idx="2">
-            <a:schemeClr val="accent1"/>
-          </a:effectRef>
-          <a:fontRef idx="minor">
-            <a:schemeClr val="lt1"/>
-          </a:fontRef>
-        </p:style>
-        <p:txBody>
-          <a:bodyPr rtlCol="0" anchor="ctr"/>
-          <a:lstStyle/>
-          <a:p>
-            <a:pPr algn="ctr"/>
-            <a:endParaRPr sz="1360"/>
-          </a:p>
-        </p:txBody>
-      </p:sp>
-      <p:sp>
-        <p:nvSpPr>
-          <p:cNvPr id="18" name="TextBox 17">
-            <a:extLst>
-              <a:ext uri="{FF2B5EF4-FFF2-40B4-BE49-F238E27FC236}">
-                <a16:creationId xmlns:a16="http://schemas.microsoft.com/office/drawing/2014/main" id="{10E3F7E2-D600-4EA6-689C-C700060582FA}"/>
-              </a:ext>
-            </a:extLst>
-          </p:cNvPr>
-          <p:cNvSpPr txBox="1"/>
-          <p:nvPr/>
-        </p:nvSpPr>
-        <p:spPr>
-          <a:xfrm>
-            <a:off x="8842" y="2460513"/>
-            <a:ext cx="7822896" cy="523220"/>
-          </a:xfrm>
-          <a:prstGeom prst="rect">
-            <a:avLst/>
-          </a:prstGeom>
-          <a:noFill/>
-        </p:spPr>
-        <p:txBody>
-          <a:bodyPr wrap="square">
-            <a:spAutoFit/>
-          </a:bodyPr>
-          <a:lstStyle/>
-          <a:p>
-            <a:pPr algn="l"/>
-            <a:r>
-              <a:rPr lang="ru-RU" sz="2800" dirty="0">
-                <a:solidFill>
-                  <a:srgbClr val="444455"/>
-                </a:solidFill>
-              </a:rPr>
-              <a:t>Предоставляют методы: </a:t>
-            </a:r>
-            <a:r>
-              <a:rPr lang="en-US" sz="2800" dirty="0">
-                <a:solidFill>
-                  <a:srgbClr val="444455"/>
-                </a:solidFill>
-              </a:rPr>
-              <a:t>click(), fill(), </a:t>
-            </a:r>
-            <a:r>
-              <a:rPr lang="en-US" sz="2800" dirty="0" err="1">
-                <a:solidFill>
-                  <a:srgbClr val="444455"/>
-                </a:solidFill>
-              </a:rPr>
-              <a:t>get_error</a:t>
-            </a:r>
-            <a:r>
-              <a:rPr lang="en-US" sz="2800" dirty="0">
-                <a:solidFill>
-                  <a:srgbClr val="444455"/>
-                </a:solidFill>
-              </a:rPr>
-              <a:t>()</a:t>
-            </a:r>
-            <a:endParaRPr sz="2800" dirty="0">
-              <a:solidFill>
-                <a:srgbClr val="444455"/>
-              </a:solidFill>
-            </a:endParaRPr>
-          </a:p>
-        </p:txBody>
-      </p:sp>
-      <p:pic>
-        <p:nvPicPr>
-          <p:cNvPr id="25" name="Рисунок 24">
-            <a:extLst>
-              <a:ext uri="{FF2B5EF4-FFF2-40B4-BE49-F238E27FC236}">
-                <a16:creationId xmlns:a16="http://schemas.microsoft.com/office/drawing/2014/main" id="{27906CB1-FF3E-E24E-B9BC-980B0604AB1A}"/>
-              </a:ext>
-            </a:extLst>
-          </p:cNvPr>
-          <p:cNvPicPr>
-            <a:picLocks noChangeAspect="1"/>
-          </p:cNvPicPr>
-          <p:nvPr/>
-        </p:nvPicPr>
-        <p:blipFill>
-          <a:blip r:embed="rId2"/>
-          <a:stretch>
-            <a:fillRect/>
-          </a:stretch>
-        </p:blipFill>
-        <p:spPr>
-          <a:xfrm>
-            <a:off x="69347" y="3175368"/>
-            <a:ext cx="4773335" cy="2673803"/>
-          </a:xfrm>
-          <a:prstGeom prst="rect">
-            <a:avLst/>
-          </a:prstGeom>
-        </p:spPr>
-      </p:pic>
-      <p:pic>
-        <p:nvPicPr>
-          <p:cNvPr id="29" name="Рисунок 28">
-            <a:extLst>
-              <a:ext uri="{FF2B5EF4-FFF2-40B4-BE49-F238E27FC236}">
-                <a16:creationId xmlns:a16="http://schemas.microsoft.com/office/drawing/2014/main" id="{14D38556-85EF-E93B-5767-15A64A071798}"/>
-              </a:ext>
-            </a:extLst>
-          </p:cNvPr>
-          <p:cNvPicPr>
-            <a:picLocks noChangeAspect="1"/>
-          </p:cNvPicPr>
-          <p:nvPr/>
-        </p:nvPicPr>
-        <p:blipFill>
-          <a:blip r:embed="rId3"/>
-          <a:stretch>
-            <a:fillRect/>
-          </a:stretch>
-        </p:blipFill>
-        <p:spPr>
-          <a:xfrm>
-            <a:off x="4936167" y="3162077"/>
-            <a:ext cx="3136484" cy="2673385"/>
-          </a:xfrm>
-          <a:prstGeom prst="rect">
-            <a:avLst/>
-          </a:prstGeom>
-        </p:spPr>
-      </p:pic>
-    </p:spTree>
-    <p:extLst>
-      <p:ext uri="{BB962C8B-B14F-4D97-AF65-F5344CB8AC3E}">
-        <p14:creationId xmlns:p14="http://schemas.microsoft.com/office/powerpoint/2010/main" val="2115762984"/>
-      </p:ext>
-    </p:extLst>
-  </p:cSld>
-  <p:clrMapOvr>
-    <a:masterClrMapping/>
-  </p:clrMapOvr>
-</p:sld>
-</file>
-
-<file path=ppt/slides/slide14.xml><?xml version="1.0" encoding="utf-8"?>
-<p:sld xmlns:a="http://schemas.openxmlformats.org/drawingml/2006/main" xmlns:r="http://schemas.openxmlformats.org/officeDocument/2006/relationships" xmlns:p="http://schemas.openxmlformats.org/presentationml/2006/main">
-  <p:cSld>
-    <p:spTree>
-      <p:nvGrpSpPr>
-        <p:cNvPr id="1" name=""/>
-        <p:cNvGrpSpPr/>
-        <p:nvPr/>
-      </p:nvGrpSpPr>
-      <p:grpSpPr>
-        <a:xfrm>
-          <a:off x="0" y="0"/>
-          <a:ext cx="0" cy="0"/>
-          <a:chOff x="0" y="0"/>
-          <a:chExt cx="0" cy="0"/>
-        </a:xfrm>
-      </p:grpSpPr>
-      <p:sp>
-        <p:nvSpPr>
-          <p:cNvPr id="2" name="Rectangle 1"/>
-          <p:cNvSpPr/>
-          <p:nvPr/>
-        </p:nvSpPr>
-        <p:spPr>
-          <a:xfrm>
-            <a:off x="1" y="468327"/>
-            <a:ext cx="8159750" cy="5649640"/>
-          </a:xfrm>
-          <a:prstGeom prst="rect">
-            <a:avLst/>
-          </a:prstGeom>
-          <a:solidFill>
-            <a:srgbClr val="F0F7FF"/>
-          </a:solidFill>
-          <a:ln>
-            <a:noFill/>
-          </a:ln>
-        </p:spPr>
-        <p:style>
-          <a:lnRef idx="1">
-            <a:schemeClr val="accent1"/>
-          </a:lnRef>
-          <a:fillRef idx="3">
-            <a:schemeClr val="accent1"/>
-          </a:fillRef>
-          <a:effectRef idx="2">
-            <a:schemeClr val="accent1"/>
-          </a:effectRef>
-          <a:fontRef idx="minor">
-            <a:schemeClr val="lt1"/>
-          </a:fontRef>
-        </p:style>
-        <p:txBody>
-          <a:bodyPr rtlCol="0" anchor="ctr"/>
-          <a:lstStyle/>
-          <a:p>
-            <a:pPr algn="ctr"/>
-            <a:endParaRPr sz="1360"/>
-          </a:p>
-        </p:txBody>
-      </p:sp>
-      <p:sp>
-        <p:nvSpPr>
-          <p:cNvPr id="3" name="Rectangle 2"/>
-          <p:cNvSpPr/>
-          <p:nvPr/>
-        </p:nvSpPr>
-        <p:spPr>
-          <a:xfrm>
-            <a:off x="2" y="1845"/>
-            <a:ext cx="8159751" cy="932968"/>
-          </a:xfrm>
-          <a:prstGeom prst="rect">
-            <a:avLst/>
-          </a:prstGeom>
-          <a:solidFill>
-            <a:srgbClr val="0D2B55"/>
-          </a:solidFill>
-          <a:ln>
-            <a:noFill/>
-          </a:ln>
-        </p:spPr>
-        <p:style>
-          <a:lnRef idx="1">
-            <a:schemeClr val="accent1"/>
-          </a:lnRef>
-          <a:fillRef idx="3">
-            <a:schemeClr val="accent1"/>
-          </a:fillRef>
-          <a:effectRef idx="2">
-            <a:schemeClr val="accent1"/>
-          </a:effectRef>
-          <a:fontRef idx="minor">
-            <a:schemeClr val="lt1"/>
-          </a:fontRef>
-        </p:style>
-        <p:txBody>
-          <a:bodyPr rtlCol="0" anchor="ctr"/>
-          <a:lstStyle/>
-          <a:p>
-            <a:pPr algn="ctr"/>
-            <a:endParaRPr sz="1360"/>
-          </a:p>
-        </p:txBody>
-      </p:sp>
-      <p:sp>
-        <p:nvSpPr>
-          <p:cNvPr id="4" name="TextBox 3"/>
-          <p:cNvSpPr txBox="1"/>
-          <p:nvPr/>
-        </p:nvSpPr>
-        <p:spPr>
-          <a:xfrm>
-            <a:off x="229983" y="137443"/>
-            <a:ext cx="7615825" cy="584775"/>
-          </a:xfrm>
-          <a:prstGeom prst="rect">
-            <a:avLst/>
-          </a:prstGeom>
-          <a:noFill/>
-        </p:spPr>
-        <p:txBody>
-          <a:bodyPr wrap="square">
-            <a:spAutoFit/>
-          </a:bodyPr>
-          <a:lstStyle/>
-          <a:p>
-            <a:pPr algn="l"/>
-            <a:r>
-              <a:rPr sz="3200" b="1" dirty="0" err="1">
-                <a:solidFill>
-                  <a:srgbClr val="FFFFFF"/>
-                </a:solidFill>
-              </a:rPr>
-              <a:t>Тест-кейсы</a:t>
-            </a:r>
-            <a:r>
-              <a:rPr sz="3200" b="1" dirty="0">
-                <a:solidFill>
-                  <a:srgbClr val="FFFFFF"/>
-                </a:solidFill>
-              </a:rPr>
-              <a:t> </a:t>
-            </a:r>
-            <a:r>
-              <a:rPr sz="3200" b="1" dirty="0" err="1">
-                <a:solidFill>
-                  <a:srgbClr val="FFFFFF"/>
-                </a:solidFill>
-              </a:rPr>
-              <a:t>для</a:t>
-            </a:r>
-            <a:r>
-              <a:rPr sz="3200" b="1" dirty="0">
-                <a:solidFill>
-                  <a:srgbClr val="FFFFFF"/>
-                </a:solidFill>
-              </a:rPr>
-              <a:t> </a:t>
-            </a:r>
-            <a:r>
-              <a:rPr sz="3200" b="1" dirty="0" err="1">
-                <a:solidFill>
-                  <a:srgbClr val="FFFFFF"/>
-                </a:solidFill>
-              </a:rPr>
-              <a:t>сайта</a:t>
-            </a:r>
-            <a:r>
-              <a:rPr sz="3200" b="1" dirty="0">
-                <a:solidFill>
-                  <a:srgbClr val="FFFFFF"/>
-                </a:solidFill>
-              </a:rPr>
-              <a:t> «</a:t>
-            </a:r>
-            <a:r>
-              <a:rPr sz="3200" b="1" dirty="0" err="1">
-                <a:solidFill>
-                  <a:srgbClr val="FFFFFF"/>
-                </a:solidFill>
-              </a:rPr>
-              <a:t>Alimma</a:t>
-            </a:r>
-            <a:r>
-              <a:rPr sz="3200" b="1" dirty="0">
-                <a:solidFill>
-                  <a:srgbClr val="FFFFFF"/>
-                </a:solidFill>
-              </a:rPr>
-              <a:t>»</a:t>
-            </a:r>
-          </a:p>
-        </p:txBody>
-      </p:sp>
-      <p:sp>
-        <p:nvSpPr>
-          <p:cNvPr id="7" name="Rectangle 6"/>
-          <p:cNvSpPr/>
-          <p:nvPr/>
-        </p:nvSpPr>
-        <p:spPr>
-          <a:xfrm>
-            <a:off x="1" y="5894849"/>
-            <a:ext cx="8159752" cy="223117"/>
-          </a:xfrm>
-          <a:prstGeom prst="rect">
-            <a:avLst/>
-          </a:prstGeom>
-          <a:solidFill>
-            <a:srgbClr val="0D2B55"/>
-          </a:solidFill>
-          <a:ln>
-            <a:noFill/>
-          </a:ln>
-        </p:spPr>
-        <p:style>
-          <a:lnRef idx="1">
-            <a:schemeClr val="accent1"/>
-          </a:lnRef>
-          <a:fillRef idx="3">
-            <a:schemeClr val="accent1"/>
-          </a:fillRef>
-          <a:effectRef idx="2">
-            <a:schemeClr val="accent1"/>
-          </a:effectRef>
-          <a:fontRef idx="minor">
-            <a:schemeClr val="lt1"/>
-          </a:fontRef>
-        </p:style>
-        <p:txBody>
-          <a:bodyPr rtlCol="0" anchor="ctr"/>
-          <a:lstStyle/>
-          <a:p>
-            <a:pPr algn="ctr"/>
-            <a:endParaRPr sz="1360"/>
-          </a:p>
-        </p:txBody>
-      </p:sp>
-      <p:sp>
-        <p:nvSpPr>
-          <p:cNvPr id="9" name="TextBox 8"/>
-          <p:cNvSpPr txBox="1"/>
-          <p:nvPr/>
-        </p:nvSpPr>
-        <p:spPr>
-          <a:xfrm>
-            <a:off x="7545632" y="5848686"/>
-            <a:ext cx="600353" cy="307777"/>
-          </a:xfrm>
-          <a:prstGeom prst="rect">
-            <a:avLst/>
-          </a:prstGeom>
-          <a:noFill/>
-        </p:spPr>
-        <p:txBody>
-          <a:bodyPr wrap="square">
-            <a:spAutoFit/>
-          </a:bodyPr>
-          <a:lstStyle/>
-          <a:p>
-            <a:pPr algn="r"/>
-            <a:r>
-              <a:rPr lang="ru-RU" sz="1400" dirty="0">
-                <a:solidFill>
-                  <a:srgbClr val="009BD8"/>
-                </a:solidFill>
-              </a:rPr>
-              <a:t>14</a:t>
             </a:r>
             <a:endParaRPr sz="1400" dirty="0">
               <a:solidFill>
@@ -12066,6 +11271,839 @@
 </p:sld>
 </file>
 
+<file path=ppt/slides/slide14.xml><?xml version="1.0" encoding="utf-8"?>
+<p:sld xmlns:a="http://schemas.openxmlformats.org/drawingml/2006/main" xmlns:r="http://schemas.openxmlformats.org/officeDocument/2006/relationships" xmlns:p="http://schemas.openxmlformats.org/presentationml/2006/main">
+  <p:cSld>
+    <p:spTree>
+      <p:nvGrpSpPr>
+        <p:cNvPr id="1" name=""/>
+        <p:cNvGrpSpPr/>
+        <p:nvPr/>
+      </p:nvGrpSpPr>
+      <p:grpSpPr>
+        <a:xfrm>
+          <a:off x="0" y="0"/>
+          <a:ext cx="0" cy="0"/>
+          <a:chOff x="0" y="0"/>
+          <a:chExt cx="0" cy="0"/>
+        </a:xfrm>
+      </p:grpSpPr>
+      <p:sp>
+        <p:nvSpPr>
+          <p:cNvPr id="2" name="Rectangle 1"/>
+          <p:cNvSpPr/>
+          <p:nvPr/>
+        </p:nvSpPr>
+        <p:spPr>
+          <a:xfrm>
+            <a:off x="0" y="468327"/>
+            <a:ext cx="8159751" cy="5651486"/>
+          </a:xfrm>
+          <a:prstGeom prst="rect">
+            <a:avLst/>
+          </a:prstGeom>
+          <a:solidFill>
+            <a:srgbClr val="F0F7FF"/>
+          </a:solidFill>
+          <a:ln>
+            <a:noFill/>
+          </a:ln>
+        </p:spPr>
+        <p:style>
+          <a:lnRef idx="1">
+            <a:schemeClr val="accent1"/>
+          </a:lnRef>
+          <a:fillRef idx="3">
+            <a:schemeClr val="accent1"/>
+          </a:fillRef>
+          <a:effectRef idx="2">
+            <a:schemeClr val="accent1"/>
+          </a:effectRef>
+          <a:fontRef idx="minor">
+            <a:schemeClr val="lt1"/>
+          </a:fontRef>
+        </p:style>
+        <p:txBody>
+          <a:bodyPr rtlCol="0" anchor="ctr"/>
+          <a:lstStyle/>
+          <a:p>
+            <a:pPr algn="ctr"/>
+            <a:endParaRPr sz="1360"/>
+          </a:p>
+        </p:txBody>
+      </p:sp>
+      <p:sp>
+        <p:nvSpPr>
+          <p:cNvPr id="3" name="Rectangle 2"/>
+          <p:cNvSpPr/>
+          <p:nvPr/>
+        </p:nvSpPr>
+        <p:spPr>
+          <a:xfrm>
+            <a:off x="1" y="-4618"/>
+            <a:ext cx="8159750" cy="940430"/>
+          </a:xfrm>
+          <a:prstGeom prst="rect">
+            <a:avLst/>
+          </a:prstGeom>
+          <a:solidFill>
+            <a:srgbClr val="0D2B55"/>
+          </a:solidFill>
+          <a:ln>
+            <a:noFill/>
+          </a:ln>
+        </p:spPr>
+        <p:style>
+          <a:lnRef idx="1">
+            <a:schemeClr val="accent1"/>
+          </a:lnRef>
+          <a:fillRef idx="3">
+            <a:schemeClr val="accent1"/>
+          </a:fillRef>
+          <a:effectRef idx="2">
+            <a:schemeClr val="accent1"/>
+          </a:effectRef>
+          <a:fontRef idx="minor">
+            <a:schemeClr val="lt1"/>
+          </a:fontRef>
+        </p:style>
+        <p:txBody>
+          <a:bodyPr rtlCol="0" anchor="ctr"/>
+          <a:lstStyle/>
+          <a:p>
+            <a:pPr algn="ctr"/>
+            <a:endParaRPr sz="1360"/>
+          </a:p>
+        </p:txBody>
+      </p:sp>
+      <p:sp>
+        <p:nvSpPr>
+          <p:cNvPr id="4" name="TextBox 3"/>
+          <p:cNvSpPr txBox="1"/>
+          <p:nvPr/>
+        </p:nvSpPr>
+        <p:spPr>
+          <a:xfrm>
+            <a:off x="82677" y="38041"/>
+            <a:ext cx="8066068" cy="523220"/>
+          </a:xfrm>
+          <a:prstGeom prst="rect">
+            <a:avLst/>
+          </a:prstGeom>
+          <a:noFill/>
+        </p:spPr>
+        <p:txBody>
+          <a:bodyPr wrap="square">
+            <a:spAutoFit/>
+          </a:bodyPr>
+          <a:lstStyle/>
+          <a:p>
+            <a:pPr algn="l"/>
+            <a:r>
+              <a:rPr sz="2800" b="1" dirty="0" err="1">
+                <a:solidFill>
+                  <a:srgbClr val="FFFFFF"/>
+                </a:solidFill>
+              </a:rPr>
+              <a:t>Отчётность</a:t>
+            </a:r>
+            <a:r>
+              <a:rPr sz="2800" b="1" dirty="0">
+                <a:solidFill>
+                  <a:srgbClr val="FFFFFF"/>
+                </a:solidFill>
+              </a:rPr>
+              <a:t> — Allure Report</a:t>
+            </a:r>
+          </a:p>
+        </p:txBody>
+      </p:sp>
+      <p:sp>
+        <p:nvSpPr>
+          <p:cNvPr id="5" name="TextBox 4"/>
+          <p:cNvSpPr txBox="1"/>
+          <p:nvPr/>
+        </p:nvSpPr>
+        <p:spPr>
+          <a:xfrm>
+            <a:off x="82677" y="459526"/>
+            <a:ext cx="7914448" cy="369332"/>
+          </a:xfrm>
+          <a:prstGeom prst="rect">
+            <a:avLst/>
+          </a:prstGeom>
+          <a:noFill/>
+        </p:spPr>
+        <p:txBody>
+          <a:bodyPr wrap="square">
+            <a:spAutoFit/>
+          </a:bodyPr>
+          <a:lstStyle/>
+          <a:p>
+            <a:pPr algn="l"/>
+            <a:r>
+              <a:rPr dirty="0" err="1">
+                <a:solidFill>
+                  <a:srgbClr val="009BD8"/>
+                </a:solidFill>
+              </a:rPr>
+              <a:t>Визуализация</a:t>
+            </a:r>
+            <a:r>
+              <a:rPr dirty="0">
+                <a:solidFill>
+                  <a:srgbClr val="009BD8"/>
+                </a:solidFill>
+              </a:rPr>
+              <a:t> </a:t>
+            </a:r>
+            <a:r>
+              <a:rPr dirty="0" err="1">
+                <a:solidFill>
+                  <a:srgbClr val="009BD8"/>
+                </a:solidFill>
+              </a:rPr>
+              <a:t>результатов</a:t>
+            </a:r>
+            <a:r>
+              <a:rPr dirty="0">
+                <a:solidFill>
+                  <a:srgbClr val="009BD8"/>
+                </a:solidFill>
+              </a:rPr>
+              <a:t> </a:t>
+            </a:r>
+            <a:r>
+              <a:rPr dirty="0" err="1">
+                <a:solidFill>
+                  <a:srgbClr val="009BD8"/>
+                </a:solidFill>
+              </a:rPr>
+              <a:t>прогона</a:t>
+            </a:r>
+            <a:r>
+              <a:rPr dirty="0">
+                <a:solidFill>
+                  <a:srgbClr val="009BD8"/>
+                </a:solidFill>
+              </a:rPr>
+              <a:t> </a:t>
+            </a:r>
+            <a:r>
+              <a:rPr dirty="0" err="1">
+                <a:solidFill>
+                  <a:srgbClr val="009BD8"/>
+                </a:solidFill>
+              </a:rPr>
+              <a:t>тестов</a:t>
+            </a:r>
+            <a:endParaRPr dirty="0">
+              <a:solidFill>
+                <a:srgbClr val="009BD8"/>
+              </a:solidFill>
+            </a:endParaRPr>
+          </a:p>
+        </p:txBody>
+      </p:sp>
+      <p:sp>
+        <p:nvSpPr>
+          <p:cNvPr id="6" name="Rectangle 5"/>
+          <p:cNvSpPr/>
+          <p:nvPr/>
+        </p:nvSpPr>
+        <p:spPr>
+          <a:xfrm flipV="1">
+            <a:off x="-5327" y="890092"/>
+            <a:ext cx="8165077" cy="45720"/>
+          </a:xfrm>
+          <a:prstGeom prst="rect">
+            <a:avLst/>
+          </a:prstGeom>
+          <a:solidFill>
+            <a:srgbClr val="009BD8"/>
+          </a:solidFill>
+          <a:ln>
+            <a:noFill/>
+          </a:ln>
+        </p:spPr>
+        <p:style>
+          <a:lnRef idx="1">
+            <a:schemeClr val="accent1"/>
+          </a:lnRef>
+          <a:fillRef idx="3">
+            <a:schemeClr val="accent1"/>
+          </a:fillRef>
+          <a:effectRef idx="2">
+            <a:schemeClr val="accent1"/>
+          </a:effectRef>
+          <a:fontRef idx="minor">
+            <a:schemeClr val="lt1"/>
+          </a:fontRef>
+        </p:style>
+        <p:txBody>
+          <a:bodyPr rtlCol="0" anchor="ctr"/>
+          <a:lstStyle/>
+          <a:p>
+            <a:pPr algn="ctr"/>
+            <a:endParaRPr sz="1360"/>
+          </a:p>
+        </p:txBody>
+      </p:sp>
+      <p:sp>
+        <p:nvSpPr>
+          <p:cNvPr id="7" name="Rectangle 6"/>
+          <p:cNvSpPr/>
+          <p:nvPr/>
+        </p:nvSpPr>
+        <p:spPr>
+          <a:xfrm>
+            <a:off x="-5327" y="5887772"/>
+            <a:ext cx="8180259" cy="232041"/>
+          </a:xfrm>
+          <a:prstGeom prst="rect">
+            <a:avLst/>
+          </a:prstGeom>
+          <a:solidFill>
+            <a:srgbClr val="0D2B55"/>
+          </a:solidFill>
+          <a:ln>
+            <a:noFill/>
+          </a:ln>
+        </p:spPr>
+        <p:style>
+          <a:lnRef idx="1">
+            <a:schemeClr val="accent1"/>
+          </a:lnRef>
+          <a:fillRef idx="3">
+            <a:schemeClr val="accent1"/>
+          </a:fillRef>
+          <a:effectRef idx="2">
+            <a:schemeClr val="accent1"/>
+          </a:effectRef>
+          <a:fontRef idx="minor">
+            <a:schemeClr val="lt1"/>
+          </a:fontRef>
+        </p:style>
+        <p:txBody>
+          <a:bodyPr rtlCol="0" anchor="ctr"/>
+          <a:lstStyle/>
+          <a:p>
+            <a:pPr algn="ctr"/>
+            <a:endParaRPr sz="1360"/>
+          </a:p>
+        </p:txBody>
+      </p:sp>
+      <p:sp>
+        <p:nvSpPr>
+          <p:cNvPr id="9" name="TextBox 8"/>
+          <p:cNvSpPr txBox="1"/>
+          <p:nvPr/>
+        </p:nvSpPr>
+        <p:spPr>
+          <a:xfrm>
+            <a:off x="7687134" y="5842925"/>
+            <a:ext cx="456008" cy="307777"/>
+          </a:xfrm>
+          <a:prstGeom prst="rect">
+            <a:avLst/>
+          </a:prstGeom>
+          <a:noFill/>
+        </p:spPr>
+        <p:txBody>
+          <a:bodyPr wrap="square">
+            <a:spAutoFit/>
+          </a:bodyPr>
+          <a:lstStyle/>
+          <a:p>
+            <a:pPr algn="r"/>
+            <a:r>
+              <a:rPr lang="ru-RU" sz="1400" dirty="0">
+                <a:solidFill>
+                  <a:srgbClr val="009BD8"/>
+                </a:solidFill>
+              </a:rPr>
+              <a:t>14</a:t>
+            </a:r>
+            <a:endParaRPr sz="1400" dirty="0">
+              <a:solidFill>
+                <a:srgbClr val="009BD8"/>
+              </a:solidFill>
+            </a:endParaRPr>
+          </a:p>
+        </p:txBody>
+      </p:sp>
+      <p:sp>
+        <p:nvSpPr>
+          <p:cNvPr id="13" name="Rectangle 12"/>
+          <p:cNvSpPr/>
+          <p:nvPr/>
+        </p:nvSpPr>
+        <p:spPr>
+          <a:xfrm>
+            <a:off x="4309729" y="991546"/>
+            <a:ext cx="3865203" cy="4876855"/>
+          </a:xfrm>
+          <a:prstGeom prst="rect">
+            <a:avLst/>
+          </a:prstGeom>
+          <a:solidFill>
+            <a:srgbClr val="0D2B55"/>
+          </a:solidFill>
+          <a:ln>
+            <a:noFill/>
+          </a:ln>
+        </p:spPr>
+        <p:style>
+          <a:lnRef idx="1">
+            <a:schemeClr val="accent1"/>
+          </a:lnRef>
+          <a:fillRef idx="3">
+            <a:schemeClr val="accent1"/>
+          </a:fillRef>
+          <a:effectRef idx="2">
+            <a:schemeClr val="accent1"/>
+          </a:effectRef>
+          <a:fontRef idx="minor">
+            <a:schemeClr val="lt1"/>
+          </a:fontRef>
+        </p:style>
+        <p:txBody>
+          <a:bodyPr rtlCol="0" anchor="ctr"/>
+          <a:lstStyle/>
+          <a:p>
+            <a:pPr algn="ctr"/>
+            <a:endParaRPr sz="1360" dirty="0"/>
+          </a:p>
+        </p:txBody>
+      </p:sp>
+      <p:sp>
+        <p:nvSpPr>
+          <p:cNvPr id="19" name="TextBox 18"/>
+          <p:cNvSpPr txBox="1"/>
+          <p:nvPr/>
+        </p:nvSpPr>
+        <p:spPr>
+          <a:xfrm>
+            <a:off x="4408110" y="3431339"/>
+            <a:ext cx="3754787" cy="461665"/>
+          </a:xfrm>
+          <a:prstGeom prst="rect">
+            <a:avLst/>
+          </a:prstGeom>
+          <a:noFill/>
+        </p:spPr>
+        <p:txBody>
+          <a:bodyPr wrap="square">
+            <a:spAutoFit/>
+          </a:bodyPr>
+          <a:lstStyle/>
+          <a:p>
+            <a:pPr algn="l"/>
+            <a:r>
+              <a:rPr sz="2400" dirty="0" err="1">
+                <a:solidFill>
+                  <a:srgbClr val="AACCFF"/>
+                </a:solidFill>
+              </a:rPr>
+              <a:t>Декораторы</a:t>
+            </a:r>
+            <a:r>
+              <a:rPr sz="2400" dirty="0">
+                <a:solidFill>
+                  <a:srgbClr val="AACCFF"/>
+                </a:solidFill>
+              </a:rPr>
+              <a:t> в </a:t>
+            </a:r>
+            <a:r>
+              <a:rPr sz="2400" dirty="0" err="1">
+                <a:solidFill>
+                  <a:srgbClr val="AACCFF"/>
+                </a:solidFill>
+              </a:rPr>
+              <a:t>тестах</a:t>
+            </a:r>
+            <a:r>
+              <a:rPr sz="2400" dirty="0">
+                <a:solidFill>
+                  <a:srgbClr val="AACCFF"/>
+                </a:solidFill>
+              </a:rPr>
+              <a:t>:</a:t>
+            </a:r>
+          </a:p>
+        </p:txBody>
+      </p:sp>
+      <p:sp>
+        <p:nvSpPr>
+          <p:cNvPr id="20" name="Rectangle 19"/>
+          <p:cNvSpPr/>
+          <p:nvPr/>
+        </p:nvSpPr>
+        <p:spPr>
+          <a:xfrm>
+            <a:off x="4355366" y="3885606"/>
+            <a:ext cx="3738265" cy="595085"/>
+          </a:xfrm>
+          <a:prstGeom prst="rect">
+            <a:avLst/>
+          </a:prstGeom>
+          <a:solidFill>
+            <a:srgbClr val="1E1E2E"/>
+          </a:solidFill>
+          <a:ln>
+            <a:noFill/>
+          </a:ln>
+        </p:spPr>
+        <p:style>
+          <a:lnRef idx="1">
+            <a:schemeClr val="accent1"/>
+          </a:lnRef>
+          <a:fillRef idx="3">
+            <a:schemeClr val="accent1"/>
+          </a:fillRef>
+          <a:effectRef idx="2">
+            <a:schemeClr val="accent1"/>
+          </a:effectRef>
+          <a:fontRef idx="minor">
+            <a:schemeClr val="lt1"/>
+          </a:fontRef>
+        </p:style>
+        <p:txBody>
+          <a:bodyPr rtlCol="0" anchor="ctr"/>
+          <a:lstStyle/>
+          <a:p>
+            <a:pPr algn="ctr"/>
+            <a:endParaRPr sz="1360"/>
+          </a:p>
+        </p:txBody>
+      </p:sp>
+      <p:sp>
+        <p:nvSpPr>
+          <p:cNvPr id="21" name="TextBox 20"/>
+          <p:cNvSpPr txBox="1"/>
+          <p:nvPr/>
+        </p:nvSpPr>
+        <p:spPr>
+          <a:xfrm>
+            <a:off x="4347611" y="4036597"/>
+            <a:ext cx="3626418" cy="338554"/>
+          </a:xfrm>
+          <a:prstGeom prst="rect">
+            <a:avLst/>
+          </a:prstGeom>
+          <a:noFill/>
+        </p:spPr>
+        <p:txBody>
+          <a:bodyPr wrap="square">
+            <a:spAutoFit/>
+          </a:bodyPr>
+          <a:lstStyle/>
+          <a:p>
+            <a:pPr algn="l"/>
+            <a:r>
+              <a:rPr sz="1600" dirty="0">
+                <a:solidFill>
+                  <a:srgbClr val="FFD78B"/>
+                </a:solidFill>
+              </a:rPr>
+              <a:t>@allure.title("...")   — </a:t>
+            </a:r>
+            <a:r>
+              <a:rPr lang="ru-RU" sz="1600" dirty="0">
+                <a:solidFill>
+                  <a:srgbClr val="FFD78B"/>
+                </a:solidFill>
+              </a:rPr>
+              <a:t>название в отчете </a:t>
+            </a:r>
+            <a:endParaRPr sz="1600" dirty="0">
+              <a:solidFill>
+                <a:srgbClr val="FFD78B"/>
+              </a:solidFill>
+            </a:endParaRPr>
+          </a:p>
+        </p:txBody>
+      </p:sp>
+      <p:sp>
+        <p:nvSpPr>
+          <p:cNvPr id="22" name="Rectangle 21"/>
+          <p:cNvSpPr/>
+          <p:nvPr/>
+        </p:nvSpPr>
+        <p:spPr>
+          <a:xfrm>
+            <a:off x="4347611" y="4530111"/>
+            <a:ext cx="3746020" cy="649295"/>
+          </a:xfrm>
+          <a:prstGeom prst="rect">
+            <a:avLst/>
+          </a:prstGeom>
+          <a:solidFill>
+            <a:srgbClr val="1E1E2E"/>
+          </a:solidFill>
+          <a:ln>
+            <a:noFill/>
+          </a:ln>
+        </p:spPr>
+        <p:style>
+          <a:lnRef idx="1">
+            <a:schemeClr val="accent1"/>
+          </a:lnRef>
+          <a:fillRef idx="3">
+            <a:schemeClr val="accent1"/>
+          </a:fillRef>
+          <a:effectRef idx="2">
+            <a:schemeClr val="accent1"/>
+          </a:effectRef>
+          <a:fontRef idx="minor">
+            <a:schemeClr val="lt1"/>
+          </a:fontRef>
+        </p:style>
+        <p:txBody>
+          <a:bodyPr rtlCol="0" anchor="ctr"/>
+          <a:lstStyle/>
+          <a:p>
+            <a:pPr algn="ctr"/>
+            <a:endParaRPr sz="1360"/>
+          </a:p>
+        </p:txBody>
+      </p:sp>
+      <p:sp>
+        <p:nvSpPr>
+          <p:cNvPr id="23" name="TextBox 22"/>
+          <p:cNvSpPr txBox="1"/>
+          <p:nvPr/>
+        </p:nvSpPr>
+        <p:spPr>
+          <a:xfrm>
+            <a:off x="4373275" y="4574121"/>
+            <a:ext cx="3626418" cy="523220"/>
+          </a:xfrm>
+          <a:prstGeom prst="rect">
+            <a:avLst/>
+          </a:prstGeom>
+          <a:noFill/>
+        </p:spPr>
+        <p:txBody>
+          <a:bodyPr wrap="square">
+            <a:spAutoFit/>
+          </a:bodyPr>
+          <a:lstStyle/>
+          <a:p>
+            <a:pPr algn="l"/>
+            <a:r>
+              <a:rPr sz="1400" dirty="0">
+                <a:solidFill>
+                  <a:srgbClr val="FFD78B"/>
+                </a:solidFill>
+              </a:rPr>
+              <a:t>@allure.description("...") — </a:t>
+            </a:r>
+            <a:r>
+              <a:rPr sz="1400" dirty="0" err="1">
+                <a:solidFill>
+                  <a:srgbClr val="FFD78B"/>
+                </a:solidFill>
+              </a:rPr>
+              <a:t>описание</a:t>
+            </a:r>
+            <a:r>
+              <a:rPr lang="ru-RU" sz="1400" dirty="0">
+                <a:solidFill>
+                  <a:srgbClr val="FFD78B"/>
+                </a:solidFill>
+              </a:rPr>
+              <a:t> теста, что проверяем</a:t>
+            </a:r>
+            <a:endParaRPr sz="1400" dirty="0">
+              <a:solidFill>
+                <a:srgbClr val="FFD78B"/>
+              </a:solidFill>
+            </a:endParaRPr>
+          </a:p>
+        </p:txBody>
+      </p:sp>
+      <p:sp>
+        <p:nvSpPr>
+          <p:cNvPr id="24" name="Rectangle 23"/>
+          <p:cNvSpPr/>
+          <p:nvPr/>
+        </p:nvSpPr>
+        <p:spPr>
+          <a:xfrm>
+            <a:off x="4347611" y="5235140"/>
+            <a:ext cx="3746020" cy="613528"/>
+          </a:xfrm>
+          <a:prstGeom prst="rect">
+            <a:avLst/>
+          </a:prstGeom>
+          <a:solidFill>
+            <a:srgbClr val="1E1E2E"/>
+          </a:solidFill>
+          <a:ln>
+            <a:noFill/>
+          </a:ln>
+        </p:spPr>
+        <p:style>
+          <a:lnRef idx="1">
+            <a:schemeClr val="accent1"/>
+          </a:lnRef>
+          <a:fillRef idx="3">
+            <a:schemeClr val="accent1"/>
+          </a:fillRef>
+          <a:effectRef idx="2">
+            <a:schemeClr val="accent1"/>
+          </a:effectRef>
+          <a:fontRef idx="minor">
+            <a:schemeClr val="lt1"/>
+          </a:fontRef>
+        </p:style>
+        <p:txBody>
+          <a:bodyPr rtlCol="0" anchor="ctr"/>
+          <a:lstStyle/>
+          <a:p>
+            <a:pPr algn="ctr"/>
+            <a:endParaRPr sz="1360"/>
+          </a:p>
+        </p:txBody>
+      </p:sp>
+      <p:sp>
+        <p:nvSpPr>
+          <p:cNvPr id="25" name="TextBox 24"/>
+          <p:cNvSpPr txBox="1"/>
+          <p:nvPr/>
+        </p:nvSpPr>
+        <p:spPr>
+          <a:xfrm>
+            <a:off x="4408110" y="5257598"/>
+            <a:ext cx="3626418" cy="523220"/>
+          </a:xfrm>
+          <a:prstGeom prst="rect">
+            <a:avLst/>
+          </a:prstGeom>
+          <a:noFill/>
+        </p:spPr>
+        <p:txBody>
+          <a:bodyPr wrap="square">
+            <a:spAutoFit/>
+          </a:bodyPr>
+          <a:lstStyle/>
+          <a:p>
+            <a:pPr algn="l"/>
+            <a:r>
+              <a:rPr sz="1400" dirty="0">
+                <a:solidFill>
+                  <a:srgbClr val="FFD78B"/>
+                </a:solidFill>
+              </a:rPr>
+              <a:t>with </a:t>
+            </a:r>
+            <a:r>
+              <a:rPr sz="1400" dirty="0" err="1">
+                <a:solidFill>
+                  <a:srgbClr val="FFD78B"/>
+                </a:solidFill>
+              </a:rPr>
+              <a:t>allure.step</a:t>
+            </a:r>
+            <a:r>
+              <a:rPr sz="1400" dirty="0">
+                <a:solidFill>
+                  <a:srgbClr val="FFD78B"/>
+                </a:solidFill>
+              </a:rPr>
+              <a:t>("..."):    — </a:t>
+            </a:r>
+            <a:r>
+              <a:rPr lang="ru-RU" sz="1400" dirty="0">
+                <a:solidFill>
+                  <a:srgbClr val="FFD78B"/>
+                </a:solidFill>
+              </a:rPr>
+              <a:t>каждый шаг виден, если тест упал сразу видно на каком шаге</a:t>
+            </a:r>
+            <a:endParaRPr sz="1400" dirty="0">
+              <a:solidFill>
+                <a:srgbClr val="FFD78B"/>
+              </a:solidFill>
+            </a:endParaRPr>
+          </a:p>
+        </p:txBody>
+      </p:sp>
+      <p:pic>
+        <p:nvPicPr>
+          <p:cNvPr id="27" name="Рисунок 26">
+            <a:extLst>
+              <a:ext uri="{FF2B5EF4-FFF2-40B4-BE49-F238E27FC236}">
+                <a16:creationId xmlns:a16="http://schemas.microsoft.com/office/drawing/2014/main" id="{CCE1A851-48C8-97F1-0B24-CE1BD95752F2}"/>
+              </a:ext>
+            </a:extLst>
+          </p:cNvPr>
+          <p:cNvPicPr>
+            <a:picLocks noChangeAspect="1"/>
+          </p:cNvPicPr>
+          <p:nvPr/>
+        </p:nvPicPr>
+        <p:blipFill>
+          <a:blip r:embed="rId3"/>
+          <a:stretch>
+            <a:fillRect/>
+          </a:stretch>
+        </p:blipFill>
+        <p:spPr>
+          <a:xfrm>
+            <a:off x="16608" y="1007050"/>
+            <a:ext cx="4233225" cy="4861352"/>
+          </a:xfrm>
+          <a:prstGeom prst="rect">
+            <a:avLst/>
+          </a:prstGeom>
+        </p:spPr>
+      </p:pic>
+      <p:pic>
+        <p:nvPicPr>
+          <p:cNvPr id="8" name="Рисунок 7">
+            <a:extLst>
+              <a:ext uri="{FF2B5EF4-FFF2-40B4-BE49-F238E27FC236}">
+                <a16:creationId xmlns:a16="http://schemas.microsoft.com/office/drawing/2014/main" id="{802D2580-F45B-B89B-0A0A-5430E2BBB44F}"/>
+              </a:ext>
+            </a:extLst>
+          </p:cNvPr>
+          <p:cNvPicPr>
+            <a:picLocks noChangeAspect="1"/>
+          </p:cNvPicPr>
+          <p:nvPr/>
+        </p:nvPicPr>
+        <p:blipFill>
+          <a:blip r:embed="rId4"/>
+          <a:stretch>
+            <a:fillRect/>
+          </a:stretch>
+        </p:blipFill>
+        <p:spPr>
+          <a:xfrm>
+            <a:off x="4373275" y="1015528"/>
+            <a:ext cx="3754787" cy="2439792"/>
+          </a:xfrm>
+          <a:prstGeom prst="rect">
+            <a:avLst/>
+          </a:prstGeom>
+          <a:ln>
+            <a:solidFill>
+              <a:schemeClr val="tx1"/>
+            </a:solidFill>
+          </a:ln>
+        </p:spPr>
+      </p:pic>
+    </p:spTree>
+  </p:cSld>
+  <p:clrMapOvr>
+    <a:masterClrMapping/>
+  </p:clrMapOvr>
+</p:sld>
+</file>
+
 <file path=ppt/slides/slide15.xml><?xml version="1.0" encoding="utf-8"?>
 <p:sld xmlns:a="http://schemas.openxmlformats.org/drawingml/2006/main" xmlns:r="http://schemas.openxmlformats.org/officeDocument/2006/relationships" xmlns:p="http://schemas.openxmlformats.org/presentationml/2006/main">
   <p:cSld>
@@ -12091,8 +12129,8 @@
         </p:nvSpPr>
         <p:spPr>
           <a:xfrm>
-            <a:off x="0" y="468327"/>
-            <a:ext cx="8159751" cy="5651486"/>
+            <a:off x="2293" y="953913"/>
+            <a:ext cx="8157458" cy="5130382"/>
           </a:xfrm>
           <a:prstGeom prst="rect">
             <a:avLst/>
@@ -12135,8 +12173,8 @@
         </p:nvSpPr>
         <p:spPr>
           <a:xfrm>
-            <a:off x="1" y="-4618"/>
-            <a:ext cx="8159750" cy="940430"/>
+            <a:off x="0" y="-2781"/>
+            <a:ext cx="8159750" cy="932968"/>
           </a:xfrm>
           <a:prstGeom prst="rect">
             <a:avLst/>
@@ -12179,8 +12217,8 @@
         </p:nvSpPr>
         <p:spPr>
           <a:xfrm>
-            <a:off x="82677" y="38041"/>
-            <a:ext cx="8066068" cy="523220"/>
+            <a:off x="216545" y="-26507"/>
+            <a:ext cx="7778353" cy="584775"/>
           </a:xfrm>
           <a:prstGeom prst="rect">
             <a:avLst/>
@@ -12195,106 +12233,16 @@
           <a:p>
             <a:pPr algn="l"/>
             <a:r>
-              <a:rPr sz="2800" b="1" dirty="0" err="1">
+              <a:rPr lang="ru-RU" sz="3200" b="1" dirty="0">
                 <a:solidFill>
                   <a:srgbClr val="FFFFFF"/>
                 </a:solidFill>
               </a:rPr>
-              <a:t>Отчётность</a:t>
-            </a:r>
-            <a:r>
-              <a:rPr sz="2800" b="1" dirty="0">
-                <a:solidFill>
-                  <a:srgbClr val="FFFFFF"/>
-                </a:solidFill>
-              </a:rPr>
-              <a:t> — Allure Report</a:t>
-            </a:r>
-          </a:p>
-        </p:txBody>
-      </p:sp>
-      <p:sp>
-        <p:nvSpPr>
-          <p:cNvPr id="5" name="TextBox 4"/>
-          <p:cNvSpPr txBox="1"/>
-          <p:nvPr/>
-        </p:nvSpPr>
-        <p:spPr>
-          <a:xfrm>
-            <a:off x="82677" y="459526"/>
-            <a:ext cx="7914448" cy="369332"/>
-          </a:xfrm>
-          <a:prstGeom prst="rect">
-            <a:avLst/>
-          </a:prstGeom>
-          <a:noFill/>
-        </p:spPr>
-        <p:txBody>
-          <a:bodyPr wrap="square">
-            <a:spAutoFit/>
-          </a:bodyPr>
-          <a:lstStyle/>
-          <a:p>
-            <a:pPr algn="l"/>
-            <a:r>
-              <a:rPr dirty="0" err="1">
-                <a:solidFill>
-                  <a:srgbClr val="009BD8"/>
-                </a:solidFill>
-              </a:rPr>
-              <a:t>Визуализация</a:t>
-            </a:r>
-            <a:r>
-              <a:rPr dirty="0">
-                <a:solidFill>
-                  <a:srgbClr val="009BD8"/>
-                </a:solidFill>
-              </a:rPr>
-              <a:t> </a:t>
-            </a:r>
-            <a:r>
-              <a:rPr dirty="0" err="1">
-                <a:solidFill>
-                  <a:srgbClr val="009BD8"/>
-                </a:solidFill>
-              </a:rPr>
-              <a:t>результатов</a:t>
-            </a:r>
-            <a:r>
-              <a:rPr dirty="0">
-                <a:solidFill>
-                  <a:srgbClr val="009BD8"/>
-                </a:solidFill>
-              </a:rPr>
-              <a:t> </a:t>
-            </a:r>
-            <a:r>
-              <a:rPr dirty="0" err="1">
-                <a:solidFill>
-                  <a:srgbClr val="009BD8"/>
-                </a:solidFill>
-              </a:rPr>
-              <a:t>прогона</a:t>
-            </a:r>
-            <a:r>
-              <a:rPr dirty="0">
-                <a:solidFill>
-                  <a:srgbClr val="009BD8"/>
-                </a:solidFill>
-              </a:rPr>
-              <a:t> </a:t>
-            </a:r>
-            <a:r>
-              <a:rPr dirty="0" err="1">
-                <a:solidFill>
-                  <a:srgbClr val="009BD8"/>
-                </a:solidFill>
-              </a:rPr>
-              <a:t>тестов</a:t>
-            </a:r>
-            <a:endParaRPr dirty="0">
+              <a:t>Результаты работы</a:t>
+            </a:r>
+            <a:endParaRPr sz="3200" b="1" dirty="0">
               <a:solidFill>
-                <a:srgbClr val="009BD8"/>
+                <a:srgbClr val="FFFFFF"/>
               </a:solidFill>
             </a:endParaRPr>
           </a:p>
@@ -12302,14 +12250,14 @@
       </p:sp>
       <p:sp>
         <p:nvSpPr>
-          <p:cNvPr id="6" name="Rectangle 5"/>
+          <p:cNvPr id="5" name="Rectangle 4"/>
           <p:cNvSpPr/>
           <p:nvPr/>
         </p:nvSpPr>
         <p:spPr>
           <a:xfrm flipV="1">
-            <a:off x="-5327" y="890092"/>
-            <a:ext cx="8165077" cy="45720"/>
+            <a:off x="1" y="938768"/>
+            <a:ext cx="8159750" cy="45719"/>
           </a:xfrm>
           <a:prstGeom prst="rect">
             <a:avLst/>
@@ -12346,14 +12294,14 @@
       </p:sp>
       <p:sp>
         <p:nvSpPr>
-          <p:cNvPr id="7" name="Rectangle 6"/>
+          <p:cNvPr id="6" name="Rectangle 5"/>
           <p:cNvSpPr/>
           <p:nvPr/>
         </p:nvSpPr>
         <p:spPr>
           <a:xfrm>
-            <a:off x="-5327" y="5887772"/>
-            <a:ext cx="8180259" cy="232041"/>
+            <a:off x="-3842" y="5874142"/>
+            <a:ext cx="8168179" cy="241881"/>
           </a:xfrm>
           <a:prstGeom prst="rect">
             <a:avLst/>
@@ -12390,14 +12338,14 @@
       </p:sp>
       <p:sp>
         <p:nvSpPr>
-          <p:cNvPr id="9" name="TextBox 8"/>
+          <p:cNvPr id="8" name="TextBox 7"/>
           <p:cNvSpPr txBox="1"/>
           <p:nvPr/>
         </p:nvSpPr>
         <p:spPr>
           <a:xfrm>
-            <a:off x="7687134" y="5842925"/>
-            <a:ext cx="456008" cy="307777"/>
+            <a:off x="7719772" y="5840039"/>
+            <a:ext cx="437685" cy="307777"/>
           </a:xfrm>
           <a:prstGeom prst="rect">
             <a:avLst/>
@@ -12412,12 +12360,20 @@
           <a:p>
             <a:pPr algn="r"/>
             <a:r>
+              <a:rPr lang="en-US" sz="1400" dirty="0">
+                <a:solidFill>
+                  <a:srgbClr val="009BD8"/>
+                </a:solidFill>
+              </a:rPr>
+              <a:t>1</a:t>
+            </a:r>
+            <a:r>
               <a:rPr lang="ru-RU" sz="1400" dirty="0">
                 <a:solidFill>
                   <a:srgbClr val="009BD8"/>
                 </a:solidFill>
               </a:rPr>
-              <a:t>15</a:t>
+              <a:t>5</a:t>
             </a:r>
             <a:endParaRPr sz="1400" dirty="0">
               <a:solidFill>
@@ -12429,20 +12385,26 @@
       </p:sp>
       <p:sp>
         <p:nvSpPr>
-          <p:cNvPr id="13" name="Rectangle 12"/>
+          <p:cNvPr id="35" name="Rectangle 24">
+            <a:extLst>
+              <a:ext uri="{FF2B5EF4-FFF2-40B4-BE49-F238E27FC236}">
+                <a16:creationId xmlns:a16="http://schemas.microsoft.com/office/drawing/2014/main" id="{A5152BC9-D871-BCE0-D0CA-1414CD30397C}"/>
+              </a:ext>
+            </a:extLst>
+          </p:cNvPr>
           <p:cNvSpPr/>
           <p:nvPr/>
         </p:nvSpPr>
         <p:spPr>
           <a:xfrm>
-            <a:off x="4309729" y="991546"/>
-            <a:ext cx="3865203" cy="4876855"/>
+            <a:off x="182490" y="1456781"/>
+            <a:ext cx="107334" cy="419751"/>
           </a:xfrm>
           <a:prstGeom prst="rect">
             <a:avLst/>
           </a:prstGeom>
           <a:solidFill>
-            <a:srgbClr val="0D2B55"/>
+            <a:srgbClr val="C0392B"/>
           </a:solidFill>
           <a:ln>
             <a:noFill/>
@@ -12467,20 +12429,26 @@
           <a:lstStyle/>
           <a:p>
             <a:pPr algn="ctr"/>
-            <a:endParaRPr sz="1360" dirty="0"/>
-          </a:p>
-        </p:txBody>
-      </p:sp>
-      <p:sp>
-        <p:nvSpPr>
-          <p:cNvPr id="19" name="TextBox 18"/>
+            <a:endParaRPr sz="1360"/>
+          </a:p>
+        </p:txBody>
+      </p:sp>
+      <p:sp>
+        <p:nvSpPr>
+          <p:cNvPr id="36" name="TextBox 35">
+            <a:extLst>
+              <a:ext uri="{FF2B5EF4-FFF2-40B4-BE49-F238E27FC236}">
+                <a16:creationId xmlns:a16="http://schemas.microsoft.com/office/drawing/2014/main" id="{D4634DED-2C15-8187-675D-F2B099B284BE}"/>
+              </a:ext>
+            </a:extLst>
+          </p:cNvPr>
           <p:cNvSpPr txBox="1"/>
           <p:nvPr/>
         </p:nvSpPr>
         <p:spPr>
           <a:xfrm>
-            <a:off x="4408110" y="3431339"/>
-            <a:ext cx="3754787" cy="461665"/>
+            <a:off x="375516" y="1010608"/>
+            <a:ext cx="2418622" cy="371320"/>
           </a:xfrm>
           <a:prstGeom prst="rect">
             <a:avLst/>
@@ -12495,56 +12463,121 @@
           <a:p>
             <a:pPr algn="l"/>
             <a:r>
-              <a:rPr sz="2400" dirty="0" err="1">
-                <a:solidFill>
-                  <a:srgbClr val="AACCFF"/>
-                </a:solidFill>
-              </a:rPr>
-              <a:t>Декораторы</a:t>
-            </a:r>
-            <a:r>
-              <a:rPr sz="2400" dirty="0">
-                <a:solidFill>
-                  <a:srgbClr val="AACCFF"/>
-                </a:solidFill>
-              </a:rPr>
-              <a:t> в </a:t>
-            </a:r>
-            <a:r>
-              <a:rPr sz="2400" dirty="0" err="1">
-                <a:solidFill>
-                  <a:srgbClr val="AACCFF"/>
-                </a:solidFill>
-              </a:rPr>
-              <a:t>тестах</a:t>
-            </a:r>
-            <a:r>
-              <a:rPr sz="2400" dirty="0">
-                <a:solidFill>
-                  <a:srgbClr val="AACCFF"/>
-                </a:solidFill>
-              </a:rPr>
-              <a:t>:</a:t>
-            </a:r>
-          </a:p>
-        </p:txBody>
-      </p:sp>
-      <p:sp>
-        <p:nvSpPr>
-          <p:cNvPr id="20" name="Rectangle 19"/>
+              <a:rPr lang="ru-RU" sz="1813" b="1" dirty="0">
+                <a:solidFill>
+                  <a:srgbClr val="0D2B55"/>
+                </a:solidFill>
+              </a:rPr>
+              <a:t>Форма записи</a:t>
+            </a:r>
+            <a:endParaRPr sz="1813" b="1" dirty="0">
+              <a:solidFill>
+                <a:srgbClr val="0D2B55"/>
+              </a:solidFill>
+            </a:endParaRPr>
+          </a:p>
+        </p:txBody>
+      </p:sp>
+      <p:sp>
+        <p:nvSpPr>
+          <p:cNvPr id="37" name="TextBox 36">
+            <a:extLst>
+              <a:ext uri="{FF2B5EF4-FFF2-40B4-BE49-F238E27FC236}">
+                <a16:creationId xmlns:a16="http://schemas.microsoft.com/office/drawing/2014/main" id="{F761F1C3-8C11-95D2-0AFC-90DF4BA04141}"/>
+              </a:ext>
+            </a:extLst>
+          </p:cNvPr>
+          <p:cNvSpPr txBox="1"/>
+          <p:nvPr/>
+        </p:nvSpPr>
+        <p:spPr>
+          <a:xfrm>
+            <a:off x="341514" y="1304191"/>
+            <a:ext cx="7836490" cy="830997"/>
+          </a:xfrm>
+          <a:prstGeom prst="rect">
+            <a:avLst/>
+          </a:prstGeom>
+          <a:noFill/>
+        </p:spPr>
+        <p:txBody>
+          <a:bodyPr wrap="square">
+            <a:spAutoFit/>
+          </a:bodyPr>
+          <a:lstStyle/>
+          <a:p>
+            <a:r>
+              <a:rPr lang="ru-RU" sz="2400" dirty="0">
+                <a:solidFill>
+                  <a:srgbClr val="444455"/>
+                </a:solidFill>
+              </a:rPr>
+              <a:t>Принимает номера телефона «00110011001»</a:t>
+            </a:r>
+          </a:p>
+          <a:p>
+            <a:r>
+              <a:rPr lang="ru-RU" sz="2400" dirty="0">
+                <a:solidFill>
+                  <a:srgbClr val="444455"/>
+                </a:solidFill>
+              </a:rPr>
+              <a:t> дату «11111-11-11» имя </a:t>
+            </a:r>
+            <a:r>
+              <a:rPr lang="ru-RU" sz="2000" dirty="0">
+                <a:solidFill>
+                  <a:srgbClr val="444455"/>
+                </a:solidFill>
+              </a:rPr>
+              <a:t>«,</a:t>
+            </a:r>
+            <a:r>
+              <a:rPr lang="en-US" sz="2000" dirty="0">
+                <a:solidFill>
+                  <a:srgbClr val="444455"/>
+                </a:solidFill>
+              </a:rPr>
+              <a:t>Mbuygt76</a:t>
+            </a:r>
+            <a:r>
+              <a:rPr lang="ru-RU" sz="2000" dirty="0">
+                <a:solidFill>
+                  <a:srgbClr val="444455"/>
+                </a:solidFill>
+              </a:rPr>
+              <a:t>» </a:t>
+            </a:r>
+            <a:endParaRPr lang="ru-RU" sz="2400" dirty="0">
+              <a:solidFill>
+                <a:srgbClr val="444455"/>
+              </a:solidFill>
+            </a:endParaRPr>
+          </a:p>
+        </p:txBody>
+      </p:sp>
+      <p:sp>
+        <p:nvSpPr>
+          <p:cNvPr id="38" name="Rectangle 24">
+            <a:extLst>
+              <a:ext uri="{FF2B5EF4-FFF2-40B4-BE49-F238E27FC236}">
+                <a16:creationId xmlns:a16="http://schemas.microsoft.com/office/drawing/2014/main" id="{D1861545-0F7F-614A-3A5B-7857EBA49E7F}"/>
+              </a:ext>
+            </a:extLst>
+          </p:cNvPr>
           <p:cNvSpPr/>
           <p:nvPr/>
         </p:nvSpPr>
         <p:spPr>
           <a:xfrm>
-            <a:off x="4355366" y="3885606"/>
-            <a:ext cx="3738265" cy="595085"/>
+            <a:off x="182490" y="2701387"/>
+            <a:ext cx="107334" cy="419751"/>
           </a:xfrm>
           <a:prstGeom prst="rect">
             <a:avLst/>
           </a:prstGeom>
           <a:solidFill>
-            <a:srgbClr val="1E1E2E"/>
+            <a:srgbClr val="C0392B"/>
           </a:solidFill>
           <a:ln>
             <a:noFill/>
@@ -12575,14 +12608,20 @@
       </p:sp>
       <p:sp>
         <p:nvSpPr>
-          <p:cNvPr id="21" name="TextBox 20"/>
+          <p:cNvPr id="39" name="TextBox 38">
+            <a:extLst>
+              <a:ext uri="{FF2B5EF4-FFF2-40B4-BE49-F238E27FC236}">
+                <a16:creationId xmlns:a16="http://schemas.microsoft.com/office/drawing/2014/main" id="{4D9A3C01-3A0E-68AA-6834-5A90AC22346D}"/>
+              </a:ext>
+            </a:extLst>
+          </p:cNvPr>
           <p:cNvSpPr txBox="1"/>
           <p:nvPr/>
         </p:nvSpPr>
         <p:spPr>
           <a:xfrm>
-            <a:off x="4347611" y="4036597"/>
-            <a:ext cx="3626418" cy="338554"/>
+            <a:off x="345336" y="2386779"/>
+            <a:ext cx="2418622" cy="371320"/>
           </a:xfrm>
           <a:prstGeom prst="rect">
             <a:avLst/>
@@ -12597,24 +12636,16 @@
           <a:p>
             <a:pPr algn="l"/>
             <a:r>
-              <a:rPr sz="1600" dirty="0">
-                <a:solidFill>
-                  <a:srgbClr val="FFD78B"/>
-                </a:solidFill>
-              </a:rPr>
-              <a:t>@allure.title("...")   — </a:t>
-            </a:r>
-            <a:r>
-              <a:rPr lang="ru-RU" sz="1600" dirty="0">
-                <a:solidFill>
-                  <a:srgbClr val="FFD78B"/>
-                </a:solidFill>
-              </a:rPr>
-              <a:t>название в отчете </a:t>
-            </a:r>
-            <a:endParaRPr sz="1600" dirty="0">
+              <a:rPr lang="ru-RU" sz="1813" b="1" dirty="0">
+                <a:solidFill>
+                  <a:srgbClr val="0D2B55"/>
+                </a:solidFill>
+              </a:rPr>
+              <a:t>Пустое поле телефона</a:t>
+            </a:r>
+            <a:endParaRPr sz="1813" b="1" dirty="0">
               <a:solidFill>
-                <a:srgbClr val="FFD78B"/>
+                <a:srgbClr val="0D2B55"/>
               </a:solidFill>
             </a:endParaRPr>
           </a:p>
@@ -12622,20 +12653,71 @@
       </p:sp>
       <p:sp>
         <p:nvSpPr>
-          <p:cNvPr id="22" name="Rectangle 21"/>
+          <p:cNvPr id="40" name="TextBox 39">
+            <a:extLst>
+              <a:ext uri="{FF2B5EF4-FFF2-40B4-BE49-F238E27FC236}">
+                <a16:creationId xmlns:a16="http://schemas.microsoft.com/office/drawing/2014/main" id="{AEB60907-93CE-A110-501F-C53AA0144C68}"/>
+              </a:ext>
+            </a:extLst>
+          </p:cNvPr>
+          <p:cNvSpPr txBox="1"/>
+          <p:nvPr/>
+        </p:nvSpPr>
+        <p:spPr>
+          <a:xfrm>
+            <a:off x="319232" y="2734470"/>
+            <a:ext cx="7619382" cy="461665"/>
+          </a:xfrm>
+          <a:prstGeom prst="rect">
+            <a:avLst/>
+          </a:prstGeom>
+          <a:noFill/>
+        </p:spPr>
+        <p:txBody>
+          <a:bodyPr wrap="square">
+            <a:spAutoFit/>
+          </a:bodyPr>
+          <a:lstStyle/>
+          <a:p>
+            <a:pPr algn="l"/>
+            <a:r>
+              <a:rPr lang="ru-RU" sz="2400" dirty="0">
+                <a:solidFill>
+                  <a:srgbClr val="444455"/>
+                </a:solidFill>
+              </a:rPr>
+              <a:t>Заявка отправляется с пустым номером</a:t>
+            </a:r>
+            <a:endParaRPr sz="2400" dirty="0">
+              <a:solidFill>
+                <a:srgbClr val="444455"/>
+              </a:solidFill>
+            </a:endParaRPr>
+          </a:p>
+        </p:txBody>
+      </p:sp>
+      <p:sp>
+        <p:nvSpPr>
+          <p:cNvPr id="48" name="Rectangle 24">
+            <a:extLst>
+              <a:ext uri="{FF2B5EF4-FFF2-40B4-BE49-F238E27FC236}">
+                <a16:creationId xmlns:a16="http://schemas.microsoft.com/office/drawing/2014/main" id="{40991BA5-8A42-48CF-A74C-46091F340AC0}"/>
+              </a:ext>
+            </a:extLst>
+          </p:cNvPr>
           <p:cNvSpPr/>
           <p:nvPr/>
         </p:nvSpPr>
         <p:spPr>
           <a:xfrm>
-            <a:off x="4347611" y="4530111"/>
-            <a:ext cx="3746020" cy="649295"/>
+            <a:off x="180287" y="3926256"/>
+            <a:ext cx="107334" cy="419751"/>
           </a:xfrm>
           <a:prstGeom prst="rect">
             <a:avLst/>
           </a:prstGeom>
           <a:solidFill>
-            <a:srgbClr val="1E1E2E"/>
+            <a:srgbClr val="C0392B"/>
           </a:solidFill>
           <a:ln>
             <a:noFill/>
@@ -12666,14 +12748,20 @@
       </p:sp>
       <p:sp>
         <p:nvSpPr>
-          <p:cNvPr id="23" name="TextBox 22"/>
+          <p:cNvPr id="49" name="TextBox 48">
+            <a:extLst>
+              <a:ext uri="{FF2B5EF4-FFF2-40B4-BE49-F238E27FC236}">
+                <a16:creationId xmlns:a16="http://schemas.microsoft.com/office/drawing/2014/main" id="{0FF78AD8-4CD9-FD92-9B25-1110D6BAA004}"/>
+              </a:ext>
+            </a:extLst>
+          </p:cNvPr>
           <p:cNvSpPr txBox="1"/>
           <p:nvPr/>
         </p:nvSpPr>
         <p:spPr>
           <a:xfrm>
-            <a:off x="4373275" y="4574121"/>
-            <a:ext cx="3626418" cy="523220"/>
+            <a:off x="375516" y="3546232"/>
+            <a:ext cx="3392651" cy="371320"/>
           </a:xfrm>
           <a:prstGeom prst="rect">
             <a:avLst/>
@@ -12688,32 +12776,32 @@
           <a:p>
             <a:pPr algn="l"/>
             <a:r>
-              <a:rPr sz="1400" dirty="0">
-                <a:solidFill>
-                  <a:srgbClr val="FFD78B"/>
-                </a:solidFill>
-              </a:rPr>
-              <a:t>@allure.description("...") — </a:t>
-            </a:r>
-            <a:r>
-              <a:rPr sz="1400" dirty="0" err="1">
-                <a:solidFill>
-                  <a:srgbClr val="FFD78B"/>
-                </a:solidFill>
-              </a:rPr>
-              <a:t>описание</a:t>
-            </a:r>
-            <a:r>
-              <a:rPr lang="ru-RU" sz="1400" dirty="0">
-                <a:solidFill>
-                  <a:srgbClr val="FFD78B"/>
-                </a:solidFill>
-              </a:rPr>
-              <a:t> теста, что проверяем</a:t>
-            </a:r>
-            <a:endParaRPr sz="1400" dirty="0">
+              <a:rPr lang="ru-RU" sz="1813" b="1" dirty="0">
+                <a:solidFill>
+                  <a:srgbClr val="0D2B55"/>
+                </a:solidFill>
+              </a:rPr>
+              <a:t>Ссылка на </a:t>
+            </a:r>
+            <a:r>
+              <a:rPr lang="en-US" sz="1813" b="1" dirty="0" err="1">
+                <a:solidFill>
+                  <a:srgbClr val="0D2B55"/>
+                </a:solidFill>
+              </a:rPr>
+              <a:t>Prodoctorov</a:t>
+            </a:r>
+            <a:r>
+              <a:rPr lang="en-US" sz="1813" b="1" dirty="0">
+                <a:solidFill>
+                  <a:srgbClr val="0D2B55"/>
+                </a:solidFill>
+              </a:rPr>
+              <a:t> </a:t>
+            </a:r>
+            <a:endParaRPr sz="1813" b="1" dirty="0">
               <a:solidFill>
-                <a:srgbClr val="FFD78B"/>
+                <a:srgbClr val="0D2B55"/>
               </a:solidFill>
             </a:endParaRPr>
           </a:p>
@@ -12721,20 +12809,87 @@
       </p:sp>
       <p:sp>
         <p:nvSpPr>
-          <p:cNvPr id="24" name="Rectangle 23"/>
+          <p:cNvPr id="50" name="TextBox 49">
+            <a:extLst>
+              <a:ext uri="{FF2B5EF4-FFF2-40B4-BE49-F238E27FC236}">
+                <a16:creationId xmlns:a16="http://schemas.microsoft.com/office/drawing/2014/main" id="{F08B363D-636F-6C23-D551-0276DFA4C246}"/>
+              </a:ext>
+            </a:extLst>
+          </p:cNvPr>
+          <p:cNvSpPr txBox="1"/>
+          <p:nvPr/>
+        </p:nvSpPr>
+        <p:spPr>
+          <a:xfrm>
+            <a:off x="353599" y="3879459"/>
+            <a:ext cx="7595213" cy="830997"/>
+          </a:xfrm>
+          <a:prstGeom prst="rect">
+            <a:avLst/>
+          </a:prstGeom>
+          <a:noFill/>
+        </p:spPr>
+        <p:txBody>
+          <a:bodyPr wrap="square">
+            <a:spAutoFit/>
+          </a:bodyPr>
+          <a:lstStyle/>
+          <a:p>
+            <a:pPr algn="l"/>
+            <a:r>
+              <a:rPr lang="ru-RU" sz="2400" dirty="0">
+                <a:solidFill>
+                  <a:srgbClr val="444455"/>
+                </a:solidFill>
+              </a:rPr>
+              <a:t>Не переходит по ссылке, ведет на ту же страницу «Неврологи в Уфе» на сайте </a:t>
+            </a:r>
+            <a:r>
+              <a:rPr lang="en-US" sz="2400" dirty="0" err="1">
+                <a:solidFill>
+                  <a:srgbClr val="444455"/>
+                </a:solidFill>
+              </a:rPr>
+              <a:t>Alimma</a:t>
+            </a:r>
+            <a:r>
+              <a:rPr lang="ru-RU" sz="2400" dirty="0">
+                <a:solidFill>
+                  <a:srgbClr val="444455"/>
+                </a:solidFill>
+              </a:rPr>
+              <a:t>. </a:t>
+            </a:r>
+            <a:endParaRPr sz="2400" dirty="0">
+              <a:solidFill>
+                <a:srgbClr val="444455"/>
+              </a:solidFill>
+            </a:endParaRPr>
+          </a:p>
+        </p:txBody>
+      </p:sp>
+      <p:sp>
+        <p:nvSpPr>
+          <p:cNvPr id="54" name="Rectangle 24">
+            <a:extLst>
+              <a:ext uri="{FF2B5EF4-FFF2-40B4-BE49-F238E27FC236}">
+                <a16:creationId xmlns:a16="http://schemas.microsoft.com/office/drawing/2014/main" id="{5805B16B-E337-455F-C51C-AFD025217DC3}"/>
+              </a:ext>
+            </a:extLst>
+          </p:cNvPr>
           <p:cNvSpPr/>
           <p:nvPr/>
         </p:nvSpPr>
         <p:spPr>
           <a:xfrm>
-            <a:off x="4347611" y="5235140"/>
-            <a:ext cx="3746020" cy="613528"/>
+            <a:off x="162878" y="5131954"/>
+            <a:ext cx="107334" cy="419751"/>
           </a:xfrm>
           <a:prstGeom prst="rect">
             <a:avLst/>
           </a:prstGeom>
           <a:solidFill>
-            <a:srgbClr val="1E1E2E"/>
+            <a:srgbClr val="C0392B"/>
           </a:solidFill>
           <a:ln>
             <a:noFill/>
@@ -12765,14 +12920,20 @@
       </p:sp>
       <p:sp>
         <p:nvSpPr>
-          <p:cNvPr id="25" name="TextBox 24"/>
+          <p:cNvPr id="55" name="TextBox 54">
+            <a:extLst>
+              <a:ext uri="{FF2B5EF4-FFF2-40B4-BE49-F238E27FC236}">
+                <a16:creationId xmlns:a16="http://schemas.microsoft.com/office/drawing/2014/main" id="{6D662FD4-75ED-6782-FAD2-FF80AD41A5E3}"/>
+              </a:ext>
+            </a:extLst>
+          </p:cNvPr>
           <p:cNvSpPr txBox="1"/>
           <p:nvPr/>
         </p:nvSpPr>
         <p:spPr>
           <a:xfrm>
-            <a:off x="4408110" y="5257598"/>
-            <a:ext cx="3626418" cy="523220"/>
+            <a:off x="375516" y="4946294"/>
+            <a:ext cx="3292293" cy="371320"/>
           </a:xfrm>
           <a:prstGeom prst="rect">
             <a:avLst/>
@@ -12787,110 +12948,269 @@
           <a:p>
             <a:pPr algn="l"/>
             <a:r>
-              <a:rPr sz="1400" dirty="0">
-                <a:solidFill>
-                  <a:srgbClr val="FFD78B"/>
-                </a:solidFill>
-              </a:rPr>
-              <a:t>with </a:t>
-            </a:r>
-            <a:r>
-              <a:rPr sz="1400" dirty="0" err="1">
-                <a:solidFill>
-                  <a:srgbClr val="FFD78B"/>
-                </a:solidFill>
-              </a:rPr>
-              <a:t>allure.step</a:t>
-            </a:r>
-            <a:r>
-              <a:rPr sz="1400" dirty="0">
-                <a:solidFill>
-                  <a:srgbClr val="FFD78B"/>
-                </a:solidFill>
-              </a:rPr>
-              <a:t>("..."):    — </a:t>
-            </a:r>
-            <a:r>
-              <a:rPr lang="ru-RU" sz="1400" dirty="0">
-                <a:solidFill>
-                  <a:srgbClr val="FFD78B"/>
-                </a:solidFill>
-              </a:rPr>
-              <a:t>каждый шаг виден, если тест упал сразу видно на каком шаге</a:t>
-            </a:r>
-            <a:endParaRPr sz="1400" dirty="0">
+              <a:rPr lang="ru-RU" sz="1813" b="1" dirty="0">
+                <a:solidFill>
+                  <a:srgbClr val="0D2B55"/>
+                </a:solidFill>
+              </a:rPr>
+              <a:t>Кнопки Пагинации  </a:t>
+            </a:r>
+            <a:r>
+              <a:rPr lang="en-US" sz="1813" b="1" dirty="0">
+                <a:solidFill>
+                  <a:srgbClr val="0D2B55"/>
+                </a:solidFill>
+              </a:rPr>
+              <a:t>Next/Prev </a:t>
+            </a:r>
+            <a:endParaRPr sz="1813" b="1" dirty="0">
               <a:solidFill>
-                <a:srgbClr val="FFD78B"/>
+                <a:srgbClr val="0D2B55"/>
               </a:solidFill>
             </a:endParaRPr>
           </a:p>
         </p:txBody>
       </p:sp>
-      <p:pic>
-        <p:nvPicPr>
-          <p:cNvPr id="27" name="Рисунок 26">
+      <p:sp>
+        <p:nvSpPr>
+          <p:cNvPr id="56" name="TextBox 55">
             <a:extLst>
               <a:ext uri="{FF2B5EF4-FFF2-40B4-BE49-F238E27FC236}">
-                <a16:creationId xmlns:a16="http://schemas.microsoft.com/office/drawing/2014/main" id="{CCE1A851-48C8-97F1-0B24-CE1BD95752F2}"/>
+                <a16:creationId xmlns:a16="http://schemas.microsoft.com/office/drawing/2014/main" id="{A8127DA8-1BC7-14CF-D3B9-AECCD96E58A6}"/>
               </a:ext>
             </a:extLst>
           </p:cNvPr>
-          <p:cNvPicPr>
-            <a:picLocks noChangeAspect="1"/>
-          </p:cNvPicPr>
-          <p:nvPr/>
-        </p:nvPicPr>
-        <p:blipFill>
-          <a:blip r:embed="rId3"/>
-          <a:stretch>
-            <a:fillRect/>
-          </a:stretch>
-        </p:blipFill>
-        <p:spPr>
-          <a:xfrm>
-            <a:off x="16608" y="1007050"/>
-            <a:ext cx="4233225" cy="4861352"/>
-          </a:xfrm>
-          <a:prstGeom prst="rect">
-            <a:avLst/>
-          </a:prstGeom>
-        </p:spPr>
-      </p:pic>
-      <p:pic>
-        <p:nvPicPr>
-          <p:cNvPr id="8" name="Рисунок 7">
+          <p:cNvSpPr txBox="1"/>
+          <p:nvPr/>
+        </p:nvSpPr>
+        <p:spPr>
+          <a:xfrm>
+            <a:off x="329357" y="5265347"/>
+            <a:ext cx="7696006" cy="461665"/>
+          </a:xfrm>
+          <a:prstGeom prst="rect">
+            <a:avLst/>
+          </a:prstGeom>
+          <a:noFill/>
+        </p:spPr>
+        <p:txBody>
+          <a:bodyPr wrap="square">
+            <a:spAutoFit/>
+          </a:bodyPr>
+          <a:lstStyle/>
+          <a:p>
+            <a:pPr algn="l"/>
+            <a:r>
+              <a:rPr lang="ru-RU" sz="2400" dirty="0">
+                <a:solidFill>
+                  <a:srgbClr val="444455"/>
+                </a:solidFill>
+              </a:rPr>
+              <a:t>Кнопки сливаются с фоном и не имеют текста или знака</a:t>
+            </a:r>
+            <a:endParaRPr sz="2400" dirty="0">
+              <a:solidFill>
+                <a:srgbClr val="444455"/>
+              </a:solidFill>
+            </a:endParaRPr>
+          </a:p>
+        </p:txBody>
+      </p:sp>
+      <p:sp>
+        <p:nvSpPr>
+          <p:cNvPr id="57" name="TextBox 56">
             <a:extLst>
               <a:ext uri="{FF2B5EF4-FFF2-40B4-BE49-F238E27FC236}">
-                <a16:creationId xmlns:a16="http://schemas.microsoft.com/office/drawing/2014/main" id="{802D2580-F45B-B89B-0A0A-5430E2BBB44F}"/>
+                <a16:creationId xmlns:a16="http://schemas.microsoft.com/office/drawing/2014/main" id="{72E59800-9BD4-59D0-ED10-A14270598DE8}"/>
               </a:ext>
             </a:extLst>
           </p:cNvPr>
-          <p:cNvPicPr>
-            <a:picLocks noChangeAspect="1"/>
-          </p:cNvPicPr>
-          <p:nvPr/>
-        </p:nvPicPr>
-        <p:blipFill>
-          <a:blip r:embed="rId4"/>
-          <a:stretch>
-            <a:fillRect/>
-          </a:stretch>
-        </p:blipFill>
-        <p:spPr>
-          <a:xfrm>
-            <a:off x="4373275" y="1015528"/>
-            <a:ext cx="3754787" cy="2439792"/>
-          </a:xfrm>
-          <a:prstGeom prst="rect">
-            <a:avLst/>
-          </a:prstGeom>
+          <p:cNvSpPr txBox="1"/>
+          <p:nvPr/>
+        </p:nvSpPr>
+        <p:spPr>
+          <a:xfrm>
+            <a:off x="226928" y="528029"/>
+            <a:ext cx="7932822" cy="369332"/>
+          </a:xfrm>
+          <a:prstGeom prst="rect">
+            <a:avLst/>
+          </a:prstGeom>
+          <a:noFill/>
+        </p:spPr>
+        <p:txBody>
+          <a:bodyPr wrap="square">
+            <a:spAutoFit/>
+          </a:bodyPr>
+          <a:lstStyle/>
+          <a:p>
+            <a:pPr algn="l"/>
+            <a:r>
+              <a:rPr lang="ru-RU" dirty="0">
+                <a:solidFill>
+                  <a:srgbClr val="009BD8"/>
+                </a:solidFill>
+              </a:rPr>
+              <a:t>Найденные критические баги</a:t>
+            </a:r>
+            <a:endParaRPr dirty="0">
+              <a:solidFill>
+                <a:srgbClr val="009BD8"/>
+              </a:solidFill>
+            </a:endParaRPr>
+          </a:p>
+        </p:txBody>
+      </p:sp>
+      <p:sp>
+        <p:nvSpPr>
+          <p:cNvPr id="7" name="Rectangle 4">
+            <a:extLst>
+              <a:ext uri="{FF2B5EF4-FFF2-40B4-BE49-F238E27FC236}">
+                <a16:creationId xmlns:a16="http://schemas.microsoft.com/office/drawing/2014/main" id="{21C3F3DD-DB53-2192-E54B-E3479F37C32C}"/>
+              </a:ext>
+            </a:extLst>
+          </p:cNvPr>
+          <p:cNvSpPr/>
+          <p:nvPr/>
+        </p:nvSpPr>
+        <p:spPr>
+          <a:xfrm flipV="1">
+            <a:off x="-3842" y="2281974"/>
+            <a:ext cx="8176607" cy="50308"/>
+          </a:xfrm>
+          <a:prstGeom prst="rect">
+            <a:avLst/>
+          </a:prstGeom>
+          <a:solidFill>
+            <a:srgbClr val="009BD8"/>
+          </a:solidFill>
           <a:ln>
-            <a:solidFill>
-              <a:schemeClr val="tx1"/>
-            </a:solidFill>
+            <a:noFill/>
           </a:ln>
         </p:spPr>
-      </p:pic>
+        <p:style>
+          <a:lnRef idx="1">
+            <a:schemeClr val="accent1"/>
+          </a:lnRef>
+          <a:fillRef idx="3">
+            <a:schemeClr val="accent1"/>
+          </a:fillRef>
+          <a:effectRef idx="2">
+            <a:schemeClr val="accent1"/>
+          </a:effectRef>
+          <a:fontRef idx="minor">
+            <a:schemeClr val="lt1"/>
+          </a:fontRef>
+        </p:style>
+        <p:txBody>
+          <a:bodyPr rtlCol="0" anchor="ctr"/>
+          <a:lstStyle/>
+          <a:p>
+            <a:pPr algn="ctr"/>
+            <a:endParaRPr sz="1360"/>
+          </a:p>
+        </p:txBody>
+      </p:sp>
+      <p:sp>
+        <p:nvSpPr>
+          <p:cNvPr id="9" name="Rectangle 4">
+            <a:extLst>
+              <a:ext uri="{FF2B5EF4-FFF2-40B4-BE49-F238E27FC236}">
+                <a16:creationId xmlns:a16="http://schemas.microsoft.com/office/drawing/2014/main" id="{FD23F9A9-6222-7C4E-7891-D6EA63130B0F}"/>
+              </a:ext>
+            </a:extLst>
+          </p:cNvPr>
+          <p:cNvSpPr/>
+          <p:nvPr/>
+        </p:nvSpPr>
+        <p:spPr>
+          <a:xfrm flipV="1">
+            <a:off x="-2293" y="3446247"/>
+            <a:ext cx="8159750" cy="45719"/>
+          </a:xfrm>
+          <a:prstGeom prst="rect">
+            <a:avLst/>
+          </a:prstGeom>
+          <a:solidFill>
+            <a:srgbClr val="009BD8"/>
+          </a:solidFill>
+          <a:ln>
+            <a:noFill/>
+          </a:ln>
+        </p:spPr>
+        <p:style>
+          <a:lnRef idx="1">
+            <a:schemeClr val="accent1"/>
+          </a:lnRef>
+          <a:fillRef idx="3">
+            <a:schemeClr val="accent1"/>
+          </a:fillRef>
+          <a:effectRef idx="2">
+            <a:schemeClr val="accent1"/>
+          </a:effectRef>
+          <a:fontRef idx="minor">
+            <a:schemeClr val="lt1"/>
+          </a:fontRef>
+        </p:style>
+        <p:txBody>
+          <a:bodyPr rtlCol="0" anchor="ctr"/>
+          <a:lstStyle/>
+          <a:p>
+            <a:pPr algn="ctr"/>
+            <a:endParaRPr sz="1360"/>
+          </a:p>
+        </p:txBody>
+      </p:sp>
+      <p:sp>
+        <p:nvSpPr>
+          <p:cNvPr id="10" name="Rectangle 4">
+            <a:extLst>
+              <a:ext uri="{FF2B5EF4-FFF2-40B4-BE49-F238E27FC236}">
+                <a16:creationId xmlns:a16="http://schemas.microsoft.com/office/drawing/2014/main" id="{25687D5D-187F-1F54-4560-A43EC5AD2C86}"/>
+              </a:ext>
+            </a:extLst>
+          </p:cNvPr>
+          <p:cNvSpPr/>
+          <p:nvPr/>
+        </p:nvSpPr>
+        <p:spPr>
+          <a:xfrm flipV="1">
+            <a:off x="4587" y="4839761"/>
+            <a:ext cx="8159750" cy="45719"/>
+          </a:xfrm>
+          <a:prstGeom prst="rect">
+            <a:avLst/>
+          </a:prstGeom>
+          <a:solidFill>
+            <a:srgbClr val="009BD8"/>
+          </a:solidFill>
+          <a:ln>
+            <a:noFill/>
+          </a:ln>
+        </p:spPr>
+        <p:style>
+          <a:lnRef idx="1">
+            <a:schemeClr val="accent1"/>
+          </a:lnRef>
+          <a:fillRef idx="3">
+            <a:schemeClr val="accent1"/>
+          </a:fillRef>
+          <a:effectRef idx="2">
+            <a:schemeClr val="accent1"/>
+          </a:effectRef>
+          <a:fontRef idx="minor">
+            <a:schemeClr val="lt1"/>
+          </a:fontRef>
+        </p:style>
+        <p:txBody>
+          <a:bodyPr rtlCol="0" anchor="ctr"/>
+          <a:lstStyle/>
+          <a:p>
+            <a:pPr algn="ctr"/>
+            <a:endParaRPr sz="1360"/>
+          </a:p>
+        </p:txBody>
+      </p:sp>
     </p:spTree>
   </p:cSld>
   <p:clrMapOvr>
@@ -12924,8 +13244,8 @@
         </p:nvSpPr>
         <p:spPr>
           <a:xfrm>
-            <a:off x="2293" y="953913"/>
-            <a:ext cx="8157458" cy="5130382"/>
+            <a:off x="-17123" y="37972"/>
+            <a:ext cx="8176873" cy="6081842"/>
           </a:xfrm>
           <a:prstGeom prst="rect">
             <a:avLst/>
@@ -12956,7 +13276,7 @@
           <a:lstStyle/>
           <a:p>
             <a:pPr algn="ctr"/>
-            <a:endParaRPr sz="1360"/>
+            <a:endParaRPr sz="1360" dirty="0"/>
           </a:p>
         </p:txBody>
       </p:sp>
@@ -12968,8 +13288,8 @@
         </p:nvSpPr>
         <p:spPr>
           <a:xfrm>
-            <a:off x="0" y="-2781"/>
-            <a:ext cx="8159750" cy="932968"/>
+            <a:off x="-17124" y="1840"/>
+            <a:ext cx="8176874" cy="932968"/>
           </a:xfrm>
           <a:prstGeom prst="rect">
             <a:avLst/>
@@ -13012,8 +13332,8 @@
         </p:nvSpPr>
         <p:spPr>
           <a:xfrm>
-            <a:off x="216545" y="-26507"/>
-            <a:ext cx="7778353" cy="584775"/>
+            <a:off x="132625" y="125158"/>
+            <a:ext cx="7877373" cy="584775"/>
           </a:xfrm>
           <a:prstGeom prst="rect">
             <a:avLst/>
@@ -13028,12 +13348,28 @@
           <a:p>
             <a:pPr algn="l"/>
             <a:r>
-              <a:rPr lang="ru-RU" sz="3200" b="1" dirty="0">
+              <a:rPr sz="3200" b="1" dirty="0" err="1">
                 <a:solidFill>
                   <a:srgbClr val="FFFFFF"/>
                 </a:solidFill>
               </a:rPr>
-              <a:t>Результаты работы</a:t>
+              <a:t>Результаты</a:t>
+            </a:r>
+            <a:r>
+              <a:rPr sz="3200" b="1" dirty="0">
+                <a:solidFill>
+                  <a:srgbClr val="FFFFFF"/>
+                </a:solidFill>
+              </a:rPr>
+              <a:t> </a:t>
+            </a:r>
+            <a:r>
+              <a:rPr sz="3200" b="1" dirty="0" err="1">
+                <a:solidFill>
+                  <a:srgbClr val="FFFFFF"/>
+                </a:solidFill>
+              </a:rPr>
+              <a:t>работы</a:t>
             </a:r>
             <a:endParaRPr sz="3200" b="1" dirty="0">
               <a:solidFill>
@@ -13050,9 +13386,9 @@
           <p:nvPr/>
         </p:nvSpPr>
         <p:spPr>
-          <a:xfrm flipV="1">
-            <a:off x="1" y="938768"/>
-            <a:ext cx="8159750" cy="45719"/>
+          <a:xfrm>
+            <a:off x="-17125" y="909804"/>
+            <a:ext cx="8176875" cy="45719"/>
           </a:xfrm>
           <a:prstGeom prst="rect">
             <a:avLst/>
@@ -13095,8 +13431,8 @@
         </p:nvSpPr>
         <p:spPr>
           <a:xfrm>
-            <a:off x="-3842" y="5874142"/>
-            <a:ext cx="8168179" cy="241881"/>
+            <a:off x="-17124" y="5907721"/>
+            <a:ext cx="8176874" cy="227925"/>
           </a:xfrm>
           <a:prstGeom prst="rect">
             <a:avLst/>
@@ -13139,8 +13475,8 @@
         </p:nvSpPr>
         <p:spPr>
           <a:xfrm>
-            <a:off x="7719772" y="5840039"/>
-            <a:ext cx="437685" cy="307777"/>
+            <a:off x="7681968" y="5866591"/>
+            <a:ext cx="477782" cy="307777"/>
           </a:xfrm>
           <a:prstGeom prst="rect">
             <a:avLst/>
@@ -13155,20 +13491,12 @@
           <a:p>
             <a:pPr algn="r"/>
             <a:r>
-              <a:rPr lang="en-US" sz="1400" dirty="0">
+              <a:rPr lang="ru-RU" sz="1400" dirty="0">
                 <a:solidFill>
                   <a:srgbClr val="009BD8"/>
                 </a:solidFill>
               </a:rPr>
-              <a:t>1</a:t>
-            </a:r>
-            <a:r>
-              <a:rPr lang="ru-RU" sz="1400" dirty="0">
-                <a:solidFill>
-                  <a:srgbClr val="009BD8"/>
-                </a:solidFill>
-              </a:rPr>
-              <a:t>6</a:t>
+              <a:t>16</a:t>
             </a:r>
             <a:endParaRPr sz="1400" dirty="0">
               <a:solidFill>
@@ -13180,26 +13508,20 @@
       </p:sp>
       <p:sp>
         <p:nvSpPr>
-          <p:cNvPr id="35" name="Rectangle 24">
-            <a:extLst>
-              <a:ext uri="{FF2B5EF4-FFF2-40B4-BE49-F238E27FC236}">
-                <a16:creationId xmlns:a16="http://schemas.microsoft.com/office/drawing/2014/main" id="{A5152BC9-D871-BCE0-D0CA-1414CD30397C}"/>
-              </a:ext>
-            </a:extLst>
-          </p:cNvPr>
+          <p:cNvPr id="12" name="Rectangle 11"/>
           <p:cNvSpPr/>
           <p:nvPr/>
         </p:nvSpPr>
         <p:spPr>
           <a:xfrm>
-            <a:off x="182490" y="1456781"/>
-            <a:ext cx="107334" cy="419751"/>
+            <a:off x="141608" y="2691336"/>
+            <a:ext cx="2046421" cy="1404580"/>
           </a:xfrm>
           <a:prstGeom prst="rect">
             <a:avLst/>
           </a:prstGeom>
           <a:solidFill>
-            <a:srgbClr val="C0392B"/>
+            <a:srgbClr val="0D6E6E"/>
           </a:solidFill>
           <a:ln>
             <a:noFill/>
@@ -13224,26 +13546,20 @@
           <a:lstStyle/>
           <a:p>
             <a:pPr algn="ctr"/>
-            <a:endParaRPr sz="1360"/>
-          </a:p>
-        </p:txBody>
-      </p:sp>
-      <p:sp>
-        <p:nvSpPr>
-          <p:cNvPr id="36" name="TextBox 35">
-            <a:extLst>
-              <a:ext uri="{FF2B5EF4-FFF2-40B4-BE49-F238E27FC236}">
-                <a16:creationId xmlns:a16="http://schemas.microsoft.com/office/drawing/2014/main" id="{D4634DED-2C15-8187-675D-F2B099B284BE}"/>
-              </a:ext>
-            </a:extLst>
-          </p:cNvPr>
+            <a:endParaRPr sz="1360" dirty="0"/>
+          </a:p>
+        </p:txBody>
+      </p:sp>
+      <p:sp>
+        <p:nvSpPr>
+          <p:cNvPr id="13" name="TextBox 12"/>
           <p:cNvSpPr txBox="1"/>
           <p:nvPr/>
         </p:nvSpPr>
         <p:spPr>
           <a:xfrm>
-            <a:off x="375516" y="1010608"/>
-            <a:ext cx="2418622" cy="371320"/>
+            <a:off x="268371" y="2727467"/>
+            <a:ext cx="1769046" cy="769441"/>
           </a:xfrm>
           <a:prstGeom prst="rect">
             <a:avLst/>
@@ -13256,39 +13572,28 @@
           </a:bodyPr>
           <a:lstStyle/>
           <a:p>
-            <a:pPr algn="l"/>
-            <a:r>
-              <a:rPr lang="ru-RU" sz="1813" b="1" dirty="0">
-                <a:solidFill>
-                  <a:srgbClr val="0D2B55"/>
-                </a:solidFill>
-              </a:rPr>
-              <a:t>Форма записи</a:t>
-            </a:r>
-            <a:endParaRPr sz="1813" b="1" dirty="0">
-              <a:solidFill>
-                <a:srgbClr val="0D2B55"/>
-              </a:solidFill>
-            </a:endParaRPr>
-          </a:p>
-        </p:txBody>
-      </p:sp>
-      <p:sp>
-        <p:nvSpPr>
-          <p:cNvPr id="37" name="TextBox 36">
-            <a:extLst>
-              <a:ext uri="{FF2B5EF4-FFF2-40B4-BE49-F238E27FC236}">
-                <a16:creationId xmlns:a16="http://schemas.microsoft.com/office/drawing/2014/main" id="{F761F1C3-8C11-95D2-0AFC-90DF4BA04141}"/>
-              </a:ext>
-            </a:extLst>
-          </p:cNvPr>
+            <a:pPr algn="ctr"/>
+            <a:r>
+              <a:rPr sz="4400" b="1" dirty="0">
+                <a:solidFill>
+                  <a:srgbClr val="FFFFFF"/>
+                </a:solidFill>
+              </a:rPr>
+              <a:t>16</a:t>
+            </a:r>
+          </a:p>
+        </p:txBody>
+      </p:sp>
+      <p:sp>
+        <p:nvSpPr>
+          <p:cNvPr id="14" name="TextBox 13"/>
           <p:cNvSpPr txBox="1"/>
           <p:nvPr/>
         </p:nvSpPr>
         <p:spPr>
           <a:xfrm>
-            <a:off x="341514" y="1304191"/>
-            <a:ext cx="7836490" cy="830997"/>
+            <a:off x="241624" y="3355991"/>
+            <a:ext cx="1769046" cy="646331"/>
           </a:xfrm>
           <a:prstGeom prst="rect">
             <a:avLst/>
@@ -13301,51 +13606,35 @@
           </a:bodyPr>
           <a:lstStyle/>
           <a:p>
-            <a:r>
-              <a:rPr lang="ru-RU" sz="2400" dirty="0">
-                <a:solidFill>
-                  <a:srgbClr val="444455"/>
-                </a:solidFill>
-              </a:rPr>
-              <a:t>Принимает номера телефона «00110011001»</a:t>
-            </a:r>
-          </a:p>
-          <a:p>
-            <a:r>
-              <a:rPr lang="ru-RU" sz="2400" dirty="0">
-                <a:solidFill>
-                  <a:srgbClr val="444455"/>
-                </a:solidFill>
-              </a:rPr>
-              <a:t> дату «11111-11-11» имя </a:t>
-            </a:r>
-            <a:r>
-              <a:rPr lang="ru-RU" sz="2000" dirty="0">
-                <a:solidFill>
-                  <a:srgbClr val="444455"/>
-                </a:solidFill>
-              </a:rPr>
-              <a:t>«,</a:t>
-            </a:r>
-            <a:r>
-              <a:rPr lang="en-US" sz="2000" dirty="0">
-                <a:solidFill>
-                  <a:srgbClr val="444455"/>
-                </a:solidFill>
-              </a:rPr>
-              <a:t>Mbuygt76</a:t>
-            </a:r>
-            <a:r>
-              <a:rPr lang="ru-RU" sz="2000" dirty="0">
-                <a:solidFill>
-                  <a:srgbClr val="444455"/>
-                </a:solidFill>
-              </a:rPr>
-              <a:t>» </a:t>
-            </a:r>
-            <a:endParaRPr lang="ru-RU" sz="2400" dirty="0">
+            <a:pPr algn="ctr"/>
+            <a:r>
+              <a:rPr dirty="0" err="1">
+                <a:solidFill>
+                  <a:srgbClr val="CCE4FF"/>
+                </a:solidFill>
+              </a:rPr>
+              <a:t>автотестов</a:t>
+            </a:r>
+            <a:r>
+              <a:rPr dirty="0">
+                <a:solidFill>
+                  <a:srgbClr val="CCE4FF"/>
+                </a:solidFill>
+              </a:rPr>
+              <a:t>
+</a:t>
+            </a:r>
+            <a:r>
+              <a:rPr dirty="0" err="1">
+                <a:solidFill>
+                  <a:srgbClr val="CCE4FF"/>
+                </a:solidFill>
+              </a:rPr>
+              <a:t>реализовано</a:t>
+            </a:r>
+            <a:endParaRPr dirty="0">
               <a:solidFill>
-                <a:srgbClr val="444455"/>
+                <a:srgbClr val="CCE4FF"/>
               </a:solidFill>
             </a:endParaRPr>
           </a:p>
@@ -13353,10 +13642,10 @@
       </p:sp>
       <p:sp>
         <p:nvSpPr>
-          <p:cNvPr id="38" name="Rectangle 24">
+          <p:cNvPr id="22" name="Rectangle 8">
             <a:extLst>
               <a:ext uri="{FF2B5EF4-FFF2-40B4-BE49-F238E27FC236}">
-                <a16:creationId xmlns:a16="http://schemas.microsoft.com/office/drawing/2014/main" id="{D1861545-0F7F-614A-3A5B-7857EBA49E7F}"/>
+                <a16:creationId xmlns:a16="http://schemas.microsoft.com/office/drawing/2014/main" id="{1CC3E1FE-5482-A837-34EA-5EDC9ED6B198}"/>
               </a:ext>
             </a:extLst>
           </p:cNvPr>
@@ -13365,14 +13654,14 @@
         </p:nvSpPr>
         <p:spPr>
           <a:xfrm>
-            <a:off x="182490" y="2701387"/>
-            <a:ext cx="107334" cy="419751"/>
+            <a:off x="141607" y="1104508"/>
+            <a:ext cx="2046421" cy="1404579"/>
           </a:xfrm>
           <a:prstGeom prst="rect">
             <a:avLst/>
           </a:prstGeom>
           <a:solidFill>
-            <a:srgbClr val="C0392B"/>
+            <a:srgbClr val="0D2B55"/>
           </a:solidFill>
           <a:ln>
             <a:noFill/>
@@ -13403,10 +13692,10 @@
       </p:sp>
       <p:sp>
         <p:nvSpPr>
-          <p:cNvPr id="39" name="TextBox 38">
+          <p:cNvPr id="23" name="TextBox 22">
             <a:extLst>
               <a:ext uri="{FF2B5EF4-FFF2-40B4-BE49-F238E27FC236}">
-                <a16:creationId xmlns:a16="http://schemas.microsoft.com/office/drawing/2014/main" id="{4D9A3C01-3A0E-68AA-6834-5A90AC22346D}"/>
+                <a16:creationId xmlns:a16="http://schemas.microsoft.com/office/drawing/2014/main" id="{0E1F4E09-AC65-2380-BB59-E9CE825F4F52}"/>
               </a:ext>
             </a:extLst>
           </p:cNvPr>
@@ -13415,8 +13704,8 @@
         </p:nvSpPr>
         <p:spPr>
           <a:xfrm>
-            <a:off x="345336" y="2386779"/>
-            <a:ext cx="2418622" cy="371320"/>
+            <a:off x="125895" y="1120340"/>
+            <a:ext cx="1962032" cy="769441"/>
           </a:xfrm>
           <a:prstGeom prst="rect">
             <a:avLst/>
@@ -13429,29 +13718,24 @@
           </a:bodyPr>
           <a:lstStyle/>
           <a:p>
-            <a:pPr algn="l"/>
-            <a:r>
-              <a:rPr lang="ru-RU" sz="1813" b="1" dirty="0">
-                <a:solidFill>
-                  <a:srgbClr val="0D2B55"/>
-                </a:solidFill>
-              </a:rPr>
-              <a:t>Пустое поле телефона</a:t>
-            </a:r>
-            <a:endParaRPr sz="1813" b="1" dirty="0">
-              <a:solidFill>
-                <a:srgbClr val="0D2B55"/>
-              </a:solidFill>
-            </a:endParaRPr>
-          </a:p>
-        </p:txBody>
-      </p:sp>
-      <p:sp>
-        <p:nvSpPr>
-          <p:cNvPr id="40" name="TextBox 39">
+            <a:pPr algn="ctr"/>
+            <a:r>
+              <a:rPr sz="4400" b="1" dirty="0">
+                <a:solidFill>
+                  <a:srgbClr val="FFFFFF"/>
+                </a:solidFill>
+              </a:rPr>
+              <a:t>16</a:t>
+            </a:r>
+          </a:p>
+        </p:txBody>
+      </p:sp>
+      <p:sp>
+        <p:nvSpPr>
+          <p:cNvPr id="24" name="TextBox 23">
             <a:extLst>
               <a:ext uri="{FF2B5EF4-FFF2-40B4-BE49-F238E27FC236}">
-                <a16:creationId xmlns:a16="http://schemas.microsoft.com/office/drawing/2014/main" id="{AEB60907-93CE-A110-501F-C53AA0144C68}"/>
+                <a16:creationId xmlns:a16="http://schemas.microsoft.com/office/drawing/2014/main" id="{FD302E9A-B00E-3559-711D-C6A48D3AC311}"/>
               </a:ext>
             </a:extLst>
           </p:cNvPr>
@@ -13460,8 +13744,8 @@
         </p:nvSpPr>
         <p:spPr>
           <a:xfrm>
-            <a:off x="319232" y="2734470"/>
-            <a:ext cx="7619382" cy="461665"/>
+            <a:off x="241624" y="1778473"/>
+            <a:ext cx="1769046" cy="646331"/>
           </a:xfrm>
           <a:prstGeom prst="rect">
             <a:avLst/>
@@ -13474,18 +13758,35 @@
           </a:bodyPr>
           <a:lstStyle/>
           <a:p>
-            <a:pPr algn="l"/>
-            <a:r>
-              <a:rPr lang="ru-RU" sz="2400" dirty="0">
-                <a:solidFill>
-                  <a:srgbClr val="444455"/>
-                </a:solidFill>
-              </a:rPr>
-              <a:t>Заявка отправляется с пустым номером</a:t>
-            </a:r>
-            <a:endParaRPr sz="2400" dirty="0">
+            <a:pPr algn="ctr"/>
+            <a:r>
+              <a:rPr dirty="0" err="1">
+                <a:solidFill>
+                  <a:srgbClr val="CCE4FF"/>
+                </a:solidFill>
+              </a:rPr>
+              <a:t>тест-кейсов</a:t>
+            </a:r>
+            <a:r>
+              <a:rPr dirty="0">
+                <a:solidFill>
+                  <a:srgbClr val="CCE4FF"/>
+                </a:solidFill>
+              </a:rPr>
+              <a:t>
+</a:t>
+            </a:r>
+            <a:r>
+              <a:rPr dirty="0" err="1">
+                <a:solidFill>
+                  <a:srgbClr val="CCE4FF"/>
+                </a:solidFill>
+              </a:rPr>
+              <a:t>разработано</a:t>
+            </a:r>
+            <a:endParaRPr dirty="0">
               <a:solidFill>
-                <a:srgbClr val="444455"/>
+                <a:srgbClr val="CCE4FF"/>
               </a:solidFill>
             </a:endParaRPr>
           </a:p>
@@ -13493,10 +13794,10 @@
       </p:sp>
       <p:sp>
         <p:nvSpPr>
-          <p:cNvPr id="48" name="Rectangle 24">
+          <p:cNvPr id="35" name="Rectangle 14">
             <a:extLst>
               <a:ext uri="{FF2B5EF4-FFF2-40B4-BE49-F238E27FC236}">
-                <a16:creationId xmlns:a16="http://schemas.microsoft.com/office/drawing/2014/main" id="{40991BA5-8A42-48CF-A74C-46091F340AC0}"/>
+                <a16:creationId xmlns:a16="http://schemas.microsoft.com/office/drawing/2014/main" id="{F420FECF-3EF0-ADD0-2A2B-FC04428FCBFB}"/>
               </a:ext>
             </a:extLst>
           </p:cNvPr>
@@ -13505,14 +13806,14 @@
         </p:nvSpPr>
         <p:spPr>
           <a:xfrm>
-            <a:off x="180287" y="3926256"/>
-            <a:ext cx="107334" cy="419751"/>
+            <a:off x="141608" y="4320525"/>
+            <a:ext cx="2046421" cy="1404580"/>
           </a:xfrm>
           <a:prstGeom prst="rect">
             <a:avLst/>
           </a:prstGeom>
           <a:solidFill>
-            <a:srgbClr val="C0392B"/>
+            <a:srgbClr val="1A5C8A"/>
           </a:solidFill>
           <a:ln>
             <a:noFill/>
@@ -13543,10 +13844,10 @@
       </p:sp>
       <p:sp>
         <p:nvSpPr>
-          <p:cNvPr id="49" name="TextBox 48">
+          <p:cNvPr id="36" name="TextBox 35">
             <a:extLst>
               <a:ext uri="{FF2B5EF4-FFF2-40B4-BE49-F238E27FC236}">
-                <a16:creationId xmlns:a16="http://schemas.microsoft.com/office/drawing/2014/main" id="{0FF78AD8-4CD9-FD92-9B25-1110D6BAA004}"/>
+                <a16:creationId xmlns:a16="http://schemas.microsoft.com/office/drawing/2014/main" id="{1F36AE7F-804E-4795-731D-64342993F609}"/>
               </a:ext>
             </a:extLst>
           </p:cNvPr>
@@ -13555,8 +13856,8 @@
         </p:nvSpPr>
         <p:spPr>
           <a:xfrm>
-            <a:off x="375516" y="3546232"/>
-            <a:ext cx="3392651" cy="371320"/>
+            <a:off x="179958" y="4409899"/>
+            <a:ext cx="1759721" cy="769441"/>
           </a:xfrm>
           <a:prstGeom prst="rect">
             <a:avLst/>
@@ -13569,45 +13870,24 @@
           </a:bodyPr>
           <a:lstStyle/>
           <a:p>
-            <a:pPr algn="l"/>
-            <a:r>
-              <a:rPr lang="ru-RU" sz="1813" b="1" dirty="0">
-                <a:solidFill>
-                  <a:srgbClr val="0D2B55"/>
-                </a:solidFill>
-              </a:rPr>
-              <a:t>Ссылка на </a:t>
-            </a:r>
-            <a:r>
-              <a:rPr lang="en-US" sz="1813" b="1" dirty="0" err="1">
-                <a:solidFill>
-                  <a:srgbClr val="0D2B55"/>
-                </a:solidFill>
-              </a:rPr>
-              <a:t>Prodoctorov</a:t>
-            </a:r>
-            <a:r>
-              <a:rPr lang="en-US" sz="1813" b="1" dirty="0">
-                <a:solidFill>
-                  <a:srgbClr val="0D2B55"/>
-                </a:solidFill>
-              </a:rPr>
-              <a:t> </a:t>
-            </a:r>
-            <a:endParaRPr sz="1813" b="1" dirty="0">
-              <a:solidFill>
-                <a:srgbClr val="0D2B55"/>
-              </a:solidFill>
-            </a:endParaRPr>
-          </a:p>
-        </p:txBody>
-      </p:sp>
-      <p:sp>
-        <p:nvSpPr>
-          <p:cNvPr id="50" name="TextBox 49">
+            <a:pPr algn="ctr"/>
+            <a:r>
+              <a:rPr sz="4400" b="1" dirty="0">
+                <a:solidFill>
+                  <a:srgbClr val="FFFFFF"/>
+                </a:solidFill>
+              </a:rPr>
+              <a:t>4</a:t>
+            </a:r>
+          </a:p>
+        </p:txBody>
+      </p:sp>
+      <p:sp>
+        <p:nvSpPr>
+          <p:cNvPr id="37" name="TextBox 36">
             <a:extLst>
               <a:ext uri="{FF2B5EF4-FFF2-40B4-BE49-F238E27FC236}">
-                <a16:creationId xmlns:a16="http://schemas.microsoft.com/office/drawing/2014/main" id="{F08B363D-636F-6C23-D551-0276DFA4C246}"/>
+                <a16:creationId xmlns:a16="http://schemas.microsoft.com/office/drawing/2014/main" id="{A9EF3CA8-9B2B-46FF-DF1B-D42ED41B1AA2}"/>
               </a:ext>
             </a:extLst>
           </p:cNvPr>
@@ -13616,8 +13896,8 @@
         </p:nvSpPr>
         <p:spPr>
           <a:xfrm>
-            <a:off x="353599" y="3879459"/>
-            <a:ext cx="7595213" cy="830997"/>
+            <a:off x="241624" y="4999473"/>
+            <a:ext cx="1759721" cy="646331"/>
           </a:xfrm>
           <a:prstGeom prst="rect">
             <a:avLst/>
@@ -13630,382 +13910,124 @@
           </a:bodyPr>
           <a:lstStyle/>
           <a:p>
-            <a:pPr algn="l"/>
-            <a:r>
-              <a:rPr lang="ru-RU" sz="2400" dirty="0">
-                <a:solidFill>
-                  <a:srgbClr val="444455"/>
-                </a:solidFill>
-              </a:rPr>
-              <a:t>Не переходит по ссылке, ведет на ту же страницу «Неврологи в Уфе» на сайте </a:t>
-            </a:r>
-            <a:r>
-              <a:rPr lang="en-US" sz="2400" dirty="0" err="1">
-                <a:solidFill>
-                  <a:srgbClr val="444455"/>
-                </a:solidFill>
-              </a:rPr>
-              <a:t>Alimma</a:t>
-            </a:r>
-            <a:r>
-              <a:rPr lang="ru-RU" sz="2400" dirty="0">
-                <a:solidFill>
-                  <a:srgbClr val="444455"/>
-                </a:solidFill>
-              </a:rPr>
-              <a:t>. </a:t>
-            </a:r>
-            <a:endParaRPr sz="2400" dirty="0">
-              <a:solidFill>
-                <a:srgbClr val="444455"/>
-              </a:solidFill>
-            </a:endParaRPr>
-          </a:p>
-        </p:txBody>
-      </p:sp>
-      <p:sp>
-        <p:nvSpPr>
-          <p:cNvPr id="54" name="Rectangle 24">
+            <a:pPr algn="ctr"/>
+            <a:r>
+              <a:rPr lang="ru-RU" dirty="0">
+                <a:solidFill>
+                  <a:srgbClr val="CCE4FF"/>
+                </a:solidFill>
+              </a:rPr>
+              <a:t>найденных
+бага</a:t>
+            </a:r>
+          </a:p>
+        </p:txBody>
+      </p:sp>
+      <p:pic>
+        <p:nvPicPr>
+          <p:cNvPr id="7" name="Рисунок 6">
             <a:extLst>
               <a:ext uri="{FF2B5EF4-FFF2-40B4-BE49-F238E27FC236}">
-                <a16:creationId xmlns:a16="http://schemas.microsoft.com/office/drawing/2014/main" id="{5805B16B-E337-455F-C51C-AFD025217DC3}"/>
+                <a16:creationId xmlns:a16="http://schemas.microsoft.com/office/drawing/2014/main" id="{6BFE9C25-3F87-0533-6766-C83EC5A65B8C}"/>
               </a:ext>
             </a:extLst>
           </p:cNvPr>
-          <p:cNvSpPr/>
-          <p:nvPr/>
-        </p:nvSpPr>
-        <p:spPr>
-          <a:xfrm>
-            <a:off x="162878" y="5131954"/>
-            <a:ext cx="107334" cy="419751"/>
-          </a:xfrm>
-          <a:prstGeom prst="rect">
-            <a:avLst/>
-          </a:prstGeom>
-          <a:solidFill>
-            <a:srgbClr val="C0392B"/>
-          </a:solidFill>
+          <p:cNvPicPr>
+            <a:picLocks noChangeAspect="1"/>
+          </p:cNvPicPr>
+          <p:nvPr/>
+        </p:nvPicPr>
+        <p:blipFill>
+          <a:blip r:embed="rId3"/>
+          <a:stretch>
+            <a:fillRect/>
+          </a:stretch>
+        </p:blipFill>
+        <p:spPr>
+          <a:xfrm>
+            <a:off x="2346760" y="4333442"/>
+            <a:ext cx="5750927" cy="1374408"/>
+          </a:xfrm>
+          <a:prstGeom prst="rect">
+            <a:avLst/>
+          </a:prstGeom>
           <a:ln>
-            <a:noFill/>
+            <a:solidFill>
+              <a:schemeClr val="tx1"/>
+            </a:solidFill>
           </a:ln>
         </p:spPr>
-        <p:style>
-          <a:lnRef idx="1">
-            <a:schemeClr val="accent1"/>
-          </a:lnRef>
-          <a:fillRef idx="3">
-            <a:schemeClr val="accent1"/>
-          </a:fillRef>
-          <a:effectRef idx="2">
-            <a:schemeClr val="accent1"/>
-          </a:effectRef>
-          <a:fontRef idx="minor">
-            <a:schemeClr val="lt1"/>
-          </a:fontRef>
-        </p:style>
-        <p:txBody>
-          <a:bodyPr rtlCol="0" anchor="ctr"/>
-          <a:lstStyle/>
-          <a:p>
-            <a:pPr algn="ctr"/>
-            <a:endParaRPr sz="1360"/>
-          </a:p>
-        </p:txBody>
-      </p:sp>
-      <p:sp>
-        <p:nvSpPr>
-          <p:cNvPr id="55" name="TextBox 54">
+      </p:pic>
+      <p:pic>
+        <p:nvPicPr>
+          <p:cNvPr id="10" name="Рисунок 9">
             <a:extLst>
               <a:ext uri="{FF2B5EF4-FFF2-40B4-BE49-F238E27FC236}">
-                <a16:creationId xmlns:a16="http://schemas.microsoft.com/office/drawing/2014/main" id="{6D662FD4-75ED-6782-FAD2-FF80AD41A5E3}"/>
+                <a16:creationId xmlns:a16="http://schemas.microsoft.com/office/drawing/2014/main" id="{86AC71C6-8FE0-4EEB-8420-D6FB68D2DBA2}"/>
               </a:ext>
             </a:extLst>
           </p:cNvPr>
-          <p:cNvSpPr txBox="1"/>
-          <p:nvPr/>
-        </p:nvSpPr>
-        <p:spPr>
-          <a:xfrm>
-            <a:off x="375516" y="4946294"/>
-            <a:ext cx="3292293" cy="371320"/>
-          </a:xfrm>
-          <a:prstGeom prst="rect">
-            <a:avLst/>
-          </a:prstGeom>
-          <a:noFill/>
-        </p:spPr>
-        <p:txBody>
-          <a:bodyPr wrap="square">
-            <a:spAutoFit/>
-          </a:bodyPr>
-          <a:lstStyle/>
-          <a:p>
-            <a:pPr algn="l"/>
-            <a:r>
-              <a:rPr lang="ru-RU" sz="1813" b="1" dirty="0">
-                <a:solidFill>
-                  <a:srgbClr val="0D2B55"/>
-                </a:solidFill>
-              </a:rPr>
-              <a:t>Кнопки Пагинации  </a:t>
-            </a:r>
-            <a:r>
-              <a:rPr lang="en-US" sz="1813" b="1" dirty="0">
-                <a:solidFill>
-                  <a:srgbClr val="0D2B55"/>
-                </a:solidFill>
-              </a:rPr>
-              <a:t>Next/Prev </a:t>
-            </a:r>
-            <a:endParaRPr sz="1813" b="1" dirty="0">
-              <a:solidFill>
-                <a:srgbClr val="0D2B55"/>
-              </a:solidFill>
-            </a:endParaRPr>
-          </a:p>
-        </p:txBody>
-      </p:sp>
-      <p:sp>
-        <p:nvSpPr>
-          <p:cNvPr id="56" name="TextBox 55">
+          <p:cNvPicPr>
+            <a:picLocks noChangeAspect="1"/>
+          </p:cNvPicPr>
+          <p:nvPr/>
+        </p:nvPicPr>
+        <p:blipFill>
+          <a:blip r:embed="rId4"/>
+          <a:stretch>
+            <a:fillRect/>
+          </a:stretch>
+        </p:blipFill>
+        <p:spPr>
+          <a:xfrm>
+            <a:off x="2346761" y="1117425"/>
+            <a:ext cx="2894371" cy="2991142"/>
+          </a:xfrm>
+          <a:prstGeom prst="rect">
+            <a:avLst/>
+          </a:prstGeom>
+          <a:ln>
+            <a:solidFill>
+              <a:schemeClr val="tx1"/>
+            </a:solidFill>
+          </a:ln>
+        </p:spPr>
+      </p:pic>
+      <p:pic>
+        <p:nvPicPr>
+          <p:cNvPr id="17" name="Рисунок 16">
             <a:extLst>
               <a:ext uri="{FF2B5EF4-FFF2-40B4-BE49-F238E27FC236}">
-                <a16:creationId xmlns:a16="http://schemas.microsoft.com/office/drawing/2014/main" id="{A8127DA8-1BC7-14CF-D3B9-AECCD96E58A6}"/>
+                <a16:creationId xmlns:a16="http://schemas.microsoft.com/office/drawing/2014/main" id="{31AE9630-9045-DD6B-F307-9AC455DC973D}"/>
               </a:ext>
             </a:extLst>
           </p:cNvPr>
-          <p:cNvSpPr txBox="1"/>
-          <p:nvPr/>
-        </p:nvSpPr>
-        <p:spPr>
-          <a:xfrm>
-            <a:off x="329357" y="5265347"/>
-            <a:ext cx="7696006" cy="461665"/>
-          </a:xfrm>
-          <a:prstGeom prst="rect">
-            <a:avLst/>
-          </a:prstGeom>
-          <a:noFill/>
-        </p:spPr>
-        <p:txBody>
-          <a:bodyPr wrap="square">
-            <a:spAutoFit/>
-          </a:bodyPr>
-          <a:lstStyle/>
-          <a:p>
-            <a:pPr algn="l"/>
-            <a:r>
-              <a:rPr lang="ru-RU" sz="2400" dirty="0">
-                <a:solidFill>
-                  <a:srgbClr val="444455"/>
-                </a:solidFill>
-              </a:rPr>
-              <a:t>Кнопки сливаются с фоном и не имеют текста или знака</a:t>
-            </a:r>
-            <a:endParaRPr sz="2400" dirty="0">
-              <a:solidFill>
-                <a:srgbClr val="444455"/>
-              </a:solidFill>
-            </a:endParaRPr>
-          </a:p>
-        </p:txBody>
-      </p:sp>
-      <p:sp>
-        <p:nvSpPr>
-          <p:cNvPr id="57" name="TextBox 56">
-            <a:extLst>
-              <a:ext uri="{FF2B5EF4-FFF2-40B4-BE49-F238E27FC236}">
-                <a16:creationId xmlns:a16="http://schemas.microsoft.com/office/drawing/2014/main" id="{72E59800-9BD4-59D0-ED10-A14270598DE8}"/>
-              </a:ext>
-            </a:extLst>
-          </p:cNvPr>
-          <p:cNvSpPr txBox="1"/>
-          <p:nvPr/>
-        </p:nvSpPr>
-        <p:spPr>
-          <a:xfrm>
-            <a:off x="226928" y="528029"/>
-            <a:ext cx="7932822" cy="369332"/>
-          </a:xfrm>
-          <a:prstGeom prst="rect">
-            <a:avLst/>
-          </a:prstGeom>
-          <a:noFill/>
-        </p:spPr>
-        <p:txBody>
-          <a:bodyPr wrap="square">
-            <a:spAutoFit/>
-          </a:bodyPr>
-          <a:lstStyle/>
-          <a:p>
-            <a:pPr algn="l"/>
-            <a:r>
-              <a:rPr lang="ru-RU" dirty="0">
-                <a:solidFill>
-                  <a:srgbClr val="009BD8"/>
-                </a:solidFill>
-              </a:rPr>
-              <a:t>Найденные критические баги</a:t>
-            </a:r>
-            <a:endParaRPr dirty="0">
-              <a:solidFill>
-                <a:srgbClr val="009BD8"/>
-              </a:solidFill>
-            </a:endParaRPr>
-          </a:p>
-        </p:txBody>
-      </p:sp>
-      <p:sp>
-        <p:nvSpPr>
-          <p:cNvPr id="7" name="Rectangle 4">
-            <a:extLst>
-              <a:ext uri="{FF2B5EF4-FFF2-40B4-BE49-F238E27FC236}">
-                <a16:creationId xmlns:a16="http://schemas.microsoft.com/office/drawing/2014/main" id="{21C3F3DD-DB53-2192-E54B-E3479F37C32C}"/>
-              </a:ext>
-            </a:extLst>
-          </p:cNvPr>
-          <p:cNvSpPr/>
-          <p:nvPr/>
-        </p:nvSpPr>
-        <p:spPr>
-          <a:xfrm flipV="1">
-            <a:off x="-3842" y="2281974"/>
-            <a:ext cx="8176607" cy="50308"/>
-          </a:xfrm>
-          <a:prstGeom prst="rect">
-            <a:avLst/>
-          </a:prstGeom>
-          <a:solidFill>
-            <a:srgbClr val="009BD8"/>
-          </a:solidFill>
+          <p:cNvPicPr>
+            <a:picLocks noChangeAspect="1"/>
+          </p:cNvPicPr>
+          <p:nvPr/>
+        </p:nvPicPr>
+        <p:blipFill>
+          <a:blip r:embed="rId5"/>
+          <a:stretch>
+            <a:fillRect/>
+          </a:stretch>
+        </p:blipFill>
+        <p:spPr>
+          <a:xfrm>
+            <a:off x="5295621" y="1104774"/>
+            <a:ext cx="2802066" cy="2983078"/>
+          </a:xfrm>
+          <a:prstGeom prst="rect">
+            <a:avLst/>
+          </a:prstGeom>
           <a:ln>
-            <a:noFill/>
+            <a:solidFill>
+              <a:schemeClr val="tx1"/>
+            </a:solidFill>
           </a:ln>
         </p:spPr>
-        <p:style>
-          <a:lnRef idx="1">
-            <a:schemeClr val="accent1"/>
-          </a:lnRef>
-          <a:fillRef idx="3">
-            <a:schemeClr val="accent1"/>
-          </a:fillRef>
-          <a:effectRef idx="2">
-            <a:schemeClr val="accent1"/>
-          </a:effectRef>
-          <a:fontRef idx="minor">
-            <a:schemeClr val="lt1"/>
-          </a:fontRef>
-        </p:style>
-        <p:txBody>
-          <a:bodyPr rtlCol="0" anchor="ctr"/>
-          <a:lstStyle/>
-          <a:p>
-            <a:pPr algn="ctr"/>
-            <a:endParaRPr sz="1360"/>
-          </a:p>
-        </p:txBody>
-      </p:sp>
-      <p:sp>
-        <p:nvSpPr>
-          <p:cNvPr id="9" name="Rectangle 4">
-            <a:extLst>
-              <a:ext uri="{FF2B5EF4-FFF2-40B4-BE49-F238E27FC236}">
-                <a16:creationId xmlns:a16="http://schemas.microsoft.com/office/drawing/2014/main" id="{FD23F9A9-6222-7C4E-7891-D6EA63130B0F}"/>
-              </a:ext>
-            </a:extLst>
-          </p:cNvPr>
-          <p:cNvSpPr/>
-          <p:nvPr/>
-        </p:nvSpPr>
-        <p:spPr>
-          <a:xfrm flipV="1">
-            <a:off x="-2293" y="3446247"/>
-            <a:ext cx="8159750" cy="45719"/>
-          </a:xfrm>
-          <a:prstGeom prst="rect">
-            <a:avLst/>
-          </a:prstGeom>
-          <a:solidFill>
-            <a:srgbClr val="009BD8"/>
-          </a:solidFill>
-          <a:ln>
-            <a:noFill/>
-          </a:ln>
-        </p:spPr>
-        <p:style>
-          <a:lnRef idx="1">
-            <a:schemeClr val="accent1"/>
-          </a:lnRef>
-          <a:fillRef idx="3">
-            <a:schemeClr val="accent1"/>
-          </a:fillRef>
-          <a:effectRef idx="2">
-            <a:schemeClr val="accent1"/>
-          </a:effectRef>
-          <a:fontRef idx="minor">
-            <a:schemeClr val="lt1"/>
-          </a:fontRef>
-        </p:style>
-        <p:txBody>
-          <a:bodyPr rtlCol="0" anchor="ctr"/>
-          <a:lstStyle/>
-          <a:p>
-            <a:pPr algn="ctr"/>
-            <a:endParaRPr sz="1360"/>
-          </a:p>
-        </p:txBody>
-      </p:sp>
-      <p:sp>
-        <p:nvSpPr>
-          <p:cNvPr id="10" name="Rectangle 4">
-            <a:extLst>
-              <a:ext uri="{FF2B5EF4-FFF2-40B4-BE49-F238E27FC236}">
-                <a16:creationId xmlns:a16="http://schemas.microsoft.com/office/drawing/2014/main" id="{25687D5D-187F-1F54-4560-A43EC5AD2C86}"/>
-              </a:ext>
-            </a:extLst>
-          </p:cNvPr>
-          <p:cNvSpPr/>
-          <p:nvPr/>
-        </p:nvSpPr>
-        <p:spPr>
-          <a:xfrm flipV="1">
-            <a:off x="4587" y="4839761"/>
-            <a:ext cx="8159750" cy="45719"/>
-          </a:xfrm>
-          <a:prstGeom prst="rect">
-            <a:avLst/>
-          </a:prstGeom>
-          <a:solidFill>
-            <a:srgbClr val="009BD8"/>
-          </a:solidFill>
-          <a:ln>
-            <a:noFill/>
-          </a:ln>
-        </p:spPr>
-        <p:style>
-          <a:lnRef idx="1">
-            <a:schemeClr val="accent1"/>
-          </a:lnRef>
-          <a:fillRef idx="3">
-            <a:schemeClr val="accent1"/>
-          </a:fillRef>
-          <a:effectRef idx="2">
-            <a:schemeClr val="accent1"/>
-          </a:effectRef>
-          <a:fontRef idx="minor">
-            <a:schemeClr val="lt1"/>
-          </a:fontRef>
-        </p:style>
-        <p:txBody>
-          <a:bodyPr rtlCol="0" anchor="ctr"/>
-          <a:lstStyle/>
-          <a:p>
-            <a:pPr algn="ctr"/>
-            <a:endParaRPr sz="1360"/>
-          </a:p>
-        </p:txBody>
-      </p:sp>
+      </p:pic>
     </p:spTree>
   </p:cSld>
   <p:clrMapOvr>
@@ -14039,52 +14061,8 @@
         </p:nvSpPr>
         <p:spPr>
           <a:xfrm>
-            <a:off x="-17123" y="37972"/>
-            <a:ext cx="8176873" cy="6081842"/>
-          </a:xfrm>
-          <a:prstGeom prst="rect">
-            <a:avLst/>
-          </a:prstGeom>
-          <a:solidFill>
-            <a:srgbClr val="F0F7FF"/>
-          </a:solidFill>
-          <a:ln>
-            <a:noFill/>
-          </a:ln>
-        </p:spPr>
-        <p:style>
-          <a:lnRef idx="1">
-            <a:schemeClr val="accent1"/>
-          </a:lnRef>
-          <a:fillRef idx="3">
-            <a:schemeClr val="accent1"/>
-          </a:fillRef>
-          <a:effectRef idx="2">
-            <a:schemeClr val="accent1"/>
-          </a:effectRef>
-          <a:fontRef idx="minor">
-            <a:schemeClr val="lt1"/>
-          </a:fontRef>
-        </p:style>
-        <p:txBody>
-          <a:bodyPr rtlCol="0" anchor="ctr"/>
-          <a:lstStyle/>
-          <a:p>
-            <a:pPr algn="ctr"/>
-            <a:endParaRPr sz="1360" dirty="0"/>
-          </a:p>
-        </p:txBody>
-      </p:sp>
-      <p:sp>
-        <p:nvSpPr>
-          <p:cNvPr id="3" name="Rectangle 2"/>
-          <p:cNvSpPr/>
-          <p:nvPr/>
-        </p:nvSpPr>
-        <p:spPr>
-          <a:xfrm>
-            <a:off x="-17124" y="1840"/>
-            <a:ext cx="8176874" cy="932968"/>
+            <a:off x="-2" y="-21780"/>
+            <a:ext cx="8159750" cy="6119813"/>
           </a:xfrm>
           <a:prstGeom prst="rect">
             <a:avLst/>
@@ -14115,75 +14093,20 @@
           <a:lstStyle/>
           <a:p>
             <a:pPr algn="ctr"/>
-            <a:endParaRPr sz="1360"/>
-          </a:p>
-        </p:txBody>
-      </p:sp>
-      <p:sp>
-        <p:nvSpPr>
-          <p:cNvPr id="4" name="TextBox 3"/>
-          <p:cNvSpPr txBox="1"/>
-          <p:nvPr/>
-        </p:nvSpPr>
-        <p:spPr>
-          <a:xfrm>
-            <a:off x="132625" y="125158"/>
-            <a:ext cx="7877373" cy="584775"/>
-          </a:xfrm>
-          <a:prstGeom prst="rect">
-            <a:avLst/>
-          </a:prstGeom>
-          <a:noFill/>
-        </p:spPr>
-        <p:txBody>
-          <a:bodyPr wrap="square">
-            <a:spAutoFit/>
-          </a:bodyPr>
-          <a:lstStyle/>
-          <a:p>
-            <a:pPr algn="l"/>
-            <a:r>
-              <a:rPr sz="3200" b="1" dirty="0" err="1">
-                <a:solidFill>
-                  <a:srgbClr val="FFFFFF"/>
-                </a:solidFill>
-              </a:rPr>
-              <a:t>Результаты</a:t>
-            </a:r>
-            <a:r>
-              <a:rPr sz="3200" b="1" dirty="0">
-                <a:solidFill>
-                  <a:srgbClr val="FFFFFF"/>
-                </a:solidFill>
-              </a:rPr>
-              <a:t> </a:t>
-            </a:r>
-            <a:r>
-              <a:rPr sz="3200" b="1" dirty="0" err="1">
-                <a:solidFill>
-                  <a:srgbClr val="FFFFFF"/>
-                </a:solidFill>
-              </a:rPr>
-              <a:t>работы</a:t>
-            </a:r>
-            <a:endParaRPr sz="3200" b="1" dirty="0">
-              <a:solidFill>
-                <a:srgbClr val="FFFFFF"/>
-              </a:solidFill>
-            </a:endParaRPr>
-          </a:p>
-        </p:txBody>
-      </p:sp>
-      <p:sp>
-        <p:nvSpPr>
-          <p:cNvPr id="5" name="Rectangle 4"/>
+            <a:endParaRPr sz="1360" dirty="0"/>
+          </a:p>
+        </p:txBody>
+      </p:sp>
+      <p:sp>
+        <p:nvSpPr>
+          <p:cNvPr id="3" name="Rectangle 2"/>
           <p:cNvSpPr/>
           <p:nvPr/>
         </p:nvSpPr>
         <p:spPr>
           <a:xfrm>
-            <a:off x="-17125" y="909804"/>
-            <a:ext cx="8176875" cy="45719"/>
+            <a:off x="-1" y="-46114"/>
+            <a:ext cx="8159750" cy="55287"/>
           </a:xfrm>
           <a:prstGeom prst="rect">
             <a:avLst/>
@@ -14220,687 +14143,13 @@
       </p:sp>
       <p:sp>
         <p:nvSpPr>
-          <p:cNvPr id="6" name="Rectangle 5"/>
+          <p:cNvPr id="4" name="Rectangle 3"/>
           <p:cNvSpPr/>
           <p:nvPr/>
         </p:nvSpPr>
         <p:spPr>
           <a:xfrm>
-            <a:off x="-17124" y="5907721"/>
-            <a:ext cx="8176874" cy="227925"/>
-          </a:xfrm>
-          <a:prstGeom prst="rect">
-            <a:avLst/>
-          </a:prstGeom>
-          <a:solidFill>
-            <a:srgbClr val="0D2B55"/>
-          </a:solidFill>
-          <a:ln>
-            <a:noFill/>
-          </a:ln>
-        </p:spPr>
-        <p:style>
-          <a:lnRef idx="1">
-            <a:schemeClr val="accent1"/>
-          </a:lnRef>
-          <a:fillRef idx="3">
-            <a:schemeClr val="accent1"/>
-          </a:fillRef>
-          <a:effectRef idx="2">
-            <a:schemeClr val="accent1"/>
-          </a:effectRef>
-          <a:fontRef idx="minor">
-            <a:schemeClr val="lt1"/>
-          </a:fontRef>
-        </p:style>
-        <p:txBody>
-          <a:bodyPr rtlCol="0" anchor="ctr"/>
-          <a:lstStyle/>
-          <a:p>
-            <a:pPr algn="ctr"/>
-            <a:endParaRPr sz="1360"/>
-          </a:p>
-        </p:txBody>
-      </p:sp>
-      <p:sp>
-        <p:nvSpPr>
-          <p:cNvPr id="8" name="TextBox 7"/>
-          <p:cNvSpPr txBox="1"/>
-          <p:nvPr/>
-        </p:nvSpPr>
-        <p:spPr>
-          <a:xfrm>
-            <a:off x="7681968" y="5866591"/>
-            <a:ext cx="477782" cy="307777"/>
-          </a:xfrm>
-          <a:prstGeom prst="rect">
-            <a:avLst/>
-          </a:prstGeom>
-          <a:noFill/>
-        </p:spPr>
-        <p:txBody>
-          <a:bodyPr wrap="square">
-            <a:spAutoFit/>
-          </a:bodyPr>
-          <a:lstStyle/>
-          <a:p>
-            <a:pPr algn="r"/>
-            <a:r>
-              <a:rPr lang="ru-RU" sz="1400" dirty="0">
-                <a:solidFill>
-                  <a:srgbClr val="009BD8"/>
-                </a:solidFill>
-              </a:rPr>
-              <a:t>17</a:t>
-            </a:r>
-            <a:endParaRPr sz="1400" dirty="0">
-              <a:solidFill>
-                <a:srgbClr val="009BD8"/>
-              </a:solidFill>
-            </a:endParaRPr>
-          </a:p>
-        </p:txBody>
-      </p:sp>
-      <p:sp>
-        <p:nvSpPr>
-          <p:cNvPr id="12" name="Rectangle 11"/>
-          <p:cNvSpPr/>
-          <p:nvPr/>
-        </p:nvSpPr>
-        <p:spPr>
-          <a:xfrm>
-            <a:off x="141608" y="2691336"/>
-            <a:ext cx="2046421" cy="1404580"/>
-          </a:xfrm>
-          <a:prstGeom prst="rect">
-            <a:avLst/>
-          </a:prstGeom>
-          <a:solidFill>
-            <a:srgbClr val="0D6E6E"/>
-          </a:solidFill>
-          <a:ln>
-            <a:noFill/>
-          </a:ln>
-        </p:spPr>
-        <p:style>
-          <a:lnRef idx="1">
-            <a:schemeClr val="accent1"/>
-          </a:lnRef>
-          <a:fillRef idx="3">
-            <a:schemeClr val="accent1"/>
-          </a:fillRef>
-          <a:effectRef idx="2">
-            <a:schemeClr val="accent1"/>
-          </a:effectRef>
-          <a:fontRef idx="minor">
-            <a:schemeClr val="lt1"/>
-          </a:fontRef>
-        </p:style>
-        <p:txBody>
-          <a:bodyPr rtlCol="0" anchor="ctr"/>
-          <a:lstStyle/>
-          <a:p>
-            <a:pPr algn="ctr"/>
-            <a:endParaRPr sz="1360" dirty="0"/>
-          </a:p>
-        </p:txBody>
-      </p:sp>
-      <p:sp>
-        <p:nvSpPr>
-          <p:cNvPr id="13" name="TextBox 12"/>
-          <p:cNvSpPr txBox="1"/>
-          <p:nvPr/>
-        </p:nvSpPr>
-        <p:spPr>
-          <a:xfrm>
-            <a:off x="268371" y="2727467"/>
-            <a:ext cx="1769046" cy="769441"/>
-          </a:xfrm>
-          <a:prstGeom prst="rect">
-            <a:avLst/>
-          </a:prstGeom>
-          <a:noFill/>
-        </p:spPr>
-        <p:txBody>
-          <a:bodyPr wrap="square">
-            <a:spAutoFit/>
-          </a:bodyPr>
-          <a:lstStyle/>
-          <a:p>
-            <a:pPr algn="ctr"/>
-            <a:r>
-              <a:rPr sz="4400" b="1" dirty="0">
-                <a:solidFill>
-                  <a:srgbClr val="FFFFFF"/>
-                </a:solidFill>
-              </a:rPr>
-              <a:t>16</a:t>
-            </a:r>
-          </a:p>
-        </p:txBody>
-      </p:sp>
-      <p:sp>
-        <p:nvSpPr>
-          <p:cNvPr id="14" name="TextBox 13"/>
-          <p:cNvSpPr txBox="1"/>
-          <p:nvPr/>
-        </p:nvSpPr>
-        <p:spPr>
-          <a:xfrm>
-            <a:off x="241624" y="3355991"/>
-            <a:ext cx="1769046" cy="646331"/>
-          </a:xfrm>
-          <a:prstGeom prst="rect">
-            <a:avLst/>
-          </a:prstGeom>
-          <a:noFill/>
-        </p:spPr>
-        <p:txBody>
-          <a:bodyPr wrap="square">
-            <a:spAutoFit/>
-          </a:bodyPr>
-          <a:lstStyle/>
-          <a:p>
-            <a:pPr algn="ctr"/>
-            <a:r>
-              <a:rPr dirty="0" err="1">
-                <a:solidFill>
-                  <a:srgbClr val="CCE4FF"/>
-                </a:solidFill>
-              </a:rPr>
-              <a:t>автотестов</a:t>
-            </a:r>
-            <a:r>
-              <a:rPr dirty="0">
-                <a:solidFill>
-                  <a:srgbClr val="CCE4FF"/>
-                </a:solidFill>
-              </a:rPr>
-              <a:t>
-</a:t>
-            </a:r>
-            <a:r>
-              <a:rPr dirty="0" err="1">
-                <a:solidFill>
-                  <a:srgbClr val="CCE4FF"/>
-                </a:solidFill>
-              </a:rPr>
-              <a:t>реализовано</a:t>
-            </a:r>
-            <a:endParaRPr dirty="0">
-              <a:solidFill>
-                <a:srgbClr val="CCE4FF"/>
-              </a:solidFill>
-            </a:endParaRPr>
-          </a:p>
-        </p:txBody>
-      </p:sp>
-      <p:sp>
-        <p:nvSpPr>
-          <p:cNvPr id="22" name="Rectangle 8">
-            <a:extLst>
-              <a:ext uri="{FF2B5EF4-FFF2-40B4-BE49-F238E27FC236}">
-                <a16:creationId xmlns:a16="http://schemas.microsoft.com/office/drawing/2014/main" id="{1CC3E1FE-5482-A837-34EA-5EDC9ED6B198}"/>
-              </a:ext>
-            </a:extLst>
-          </p:cNvPr>
-          <p:cNvSpPr/>
-          <p:nvPr/>
-        </p:nvSpPr>
-        <p:spPr>
-          <a:xfrm>
-            <a:off x="141607" y="1104508"/>
-            <a:ext cx="2046421" cy="1404579"/>
-          </a:xfrm>
-          <a:prstGeom prst="rect">
-            <a:avLst/>
-          </a:prstGeom>
-          <a:solidFill>
-            <a:srgbClr val="0D2B55"/>
-          </a:solidFill>
-          <a:ln>
-            <a:noFill/>
-          </a:ln>
-        </p:spPr>
-        <p:style>
-          <a:lnRef idx="1">
-            <a:schemeClr val="accent1"/>
-          </a:lnRef>
-          <a:fillRef idx="3">
-            <a:schemeClr val="accent1"/>
-          </a:fillRef>
-          <a:effectRef idx="2">
-            <a:schemeClr val="accent1"/>
-          </a:effectRef>
-          <a:fontRef idx="minor">
-            <a:schemeClr val="lt1"/>
-          </a:fontRef>
-        </p:style>
-        <p:txBody>
-          <a:bodyPr rtlCol="0" anchor="ctr"/>
-          <a:lstStyle/>
-          <a:p>
-            <a:pPr algn="ctr"/>
-            <a:endParaRPr sz="1360"/>
-          </a:p>
-        </p:txBody>
-      </p:sp>
-      <p:sp>
-        <p:nvSpPr>
-          <p:cNvPr id="23" name="TextBox 22">
-            <a:extLst>
-              <a:ext uri="{FF2B5EF4-FFF2-40B4-BE49-F238E27FC236}">
-                <a16:creationId xmlns:a16="http://schemas.microsoft.com/office/drawing/2014/main" id="{0E1F4E09-AC65-2380-BB59-E9CE825F4F52}"/>
-              </a:ext>
-            </a:extLst>
-          </p:cNvPr>
-          <p:cNvSpPr txBox="1"/>
-          <p:nvPr/>
-        </p:nvSpPr>
-        <p:spPr>
-          <a:xfrm>
-            <a:off x="125895" y="1120340"/>
-            <a:ext cx="1962032" cy="769441"/>
-          </a:xfrm>
-          <a:prstGeom prst="rect">
-            <a:avLst/>
-          </a:prstGeom>
-          <a:noFill/>
-        </p:spPr>
-        <p:txBody>
-          <a:bodyPr wrap="square">
-            <a:spAutoFit/>
-          </a:bodyPr>
-          <a:lstStyle/>
-          <a:p>
-            <a:pPr algn="ctr"/>
-            <a:r>
-              <a:rPr sz="4400" b="1" dirty="0">
-                <a:solidFill>
-                  <a:srgbClr val="FFFFFF"/>
-                </a:solidFill>
-              </a:rPr>
-              <a:t>16</a:t>
-            </a:r>
-          </a:p>
-        </p:txBody>
-      </p:sp>
-      <p:sp>
-        <p:nvSpPr>
-          <p:cNvPr id="24" name="TextBox 23">
-            <a:extLst>
-              <a:ext uri="{FF2B5EF4-FFF2-40B4-BE49-F238E27FC236}">
-                <a16:creationId xmlns:a16="http://schemas.microsoft.com/office/drawing/2014/main" id="{FD302E9A-B00E-3559-711D-C6A48D3AC311}"/>
-              </a:ext>
-            </a:extLst>
-          </p:cNvPr>
-          <p:cNvSpPr txBox="1"/>
-          <p:nvPr/>
-        </p:nvSpPr>
-        <p:spPr>
-          <a:xfrm>
-            <a:off x="241624" y="1778473"/>
-            <a:ext cx="1769046" cy="646331"/>
-          </a:xfrm>
-          <a:prstGeom prst="rect">
-            <a:avLst/>
-          </a:prstGeom>
-          <a:noFill/>
-        </p:spPr>
-        <p:txBody>
-          <a:bodyPr wrap="square">
-            <a:spAutoFit/>
-          </a:bodyPr>
-          <a:lstStyle/>
-          <a:p>
-            <a:pPr algn="ctr"/>
-            <a:r>
-              <a:rPr dirty="0" err="1">
-                <a:solidFill>
-                  <a:srgbClr val="CCE4FF"/>
-                </a:solidFill>
-              </a:rPr>
-              <a:t>тест-кейсов</a:t>
-            </a:r>
-            <a:r>
-              <a:rPr dirty="0">
-                <a:solidFill>
-                  <a:srgbClr val="CCE4FF"/>
-                </a:solidFill>
-              </a:rPr>
-              <a:t>
-</a:t>
-            </a:r>
-            <a:r>
-              <a:rPr dirty="0" err="1">
-                <a:solidFill>
-                  <a:srgbClr val="CCE4FF"/>
-                </a:solidFill>
-              </a:rPr>
-              <a:t>разработано</a:t>
-            </a:r>
-            <a:endParaRPr dirty="0">
-              <a:solidFill>
-                <a:srgbClr val="CCE4FF"/>
-              </a:solidFill>
-            </a:endParaRPr>
-          </a:p>
-        </p:txBody>
-      </p:sp>
-      <p:sp>
-        <p:nvSpPr>
-          <p:cNvPr id="35" name="Rectangle 14">
-            <a:extLst>
-              <a:ext uri="{FF2B5EF4-FFF2-40B4-BE49-F238E27FC236}">
-                <a16:creationId xmlns:a16="http://schemas.microsoft.com/office/drawing/2014/main" id="{F420FECF-3EF0-ADD0-2A2B-FC04428FCBFB}"/>
-              </a:ext>
-            </a:extLst>
-          </p:cNvPr>
-          <p:cNvSpPr/>
-          <p:nvPr/>
-        </p:nvSpPr>
-        <p:spPr>
-          <a:xfrm>
-            <a:off x="141608" y="4320525"/>
-            <a:ext cx="2046421" cy="1404580"/>
-          </a:xfrm>
-          <a:prstGeom prst="rect">
-            <a:avLst/>
-          </a:prstGeom>
-          <a:solidFill>
-            <a:srgbClr val="1A5C8A"/>
-          </a:solidFill>
-          <a:ln>
-            <a:noFill/>
-          </a:ln>
-        </p:spPr>
-        <p:style>
-          <a:lnRef idx="1">
-            <a:schemeClr val="accent1"/>
-          </a:lnRef>
-          <a:fillRef idx="3">
-            <a:schemeClr val="accent1"/>
-          </a:fillRef>
-          <a:effectRef idx="2">
-            <a:schemeClr val="accent1"/>
-          </a:effectRef>
-          <a:fontRef idx="minor">
-            <a:schemeClr val="lt1"/>
-          </a:fontRef>
-        </p:style>
-        <p:txBody>
-          <a:bodyPr rtlCol="0" anchor="ctr"/>
-          <a:lstStyle/>
-          <a:p>
-            <a:pPr algn="ctr"/>
-            <a:endParaRPr sz="1360"/>
-          </a:p>
-        </p:txBody>
-      </p:sp>
-      <p:sp>
-        <p:nvSpPr>
-          <p:cNvPr id="36" name="TextBox 35">
-            <a:extLst>
-              <a:ext uri="{FF2B5EF4-FFF2-40B4-BE49-F238E27FC236}">
-                <a16:creationId xmlns:a16="http://schemas.microsoft.com/office/drawing/2014/main" id="{1F36AE7F-804E-4795-731D-64342993F609}"/>
-              </a:ext>
-            </a:extLst>
-          </p:cNvPr>
-          <p:cNvSpPr txBox="1"/>
-          <p:nvPr/>
-        </p:nvSpPr>
-        <p:spPr>
-          <a:xfrm>
-            <a:off x="179958" y="4409899"/>
-            <a:ext cx="1759721" cy="769441"/>
-          </a:xfrm>
-          <a:prstGeom prst="rect">
-            <a:avLst/>
-          </a:prstGeom>
-          <a:noFill/>
-        </p:spPr>
-        <p:txBody>
-          <a:bodyPr wrap="square">
-            <a:spAutoFit/>
-          </a:bodyPr>
-          <a:lstStyle/>
-          <a:p>
-            <a:pPr algn="ctr"/>
-            <a:r>
-              <a:rPr sz="4400" b="1" dirty="0">
-                <a:solidFill>
-                  <a:srgbClr val="FFFFFF"/>
-                </a:solidFill>
-              </a:rPr>
-              <a:t>4</a:t>
-            </a:r>
-          </a:p>
-        </p:txBody>
-      </p:sp>
-      <p:sp>
-        <p:nvSpPr>
-          <p:cNvPr id="37" name="TextBox 36">
-            <a:extLst>
-              <a:ext uri="{FF2B5EF4-FFF2-40B4-BE49-F238E27FC236}">
-                <a16:creationId xmlns:a16="http://schemas.microsoft.com/office/drawing/2014/main" id="{A9EF3CA8-9B2B-46FF-DF1B-D42ED41B1AA2}"/>
-              </a:ext>
-            </a:extLst>
-          </p:cNvPr>
-          <p:cNvSpPr txBox="1"/>
-          <p:nvPr/>
-        </p:nvSpPr>
-        <p:spPr>
-          <a:xfrm>
-            <a:off x="241624" y="4999473"/>
-            <a:ext cx="1759721" cy="646331"/>
-          </a:xfrm>
-          <a:prstGeom prst="rect">
-            <a:avLst/>
-          </a:prstGeom>
-          <a:noFill/>
-        </p:spPr>
-        <p:txBody>
-          <a:bodyPr wrap="square">
-            <a:spAutoFit/>
-          </a:bodyPr>
-          <a:lstStyle/>
-          <a:p>
-            <a:pPr algn="ctr"/>
-            <a:r>
-              <a:rPr lang="ru-RU" dirty="0">
-                <a:solidFill>
-                  <a:srgbClr val="CCE4FF"/>
-                </a:solidFill>
-              </a:rPr>
-              <a:t>найденных
-бага</a:t>
-            </a:r>
-          </a:p>
-        </p:txBody>
-      </p:sp>
-      <p:pic>
-        <p:nvPicPr>
-          <p:cNvPr id="7" name="Рисунок 6">
-            <a:extLst>
-              <a:ext uri="{FF2B5EF4-FFF2-40B4-BE49-F238E27FC236}">
-                <a16:creationId xmlns:a16="http://schemas.microsoft.com/office/drawing/2014/main" id="{6BFE9C25-3F87-0533-6766-C83EC5A65B8C}"/>
-              </a:ext>
-            </a:extLst>
-          </p:cNvPr>
-          <p:cNvPicPr>
-            <a:picLocks noChangeAspect="1"/>
-          </p:cNvPicPr>
-          <p:nvPr/>
-        </p:nvPicPr>
-        <p:blipFill>
-          <a:blip r:embed="rId3"/>
-          <a:stretch>
-            <a:fillRect/>
-          </a:stretch>
-        </p:blipFill>
-        <p:spPr>
-          <a:xfrm>
-            <a:off x="2346760" y="4333442"/>
-            <a:ext cx="5750927" cy="1374408"/>
-          </a:xfrm>
-          <a:prstGeom prst="rect">
-            <a:avLst/>
-          </a:prstGeom>
-          <a:ln>
-            <a:solidFill>
-              <a:schemeClr val="tx1"/>
-            </a:solidFill>
-          </a:ln>
-        </p:spPr>
-      </p:pic>
-      <p:pic>
-        <p:nvPicPr>
-          <p:cNvPr id="10" name="Рисунок 9">
-            <a:extLst>
-              <a:ext uri="{FF2B5EF4-FFF2-40B4-BE49-F238E27FC236}">
-                <a16:creationId xmlns:a16="http://schemas.microsoft.com/office/drawing/2014/main" id="{86AC71C6-8FE0-4EEB-8420-D6FB68D2DBA2}"/>
-              </a:ext>
-            </a:extLst>
-          </p:cNvPr>
-          <p:cNvPicPr>
-            <a:picLocks noChangeAspect="1"/>
-          </p:cNvPicPr>
-          <p:nvPr/>
-        </p:nvPicPr>
-        <p:blipFill>
-          <a:blip r:embed="rId4"/>
-          <a:stretch>
-            <a:fillRect/>
-          </a:stretch>
-        </p:blipFill>
-        <p:spPr>
-          <a:xfrm>
-            <a:off x="2346761" y="1117425"/>
-            <a:ext cx="2894371" cy="2991142"/>
-          </a:xfrm>
-          <a:prstGeom prst="rect">
-            <a:avLst/>
-          </a:prstGeom>
-          <a:ln>
-            <a:solidFill>
-              <a:schemeClr val="tx1"/>
-            </a:solidFill>
-          </a:ln>
-        </p:spPr>
-      </p:pic>
-      <p:pic>
-        <p:nvPicPr>
-          <p:cNvPr id="17" name="Рисунок 16">
-            <a:extLst>
-              <a:ext uri="{FF2B5EF4-FFF2-40B4-BE49-F238E27FC236}">
-                <a16:creationId xmlns:a16="http://schemas.microsoft.com/office/drawing/2014/main" id="{31AE9630-9045-DD6B-F307-9AC455DC973D}"/>
-              </a:ext>
-            </a:extLst>
-          </p:cNvPr>
-          <p:cNvPicPr>
-            <a:picLocks noChangeAspect="1"/>
-          </p:cNvPicPr>
-          <p:nvPr/>
-        </p:nvPicPr>
-        <p:blipFill>
-          <a:blip r:embed="rId5"/>
-          <a:stretch>
-            <a:fillRect/>
-          </a:stretch>
-        </p:blipFill>
-        <p:spPr>
-          <a:xfrm>
-            <a:off x="5295621" y="1104774"/>
-            <a:ext cx="2802066" cy="2983078"/>
-          </a:xfrm>
-          <a:prstGeom prst="rect">
-            <a:avLst/>
-          </a:prstGeom>
-          <a:ln>
-            <a:solidFill>
-              <a:schemeClr val="tx1"/>
-            </a:solidFill>
-          </a:ln>
-        </p:spPr>
-      </p:pic>
-    </p:spTree>
-  </p:cSld>
-  <p:clrMapOvr>
-    <a:masterClrMapping/>
-  </p:clrMapOvr>
-</p:sld>
-</file>
-
-<file path=ppt/slides/slide18.xml><?xml version="1.0" encoding="utf-8"?>
-<p:sld xmlns:a="http://schemas.openxmlformats.org/drawingml/2006/main" xmlns:r="http://schemas.openxmlformats.org/officeDocument/2006/relationships" xmlns:p="http://schemas.openxmlformats.org/presentationml/2006/main">
-  <p:cSld>
-    <p:spTree>
-      <p:nvGrpSpPr>
-        <p:cNvPr id="1" name=""/>
-        <p:cNvGrpSpPr/>
-        <p:nvPr/>
-      </p:nvGrpSpPr>
-      <p:grpSpPr>
-        <a:xfrm>
-          <a:off x="0" y="0"/>
-          <a:ext cx="0" cy="0"/>
-          <a:chOff x="0" y="0"/>
-          <a:chExt cx="0" cy="0"/>
-        </a:xfrm>
-      </p:grpSpPr>
-      <p:sp>
-        <p:nvSpPr>
-          <p:cNvPr id="2" name="Rectangle 1"/>
-          <p:cNvSpPr/>
-          <p:nvPr/>
-        </p:nvSpPr>
-        <p:spPr>
-          <a:xfrm>
-            <a:off x="-2" y="-21780"/>
-            <a:ext cx="8159750" cy="6119813"/>
-          </a:xfrm>
-          <a:prstGeom prst="rect">
-            <a:avLst/>
-          </a:prstGeom>
-          <a:solidFill>
-            <a:srgbClr val="0D2B55"/>
-          </a:solidFill>
-          <a:ln>
-            <a:noFill/>
-          </a:ln>
-        </p:spPr>
-        <p:style>
-          <a:lnRef idx="1">
-            <a:schemeClr val="accent1"/>
-          </a:lnRef>
-          <a:fillRef idx="3">
-            <a:schemeClr val="accent1"/>
-          </a:fillRef>
-          <a:effectRef idx="2">
-            <a:schemeClr val="accent1"/>
-          </a:effectRef>
-          <a:fontRef idx="minor">
-            <a:schemeClr val="lt1"/>
-          </a:fontRef>
-        </p:style>
-        <p:txBody>
-          <a:bodyPr rtlCol="0" anchor="ctr"/>
-          <a:lstStyle/>
-          <a:p>
-            <a:pPr algn="ctr"/>
-            <a:endParaRPr sz="1360" dirty="0"/>
-          </a:p>
-        </p:txBody>
-      </p:sp>
-      <p:sp>
-        <p:nvSpPr>
-          <p:cNvPr id="3" name="Rectangle 2"/>
-          <p:cNvSpPr/>
-          <p:nvPr/>
-        </p:nvSpPr>
-        <p:spPr>
-          <a:xfrm>
-            <a:off x="-1" y="-46114"/>
+            <a:off x="1" y="6070390"/>
             <a:ext cx="8159750" cy="55287"/>
           </a:xfrm>
           <a:prstGeom prst="rect">
@@ -14938,14 +14187,48 @@
       </p:sp>
       <p:sp>
         <p:nvSpPr>
-          <p:cNvPr id="4" name="Rectangle 3"/>
+          <p:cNvPr id="5" name="TextBox 4"/>
+          <p:cNvSpPr txBox="1"/>
+          <p:nvPr/>
+        </p:nvSpPr>
+        <p:spPr>
+          <a:xfrm>
+            <a:off x="-180681" y="53758"/>
+            <a:ext cx="8521114" cy="646331"/>
+          </a:xfrm>
+          <a:prstGeom prst="rect">
+            <a:avLst/>
+          </a:prstGeom>
+          <a:noFill/>
+        </p:spPr>
+        <p:txBody>
+          <a:bodyPr wrap="square">
+            <a:spAutoFit/>
+          </a:bodyPr>
+          <a:lstStyle/>
+          <a:p>
+            <a:pPr algn="ctr"/>
+            <a:r>
+              <a:rPr sz="3600" b="1" dirty="0">
+                <a:solidFill>
+                  <a:srgbClr val="FFFFFF"/>
+                </a:solidFill>
+              </a:rPr>
+              <a:t>ЗАКЛЮЧЕНИЕ</a:t>
+            </a:r>
+          </a:p>
+        </p:txBody>
+      </p:sp>
+      <p:sp>
+        <p:nvSpPr>
+          <p:cNvPr id="6" name="Rectangle 5"/>
           <p:cNvSpPr/>
           <p:nvPr/>
         </p:nvSpPr>
         <p:spPr>
           <a:xfrm>
-            <a:off x="1" y="6070390"/>
-            <a:ext cx="8159750" cy="55287"/>
+            <a:off x="2583667" y="624069"/>
+            <a:ext cx="2992411" cy="41466"/>
           </a:xfrm>
           <a:prstGeom prst="rect">
             <a:avLst/>
@@ -14982,14 +14265,14 @@
       </p:sp>
       <p:sp>
         <p:nvSpPr>
-          <p:cNvPr id="5" name="TextBox 4"/>
+          <p:cNvPr id="7" name="TextBox 6"/>
           <p:cNvSpPr txBox="1"/>
           <p:nvPr/>
         </p:nvSpPr>
         <p:spPr>
           <a:xfrm>
-            <a:off x="-180681" y="53758"/>
-            <a:ext cx="8521114" cy="646331"/>
+            <a:off x="573741" y="700089"/>
+            <a:ext cx="7216585" cy="2554545"/>
           </a:xfrm>
           <a:prstGeom prst="rect">
             <a:avLst/>
@@ -15002,91 +14285,23 @@
           </a:bodyPr>
           <a:lstStyle/>
           <a:p>
-            <a:pPr algn="ctr"/>
-            <a:r>
-              <a:rPr sz="3600" b="1" dirty="0">
-                <a:solidFill>
-                  <a:srgbClr val="FFFFFF"/>
-                </a:solidFill>
-              </a:rPr>
-              <a:t>ЗАКЛЮЧЕНИЕ</a:t>
-            </a:r>
-          </a:p>
-        </p:txBody>
-      </p:sp>
-      <p:sp>
-        <p:nvSpPr>
-          <p:cNvPr id="6" name="Rectangle 5"/>
-          <p:cNvSpPr/>
-          <p:nvPr/>
-        </p:nvSpPr>
-        <p:spPr>
-          <a:xfrm>
-            <a:off x="2583667" y="624069"/>
-            <a:ext cx="2992411" cy="41466"/>
-          </a:xfrm>
-          <a:prstGeom prst="rect">
-            <a:avLst/>
-          </a:prstGeom>
-          <a:solidFill>
-            <a:srgbClr val="009BD8"/>
-          </a:solidFill>
-          <a:ln>
-            <a:noFill/>
-          </a:ln>
-        </p:spPr>
-        <p:style>
-          <a:lnRef idx="1">
-            <a:schemeClr val="accent1"/>
-          </a:lnRef>
-          <a:fillRef idx="3">
-            <a:schemeClr val="accent1"/>
-          </a:fillRef>
-          <a:effectRef idx="2">
-            <a:schemeClr val="accent1"/>
-          </a:effectRef>
-          <a:fontRef idx="minor">
-            <a:schemeClr val="lt1"/>
-          </a:fontRef>
-        </p:style>
-        <p:txBody>
-          <a:bodyPr rtlCol="0" anchor="ctr"/>
-          <a:lstStyle/>
-          <a:p>
-            <a:pPr algn="ctr"/>
-            <a:endParaRPr sz="1360"/>
-          </a:p>
-        </p:txBody>
-      </p:sp>
-      <p:sp>
-        <p:nvSpPr>
-          <p:cNvPr id="7" name="TextBox 6"/>
-          <p:cNvSpPr txBox="1"/>
-          <p:nvPr/>
-        </p:nvSpPr>
-        <p:spPr>
-          <a:xfrm>
-            <a:off x="329723" y="700089"/>
-            <a:ext cx="7665163" cy="2554545"/>
-          </a:xfrm>
-          <a:prstGeom prst="rect">
-            <a:avLst/>
-          </a:prstGeom>
-          <a:noFill/>
-        </p:spPr>
-        <p:txBody>
-          <a:bodyPr wrap="square">
-            <a:spAutoFit/>
-          </a:bodyPr>
-          <a:lstStyle/>
-          <a:p>
             <a:r>
               <a:rPr lang="ru-RU" sz="3200" dirty="0">
                 <a:solidFill>
                   <a:schemeClr val="bg1"/>
                 </a:solidFill>
               </a:rPr>
-              <a:t>В ходе тестирования обнаружены реальные проблемы, которые влияют на бизнес (потеря клиентов, репутация). Внедрение тестов на проект </a:t>
+              <a:t>В ходе тестирования обнаружены реальные проблемы, которые влияют на бизнес .</a:t>
+            </a:r>
+          </a:p>
+          <a:p>
+            <a:r>
+              <a:rPr lang="ru-RU" sz="3200" dirty="0">
+                <a:solidFill>
+                  <a:schemeClr val="bg1"/>
+                </a:solidFill>
+              </a:rPr>
+              <a:t>Внедрение тестов на проект </a:t>
             </a:r>
             <a:r>
               <a:rPr lang="en-US" sz="3200" dirty="0">
@@ -21307,8 +20522,8 @@
         </p:nvSpPr>
         <p:spPr>
           <a:xfrm>
-            <a:off x="2127698" y="998076"/>
-            <a:ext cx="1878850" cy="4826360"/>
+            <a:off x="2127698" y="1014745"/>
+            <a:ext cx="1878850" cy="4809691"/>
           </a:xfrm>
           <a:prstGeom prst="rect">
             <a:avLst/>
@@ -22286,14 +21501,14 @@
       </p:grpSpPr>
       <p:sp>
         <p:nvSpPr>
-          <p:cNvPr id="2" name="bg"/>
+          <p:cNvPr id="2" name="Rectangle 1"/>
           <p:cNvSpPr/>
           <p:nvPr/>
         </p:nvSpPr>
         <p:spPr>
           <a:xfrm>
-            <a:off x="-7010" y="553658"/>
-            <a:ext cx="8159747" cy="5331141"/>
+            <a:off x="6387" y="458804"/>
+            <a:ext cx="8159749" cy="5651486"/>
           </a:xfrm>
           <a:prstGeom prst="rect">
             <a:avLst/>
@@ -22305,24 +21520,38 @@
             <a:noFill/>
           </a:ln>
         </p:spPr>
-        <p:txBody>
-          <a:bodyPr/>
-          <a:lstStyle/>
-          <a:p>
-            <a:endParaRPr sz="1360"/>
-          </a:p>
-        </p:txBody>
-      </p:sp>
-      <p:sp>
-        <p:nvSpPr>
-          <p:cNvPr id="3" name="header"/>
+        <p:style>
+          <a:lnRef idx="1">
+            <a:schemeClr val="accent1"/>
+          </a:lnRef>
+          <a:fillRef idx="3">
+            <a:schemeClr val="accent1"/>
+          </a:fillRef>
+          <a:effectRef idx="2">
+            <a:schemeClr val="accent1"/>
+          </a:effectRef>
+          <a:fontRef idx="minor">
+            <a:schemeClr val="lt1"/>
+          </a:fontRef>
+        </p:style>
+        <p:txBody>
+          <a:bodyPr rtlCol="0" anchor="ctr"/>
+          <a:lstStyle/>
+          <a:p>
+            <a:endParaRPr lang="ru-RU" sz="1360" dirty="0"/>
+          </a:p>
+        </p:txBody>
+      </p:sp>
+      <p:sp>
+        <p:nvSpPr>
+          <p:cNvPr id="3" name="Rectangle 2"/>
           <p:cNvSpPr/>
           <p:nvPr/>
         </p:nvSpPr>
         <p:spPr>
           <a:xfrm>
-            <a:off x="2" y="-6065"/>
-            <a:ext cx="8159748" cy="903964"/>
+            <a:off x="-647" y="-9523"/>
+            <a:ext cx="8166785" cy="932968"/>
           </a:xfrm>
           <a:prstGeom prst="rect">
             <a:avLst/>
@@ -22334,23 +21563,38 @@
             <a:noFill/>
           </a:ln>
         </p:spPr>
-        <p:txBody>
-          <a:bodyPr/>
-          <a:lstStyle/>
-          <a:p>
+        <p:style>
+          <a:lnRef idx="1">
+            <a:schemeClr val="accent1"/>
+          </a:lnRef>
+          <a:fillRef idx="3">
+            <a:schemeClr val="accent1"/>
+          </a:fillRef>
+          <a:effectRef idx="2">
+            <a:schemeClr val="accent1"/>
+          </a:effectRef>
+          <a:fontRef idx="minor">
+            <a:schemeClr val="lt1"/>
+          </a:fontRef>
+        </p:style>
+        <p:txBody>
+          <a:bodyPr rtlCol="0" anchor="ctr"/>
+          <a:lstStyle/>
+          <a:p>
+            <a:pPr algn="ctr"/>
             <a:endParaRPr sz="1360"/>
           </a:p>
         </p:txBody>
       </p:sp>
       <p:sp>
         <p:nvSpPr>
-          <p:cNvPr id="4" name="title"/>
+          <p:cNvPr id="4" name="TextBox 3"/>
           <p:cNvSpPr txBox="1"/>
           <p:nvPr/>
         </p:nvSpPr>
         <p:spPr>
           <a:xfrm>
-            <a:off x="164700" y="129693"/>
+            <a:off x="146022" y="209296"/>
             <a:ext cx="8638598" cy="523220"/>
           </a:xfrm>
           <a:prstGeom prst="rect">
@@ -22366,12 +21610,28 @@
           <a:p>
             <a:pPr algn="l"/>
             <a:r>
+              <a:rPr lang="ru-RU" sz="2800" b="1" dirty="0">
+                <a:solidFill>
+                  <a:srgbClr val="FFFFFF"/>
+                </a:solidFill>
+              </a:rPr>
+              <a:t>О</a:t>
+            </a:r>
+            <a:r>
               <a:rPr sz="2800" b="1" dirty="0" err="1">
                 <a:solidFill>
                   <a:srgbClr val="FFFFFF"/>
                 </a:solidFill>
               </a:rPr>
-              <a:t>Почему</a:t>
+              <a:t>рганизаци</a:t>
+            </a:r>
+            <a:r>
+              <a:rPr lang="ru-RU" sz="2800" b="1" dirty="0">
+                <a:solidFill>
+                  <a:srgbClr val="FFFFFF"/>
+                </a:solidFill>
+              </a:rPr>
+              <a:t>я</a:t>
             </a:r>
             <a:r>
               <a:rPr sz="2800" b="1" dirty="0">
@@ -22379,7 +21639,7 @@
                   <a:srgbClr val="FFFFFF"/>
                 </a:solidFill>
               </a:rPr>
-              <a:t> Playwright, а </a:t>
+              <a:t> </a:t>
             </a:r>
             <a:r>
               <a:rPr sz="2800" b="1" dirty="0" err="1">
@@ -22387,7 +21647,7 @@
                   <a:srgbClr val="FFFFFF"/>
                 </a:solidFill>
               </a:rPr>
-              <a:t>не</a:t>
+              <a:t>кода</a:t>
             </a:r>
             <a:r>
               <a:rPr sz="2800" b="1" dirty="0">
@@ -22395,21 +21655,21 @@
                   <a:srgbClr val="FFFFFF"/>
                 </a:solidFill>
               </a:rPr>
-              <a:t> Selenium?</a:t>
-            </a:r>
-          </a:p>
-        </p:txBody>
-      </p:sp>
-      <p:sp>
-        <p:nvSpPr>
-          <p:cNvPr id="5" name="accent_line"/>
+              <a:t> — Page Object Model (POM)</a:t>
+            </a:r>
+          </a:p>
+        </p:txBody>
+      </p:sp>
+      <p:sp>
+        <p:nvSpPr>
+          <p:cNvPr id="5" name="Rectangle 4"/>
           <p:cNvSpPr/>
           <p:nvPr/>
         </p:nvSpPr>
         <p:spPr>
           <a:xfrm>
-            <a:off x="0" y="893193"/>
-            <a:ext cx="8166762" cy="45719"/>
+            <a:off x="-649" y="911109"/>
+            <a:ext cx="8166785" cy="45719"/>
           </a:xfrm>
           <a:prstGeom prst="rect">
             <a:avLst/>
@@ -22421,24 +21681,39 @@
             <a:noFill/>
           </a:ln>
         </p:spPr>
-        <p:txBody>
-          <a:bodyPr/>
-          <a:lstStyle/>
-          <a:p>
+        <p:style>
+          <a:lnRef idx="1">
+            <a:schemeClr val="accent1"/>
+          </a:lnRef>
+          <a:fillRef idx="3">
+            <a:schemeClr val="accent1"/>
+          </a:fillRef>
+          <a:effectRef idx="2">
+            <a:schemeClr val="accent1"/>
+          </a:effectRef>
+          <a:fontRef idx="minor">
+            <a:schemeClr val="lt1"/>
+          </a:fontRef>
+        </p:style>
+        <p:txBody>
+          <a:bodyPr rtlCol="0" anchor="ctr"/>
+          <a:lstStyle/>
+          <a:p>
+            <a:pPr algn="ctr"/>
             <a:endParaRPr sz="1360"/>
           </a:p>
         </p:txBody>
       </p:sp>
       <p:sp>
         <p:nvSpPr>
-          <p:cNvPr id="6" name="footer_bar"/>
+          <p:cNvPr id="6" name="Rectangle 5"/>
           <p:cNvSpPr/>
           <p:nvPr/>
         </p:nvSpPr>
         <p:spPr>
           <a:xfrm>
-            <a:off x="2" y="5884799"/>
-            <a:ext cx="8173774" cy="241881"/>
+            <a:off x="-3518" y="5877936"/>
+            <a:ext cx="8166785" cy="241877"/>
           </a:xfrm>
           <a:prstGeom prst="rect">
             <a:avLst/>
@@ -22450,24 +21725,39 @@
             <a:noFill/>
           </a:ln>
         </p:spPr>
-        <p:txBody>
-          <a:bodyPr/>
-          <a:lstStyle/>
-          <a:p>
+        <p:style>
+          <a:lnRef idx="1">
+            <a:schemeClr val="accent1"/>
+          </a:lnRef>
+          <a:fillRef idx="3">
+            <a:schemeClr val="accent1"/>
+          </a:fillRef>
+          <a:effectRef idx="2">
+            <a:schemeClr val="accent1"/>
+          </a:effectRef>
+          <a:fontRef idx="minor">
+            <a:schemeClr val="lt1"/>
+          </a:fontRef>
+        </p:style>
+        <p:txBody>
+          <a:bodyPr rtlCol="0" anchor="ctr"/>
+          <a:lstStyle/>
+          <a:p>
+            <a:pPr algn="ctr"/>
             <a:endParaRPr sz="1360"/>
           </a:p>
         </p:txBody>
       </p:sp>
       <p:sp>
         <p:nvSpPr>
-          <p:cNvPr id="8" name="page_num"/>
+          <p:cNvPr id="8" name="TextBox 7"/>
           <p:cNvSpPr txBox="1"/>
           <p:nvPr/>
         </p:nvSpPr>
         <p:spPr>
           <a:xfrm>
-            <a:off x="7883313" y="5858707"/>
-            <a:ext cx="276435" cy="307777"/>
+            <a:off x="7646038" y="5820074"/>
+            <a:ext cx="513712" cy="338554"/>
           </a:xfrm>
           <a:prstGeom prst="rect">
             <a:avLst/>
@@ -22482,14 +21772,14 @@
           <a:p>
             <a:pPr algn="r"/>
             <a:r>
-              <a:rPr lang="ru-RU" sz="1400" dirty="0">
+              <a:rPr lang="ru-RU" sz="1600" dirty="0">
                 <a:solidFill>
                   <a:srgbClr val="009BD8"/>
                 </a:solidFill>
               </a:rPr>
               <a:t>9</a:t>
             </a:r>
-            <a:endParaRPr sz="1400" dirty="0">
+            <a:endParaRPr sz="1600" dirty="0">
               <a:solidFill>
                 <a:srgbClr val="009BD8"/>
               </a:solidFill>
@@ -22499,74 +21789,58 @@
       </p:sp>
       <p:sp>
         <p:nvSpPr>
-          <p:cNvPr id="10" name="card1_bg"/>
+          <p:cNvPr id="10" name="Rectangle 9"/>
           <p:cNvSpPr/>
           <p:nvPr/>
         </p:nvSpPr>
         <p:spPr>
           <a:xfrm>
-            <a:off x="50794" y="2161202"/>
-            <a:ext cx="2585803" cy="3682584"/>
+            <a:off x="0" y="982606"/>
+            <a:ext cx="8166138" cy="794752"/>
           </a:xfrm>
           <a:prstGeom prst="rect">
             <a:avLst/>
           </a:prstGeom>
           <a:solidFill>
-            <a:srgbClr val="FFFFFF"/>
-          </a:solidFill>
-          <a:ln w="18000">
-            <a:solidFill>
-              <a:srgbClr val="009BD8"/>
-            </a:solidFill>
-          </a:ln>
-        </p:spPr>
-        <p:txBody>
-          <a:bodyPr/>
-          <a:lstStyle/>
-          <a:p>
-            <a:endParaRPr sz="1360"/>
-          </a:p>
-        </p:txBody>
-      </p:sp>
-      <p:sp>
-        <p:nvSpPr>
-          <p:cNvPr id="11" name="card1_top"/>
-          <p:cNvSpPr/>
-          <p:nvPr/>
-        </p:nvSpPr>
-        <p:spPr>
-          <a:xfrm>
-            <a:off x="40017" y="1717689"/>
-            <a:ext cx="2587983" cy="414653"/>
-          </a:xfrm>
-          <a:prstGeom prst="rect">
-            <a:avLst/>
-          </a:prstGeom>
-          <a:solidFill>
-            <a:srgbClr val="009BD8"/>
+            <a:srgbClr val="4A2377"/>
           </a:solidFill>
           <a:ln>
             <a:noFill/>
           </a:ln>
         </p:spPr>
-        <p:txBody>
-          <a:bodyPr/>
-          <a:lstStyle/>
-          <a:p>
+        <p:style>
+          <a:lnRef idx="1">
+            <a:schemeClr val="accent1"/>
+          </a:lnRef>
+          <a:fillRef idx="3">
+            <a:schemeClr val="accent1"/>
+          </a:fillRef>
+          <a:effectRef idx="2">
+            <a:schemeClr val="accent1"/>
+          </a:effectRef>
+          <a:fontRef idx="minor">
+            <a:schemeClr val="lt1"/>
+          </a:fontRef>
+        </p:style>
+        <p:txBody>
+          <a:bodyPr rtlCol="0" anchor="ctr"/>
+          <a:lstStyle/>
+          <a:p>
+            <a:pPr algn="ctr"/>
             <a:endParaRPr sz="1360"/>
           </a:p>
         </p:txBody>
       </p:sp>
       <p:sp>
         <p:nvSpPr>
-          <p:cNvPr id="12" name="card1_icon"/>
+          <p:cNvPr id="11" name="TextBox 10"/>
           <p:cNvSpPr txBox="1"/>
           <p:nvPr/>
         </p:nvSpPr>
         <p:spPr>
           <a:xfrm>
-            <a:off x="25988" y="1716386"/>
-            <a:ext cx="2533108" cy="418723"/>
+            <a:off x="45282" y="1078245"/>
+            <a:ext cx="1382175" cy="584775"/>
           </a:xfrm>
           <a:prstGeom prst="rect">
             <a:avLst/>
@@ -22579,28 +21853,28 @@
           </a:bodyPr>
           <a:lstStyle/>
           <a:p>
-            <a:pPr algn="ctr"/>
-            <a:r>
-              <a:rPr sz="2117" b="1" dirty="0">
+            <a:pPr algn="l"/>
+            <a:r>
+              <a:rPr sz="3200" b="1" dirty="0">
                 <a:solidFill>
                   <a:srgbClr val="FFFFFF"/>
                 </a:solidFill>
               </a:rPr>
-              <a:t>⏱</a:t>
-            </a:r>
-          </a:p>
-        </p:txBody>
-      </p:sp>
-      <p:sp>
-        <p:nvSpPr>
-          <p:cNvPr id="13" name="card1_title"/>
+              <a:t>TESTS</a:t>
+            </a:r>
+          </a:p>
+        </p:txBody>
+      </p:sp>
+      <p:sp>
+        <p:nvSpPr>
+          <p:cNvPr id="12" name="TextBox 11"/>
           <p:cNvSpPr txBox="1"/>
           <p:nvPr/>
         </p:nvSpPr>
         <p:spPr>
           <a:xfrm>
-            <a:off x="67843" y="2168401"/>
-            <a:ext cx="2520911" cy="707886"/>
+            <a:off x="1427457" y="1078668"/>
+            <a:ext cx="3800984" cy="523220"/>
           </a:xfrm>
           <a:prstGeom prst="rect">
             <a:avLst/>
@@ -22613,33 +21887,44 @@
           </a:bodyPr>
           <a:lstStyle/>
           <a:p>
-            <a:pPr algn="ctr"/>
-            <a:r>
-              <a:rPr lang="ru-RU" sz="2000" b="1" dirty="0">
-                <a:solidFill>
-                  <a:srgbClr val="0D2B55"/>
-                </a:solidFill>
-              </a:rPr>
-              <a:t>Автоматические ожидания</a:t>
-            </a:r>
-            <a:endParaRPr sz="2000" b="1" dirty="0">
-              <a:solidFill>
-                <a:srgbClr val="0D2B55"/>
-              </a:solidFill>
-            </a:endParaRPr>
-          </a:p>
-        </p:txBody>
-      </p:sp>
-      <p:sp>
-        <p:nvSpPr>
-          <p:cNvPr id="14" name="card1_body"/>
+            <a:pPr algn="l"/>
+            <a:r>
+              <a:rPr sz="2800" dirty="0" err="1">
+                <a:solidFill>
+                  <a:srgbClr val="AACCFF"/>
+                </a:solidFill>
+              </a:rPr>
+              <a:t>Тест-файлы</a:t>
+            </a:r>
+            <a:r>
+              <a:rPr lang="ru-RU" sz="2800" dirty="0">
+                <a:solidFill>
+                  <a:srgbClr val="AACCFF"/>
+                </a:solidFill>
+              </a:rPr>
+              <a:t> </a:t>
+            </a:r>
+            <a:r>
+              <a:rPr sz="2800" dirty="0">
+                <a:solidFill>
+                  <a:srgbClr val="AACCFF"/>
+                </a:solidFill>
+              </a:rPr>
+              <a:t>test_*.py</a:t>
+            </a:r>
+          </a:p>
+        </p:txBody>
+      </p:sp>
+      <p:sp>
+        <p:nvSpPr>
+          <p:cNvPr id="13" name="TextBox 12"/>
           <p:cNvSpPr txBox="1"/>
           <p:nvPr/>
         </p:nvSpPr>
         <p:spPr>
           <a:xfrm>
-            <a:off x="60830" y="2914933"/>
-            <a:ext cx="2462339" cy="2723823"/>
+            <a:off x="7782574" y="1229911"/>
+            <a:ext cx="276435" cy="279062"/>
           </a:xfrm>
           <a:prstGeom prst="rect">
             <a:avLst/>
@@ -22654,144 +21939,164 @@
           <a:p>
             <a:pPr algn="ctr"/>
             <a:r>
-              <a:rPr lang="en-US" sz="1900" dirty="0">
+              <a:rPr sz="1209" dirty="0">
+                <a:solidFill>
+                  <a:srgbClr val="009BD8"/>
+                </a:solidFill>
+              </a:rPr>
+              <a:t>▼</a:t>
+            </a:r>
+          </a:p>
+        </p:txBody>
+      </p:sp>
+      <p:sp>
+        <p:nvSpPr>
+          <p:cNvPr id="14" name="Rectangle 13"/>
+          <p:cNvSpPr/>
+          <p:nvPr/>
+        </p:nvSpPr>
+        <p:spPr>
+          <a:xfrm>
+            <a:off x="-649" y="1836051"/>
+            <a:ext cx="8166785" cy="794751"/>
+          </a:xfrm>
+          <a:prstGeom prst="rect">
+            <a:avLst/>
+          </a:prstGeom>
+          <a:solidFill>
+            <a:srgbClr val="FFFFFF"/>
+          </a:solidFill>
+          <a:ln>
+            <a:noFill/>
+          </a:ln>
+        </p:spPr>
+        <p:style>
+          <a:lnRef idx="1">
+            <a:schemeClr val="accent1"/>
+          </a:lnRef>
+          <a:fillRef idx="3">
+            <a:schemeClr val="accent1"/>
+          </a:fillRef>
+          <a:effectRef idx="2">
+            <a:schemeClr val="accent1"/>
+          </a:effectRef>
+          <a:fontRef idx="minor">
+            <a:schemeClr val="lt1"/>
+          </a:fontRef>
+        </p:style>
+        <p:txBody>
+          <a:bodyPr rtlCol="0" anchor="ctr"/>
+          <a:lstStyle/>
+          <a:p>
+            <a:pPr algn="ctr"/>
+            <a:endParaRPr sz="1360"/>
+          </a:p>
+        </p:txBody>
+      </p:sp>
+      <p:sp>
+        <p:nvSpPr>
+          <p:cNvPr id="15" name="TextBox 14"/>
+          <p:cNvSpPr txBox="1"/>
+          <p:nvPr/>
+        </p:nvSpPr>
+        <p:spPr>
+          <a:xfrm>
+            <a:off x="6388" y="1926427"/>
+            <a:ext cx="8146976" cy="523220"/>
+          </a:xfrm>
+          <a:prstGeom prst="rect">
+            <a:avLst/>
+          </a:prstGeom>
+          <a:noFill/>
+        </p:spPr>
+        <p:txBody>
+          <a:bodyPr wrap="square">
+            <a:spAutoFit/>
+          </a:bodyPr>
+          <a:lstStyle/>
+          <a:p>
+            <a:pPr algn="l"/>
+            <a:r>
+              <a:rPr sz="2800" dirty="0" err="1">
                 <a:solidFill>
                   <a:srgbClr val="444455"/>
                 </a:solidFill>
               </a:rPr>
-              <a:t>Playwright </a:t>
-            </a:r>
-            <a:r>
-              <a:rPr lang="ru-RU" sz="1900" dirty="0">
+              <a:t>Только</a:t>
+            </a:r>
+            <a:r>
+              <a:rPr sz="2800" dirty="0">
                 <a:solidFill>
                   <a:srgbClr val="444455"/>
                 </a:solidFill>
               </a:rPr>
-              <a:t> сам ждет </a:t>
-            </a:r>
-            <a:r>
-              <a:rPr sz="1900" dirty="0" err="1">
+              <a:t> </a:t>
+            </a:r>
+            <a:r>
+              <a:rPr lang="ru-RU" sz="2800" dirty="0">
                 <a:solidFill>
                   <a:srgbClr val="444455"/>
                 </a:solidFill>
               </a:rPr>
-              <a:t>появления</a:t>
-            </a:r>
-            <a:r>
-              <a:rPr sz="1900" dirty="0">
+              <a:t>действия</a:t>
+            </a:r>
+            <a:r>
+              <a:rPr sz="2800" dirty="0">
                 <a:solidFill>
                   <a:srgbClr val="444455"/>
                 </a:solidFill>
               </a:rPr>
-              <a:t> </a:t>
-            </a:r>
-            <a:r>
-              <a:rPr sz="1900" dirty="0" err="1">
+              <a:t>: </a:t>
+            </a:r>
+            <a:r>
+              <a:rPr sz="2800" dirty="0" err="1">
                 <a:solidFill>
                   <a:srgbClr val="444455"/>
                 </a:solidFill>
               </a:rPr>
-              <a:t>элементов</a:t>
-            </a:r>
-            <a:r>
-              <a:rPr sz="1900" dirty="0">
+              <a:t>открыть</a:t>
+            </a:r>
+            <a:r>
+              <a:rPr sz="2800" dirty="0">
                 <a:solidFill>
                   <a:srgbClr val="444455"/>
                 </a:solidFill>
               </a:rPr>
-              <a:t> 
-</a:t>
-            </a:r>
-            <a:r>
-              <a:rPr sz="1900" dirty="0" err="1">
+              <a:t> → </a:t>
+            </a:r>
+            <a:r>
+              <a:rPr sz="2800" dirty="0" err="1">
                 <a:solidFill>
                   <a:srgbClr val="444455"/>
                 </a:solidFill>
               </a:rPr>
-              <a:t>Не</a:t>
-            </a:r>
-            <a:r>
-              <a:rPr sz="1900" dirty="0">
+              <a:t>кликнуть</a:t>
+            </a:r>
+            <a:r>
+              <a:rPr sz="2800" dirty="0">
                 <a:solidFill>
                   <a:srgbClr val="444455"/>
                 </a:solidFill>
               </a:rPr>
-              <a:t> </a:t>
-            </a:r>
-            <a:r>
-              <a:rPr sz="1900" dirty="0" err="1">
+              <a:t> → </a:t>
+            </a:r>
+            <a:r>
+              <a:rPr sz="2800" dirty="0" err="1">
                 <a:solidFill>
                   <a:srgbClr val="444455"/>
                 </a:solidFill>
               </a:rPr>
-              <a:t>нужны</a:t>
-            </a:r>
-            <a:r>
-              <a:rPr sz="1900" dirty="0">
+              <a:t>проверить</a:t>
+            </a:r>
+            <a:r>
+              <a:rPr lang="ru-RU" sz="2800" dirty="0">
                 <a:solidFill>
                   <a:srgbClr val="444455"/>
                 </a:solidFill>
               </a:rPr>
-              <a:t> </a:t>
-            </a:r>
-            <a:r>
-              <a:rPr lang="en-US" sz="1900" dirty="0">
-                <a:solidFill>
-                  <a:srgbClr val="444455"/>
-                </a:solidFill>
-              </a:rPr>
-              <a:t>time. </a:t>
-            </a:r>
-            <a:r>
-              <a:rPr sz="1900" dirty="0">
-                <a:solidFill>
-                  <a:srgbClr val="444455"/>
-                </a:solidFill>
-              </a:rPr>
-              <a:t>sleep() и </a:t>
-            </a:r>
-            <a:r>
-              <a:rPr sz="1900" dirty="0" err="1">
-                <a:solidFill>
-                  <a:srgbClr val="444455"/>
-                </a:solidFill>
-              </a:rPr>
-              <a:t>WebDriverWait</a:t>
-            </a:r>
-            <a:r>
-              <a:rPr sz="1900" dirty="0">
-                <a:solidFill>
-                  <a:srgbClr val="444455"/>
-                </a:solidFill>
-              </a:rPr>
-              <a:t>
-</a:t>
-            </a:r>
-            <a:r>
-              <a:rPr sz="1900" dirty="0" err="1">
-                <a:solidFill>
-                  <a:srgbClr val="444455"/>
-                </a:solidFill>
-              </a:rPr>
-              <a:t>Тесты</a:t>
-            </a:r>
-            <a:r>
-              <a:rPr sz="1900" dirty="0">
-                <a:solidFill>
-                  <a:srgbClr val="444455"/>
-                </a:solidFill>
-              </a:rPr>
-              <a:t> </a:t>
-            </a:r>
-            <a:r>
-              <a:rPr lang="ru-RU" sz="1900" dirty="0">
-                <a:solidFill>
-                  <a:srgbClr val="444455"/>
-                </a:solidFill>
-              </a:rPr>
-              <a:t>не падают из-за задержек</a:t>
-            </a:r>
-            <a:endParaRPr sz="1900" dirty="0">
+              <a:t>. </a:t>
+            </a:r>
+            <a:endParaRPr sz="2800" dirty="0">
               <a:solidFill>
                 <a:srgbClr val="444455"/>
               </a:solidFill>
@@ -22801,74 +22106,20 @@
       </p:sp>
       <p:sp>
         <p:nvSpPr>
-          <p:cNvPr id="20" name="card2_bg"/>
-          <p:cNvSpPr/>
-          <p:nvPr/>
-        </p:nvSpPr>
-        <p:spPr>
-          <a:xfrm>
-            <a:off x="2756133" y="2152628"/>
-            <a:ext cx="2586600" cy="3691158"/>
-          </a:xfrm>
-          <a:prstGeom prst="rect">
-            <a:avLst/>
-          </a:prstGeom>
-          <a:solidFill>
-            <a:srgbClr val="FFFFFF"/>
-          </a:solidFill>
-          <a:ln w="18000">
-            <a:solidFill>
-              <a:srgbClr val="27AE60"/>
-            </a:solidFill>
-          </a:ln>
-        </p:spPr>
-        <p:txBody>
-          <a:bodyPr/>
-          <a:lstStyle/>
-          <a:p>
-            <a:endParaRPr sz="1360"/>
-          </a:p>
-        </p:txBody>
-      </p:sp>
-      <p:sp>
-        <p:nvSpPr>
-          <p:cNvPr id="21" name="card2_top"/>
-          <p:cNvSpPr/>
-          <p:nvPr/>
-        </p:nvSpPr>
-        <p:spPr>
-          <a:xfrm>
-            <a:off x="2748137" y="1706460"/>
-            <a:ext cx="2594596" cy="414653"/>
-          </a:xfrm>
-          <a:prstGeom prst="rect">
-            <a:avLst/>
-          </a:prstGeom>
-          <a:solidFill>
-            <a:srgbClr val="27AE60"/>
-          </a:solidFill>
-          <a:ln>
-            <a:noFill/>
-          </a:ln>
-        </p:spPr>
-        <p:txBody>
-          <a:bodyPr/>
-          <a:lstStyle/>
-          <a:p>
-            <a:endParaRPr sz="1360"/>
-          </a:p>
-        </p:txBody>
-      </p:sp>
-      <p:sp>
-        <p:nvSpPr>
-          <p:cNvPr id="22" name="card2_icon"/>
+          <p:cNvPr id="34" name="TextBox 33">
+            <a:extLst>
+              <a:ext uri="{FF2B5EF4-FFF2-40B4-BE49-F238E27FC236}">
+                <a16:creationId xmlns:a16="http://schemas.microsoft.com/office/drawing/2014/main" id="{25A24F72-9E6D-0745-1909-03E5440FCA5B}"/>
+              </a:ext>
+            </a:extLst>
+          </p:cNvPr>
           <p:cNvSpPr txBox="1"/>
           <p:nvPr/>
         </p:nvSpPr>
         <p:spPr>
           <a:xfrm>
-            <a:off x="2748134" y="1710592"/>
-            <a:ext cx="2392986" cy="418723"/>
+            <a:off x="5335568" y="2883783"/>
+            <a:ext cx="2817795" cy="2554545"/>
           </a:xfrm>
           <a:prstGeom prst="rect">
             <a:avLst/>
@@ -22881,219 +22132,16 @@
           </a:bodyPr>
           <a:lstStyle/>
           <a:p>
-            <a:pPr algn="ctr"/>
-            <a:r>
-              <a:rPr sz="2117" b="1" dirty="0">
-                <a:solidFill>
-                  <a:srgbClr val="FFFFFF"/>
-                </a:solidFill>
-              </a:rPr>
-              <a:t>💻</a:t>
-            </a:r>
-          </a:p>
-        </p:txBody>
-      </p:sp>
-      <p:sp>
-        <p:nvSpPr>
-          <p:cNvPr id="23" name="card2_title"/>
-          <p:cNvSpPr txBox="1"/>
-          <p:nvPr/>
-        </p:nvSpPr>
-        <p:spPr>
-          <a:xfrm>
-            <a:off x="2605803" y="2222633"/>
-            <a:ext cx="2910087" cy="707886"/>
-          </a:xfrm>
-          <a:prstGeom prst="rect">
-            <a:avLst/>
-          </a:prstGeom>
-          <a:noFill/>
-        </p:spPr>
-        <p:txBody>
-          <a:bodyPr wrap="square">
-            <a:spAutoFit/>
-          </a:bodyPr>
-          <a:lstStyle/>
-          <a:p>
-            <a:pPr algn="ctr"/>
-            <a:r>
-              <a:rPr lang="ru-RU" sz="2000" b="1" dirty="0">
-                <a:solidFill>
-                  <a:srgbClr val="0D2B55"/>
-                </a:solidFill>
-              </a:rPr>
-              <a:t>Без установки драйверов</a:t>
-            </a:r>
-            <a:endParaRPr sz="2000" b="1" dirty="0">
-              <a:solidFill>
-                <a:srgbClr val="0D2B55"/>
-              </a:solidFill>
-            </a:endParaRPr>
-          </a:p>
-        </p:txBody>
-      </p:sp>
-      <p:sp>
-        <p:nvSpPr>
-          <p:cNvPr id="24" name="card2_body"/>
-          <p:cNvSpPr txBox="1"/>
-          <p:nvPr/>
-        </p:nvSpPr>
-        <p:spPr>
-          <a:xfrm>
-            <a:off x="2795804" y="2982388"/>
-            <a:ext cx="2499261" cy="2723823"/>
-          </a:xfrm>
-          <a:prstGeom prst="rect">
-            <a:avLst/>
-          </a:prstGeom>
-          <a:noFill/>
-        </p:spPr>
-        <p:txBody>
-          <a:bodyPr wrap="square">
-            <a:spAutoFit/>
-          </a:bodyPr>
-          <a:lstStyle/>
-          <a:p>
-            <a:pPr algn="ctr"/>
-            <a:r>
-              <a:rPr sz="1900" dirty="0" err="1">
+            <a:pPr algn="l"/>
+            <a:r>
+              <a:rPr lang="ru-RU" sz="3200" dirty="0">
                 <a:solidFill>
                   <a:srgbClr val="444455"/>
                 </a:solidFill>
               </a:rPr>
-              <a:t>Не</a:t>
-            </a:r>
-            <a:r>
-              <a:rPr sz="1900" dirty="0">
-                <a:solidFill>
-                  <a:srgbClr val="444455"/>
-                </a:solidFill>
-              </a:rPr>
-              <a:t> </a:t>
-            </a:r>
-            <a:r>
-              <a:rPr sz="1900" dirty="0" err="1">
-                <a:solidFill>
-                  <a:srgbClr val="444455"/>
-                </a:solidFill>
-              </a:rPr>
-              <a:t>нужно</a:t>
-            </a:r>
-            <a:r>
-              <a:rPr sz="1900" dirty="0">
-                <a:solidFill>
-                  <a:srgbClr val="444455"/>
-                </a:solidFill>
-              </a:rPr>
-              <a:t> </a:t>
-            </a:r>
-            <a:r>
-              <a:rPr sz="1900" dirty="0" err="1">
-                <a:solidFill>
-                  <a:srgbClr val="444455"/>
-                </a:solidFill>
-              </a:rPr>
-              <a:t>устанавливать</a:t>
-            </a:r>
-            <a:r>
-              <a:rPr sz="1900" dirty="0">
-                <a:solidFill>
-                  <a:srgbClr val="444455"/>
-                </a:solidFill>
-              </a:rPr>
-              <a:t> </a:t>
-            </a:r>
-            <a:r>
-              <a:rPr sz="1900" dirty="0" err="1">
-                <a:solidFill>
-                  <a:srgbClr val="444455"/>
-                </a:solidFill>
-              </a:rPr>
-              <a:t>ChromeDriver</a:t>
-            </a:r>
-            <a:r>
-              <a:rPr sz="1900" dirty="0">
-                <a:solidFill>
-                  <a:srgbClr val="444455"/>
-                </a:solidFill>
-              </a:rPr>
-              <a:t> </a:t>
-            </a:r>
-            <a:r>
-              <a:rPr sz="1900" dirty="0" err="1">
-                <a:solidFill>
-                  <a:srgbClr val="444455"/>
-                </a:solidFill>
-              </a:rPr>
-              <a:t>вручную</a:t>
-            </a:r>
-            <a:r>
-              <a:rPr sz="1900" dirty="0">
-                <a:solidFill>
-                  <a:srgbClr val="444455"/>
-                </a:solidFill>
-              </a:rPr>
-              <a:t>
-Chromium, Firefox и WebKit — </a:t>
-            </a:r>
-            <a:r>
-              <a:rPr lang="ru-RU" sz="1900" dirty="0">
-                <a:solidFill>
-                  <a:srgbClr val="444455"/>
-                </a:solidFill>
-              </a:rPr>
-              <a:t>уже внутри</a:t>
-            </a:r>
-            <a:r>
-              <a:rPr sz="1900" dirty="0">
-                <a:solidFill>
-                  <a:srgbClr val="444455"/>
-                </a:solidFill>
-              </a:rPr>
-              <a:t>
-</a:t>
-            </a:r>
-            <a:r>
-              <a:rPr sz="1900" dirty="0" err="1">
-                <a:solidFill>
-                  <a:srgbClr val="444455"/>
-                </a:solidFill>
-              </a:rPr>
-              <a:t>Быстрый</a:t>
-            </a:r>
-            <a:r>
-              <a:rPr sz="1900" dirty="0">
-                <a:solidFill>
-                  <a:srgbClr val="444455"/>
-                </a:solidFill>
-              </a:rPr>
-              <a:t> </a:t>
-            </a:r>
-            <a:r>
-              <a:rPr sz="1900" dirty="0" err="1">
-                <a:solidFill>
-                  <a:srgbClr val="444455"/>
-                </a:solidFill>
-              </a:rPr>
-              <a:t>старт</a:t>
-            </a:r>
-            <a:r>
-              <a:rPr lang="ru-RU" sz="1900" dirty="0">
-                <a:solidFill>
-                  <a:srgbClr val="444455"/>
-                </a:solidFill>
-              </a:rPr>
-              <a:t>, простая </a:t>
-            </a:r>
-            <a:r>
-              <a:rPr sz="1900" dirty="0" err="1">
-                <a:solidFill>
-                  <a:srgbClr val="444455"/>
-                </a:solidFill>
-              </a:rPr>
-              <a:t>настройки</a:t>
-            </a:r>
-            <a:endParaRPr sz="1900" dirty="0">
+              <a:t>Нет деталей реализации. Тест вызывает только готовые методы .</a:t>
+            </a:r>
+            <a:endParaRPr sz="3200" dirty="0">
               <a:solidFill>
                 <a:srgbClr val="444455"/>
               </a:solidFill>
@@ -23101,350 +22149,36 @@
           </a:p>
         </p:txBody>
       </p:sp>
-      <p:sp>
-        <p:nvSpPr>
-          <p:cNvPr id="30" name="card3_bg"/>
-          <p:cNvSpPr/>
-          <p:nvPr/>
-        </p:nvSpPr>
-        <p:spPr>
-          <a:xfrm>
-            <a:off x="5436537" y="2153603"/>
-            <a:ext cx="2633566" cy="3690183"/>
-          </a:xfrm>
-          <a:prstGeom prst="rect">
-            <a:avLst/>
-          </a:prstGeom>
-          <a:solidFill>
-            <a:srgbClr val="FFFFFF"/>
-          </a:solidFill>
-          <a:ln w="18000">
-            <a:solidFill>
-              <a:srgbClr val="E67E22"/>
-            </a:solidFill>
-          </a:ln>
-        </p:spPr>
-        <p:txBody>
-          <a:bodyPr/>
-          <a:lstStyle/>
-          <a:p>
-            <a:endParaRPr sz="1360"/>
-          </a:p>
-        </p:txBody>
-      </p:sp>
-      <p:sp>
-        <p:nvSpPr>
-          <p:cNvPr id="31" name="card3_top"/>
-          <p:cNvSpPr/>
-          <p:nvPr/>
-        </p:nvSpPr>
-        <p:spPr>
-          <a:xfrm>
-            <a:off x="5427249" y="1702279"/>
-            <a:ext cx="2633567" cy="414653"/>
-          </a:xfrm>
-          <a:prstGeom prst="rect">
-            <a:avLst/>
-          </a:prstGeom>
-          <a:solidFill>
-            <a:srgbClr val="E67E22"/>
-          </a:solidFill>
-          <a:ln>
-            <a:noFill/>
-          </a:ln>
-        </p:spPr>
-        <p:txBody>
-          <a:bodyPr/>
-          <a:lstStyle/>
-          <a:p>
-            <a:endParaRPr sz="1360"/>
-          </a:p>
-        </p:txBody>
-      </p:sp>
-      <p:sp>
-        <p:nvSpPr>
-          <p:cNvPr id="32" name="card3_icon"/>
-          <p:cNvSpPr txBox="1"/>
-          <p:nvPr/>
-        </p:nvSpPr>
-        <p:spPr>
-          <a:xfrm>
-            <a:off x="5420234" y="1700541"/>
-            <a:ext cx="2640582" cy="418128"/>
-          </a:xfrm>
-          <a:prstGeom prst="rect">
-            <a:avLst/>
-          </a:prstGeom>
-          <a:noFill/>
-          <a:ln>
-            <a:solidFill>
-              <a:schemeClr val="accent6">
-                <a:lumMod val="75000"/>
-              </a:schemeClr>
-            </a:solidFill>
-          </a:ln>
-        </p:spPr>
-        <p:txBody>
-          <a:bodyPr wrap="square">
-            <a:spAutoFit/>
-          </a:bodyPr>
-          <a:lstStyle/>
-          <a:p>
-            <a:pPr algn="ctr"/>
-            <a:r>
-              <a:rPr sz="2117" b="1" dirty="0">
-                <a:ln w="22225">
-                  <a:solidFill>
-                    <a:schemeClr val="accent2"/>
-                  </a:solidFill>
-                  <a:prstDash val="solid"/>
-                </a:ln>
-                <a:solidFill>
-                  <a:schemeClr val="accent2">
-                    <a:lumMod val="40000"/>
-                    <a:lumOff val="60000"/>
-                  </a:schemeClr>
-                </a:solidFill>
-              </a:rPr>
-              <a:t>⚡</a:t>
-            </a:r>
-            <a:endParaRPr sz="2117" dirty="0">
-              <a:ln w="0"/>
-              <a:effectLst>
-                <a:outerShdw blurRad="38100" dist="19050" dir="2700000" algn="tl" rotWithShape="0">
-                  <a:schemeClr val="dk1">
-                    <a:alpha val="40000"/>
-                  </a:schemeClr>
-                </a:outerShdw>
-              </a:effectLst>
-            </a:endParaRPr>
-          </a:p>
-        </p:txBody>
-      </p:sp>
-      <p:sp>
-        <p:nvSpPr>
-          <p:cNvPr id="33" name="card3_title"/>
-          <p:cNvSpPr txBox="1"/>
-          <p:nvPr/>
-        </p:nvSpPr>
-        <p:spPr>
-          <a:xfrm>
-            <a:off x="5411962" y="2185491"/>
-            <a:ext cx="2603020" cy="707886"/>
-          </a:xfrm>
-          <a:prstGeom prst="rect">
-            <a:avLst/>
-          </a:prstGeom>
-          <a:noFill/>
-        </p:spPr>
-        <p:txBody>
-          <a:bodyPr wrap="square">
-            <a:spAutoFit/>
-          </a:bodyPr>
-          <a:lstStyle/>
-          <a:p>
-            <a:pPr algn="ctr"/>
-            <a:r>
-              <a:rPr lang="ru-RU" sz="2000" b="1" dirty="0">
-                <a:solidFill>
-                  <a:srgbClr val="0D2B55"/>
-                </a:solidFill>
-              </a:rPr>
-              <a:t>Простой и понятный код</a:t>
-            </a:r>
-            <a:endParaRPr sz="2000" b="1" dirty="0">
-              <a:solidFill>
-                <a:srgbClr val="0D2B55"/>
-              </a:solidFill>
-            </a:endParaRPr>
-          </a:p>
-        </p:txBody>
-      </p:sp>
-      <p:sp>
-        <p:nvSpPr>
-          <p:cNvPr id="34" name="card3_body"/>
-          <p:cNvSpPr txBox="1"/>
-          <p:nvPr/>
-        </p:nvSpPr>
-        <p:spPr>
-          <a:xfrm>
-            <a:off x="5403618" y="2863597"/>
-            <a:ext cx="2695243" cy="2432845"/>
-          </a:xfrm>
-          <a:prstGeom prst="rect">
-            <a:avLst/>
-          </a:prstGeom>
-          <a:noFill/>
-        </p:spPr>
-        <p:txBody>
-          <a:bodyPr wrap="square">
-            <a:spAutoFit/>
-          </a:bodyPr>
-          <a:lstStyle/>
-          <a:p>
-            <a:pPr algn="ctr"/>
-            <a:r>
-              <a:rPr sz="1209">
-                <a:solidFill>
-                  <a:srgbClr val="444455"/>
-                </a:solidFill>
-              </a:rPr>
-              <a:t>
-</a:t>
-            </a:r>
-            <a:r>
-              <a:rPr sz="2000">
-                <a:solidFill>
-                  <a:srgbClr val="444455"/>
-                </a:solidFill>
-              </a:rPr>
-              <a:t>Чистый синтаксис, хорошая документация
-Даёт больше возможностей, чем Selenium</a:t>
-            </a:r>
-            <a:endParaRPr dirty="0">
-              <a:solidFill>
-                <a:srgbClr val="444455"/>
-              </a:solidFill>
-            </a:endParaRPr>
-          </a:p>
-        </p:txBody>
-      </p:sp>
-      <p:sp>
-        <p:nvSpPr>
-          <p:cNvPr id="15" name="intro">
+      <p:pic>
+        <p:nvPicPr>
+          <p:cNvPr id="9" name="Рисунок 8">
             <a:extLst>
               <a:ext uri="{FF2B5EF4-FFF2-40B4-BE49-F238E27FC236}">
-                <a16:creationId xmlns:a16="http://schemas.microsoft.com/office/drawing/2014/main" id="{5B9D2F26-AC2E-F9C7-566A-7507A7570A8B}"/>
+                <a16:creationId xmlns:a16="http://schemas.microsoft.com/office/drawing/2014/main" id="{DC5B886B-BB04-47E5-C4E4-4F348275D26A}"/>
               </a:ext>
             </a:extLst>
           </p:cNvPr>
-          <p:cNvSpPr txBox="1"/>
-          <p:nvPr/>
-        </p:nvSpPr>
-        <p:spPr>
-          <a:xfrm>
-            <a:off x="130173" y="1268551"/>
-            <a:ext cx="8079715" cy="338554"/>
-          </a:xfrm>
-          <a:prstGeom prst="rect">
-            <a:avLst/>
-          </a:prstGeom>
-          <a:noFill/>
-        </p:spPr>
-        <p:txBody>
-          <a:bodyPr wrap="square">
-            <a:spAutoFit/>
-          </a:bodyPr>
-          <a:lstStyle/>
-          <a:p>
-            <a:r>
-              <a:rPr lang="en-US" sz="1600" i="1" dirty="0">
-                <a:solidFill>
-                  <a:srgbClr val="444455"/>
-                </a:solidFill>
-              </a:rPr>
-              <a:t>Selenium</a:t>
-            </a:r>
-            <a:r>
-              <a:rPr lang="ru-RU" sz="1600" i="1" dirty="0">
-                <a:solidFill>
-                  <a:srgbClr val="444455"/>
-                </a:solidFill>
-              </a:rPr>
-              <a:t>,  </a:t>
-            </a:r>
-            <a:r>
-              <a:rPr lang="en-US" sz="1600" i="1" dirty="0" err="1">
-                <a:solidFill>
-                  <a:srgbClr val="444455"/>
-                </a:solidFill>
-              </a:rPr>
-              <a:t>driver.find_element</a:t>
-            </a:r>
-            <a:r>
-              <a:rPr lang="en-US" sz="1600" i="1" dirty="0">
-                <a:solidFill>
-                  <a:srgbClr val="444455"/>
-                </a:solidFill>
-              </a:rPr>
-              <a:t>(By.ID, "submit").click()</a:t>
-            </a:r>
-            <a:endParaRPr sz="1600" i="1" dirty="0">
-              <a:solidFill>
-                <a:srgbClr val="444455"/>
-              </a:solidFill>
-            </a:endParaRPr>
-          </a:p>
-        </p:txBody>
-      </p:sp>
-      <p:sp>
-        <p:nvSpPr>
-          <p:cNvPr id="16" name="intro">
-            <a:extLst>
-              <a:ext uri="{FF2B5EF4-FFF2-40B4-BE49-F238E27FC236}">
-                <a16:creationId xmlns:a16="http://schemas.microsoft.com/office/drawing/2014/main" id="{D91EA61A-0C49-23BF-BC8C-7A1D08EBDE4C}"/>
-              </a:ext>
-            </a:extLst>
-          </p:cNvPr>
-          <p:cNvSpPr txBox="1"/>
-          <p:nvPr/>
-        </p:nvSpPr>
-        <p:spPr>
-          <a:xfrm>
-            <a:off x="123787" y="949940"/>
-            <a:ext cx="7843296" cy="325572"/>
-          </a:xfrm>
-          <a:prstGeom prst="rect">
-            <a:avLst/>
-          </a:prstGeom>
-          <a:noFill/>
-        </p:spPr>
-        <p:txBody>
-          <a:bodyPr wrap="square">
-            <a:spAutoFit/>
-          </a:bodyPr>
-          <a:lstStyle/>
-          <a:p>
-            <a:r>
-              <a:rPr lang="en-US" sz="1511" i="1" dirty="0">
-                <a:solidFill>
-                  <a:srgbClr val="444455"/>
-                </a:solidFill>
-              </a:rPr>
-              <a:t>Playwright</a:t>
-            </a:r>
-            <a:r>
-              <a:rPr lang="ru-RU" sz="1511" i="1" dirty="0">
-                <a:solidFill>
-                  <a:srgbClr val="444455"/>
-                </a:solidFill>
-              </a:rPr>
-              <a:t>, </a:t>
-            </a:r>
-            <a:r>
-              <a:rPr lang="en-US" sz="1511" i="1" dirty="0" err="1">
-                <a:solidFill>
-                  <a:srgbClr val="444455"/>
-                </a:solidFill>
-              </a:rPr>
-              <a:t>page.click</a:t>
-            </a:r>
-            <a:r>
-              <a:rPr lang="en-US" sz="1511" i="1" dirty="0">
-                <a:solidFill>
-                  <a:srgbClr val="444455"/>
-                </a:solidFill>
-              </a:rPr>
-              <a:t>("#submit")</a:t>
-            </a:r>
-            <a:endParaRPr sz="1511" i="1" dirty="0">
-              <a:solidFill>
-                <a:srgbClr val="444455"/>
-              </a:solidFill>
-            </a:endParaRPr>
-          </a:p>
-        </p:txBody>
-      </p:sp>
+          <p:cNvPicPr>
+            <a:picLocks noChangeAspect="1"/>
+          </p:cNvPicPr>
+          <p:nvPr/>
+        </p:nvPicPr>
+        <p:blipFill>
+          <a:blip r:embed="rId3"/>
+          <a:stretch>
+            <a:fillRect/>
+          </a:stretch>
+        </p:blipFill>
+        <p:spPr>
+          <a:xfrm>
+            <a:off x="6389" y="2656581"/>
+            <a:ext cx="5316406" cy="3192423"/>
+          </a:xfrm>
+          <a:prstGeom prst="rect">
+            <a:avLst/>
+          </a:prstGeom>
+        </p:spPr>
+      </p:pic>
     </p:spTree>
   </p:cSld>
   <p:clrMapOvr>
